--- a/instructor/ai-administrator/out/day1/Day1_S1_Foundations.pptx
+++ b/instructor/ai-administrator/out/day1/Day1_S1_Foundations.pptx
@@ -4843,7 +4843,7 @@
           <a:lstStyle/>
           <a:p>
             <a:r>
-              <a:t>Leave on screen during questions. All figures in this deck are from Maarten Grootendorst's 'A Visual Guide to LLM Agents', reused with credit as on the course website.</a:t>
+              <a:t>Leave on screen during questions. All figures in this deck are from Alammar and Grootendorst, Hands-On Large Language Models (O'Reilly, 2024), credited on each slide; the same figures appear in Grootendorst's online Visual Guide.</a:t>
             </a:r>
           </a:p>
         </p:txBody>
@@ -8666,7 +8666,7 @@
                 </a:solidFill>
                 <a:latin typeface="Calibri"/>
               </a:rPr>
-              <a:t>Figure: M. Grootendorst, A Visual Guide to LLM Agents</a:t>
+              <a:t>Figure: Alammar, J. and Grootendorst, M. (2024). Hands-On Large Language Models. O'Reilly Media</a:t>
             </a:r>
           </a:p>
         </p:txBody>
@@ -11024,7 +11024,7 @@
                 </a:solidFill>
                 <a:latin typeface="Calibri"/>
               </a:rPr>
-              <a:t>Figure: M. Grootendorst, A Visual Guide to LLM Agents</a:t>
+              <a:t>Figure: Alammar, J. and Grootendorst, M. (2024). Hands-On Large Language Models. O'Reilly Media</a:t>
             </a:r>
           </a:p>
         </p:txBody>
@@ -11373,7 +11373,7 @@
                 </a:solidFill>
                 <a:latin typeface="Calibri"/>
               </a:rPr>
-              <a:t>Figure: M. Grootendorst, A Visual Guide to LLM Agents</a:t>
+              <a:t>Figure: Alammar, J. and Grootendorst, M. (2024). Hands-On Large Language Models. O'Reilly Media</a:t>
             </a:r>
           </a:p>
         </p:txBody>
@@ -12064,7 +12064,7 @@
                 </a:solidFill>
                 <a:latin typeface="Calibri"/>
               </a:rPr>
-              <a:t>Figure: M. Grootendorst, A Visual Guide to LLM Agents</a:t>
+              <a:t>Figure: Alammar, J. and Grootendorst, M. (2024). Hands-On Large Language Models. O'Reilly Media</a:t>
             </a:r>
           </a:p>
         </p:txBody>
@@ -13437,7 +13437,7 @@
                 </a:solidFill>
                 <a:latin typeface="Calibri"/>
               </a:rPr>
-              <a:t>Figure: M. Grootendorst, A Visual Guide to LLM Agents</a:t>
+              <a:t>Figure: Alammar, J. and Grootendorst, M. (2024). Hands-On Large Language Models. O'Reilly Media</a:t>
             </a:r>
           </a:p>
         </p:txBody>
@@ -13786,7 +13786,7 @@
                 </a:solidFill>
                 <a:latin typeface="Calibri"/>
               </a:rPr>
-              <a:t>Figure: M. Grootendorst, A Visual Guide to LLM Agents</a:t>
+              <a:t>Figure: Alammar, J. and Grootendorst, M. (2024). Hands-On Large Language Models. O'Reilly Media</a:t>
             </a:r>
           </a:p>
         </p:txBody>
@@ -14222,7 +14222,7 @@
                 </a:solidFill>
                 <a:latin typeface="Calibri"/>
               </a:rPr>
-              <a:t>Figure: M. Grootendorst, A Visual Guide to LLM Agents</a:t>
+              <a:t>Figure: Alammar, J. and Grootendorst, M. (2024). Hands-On Large Language Models. O'Reilly Media</a:t>
             </a:r>
           </a:p>
         </p:txBody>
@@ -14642,7 +14642,7 @@
                 </a:solidFill>
                 <a:latin typeface="Calibri"/>
               </a:rPr>
-              <a:t>Figure: M. Grootendorst, A Visual Guide to LLM Agents</a:t>
+              <a:t>Figure: Alammar, J. and Grootendorst, M. (2024). Hands-On Large Language Models. O'Reilly Media</a:t>
             </a:r>
           </a:p>
         </p:txBody>
@@ -14991,7 +14991,7 @@
                 </a:solidFill>
                 <a:latin typeface="Calibri"/>
               </a:rPr>
-              <a:t>Figure: M. Grootendorst, A Visual Guide to LLM Agents</a:t>
+              <a:t>Figure: Alammar, J. and Grootendorst, M. (2024). Hands-On Large Language Models. O'Reilly Media</a:t>
             </a:r>
           </a:p>
         </p:txBody>
@@ -15340,7 +15340,7 @@
                 </a:solidFill>
                 <a:latin typeface="Calibri"/>
               </a:rPr>
-              <a:t>Figure: M. Grootendorst, A Visual Guide to LLM Agents</a:t>
+              <a:t>Figure: Alammar, J. and Grootendorst, M. (2024). Hands-On Large Language Models. O'Reilly Media</a:t>
             </a:r>
           </a:p>
         </p:txBody>
@@ -15689,7 +15689,7 @@
                 </a:solidFill>
                 <a:latin typeface="Calibri"/>
               </a:rPr>
-              <a:t>Figure: M. Grootendorst, A Visual Guide to LLM Agents</a:t>
+              <a:t>Figure: Alammar, J. and Grootendorst, M. (2024). Hands-On Large Language Models. O'Reilly Media</a:t>
             </a:r>
           </a:p>
         </p:txBody>
@@ -16038,7 +16038,7 @@
                 </a:solidFill>
                 <a:latin typeface="Calibri"/>
               </a:rPr>
-              <a:t>Figure: M. Grootendorst, A Visual Guide to LLM Agents</a:t>
+              <a:t>Figure: Alammar, J. and Grootendorst, M. (2024). Hands-On Large Language Models. O'Reilly Media</a:t>
             </a:r>
           </a:p>
         </p:txBody>
@@ -16435,7 +16435,7 @@
                 </a:solidFill>
                 <a:latin typeface="Calibri"/>
               </a:rPr>
-              <a:t>Figure: M. Grootendorst, A Visual Guide to LLM Agents</a:t>
+              <a:t>Figure: Alammar, J. and Grootendorst, M. (2024). Hands-On Large Language Models. O'Reilly Media</a:t>
             </a:r>
           </a:p>
         </p:txBody>
@@ -17142,7 +17142,7 @@
                 </a:solidFill>
                 <a:latin typeface="Calibri"/>
               </a:rPr>
-              <a:t>Figure: M. Grootendorst, A Visual Guide to LLM Agents</a:t>
+              <a:t>Figure: Alammar, J. and Grootendorst, M. (2024). Hands-On Large Language Models. O'Reilly Media</a:t>
             </a:r>
           </a:p>
         </p:txBody>
@@ -17491,7 +17491,7 @@
                 </a:solidFill>
                 <a:latin typeface="Calibri"/>
               </a:rPr>
-              <a:t>Figure: M. Grootendorst, A Visual Guide to LLM Agents</a:t>
+              <a:t>Figure: Alammar, J. and Grootendorst, M. (2024). Hands-On Large Language Models. O'Reilly Media</a:t>
             </a:r>
           </a:p>
         </p:txBody>
@@ -17840,7 +17840,7 @@
                 </a:solidFill>
                 <a:latin typeface="Calibri"/>
               </a:rPr>
-              <a:t>Figure: M. Grootendorst, A Visual Guide to LLM Agents</a:t>
+              <a:t>Figure: Alammar, J. and Grootendorst, M. (2024). Hands-On Large Language Models. O'Reilly Media</a:t>
             </a:r>
           </a:p>
         </p:txBody>
@@ -18189,7 +18189,7 @@
                 </a:solidFill>
                 <a:latin typeface="Calibri"/>
               </a:rPr>
-              <a:t>Figure: M. Grootendorst, A Visual Guide to LLM Agents</a:t>
+              <a:t>Figure: Alammar, J. and Grootendorst, M. (2024). Hands-On Large Language Models. O'Reilly Media</a:t>
             </a:r>
           </a:p>
         </p:txBody>
@@ -20433,7 +20433,7 @@
                 </a:solidFill>
                 <a:latin typeface="Calibri"/>
               </a:rPr>
-              <a:t>Figure: M. Grootendorst, A Visual Guide to LLM Agents</a:t>
+              <a:t>Figure: Alammar, J. and Grootendorst, M. (2024). Hands-On Large Language Models. O'Reilly Media</a:t>
             </a:r>
           </a:p>
         </p:txBody>
@@ -20782,7 +20782,7 @@
                 </a:solidFill>
                 <a:latin typeface="Calibri"/>
               </a:rPr>
-              <a:t>Figure: M. Grootendorst, A Visual Guide to LLM Agents</a:t>
+              <a:t>Figure: Alammar, J. and Grootendorst, M. (2024). Hands-On Large Language Models. O'Reilly Media</a:t>
             </a:r>
           </a:p>
         </p:txBody>
@@ -22083,7 +22083,7 @@
                 </a:solidFill>
                 <a:latin typeface="Calibri"/>
               </a:rPr>
-              <a:t>Figure: M. Grootendorst, A Visual Guide to LLM Agents</a:t>
+              <a:t>Figure: Alammar, J. and Grootendorst, M. (2024). Hands-On Large Language Models. O'Reilly Media</a:t>
             </a:r>
           </a:p>
         </p:txBody>
@@ -24669,7 +24669,7 @@
                 </a:solidFill>
                 <a:latin typeface="Calibri"/>
               </a:rPr>
-              <a:t>Figure: M. Grootendorst, A Visual Guide to LLM Agents</a:t>
+              <a:t>Figure: Alammar, J. and Grootendorst, M. (2024). Hands-On Large Language Models. O'Reilly Media</a:t>
             </a:r>
           </a:p>
         </p:txBody>
@@ -25018,7 +25018,7 @@
                 </a:solidFill>
                 <a:latin typeface="Calibri"/>
               </a:rPr>
-              <a:t>Figure: M. Grootendorst, A Visual Guide to LLM Agents</a:t>
+              <a:t>Figure: Alammar, J. and Grootendorst, M. (2024). Hands-On Large Language Models. O'Reilly Media</a:t>
             </a:r>
           </a:p>
         </p:txBody>
@@ -25770,7 +25770,7 @@
                 </a:solidFill>
                 <a:latin typeface="Calibri"/>
               </a:rPr>
-              <a:t>Figure: M. Grootendorst, A Visual Guide to LLM Agents</a:t>
+              <a:t>Figure: Alammar, J. and Grootendorst, M. (2024). Hands-On Large Language Models. O'Reilly Media</a:t>
             </a:r>
           </a:p>
         </p:txBody>
@@ -38230,7 +38230,7 @@
                 </a:solidFill>
                 <a:latin typeface="Calibri"/>
               </a:rPr>
-              <a:t>Figure: M. Grootendorst, A Visual Guide to LLM Agents</a:t>
+              <a:t>Figure: Alammar, J. and Grootendorst, M. (2024). Hands-On Large Language Models. O'Reilly Media</a:t>
             </a:r>
           </a:p>
         </p:txBody>
@@ -38666,7 +38666,7 @@
                 </a:solidFill>
                 <a:latin typeface="Calibri"/>
               </a:rPr>
-              <a:t>Figure: M. Grootendorst, A Visual Guide to LLM Agents</a:t>
+              <a:t>Figure: Alammar, J. and Grootendorst, M. (2024). Hands-On Large Language Models. O'Reilly Media</a:t>
             </a:r>
           </a:p>
         </p:txBody>
@@ -39815,7 +39815,7 @@
                 </a:solidFill>
                 <a:latin typeface="Calibri"/>
               </a:rPr>
-              <a:t>4.  Grootendorst, M. (2025). A Visual Guide to LLM Agents. newsletter.maartengrootendorst.com (source of the diagrams in this deck)</a:t>
+              <a:t>4.  Grootendorst, M. (2025). A Visual Guide to LLM Agents. newsletter.maartengrootendorst.com (online version of the same diagrams)</a:t>
             </a:r>
           </a:p>
           <a:p>
@@ -40260,7 +40260,7 @@
                 </a:solidFill>
                 <a:latin typeface="Calibri"/>
               </a:rPr>
-              <a:t>Figure: M. Grootendorst, A Visual Guide to LLM Agents</a:t>
+              <a:t>Figure: Alammar, J. and Grootendorst, M. (2024). Hands-On Large Language Models. O'Reilly Media</a:t>
             </a:r>
           </a:p>
         </p:txBody>
@@ -40680,7 +40680,7 @@
                 </a:solidFill>
                 <a:latin typeface="Calibri"/>
               </a:rPr>
-              <a:t>Figure: M. Grootendorst, A Visual Guide to LLM Agents</a:t>
+              <a:t>Figure: Alammar, J. and Grootendorst, M. (2024). Hands-On Large Language Models. O'Reilly Media</a:t>
             </a:r>
           </a:p>
         </p:txBody>

--- a/instructor/ai-administrator/out/day1/Day1_S1_Foundations.pptx
+++ b/instructor/ai-administrator/out/day1/Day1_S1_Foundations.pptx
@@ -25735,7 +25735,7 @@
                 </a:solidFill>
                 <a:latin typeface="Calibri"/>
               </a:rPr>
-              <a:t>•  Today's one lives on the instructor's laptop and is deleted after the session</a:t>
+              <a:t>•  Today's one runs on a small cloud server the instructor controls; what you tell it is deleted after the session</a:t>
             </a:r>
           </a:p>
         </p:txBody>
@@ -26670,7 +26670,7 @@
                 </a:solidFill>
                 <a:latin typeface="Calibri"/>
               </a:rPr>
-              <a:t>•  The bot and its memory are deleted after the session</a:t>
+              <a:t>•  What you tell it is deleted after the session</a:t>
             </a:r>
           </a:p>
         </p:txBody>
@@ -28470,7 +28470,7 @@
                 </a:solidFill>
                 <a:latin typeface="Calibri"/>
               </a:rPr>
-              <a:t>It runs on the instructor's laptop with the instructor's keys and permissions, has one tool, and is deleted after the session. Who holds the keys, which tools it may use, who can message it and who reads the log are the questions of Day 5 and Day 6.</a:t>
+              <a:t>It runs on a small cloud server with the instructor's keys and permissions, has one tool, and forgets you after the session. Who holds the keys, which tools it may use, who can message it and who reads the log are the questions of Day 5 and Day 6.</a:t>
             </a:r>
           </a:p>
         </p:txBody>

--- a/instructor/ai-administrator/out/day1/Day1_S1_Foundations.pptx
+++ b/instructor/ai-administrator/out/day1/Day1_S1_Foundations.pptx
@@ -68,15 +68,6 @@
     <p:sldId id="316" r:id="rId68"/>
     <p:sldId id="317" r:id="rId69"/>
     <p:sldId id="318" r:id="rId70"/>
-    <p:sldId id="319" r:id="rId71"/>
-    <p:sldId id="320" r:id="rId72"/>
-    <p:sldId id="321" r:id="rId73"/>
-    <p:sldId id="322" r:id="rId74"/>
-    <p:sldId id="323" r:id="rId75"/>
-    <p:sldId id="324" r:id="rId76"/>
-    <p:sldId id="325" r:id="rId77"/>
-    <p:sldId id="326" r:id="rId78"/>
-    <p:sldId id="327" r:id="rId79"/>
   </p:sldIdLst>
   <p:sldSz cx="12191695" cy="6858000" type="screen4x3"/>
   <p:notesSz cx="6858000" cy="9144000"/>
@@ -3863,7 +3854,7 @@
           <a:lstStyle/>
           <a:p>
             <a:r>
-              <a:t>Correct answer: B. In an automation every step is fixed in advance; in an agent the model chooses which tool to use next and when to stop.</a:t>
+              <a:t>Import Day1_S1_Kahoot.xlsx into Kahoot beforehand (Create, then Import spreadsheet). Launch in Classic mode, show the PIN on this slide. Ten minutes covers roughly 15 to 20 questions with brief comments; assign the remainder as a challenge with a one-week deadline. The answer key with rationales is Day1_S1_Kahoot_Answer_Key.pdf. Say out loud that answer lengths are balanced, so participants stop guessing by length.</a:t>
             </a:r>
           </a:p>
         </p:txBody>
@@ -3933,7 +3924,7 @@
           <a:lstStyle/>
           <a:p>
             <a:r>
-              <a:t>Correct answer: B. In an automation every step is fixed in advance; in an agent the model chooses which tool to use next and when to stop.</a:t>
+              <a:t>Read the four takeaways. Then say what the next session, Session 2, is: writing instructions (prompts) that produce the same shape of answer every time, and building a first assistant that knows your documents.</a:t>
             </a:r>
           </a:p>
         </p:txBody>
@@ -4003,7 +3994,7 @@
           <a:lstStyle/>
           <a:p>
             <a:r>
-              <a:t>Correct answer: D. The four parts are model, tools, memory and instructions. A dashboard is a way to monitor, not a part of the agent.</a:t>
+              <a:t>Optional reading only. The online module repeats everything in this deck, with the knowledge check scored in the browser, so participants can revise alone.</a:t>
             </a:r>
           </a:p>
         </p:txBody>
@@ -4073,7 +4064,7 @@
           <a:lstStyle/>
           <a:p>
             <a:r>
-              <a:t>Correct answer: D. The four parts are model, tools, memory and instructions. A dashboard is a way to monitor, not a part of the agent.</a:t>
+              <a:t>Optional two minutes, or leave for self-study. Each item links a headline from the last few months to something taught today. Instructors may swap in newer pieces; keep the pattern: source, date, one-line takeaway tied to the session.</a:t>
             </a:r>
           </a:p>
         </p:txBody>
@@ -4143,217 +4134,7 @@
           <a:lstStyle/>
           <a:p>
             <a:r>
-              <a:t>Correct answer: B. The path is fixed (read, classify, route) and only one step needs a model. That is the workflow-with-AI-step pattern.</a:t>
-            </a:r>
-          </a:p>
-        </p:txBody>
-      </p:sp>
-      <p:sp>
-        <p:nvSpPr>
-          <p:cNvPr id="4" name="Slide Number Placeholder 3"/>
-          <p:cNvSpPr>
-            <a:spLocks noGrp="1"/>
-          </p:cNvSpPr>
-          <p:nvPr>
-            <p:ph type="sldNum" idx="5" sz="quarter"/>
-          </p:nvPr>
-        </p:nvSpPr>
-        <p:spPr/>
-      </p:sp>
-    </p:spTree>
-  </p:cSld>
-  <p:clrMapOvr>
-    <a:masterClrMapping/>
-  </p:clrMapOvr>
-</p:notes>
-</file>
-
-<file path=ppt/notesSlides/notesSlide57.xml><?xml version="1.0" encoding="utf-8"?>
-<p:notes xmlns:a="http://schemas.openxmlformats.org/drawingml/2006/main" xmlns:p="http://schemas.openxmlformats.org/presentationml/2006/main" xmlns:r="http://schemas.openxmlformats.org/officeDocument/2006/relationships">
-  <p:cSld>
-    <p:spTree>
-      <p:nvGrpSpPr>
-        <p:cNvPr id="1" name=""/>
-        <p:cNvGrpSpPr/>
-        <p:nvPr/>
-      </p:nvGrpSpPr>
-      <p:grpSpPr>
-        <a:xfrm>
-          <a:off x="0" y="0"/>
-          <a:ext cx="0" cy="0"/>
-          <a:chOff x="0" y="0"/>
-          <a:chExt cx="0" cy="0"/>
-        </a:xfrm>
-      </p:grpSpPr>
-      <p:sp>
-        <p:nvSpPr>
-          <p:cNvPr id="2" name="Slide Image Placeholder 1"/>
-          <p:cNvSpPr>
-            <a:spLocks noGrp="1"/>
-          </p:cNvSpPr>
-          <p:nvPr>
-            <p:ph type="sldImg" idx="2"/>
-          </p:nvPr>
-        </p:nvSpPr>
-        <p:spPr/>
-      </p:sp>
-      <p:sp>
-        <p:nvSpPr>
-          <p:cNvPr id="3" name="Notes Placeholder 2"/>
-          <p:cNvSpPr>
-            <a:spLocks noGrp="1"/>
-          </p:cNvSpPr>
-          <p:nvPr>
-            <p:ph type="body" idx="3" sz="quarter"/>
-          </p:nvPr>
-        </p:nvSpPr>
-        <p:spPr/>
-        <p:txBody>
-          <a:bodyPr/>
-          <a:lstStyle/>
-          <a:p>
-            <a:r>
-              <a:t>Correct answer: B. The path is fixed (read, classify, route) and only one step needs a model. That is the workflow-with-AI-step pattern.</a:t>
-            </a:r>
-          </a:p>
-        </p:txBody>
-      </p:sp>
-      <p:sp>
-        <p:nvSpPr>
-          <p:cNvPr id="4" name="Slide Number Placeholder 3"/>
-          <p:cNvSpPr>
-            <a:spLocks noGrp="1"/>
-          </p:cNvSpPr>
-          <p:nvPr>
-            <p:ph type="sldNum" idx="5" sz="quarter"/>
-          </p:nvPr>
-        </p:nvSpPr>
-        <p:spPr/>
-      </p:sp>
-    </p:spTree>
-  </p:cSld>
-  <p:clrMapOvr>
-    <a:masterClrMapping/>
-  </p:clrMapOvr>
-</p:notes>
-</file>
-
-<file path=ppt/notesSlides/notesSlide58.xml><?xml version="1.0" encoding="utf-8"?>
-<p:notes xmlns:a="http://schemas.openxmlformats.org/drawingml/2006/main" xmlns:p="http://schemas.openxmlformats.org/presentationml/2006/main" xmlns:r="http://schemas.openxmlformats.org/officeDocument/2006/relationships">
-  <p:cSld>
-    <p:spTree>
-      <p:nvGrpSpPr>
-        <p:cNvPr id="1" name=""/>
-        <p:cNvGrpSpPr/>
-        <p:nvPr/>
-      </p:nvGrpSpPr>
-      <p:grpSpPr>
-        <a:xfrm>
-          <a:off x="0" y="0"/>
-          <a:ext cx="0" cy="0"/>
-          <a:chOff x="0" y="0"/>
-          <a:chExt cx="0" cy="0"/>
-        </a:xfrm>
-      </p:grpSpPr>
-      <p:sp>
-        <p:nvSpPr>
-          <p:cNvPr id="2" name="Slide Image Placeholder 1"/>
-          <p:cNvSpPr>
-            <a:spLocks noGrp="1"/>
-          </p:cNvSpPr>
-          <p:nvPr>
-            <p:ph type="sldImg" idx="2"/>
-          </p:nvPr>
-        </p:nvSpPr>
-        <p:spPr/>
-      </p:sp>
-      <p:sp>
-        <p:nvSpPr>
-          <p:cNvPr id="3" name="Notes Placeholder 2"/>
-          <p:cNvSpPr>
-            <a:spLocks noGrp="1"/>
-          </p:cNvSpPr>
-          <p:nvPr>
-            <p:ph type="body" idx="3" sz="quarter"/>
-          </p:nvPr>
-        </p:nvSpPr>
-        <p:spPr/>
-        <p:txBody>
-          <a:bodyPr/>
-          <a:lstStyle/>
-          <a:p>
-            <a:r>
-              <a:t>Correct answer: B. Without a limit a stuck agent burns money and may take more actions than intended. The limit is a basic control.</a:t>
-            </a:r>
-          </a:p>
-        </p:txBody>
-      </p:sp>
-      <p:sp>
-        <p:nvSpPr>
-          <p:cNvPr id="4" name="Slide Number Placeholder 3"/>
-          <p:cNvSpPr>
-            <a:spLocks noGrp="1"/>
-          </p:cNvSpPr>
-          <p:nvPr>
-            <p:ph type="sldNum" idx="5" sz="quarter"/>
-          </p:nvPr>
-        </p:nvSpPr>
-        <p:spPr/>
-      </p:sp>
-    </p:spTree>
-  </p:cSld>
-  <p:clrMapOvr>
-    <a:masterClrMapping/>
-  </p:clrMapOvr>
-</p:notes>
-</file>
-
-<file path=ppt/notesSlides/notesSlide59.xml><?xml version="1.0" encoding="utf-8"?>
-<p:notes xmlns:a="http://schemas.openxmlformats.org/drawingml/2006/main" xmlns:p="http://schemas.openxmlformats.org/presentationml/2006/main" xmlns:r="http://schemas.openxmlformats.org/officeDocument/2006/relationships">
-  <p:cSld>
-    <p:spTree>
-      <p:nvGrpSpPr>
-        <p:cNvPr id="1" name=""/>
-        <p:cNvGrpSpPr/>
-        <p:nvPr/>
-      </p:nvGrpSpPr>
-      <p:grpSpPr>
-        <a:xfrm>
-          <a:off x="0" y="0"/>
-          <a:ext cx="0" cy="0"/>
-          <a:chOff x="0" y="0"/>
-          <a:chExt cx="0" cy="0"/>
-        </a:xfrm>
-      </p:grpSpPr>
-      <p:sp>
-        <p:nvSpPr>
-          <p:cNvPr id="2" name="Slide Image Placeholder 1"/>
-          <p:cNvSpPr>
-            <a:spLocks noGrp="1"/>
-          </p:cNvSpPr>
-          <p:nvPr>
-            <p:ph type="sldImg" idx="2"/>
-          </p:nvPr>
-        </p:nvSpPr>
-        <p:spPr/>
-      </p:sp>
-      <p:sp>
-        <p:nvSpPr>
-          <p:cNvPr id="3" name="Notes Placeholder 2"/>
-          <p:cNvSpPr>
-            <a:spLocks noGrp="1"/>
-          </p:cNvSpPr>
-          <p:nvPr>
-            <p:ph type="body" idx="3" sz="quarter"/>
-          </p:nvPr>
-        </p:nvSpPr>
-        <p:spPr/>
-        <p:txBody>
-          <a:bodyPr/>
-          <a:lstStyle/>
-          <a:p>
-            <a:r>
-              <a:t>Correct answer: B. Without a limit a stuck agent burns money and may take more actions than intended. The limit is a basic control.</a:t>
+              <a:t>Leave on screen during questions. All figures in this deck are from Alammar and Grootendorst, Hands-On Large Language Models (O'Reilly, 2024), credited on each slide; the same figures appear in Grootendorst's online Visual Guide.</a:t>
             </a:r>
           </a:p>
         </p:txBody>
@@ -4424,426 +4205,6 @@
           <a:p>
             <a:r>
               <a:t>Keep this to one minute. Participants do not need to know how the model is trained. They need to know that it produces plausible continuations, because that single fact explains both its strengths (fluent reading and writing) and its main weakness (confident, plausible, wrong answers), which we meet in Session 2.</a:t>
-            </a:r>
-          </a:p>
-        </p:txBody>
-      </p:sp>
-      <p:sp>
-        <p:nvSpPr>
-          <p:cNvPr id="4" name="Slide Number Placeholder 3"/>
-          <p:cNvSpPr>
-            <a:spLocks noGrp="1"/>
-          </p:cNvSpPr>
-          <p:nvPr>
-            <p:ph type="sldNum" idx="5" sz="quarter"/>
-          </p:nvPr>
-        </p:nvSpPr>
-        <p:spPr/>
-      </p:sp>
-    </p:spTree>
-  </p:cSld>
-  <p:clrMapOvr>
-    <a:masterClrMapping/>
-  </p:clrMapOvr>
-</p:notes>
-</file>
-
-<file path=ppt/notesSlides/notesSlide60.xml><?xml version="1.0" encoding="utf-8"?>
-<p:notes xmlns:a="http://schemas.openxmlformats.org/drawingml/2006/main" xmlns:p="http://schemas.openxmlformats.org/presentationml/2006/main" xmlns:r="http://schemas.openxmlformats.org/officeDocument/2006/relationships">
-  <p:cSld>
-    <p:spTree>
-      <p:nvGrpSpPr>
-        <p:cNvPr id="1" name=""/>
-        <p:cNvGrpSpPr/>
-        <p:nvPr/>
-      </p:nvGrpSpPr>
-      <p:grpSpPr>
-        <a:xfrm>
-          <a:off x="0" y="0"/>
-          <a:ext cx="0" cy="0"/>
-          <a:chOff x="0" y="0"/>
-          <a:chExt cx="0" cy="0"/>
-        </a:xfrm>
-      </p:grpSpPr>
-      <p:sp>
-        <p:nvSpPr>
-          <p:cNvPr id="2" name="Slide Image Placeholder 1"/>
-          <p:cNvSpPr>
-            <a:spLocks noGrp="1"/>
-          </p:cNvSpPr>
-          <p:nvPr>
-            <p:ph type="sldImg" idx="2"/>
-          </p:nvPr>
-        </p:nvSpPr>
-        <p:spPr/>
-      </p:sp>
-      <p:sp>
-        <p:nvSpPr>
-          <p:cNvPr id="3" name="Notes Placeholder 2"/>
-          <p:cNvSpPr>
-            <a:spLocks noGrp="1"/>
-          </p:cNvSpPr>
-          <p:nvPr>
-            <p:ph type="body" idx="3" sz="quarter"/>
-          </p:nvPr>
-        </p:nvSpPr>
-        <p:spPr/>
-        <p:txBody>
-          <a:bodyPr/>
-          <a:lstStyle/>
-          <a:p>
-            <a:r>
-              <a:t>Correct answer: C. Automation removes copying and chasing. Decisions involving money, people or legal exposure need human accountability.</a:t>
-            </a:r>
-          </a:p>
-        </p:txBody>
-      </p:sp>
-      <p:sp>
-        <p:nvSpPr>
-          <p:cNvPr id="4" name="Slide Number Placeholder 3"/>
-          <p:cNvSpPr>
-            <a:spLocks noGrp="1"/>
-          </p:cNvSpPr>
-          <p:nvPr>
-            <p:ph type="sldNum" idx="5" sz="quarter"/>
-          </p:nvPr>
-        </p:nvSpPr>
-        <p:spPr/>
-      </p:sp>
-    </p:spTree>
-  </p:cSld>
-  <p:clrMapOvr>
-    <a:masterClrMapping/>
-  </p:clrMapOvr>
-</p:notes>
-</file>
-
-<file path=ppt/notesSlides/notesSlide61.xml><?xml version="1.0" encoding="utf-8"?>
-<p:notes xmlns:a="http://schemas.openxmlformats.org/drawingml/2006/main" xmlns:p="http://schemas.openxmlformats.org/presentationml/2006/main" xmlns:r="http://schemas.openxmlformats.org/officeDocument/2006/relationships">
-  <p:cSld>
-    <p:spTree>
-      <p:nvGrpSpPr>
-        <p:cNvPr id="1" name=""/>
-        <p:cNvGrpSpPr/>
-        <p:nvPr/>
-      </p:nvGrpSpPr>
-      <p:grpSpPr>
-        <a:xfrm>
-          <a:off x="0" y="0"/>
-          <a:ext cx="0" cy="0"/>
-          <a:chOff x="0" y="0"/>
-          <a:chExt cx="0" cy="0"/>
-        </a:xfrm>
-      </p:grpSpPr>
-      <p:sp>
-        <p:nvSpPr>
-          <p:cNvPr id="2" name="Slide Image Placeholder 1"/>
-          <p:cNvSpPr>
-            <a:spLocks noGrp="1"/>
-          </p:cNvSpPr>
-          <p:nvPr>
-            <p:ph type="sldImg" idx="2"/>
-          </p:nvPr>
-        </p:nvSpPr>
-        <p:spPr/>
-      </p:sp>
-      <p:sp>
-        <p:nvSpPr>
-          <p:cNvPr id="3" name="Notes Placeholder 2"/>
-          <p:cNvSpPr>
-            <a:spLocks noGrp="1"/>
-          </p:cNvSpPr>
-          <p:nvPr>
-            <p:ph type="body" idx="3" sz="quarter"/>
-          </p:nvPr>
-        </p:nvSpPr>
-        <p:spPr/>
-        <p:txBody>
-          <a:bodyPr/>
-          <a:lstStyle/>
-          <a:p>
-            <a:r>
-              <a:t>Correct answer: C. Automation removes copying and chasing. Decisions involving money, people or legal exposure need human accountability.</a:t>
-            </a:r>
-          </a:p>
-        </p:txBody>
-      </p:sp>
-      <p:sp>
-        <p:nvSpPr>
-          <p:cNvPr id="4" name="Slide Number Placeholder 3"/>
-          <p:cNvSpPr>
-            <a:spLocks noGrp="1"/>
-          </p:cNvSpPr>
-          <p:nvPr>
-            <p:ph type="sldNum" idx="5" sz="quarter"/>
-          </p:nvPr>
-        </p:nvSpPr>
-        <p:spPr/>
-      </p:sp>
-    </p:spTree>
-  </p:cSld>
-  <p:clrMapOvr>
-    <a:masterClrMapping/>
-  </p:clrMapOvr>
-</p:notes>
-</file>
-
-<file path=ppt/notesSlides/notesSlide62.xml><?xml version="1.0" encoding="utf-8"?>
-<p:notes xmlns:a="http://schemas.openxmlformats.org/drawingml/2006/main" xmlns:p="http://schemas.openxmlformats.org/presentationml/2006/main" xmlns:r="http://schemas.openxmlformats.org/officeDocument/2006/relationships">
-  <p:cSld>
-    <p:spTree>
-      <p:nvGrpSpPr>
-        <p:cNvPr id="1" name=""/>
-        <p:cNvGrpSpPr/>
-        <p:nvPr/>
-      </p:nvGrpSpPr>
-      <p:grpSpPr>
-        <a:xfrm>
-          <a:off x="0" y="0"/>
-          <a:ext cx="0" cy="0"/>
-          <a:chOff x="0" y="0"/>
-          <a:chExt cx="0" cy="0"/>
-        </a:xfrm>
-      </p:grpSpPr>
-      <p:sp>
-        <p:nvSpPr>
-          <p:cNvPr id="2" name="Slide Image Placeholder 1"/>
-          <p:cNvSpPr>
-            <a:spLocks noGrp="1"/>
-          </p:cNvSpPr>
-          <p:nvPr>
-            <p:ph type="sldImg" idx="2"/>
-          </p:nvPr>
-        </p:nvSpPr>
-        <p:spPr/>
-      </p:sp>
-      <p:sp>
-        <p:nvSpPr>
-          <p:cNvPr id="3" name="Notes Placeholder 2"/>
-          <p:cNvSpPr>
-            <a:spLocks noGrp="1"/>
-          </p:cNvSpPr>
-          <p:nvPr>
-            <p:ph type="body" idx="3" sz="quarter"/>
-          </p:nvPr>
-        </p:nvSpPr>
-        <p:spPr/>
-        <p:txBody>
-          <a:bodyPr/>
-          <a:lstStyle/>
-          <a:p>
-            <a:r>
-              <a:t>Read the four takeaways. Then say what the next session, Session 2, is: writing instructions (prompts) that produce the same shape of answer every time, and building a first assistant that knows your documents.</a:t>
-            </a:r>
-          </a:p>
-        </p:txBody>
-      </p:sp>
-      <p:sp>
-        <p:nvSpPr>
-          <p:cNvPr id="4" name="Slide Number Placeholder 3"/>
-          <p:cNvSpPr>
-            <a:spLocks noGrp="1"/>
-          </p:cNvSpPr>
-          <p:nvPr>
-            <p:ph type="sldNum" idx="5" sz="quarter"/>
-          </p:nvPr>
-        </p:nvSpPr>
-        <p:spPr/>
-      </p:sp>
-    </p:spTree>
-  </p:cSld>
-  <p:clrMapOvr>
-    <a:masterClrMapping/>
-  </p:clrMapOvr>
-</p:notes>
-</file>
-
-<file path=ppt/notesSlides/notesSlide63.xml><?xml version="1.0" encoding="utf-8"?>
-<p:notes xmlns:a="http://schemas.openxmlformats.org/drawingml/2006/main" xmlns:p="http://schemas.openxmlformats.org/presentationml/2006/main" xmlns:r="http://schemas.openxmlformats.org/officeDocument/2006/relationships">
-  <p:cSld>
-    <p:spTree>
-      <p:nvGrpSpPr>
-        <p:cNvPr id="1" name=""/>
-        <p:cNvGrpSpPr/>
-        <p:nvPr/>
-      </p:nvGrpSpPr>
-      <p:grpSpPr>
-        <a:xfrm>
-          <a:off x="0" y="0"/>
-          <a:ext cx="0" cy="0"/>
-          <a:chOff x="0" y="0"/>
-          <a:chExt cx="0" cy="0"/>
-        </a:xfrm>
-      </p:grpSpPr>
-      <p:sp>
-        <p:nvSpPr>
-          <p:cNvPr id="2" name="Slide Image Placeholder 1"/>
-          <p:cNvSpPr>
-            <a:spLocks noGrp="1"/>
-          </p:cNvSpPr>
-          <p:nvPr>
-            <p:ph type="sldImg" idx="2"/>
-          </p:nvPr>
-        </p:nvSpPr>
-        <p:spPr/>
-      </p:sp>
-      <p:sp>
-        <p:nvSpPr>
-          <p:cNvPr id="3" name="Notes Placeholder 2"/>
-          <p:cNvSpPr>
-            <a:spLocks noGrp="1"/>
-          </p:cNvSpPr>
-          <p:nvPr>
-            <p:ph type="body" idx="3" sz="quarter"/>
-          </p:nvPr>
-        </p:nvSpPr>
-        <p:spPr/>
-        <p:txBody>
-          <a:bodyPr/>
-          <a:lstStyle/>
-          <a:p>
-            <a:r>
-              <a:t>Optional reading only. The online module repeats everything in this deck, with the knowledge check scored in the browser, so participants can revise alone.</a:t>
-            </a:r>
-          </a:p>
-        </p:txBody>
-      </p:sp>
-      <p:sp>
-        <p:nvSpPr>
-          <p:cNvPr id="4" name="Slide Number Placeholder 3"/>
-          <p:cNvSpPr>
-            <a:spLocks noGrp="1"/>
-          </p:cNvSpPr>
-          <p:nvPr>
-            <p:ph type="sldNum" idx="5" sz="quarter"/>
-          </p:nvPr>
-        </p:nvSpPr>
-        <p:spPr/>
-      </p:sp>
-    </p:spTree>
-  </p:cSld>
-  <p:clrMapOvr>
-    <a:masterClrMapping/>
-  </p:clrMapOvr>
-</p:notes>
-</file>
-
-<file path=ppt/notesSlides/notesSlide64.xml><?xml version="1.0" encoding="utf-8"?>
-<p:notes xmlns:a="http://schemas.openxmlformats.org/drawingml/2006/main" xmlns:p="http://schemas.openxmlformats.org/presentationml/2006/main" xmlns:r="http://schemas.openxmlformats.org/officeDocument/2006/relationships">
-  <p:cSld>
-    <p:spTree>
-      <p:nvGrpSpPr>
-        <p:cNvPr id="1" name=""/>
-        <p:cNvGrpSpPr/>
-        <p:nvPr/>
-      </p:nvGrpSpPr>
-      <p:grpSpPr>
-        <a:xfrm>
-          <a:off x="0" y="0"/>
-          <a:ext cx="0" cy="0"/>
-          <a:chOff x="0" y="0"/>
-          <a:chExt cx="0" cy="0"/>
-        </a:xfrm>
-      </p:grpSpPr>
-      <p:sp>
-        <p:nvSpPr>
-          <p:cNvPr id="2" name="Slide Image Placeholder 1"/>
-          <p:cNvSpPr>
-            <a:spLocks noGrp="1"/>
-          </p:cNvSpPr>
-          <p:nvPr>
-            <p:ph type="sldImg" idx="2"/>
-          </p:nvPr>
-        </p:nvSpPr>
-        <p:spPr/>
-      </p:sp>
-      <p:sp>
-        <p:nvSpPr>
-          <p:cNvPr id="3" name="Notes Placeholder 2"/>
-          <p:cNvSpPr>
-            <a:spLocks noGrp="1"/>
-          </p:cNvSpPr>
-          <p:nvPr>
-            <p:ph type="body" idx="3" sz="quarter"/>
-          </p:nvPr>
-        </p:nvSpPr>
-        <p:spPr/>
-        <p:txBody>
-          <a:bodyPr/>
-          <a:lstStyle/>
-          <a:p>
-            <a:r>
-              <a:t>Optional two minutes, or leave for self-study. Each item links a headline from the last few months to something taught today. Instructors may swap in newer pieces; keep the pattern: source, date, one-line takeaway tied to the session.</a:t>
-            </a:r>
-          </a:p>
-        </p:txBody>
-      </p:sp>
-      <p:sp>
-        <p:nvSpPr>
-          <p:cNvPr id="4" name="Slide Number Placeholder 3"/>
-          <p:cNvSpPr>
-            <a:spLocks noGrp="1"/>
-          </p:cNvSpPr>
-          <p:nvPr>
-            <p:ph type="sldNum" idx="5" sz="quarter"/>
-          </p:nvPr>
-        </p:nvSpPr>
-        <p:spPr/>
-      </p:sp>
-    </p:spTree>
-  </p:cSld>
-  <p:clrMapOvr>
-    <a:masterClrMapping/>
-  </p:clrMapOvr>
-</p:notes>
-</file>
-
-<file path=ppt/notesSlides/notesSlide65.xml><?xml version="1.0" encoding="utf-8"?>
-<p:notes xmlns:a="http://schemas.openxmlformats.org/drawingml/2006/main" xmlns:p="http://schemas.openxmlformats.org/presentationml/2006/main" xmlns:r="http://schemas.openxmlformats.org/officeDocument/2006/relationships">
-  <p:cSld>
-    <p:spTree>
-      <p:nvGrpSpPr>
-        <p:cNvPr id="1" name=""/>
-        <p:cNvGrpSpPr/>
-        <p:nvPr/>
-      </p:nvGrpSpPr>
-      <p:grpSpPr>
-        <a:xfrm>
-          <a:off x="0" y="0"/>
-          <a:ext cx="0" cy="0"/>
-          <a:chOff x="0" y="0"/>
-          <a:chExt cx="0" cy="0"/>
-        </a:xfrm>
-      </p:grpSpPr>
-      <p:sp>
-        <p:nvSpPr>
-          <p:cNvPr id="2" name="Slide Image Placeholder 1"/>
-          <p:cNvSpPr>
-            <a:spLocks noGrp="1"/>
-          </p:cNvSpPr>
-          <p:nvPr>
-            <p:ph type="sldImg" idx="2"/>
-          </p:nvPr>
-        </p:nvSpPr>
-        <p:spPr/>
-      </p:sp>
-      <p:sp>
-        <p:nvSpPr>
-          <p:cNvPr id="3" name="Notes Placeholder 2"/>
-          <p:cNvSpPr>
-            <a:spLocks noGrp="1"/>
-          </p:cNvSpPr>
-          <p:nvPr>
-            <p:ph type="body" idx="3" sz="quarter"/>
-          </p:nvPr>
-        </p:nvSpPr>
-        <p:spPr/>
-        <p:txBody>
-          <a:bodyPr/>
-          <a:lstStyle/>
-          <a:p>
-            <a:r>
-              <a:t>Leave on screen during questions. All figures in this deck are from Alammar and Grootendorst, Hands-On Large Language Models (O'Reilly, 2024), credited on each slide; the same figures appear in Grootendorst's online Visual Guide.</a:t>
             </a:r>
           </a:p>
         </p:txBody>
@@ -21544,7 +20905,7 @@
                           </a:solidFill>
                           <a:latin typeface="Calibri"/>
                         </a:rPr>
-                        <a:t>90 to 108</a:t>
+                        <a:t>90 to 105</a:t>
                       </a:r>
                     </a:p>
                   </a:txBody>
@@ -21588,7 +20949,7 @@
                           </a:solidFill>
                           <a:latin typeface="Calibri"/>
                         </a:rPr>
-                        <a:t>Join a live Hermes agent on Telegram; four tasks; debrief on the four parts</a:t>
+                        <a:t>Join the live agent on Telegram; four tasks; debrief on the four parts</a:t>
                       </a:r>
                     </a:p>
                   </a:txBody>
@@ -21612,7 +20973,7 @@
                           </a:solidFill>
                           <a:latin typeface="Calibri"/>
                         </a:rPr>
-                        <a:t>108 to 116</a:t>
+                        <a:t>105 to 110</a:t>
                       </a:r>
                     </a:p>
                   </a:txBody>
@@ -21656,7 +21017,7 @@
                           </a:solidFill>
                           <a:latin typeface="Calibri"/>
                         </a:rPr>
-                        <a:t>Task inventory: ten tasks, tagged, classified, challenged by an assistant (finished at home)</a:t>
+                        <a:t>Task inventory steps shown; finished at home</a:t>
                       </a:r>
                     </a:p>
                   </a:txBody>
@@ -21680,7 +21041,7 @@
                           </a:solidFill>
                           <a:latin typeface="Calibri"/>
                         </a:rPr>
-                        <a:t>116 to 120</a:t>
+                        <a:t>110 to 120</a:t>
                       </a:r>
                     </a:p>
                   </a:txBody>
@@ -21702,7 +21063,7 @@
                           </a:solidFill>
                           <a:latin typeface="Calibri"/>
                         </a:rPr>
-                        <a:t>Knowledge check and wrap</a:t>
+                        <a:t>Kahoot and wrap</a:t>
                       </a:r>
                     </a:p>
                   </a:txBody>
@@ -21724,7 +21085,7 @@
                           </a:solidFill>
                           <a:latin typeface="Calibri"/>
                         </a:rPr>
-                        <a:t>Five questions, key takeaways, what to bring to Session 2</a:t>
+                        <a:t>As many of the 30 questions as time allows; the rest as a challenge link; key takeaways</a:t>
                       </a:r>
                     </a:p>
                   </a:txBody>
@@ -25334,7 +24695,7 @@
                 </a:solidFill>
                 <a:latin typeface="Calibri"/>
               </a:rPr>
-              <a:t>About 18 minutes</a:t>
+              <a:t>About 15 minutes</a:t>
             </a:r>
           </a:p>
         </p:txBody>
@@ -26346,53 +25707,30 @@
           </a:p>
         </p:txBody>
       </p:sp>
-      <p:sp>
-        <p:nvSpPr>
-          <p:cNvPr id="5" name="Rectangle 4"/>
-          <p:cNvSpPr/>
-          <p:nvPr/>
-        </p:nvSpPr>
+      <p:pic>
+        <p:nvPicPr>
+          <p:cNvPr id="5" name="Picture 4" descr="bot_qr.png"/>
+          <p:cNvPicPr>
+            <a:picLocks noChangeAspect="1"/>
+          </p:cNvPicPr>
+          <p:nvPr/>
+        </p:nvPicPr>
+        <p:blipFill>
+          <a:blip r:embed="rId2"/>
+          <a:stretch>
+            <a:fillRect/>
+          </a:stretch>
+        </p:blipFill>
         <p:spPr>
           <a:xfrm>
             <a:off x="548640" y="1508760"/>
-            <a:ext cx="3291840" cy="3291840"/>
-          </a:xfrm>
-          <a:prstGeom prst="rect">
-            <a:avLst/>
-          </a:prstGeom>
-          <a:solidFill>
-            <a:srgbClr val="F2F2F2"/>
-          </a:solidFill>
-          <a:ln>
-            <a:solidFill>
-              <a:srgbClr val="666666"/>
-            </a:solidFill>
-            <a:prstDash val="dash"/>
-          </a:ln>
-          <a:effectLst/>
-        </p:spPr>
-        <p:style>
-          <a:lnRef idx="1">
-            <a:schemeClr val="accent1"/>
-          </a:lnRef>
-          <a:fillRef idx="3">
-            <a:schemeClr val="accent1"/>
-          </a:fillRef>
-          <a:effectRef idx="2">
-            <a:schemeClr val="accent1"/>
-          </a:effectRef>
-          <a:fontRef idx="minor">
-            <a:schemeClr val="lt1"/>
-          </a:fontRef>
-        </p:style>
-        <p:txBody>
-          <a:bodyPr rtlCol="0" anchor="ctr"/>
-          <a:lstStyle/>
-          <a:p>
-            <a:pPr algn="ctr"/>
-          </a:p>
-        </p:txBody>
-      </p:sp>
+            <a:ext cx="3291839" cy="3291839"/>
+          </a:xfrm>
+          <a:prstGeom prst="rect">
+            <a:avLst/>
+          </a:prstGeom>
+        </p:spPr>
+      </p:pic>
       <p:sp>
         <p:nvSpPr>
           <p:cNvPr id="6" name="TextBox 5"/>
@@ -26401,8 +25739,8 @@
         </p:nvSpPr>
         <p:spPr>
           <a:xfrm>
-            <a:off x="548640" y="2697480"/>
-            <a:ext cx="3291840" cy="914400"/>
+            <a:off x="548640" y="4937760"/>
+            <a:ext cx="3291840" cy="457200"/>
           </a:xfrm>
           <a:prstGeom prst="rect">
             <a:avLst/>
@@ -26410,20 +25748,20 @@
           <a:noFill/>
         </p:spPr>
         <p:txBody>
-          <a:bodyPr wrap="square" anchor="ctr" lIns="45720" rIns="45720" tIns="27432" bIns="27432">
+          <a:bodyPr wrap="square" anchor="t" lIns="45720" rIns="45720" tIns="27432" bIns="27432">
             <a:spAutoFit/>
           </a:bodyPr>
           <a:lstStyle/>
           <a:p>
             <a:pPr algn="ctr"/>
             <a:r>
-              <a:rPr sz="1600" b="0" i="0">
-                <a:solidFill>
-                  <a:srgbClr val="666666"/>
-                </a:solidFill>
-                <a:latin typeface="Calibri"/>
-              </a:rPr>
-              <a:t>Paste the Telegram bot QR code here (see setup sheet, step 7)</a:t>
+              <a:rPr sz="1800" b="1" i="0">
+                <a:solidFill>
+                  <a:srgbClr val="111111"/>
+                </a:solidFill>
+                <a:latin typeface="Calibri"/>
+              </a:rPr>
+              <a:t>@aicaravan_bot</a:t>
             </a:r>
           </a:p>
         </p:txBody>
@@ -26436,8 +25774,8 @@
         </p:nvSpPr>
         <p:spPr>
           <a:xfrm>
-            <a:off x="548640" y="4937760"/>
-            <a:ext cx="3291840" cy="457200"/>
+            <a:off x="4389120" y="1508760"/>
+            <a:ext cx="7253935" cy="457200"/>
           </a:xfrm>
           <a:prstGeom prst="rect">
             <a:avLst/>
@@ -26450,15 +25788,15 @@
           </a:bodyPr>
           <a:lstStyle/>
           <a:p>
-            <a:pPr algn="ctr"/>
-            <a:r>
-              <a:rPr sz="1800" b="1" i="0">
+            <a:pPr algn="l"/>
+            <a:r>
+              <a:rPr sz="2000" b="1" i="0">
                 <a:solidFill>
                   <a:srgbClr val="111111"/>
                 </a:solidFill>
                 <a:latin typeface="Calibri"/>
               </a:rPr>
-              <a:t>@aicaravan_day1_bot</a:t>
+              <a:t>How to join</a:t>
             </a:r>
           </a:p>
         </p:txBody>
@@ -26466,41 +25804,6 @@
       <p:sp>
         <p:nvSpPr>
           <p:cNvPr id="8" name="TextBox 7"/>
-          <p:cNvSpPr txBox="1"/>
-          <p:nvPr/>
-        </p:nvSpPr>
-        <p:spPr>
-          <a:xfrm>
-            <a:off x="4389120" y="1508760"/>
-            <a:ext cx="7253935" cy="457200"/>
-          </a:xfrm>
-          <a:prstGeom prst="rect">
-            <a:avLst/>
-          </a:prstGeom>
-          <a:noFill/>
-        </p:spPr>
-        <p:txBody>
-          <a:bodyPr wrap="square" anchor="t" lIns="45720" rIns="45720" tIns="27432" bIns="27432">
-            <a:spAutoFit/>
-          </a:bodyPr>
-          <a:lstStyle/>
-          <a:p>
-            <a:pPr algn="l"/>
-            <a:r>
-              <a:rPr sz="2000" b="1" i="0">
-                <a:solidFill>
-                  <a:srgbClr val="111111"/>
-                </a:solidFill>
-                <a:latin typeface="Calibri"/>
-              </a:rPr>
-              <a:t>How to join</a:t>
-            </a:r>
-          </a:p>
-        </p:txBody>
-      </p:sp>
-      <p:sp>
-        <p:nvSpPr>
-          <p:cNvPr id="9" name="TextBox 8"/>
           <p:cNvSpPr txBox="1"/>
           <p:nvPr/>
         </p:nvSpPr>
@@ -26571,7 +25874,7 @@
       </p:sp>
       <p:sp>
         <p:nvSpPr>
-          <p:cNvPr id="10" name="TextBox 9"/>
+          <p:cNvPr id="9" name="TextBox 8"/>
           <p:cNvSpPr txBox="1"/>
           <p:nvPr/>
         </p:nvSpPr>
@@ -26606,7 +25909,7 @@
       </p:sp>
       <p:sp>
         <p:nvSpPr>
-          <p:cNvPr id="11" name="TextBox 10"/>
+          <p:cNvPr id="10" name="TextBox 9"/>
           <p:cNvSpPr txBox="1"/>
           <p:nvPr/>
         </p:nvSpPr>
@@ -26677,7 +25980,7 @@
       </p:sp>
       <p:sp>
         <p:nvSpPr>
-          <p:cNvPr id="12" name="Rectangle 11"/>
+          <p:cNvPr id="11" name="Rectangle 10"/>
           <p:cNvSpPr/>
           <p:nvPr/>
         </p:nvSpPr>
@@ -26721,7 +26024,7 @@
       </p:sp>
       <p:sp>
         <p:nvSpPr>
-          <p:cNvPr id="13" name="TextBox 12"/>
+          <p:cNvPr id="12" name="TextBox 11"/>
           <p:cNvSpPr txBox="1"/>
           <p:nvPr/>
         </p:nvSpPr>
@@ -26756,7 +26059,7 @@
       </p:sp>
       <p:sp>
         <p:nvSpPr>
-          <p:cNvPr id="14" name="TextBox 13"/>
+          <p:cNvPr id="13" name="TextBox 12"/>
           <p:cNvSpPr txBox="1"/>
           <p:nvPr/>
         </p:nvSpPr>
@@ -28637,7 +27940,7 @@
                 </a:solidFill>
                 <a:latin typeface="Calibri"/>
               </a:rPr>
-              <a:t>Section · minute 108</a:t>
+              <a:t>Section · minute 105</a:t>
             </a:r>
           </a:p>
         </p:txBody>
@@ -28786,7 +28089,7 @@
                 </a:solidFill>
                 <a:latin typeface="Calibri"/>
               </a:rPr>
-              <a:t>About 8 minutes</a:t>
+              <a:t>About 5 minutes</a:t>
             </a:r>
           </a:p>
         </p:txBody>
@@ -30717,7 +30020,7 @@
                 </a:solidFill>
                 <a:latin typeface="Calibri"/>
               </a:rPr>
-              <a:t>Section · minute 116</a:t>
+              <a:t>Section · minute 110</a:t>
             </a:r>
           </a:p>
         </p:txBody>
@@ -30796,7 +30099,7 @@
                 </a:solidFill>
                 <a:latin typeface="Calibri"/>
               </a:rPr>
-              <a:t>Knowledge check</a:t>
+              <a:t>Kahoot: knowledge check</a:t>
             </a:r>
           </a:p>
         </p:txBody>
@@ -30831,7 +30134,7 @@
                 </a:solidFill>
                 <a:latin typeface="Calibri"/>
               </a:rPr>
-              <a:t>Five questions in the style of the final exam</a:t>
+              <a:t>30 questions, 20 seconds each. Phones out.</a:t>
             </a:r>
           </a:p>
         </p:txBody>
@@ -30866,7 +30169,7 @@
                 </a:solidFill>
                 <a:latin typeface="Calibri"/>
               </a:rPr>
-              <a:t>About 4 minutes</a:t>
+              <a:t>About 10 minutes</a:t>
             </a:r>
           </a:p>
         </p:txBody>
@@ -31033,7 +30336,7 @@
                 </a:solidFill>
                 <a:latin typeface="Calibri"/>
               </a:rPr>
-              <a:t>Question 1</a:t>
+              <a:t>Join the Kahoot</a:t>
             </a:r>
           </a:p>
         </p:txBody>
@@ -31135,7 +30438,7 @@
         <p:spPr>
           <a:xfrm>
             <a:off x="548640" y="1325880"/>
-            <a:ext cx="11094415" cy="1097280"/>
+            <a:ext cx="5318607" cy="457200"/>
           </a:xfrm>
           <a:prstGeom prst="rect">
             <a:avLst/>
@@ -31150,38 +30453,36 @@
           <a:p>
             <a:pPr algn="l"/>
             <a:r>
-              <a:rPr sz="2200" b="1" i="0">
+              <a:rPr sz="2000" b="1" i="0">
                 <a:solidFill>
                   <a:srgbClr val="111111"/>
                 </a:solidFill>
                 <a:latin typeface="Calibri"/>
               </a:rPr>
-              <a:t>Which statement best describes an agent, as opposed to an automation?</a:t>
-            </a:r>
-          </a:p>
-        </p:txBody>
-      </p:sp>
-      <p:sp>
-        <p:nvSpPr>
-          <p:cNvPr id="6" name="Rounded Rectangle 5"/>
+              <a:t>How to join</a:t>
+            </a:r>
+          </a:p>
+        </p:txBody>
+      </p:sp>
+      <p:sp>
+        <p:nvSpPr>
+          <p:cNvPr id="6" name="Rectangle 5"/>
           <p:cNvSpPr/>
           <p:nvPr/>
         </p:nvSpPr>
         <p:spPr>
           <a:xfrm>
-            <a:off x="548640" y="2514600"/>
-            <a:ext cx="11094415" cy="566928"/>
-          </a:xfrm>
-          <a:prstGeom prst="roundRect">
+            <a:off x="548640" y="1801368"/>
+            <a:ext cx="5318607" cy="25400"/>
+          </a:xfrm>
+          <a:prstGeom prst="rect">
             <a:avLst/>
           </a:prstGeom>
           <a:solidFill>
-            <a:srgbClr val="F2F2F2"/>
+            <a:srgbClr val="F7A11A"/>
           </a:solidFill>
-          <a:ln w="12700">
-            <a:solidFill>
-              <a:srgbClr val="DDDDDD"/>
-            </a:solidFill>
+          <a:ln>
+            <a:noFill/>
           </a:ln>
           <a:effectLst/>
         </p:spPr>
@@ -31215,8 +30516,8 @@
         </p:nvSpPr>
         <p:spPr>
           <a:xfrm>
-            <a:off x="731520" y="2587752"/>
-            <a:ext cx="10728655" cy="457200"/>
+            <a:off x="548640" y="1920240"/>
+            <a:ext cx="5318607" cy="4297680"/>
           </a:xfrm>
           <a:prstGeom prst="rect">
             <a:avLst/>
@@ -31224,45 +30525,130 @@
           <a:noFill/>
         </p:spPr>
         <p:txBody>
-          <a:bodyPr wrap="square" anchor="ctr" lIns="45720" rIns="45720" tIns="27432" bIns="27432">
+          <a:bodyPr wrap="square" lIns="45720" rIns="45720">
             <a:spAutoFit/>
           </a:bodyPr>
           <a:lstStyle/>
           <a:p>
+            <a:pPr>
+              <a:spcAft>
+                <a:spcPts val="1000"/>
+              </a:spcAft>
+            </a:pPr>
+            <a:r>
+              <a:rPr sz="1800">
+                <a:solidFill>
+                  <a:srgbClr val="111111"/>
+                </a:solidFill>
+                <a:latin typeface="Calibri"/>
+              </a:rPr>
+              <a:t>•  Open kahoot.it on your phone, or the Kahoot app</a:t>
+            </a:r>
+          </a:p>
+          <a:p>
+            <a:pPr>
+              <a:spcAft>
+                <a:spcPts val="1000"/>
+              </a:spcAft>
+            </a:pPr>
+            <a:r>
+              <a:rPr sz="1800">
+                <a:solidFill>
+                  <a:srgbClr val="111111"/>
+                </a:solidFill>
+                <a:latin typeface="Calibri"/>
+              </a:rPr>
+              <a:t>•  Enter the game PIN shown on the screen</a:t>
+            </a:r>
+          </a:p>
+          <a:p>
+            <a:pPr>
+              <a:spcAft>
+                <a:spcPts val="1000"/>
+              </a:spcAft>
+            </a:pPr>
+            <a:r>
+              <a:rPr sz="1800">
+                <a:solidFill>
+                  <a:srgbClr val="111111"/>
+                </a:solidFill>
+                <a:latin typeface="Calibri"/>
+              </a:rPr>
+              <a:t>•  Nickname: your first name</a:t>
+            </a:r>
+          </a:p>
+          <a:p>
+            <a:pPr>
+              <a:spcAft>
+                <a:spcPts val="1000"/>
+              </a:spcAft>
+            </a:pPr>
+            <a:r>
+              <a:rPr sz="1800">
+                <a:solidFill>
+                  <a:srgbClr val="111111"/>
+                </a:solidFill>
+                <a:latin typeface="Calibri"/>
+              </a:rPr>
+              <a:t>•  20 seconds per question; answer on your phone</a:t>
+            </a:r>
+          </a:p>
+        </p:txBody>
+      </p:sp>
+      <p:sp>
+        <p:nvSpPr>
+          <p:cNvPr id="8" name="TextBox 7"/>
+          <p:cNvSpPr txBox="1"/>
+          <p:nvPr/>
+        </p:nvSpPr>
+        <p:spPr>
+          <a:xfrm>
+            <a:off x="6324447" y="1325880"/>
+            <a:ext cx="5318607" cy="457200"/>
+          </a:xfrm>
+          <a:prstGeom prst="rect">
+            <a:avLst/>
+          </a:prstGeom>
+          <a:noFill/>
+        </p:spPr>
+        <p:txBody>
+          <a:bodyPr wrap="square" anchor="t" lIns="45720" rIns="45720" tIns="27432" bIns="27432">
+            <a:spAutoFit/>
+          </a:bodyPr>
+          <a:lstStyle/>
+          <a:p>
             <a:pPr algn="l"/>
             <a:r>
-              <a:rPr sz="1700" b="0" i="0">
+              <a:rPr sz="2000" b="1" i="0">
                 <a:solidFill>
                   <a:srgbClr val="111111"/>
                 </a:solidFill>
                 <a:latin typeface="Calibri"/>
               </a:rPr>
-              <a:t>A.  It runs on a schedule instead of a trigger</a:t>
-            </a:r>
-          </a:p>
-        </p:txBody>
-      </p:sp>
-      <p:sp>
-        <p:nvSpPr>
-          <p:cNvPr id="8" name="Rounded Rectangle 7"/>
+              <a:t>Fair play notes</a:t>
+            </a:r>
+          </a:p>
+        </p:txBody>
+      </p:sp>
+      <p:sp>
+        <p:nvSpPr>
+          <p:cNvPr id="9" name="Rectangle 8"/>
           <p:cNvSpPr/>
           <p:nvPr/>
         </p:nvSpPr>
         <p:spPr>
           <a:xfrm>
-            <a:off x="548640" y="3172968"/>
-            <a:ext cx="11094415" cy="566928"/>
-          </a:xfrm>
-          <a:prstGeom prst="roundRect">
+            <a:off x="6324447" y="1801368"/>
+            <a:ext cx="5318607" cy="25400"/>
+          </a:xfrm>
+          <a:prstGeom prst="rect">
             <a:avLst/>
           </a:prstGeom>
           <a:solidFill>
-            <a:srgbClr val="F2F2F2"/>
+            <a:srgbClr val="666666"/>
           </a:solidFill>
-          <a:ln w="12700">
-            <a:solidFill>
-              <a:srgbClr val="DDDDDD"/>
-            </a:solidFill>
+          <a:ln>
+            <a:noFill/>
           </a:ln>
           <a:effectLst/>
         </p:spPr>
@@ -31290,14 +30676,14 @@
       </p:sp>
       <p:sp>
         <p:nvSpPr>
-          <p:cNvPr id="9" name="TextBox 8"/>
+          <p:cNvPr id="10" name="TextBox 9"/>
           <p:cNvSpPr txBox="1"/>
           <p:nvPr/>
         </p:nvSpPr>
         <p:spPr>
           <a:xfrm>
-            <a:off x="731520" y="3246120"/>
-            <a:ext cx="10728655" cy="457200"/>
+            <a:off x="6324447" y="1920240"/>
+            <a:ext cx="5318607" cy="4297680"/>
           </a:xfrm>
           <a:prstGeom prst="rect">
             <a:avLst/>
@@ -31305,189 +30691,79 @@
           <a:noFill/>
         </p:spPr>
         <p:txBody>
-          <a:bodyPr wrap="square" anchor="ctr" lIns="45720" rIns="45720" tIns="27432" bIns="27432">
+          <a:bodyPr wrap="square" lIns="45720" rIns="45720">
             <a:spAutoFit/>
           </a:bodyPr>
           <a:lstStyle/>
           <a:p>
-            <a:pPr algn="l"/>
-            <a:r>
-              <a:rPr sz="1700" b="0" i="0">
+            <a:pPr>
+              <a:spcAft>
+                <a:spcPts val="1000"/>
+              </a:spcAft>
+            </a:pPr>
+            <a:r>
+              <a:rPr sz="1800">
                 <a:solidFill>
                   <a:srgbClr val="111111"/>
                 </a:solidFill>
                 <a:latin typeface="Calibri"/>
               </a:rPr>
-              <a:t>B.  A language model decides the steps at run time</a:t>
-            </a:r>
-          </a:p>
-        </p:txBody>
-      </p:sp>
-      <p:sp>
-        <p:nvSpPr>
-          <p:cNvPr id="10" name="Rounded Rectangle 9"/>
-          <p:cNvSpPr/>
-          <p:nvPr/>
-        </p:nvSpPr>
-        <p:spPr>
-          <a:xfrm>
-            <a:off x="548640" y="3831336"/>
-            <a:ext cx="11094415" cy="566928"/>
-          </a:xfrm>
-          <a:prstGeom prst="roundRect">
-            <a:avLst/>
-          </a:prstGeom>
-          <a:solidFill>
-            <a:srgbClr val="F2F2F2"/>
-          </a:solidFill>
-          <a:ln w="12700">
-            <a:solidFill>
-              <a:srgbClr val="DDDDDD"/>
-            </a:solidFill>
-          </a:ln>
-          <a:effectLst/>
-        </p:spPr>
-        <p:style>
-          <a:lnRef idx="1">
-            <a:schemeClr val="accent1"/>
-          </a:lnRef>
-          <a:fillRef idx="3">
-            <a:schemeClr val="accent1"/>
-          </a:fillRef>
-          <a:effectRef idx="2">
-            <a:schemeClr val="accent1"/>
-          </a:effectRef>
-          <a:fontRef idx="minor">
-            <a:schemeClr val="lt1"/>
-          </a:fontRef>
-        </p:style>
-        <p:txBody>
-          <a:bodyPr rtlCol="0" anchor="ctr"/>
-          <a:lstStyle/>
-          <a:p>
-            <a:pPr algn="ctr"/>
-          </a:p>
-        </p:txBody>
-      </p:sp>
-      <p:sp>
-        <p:nvSpPr>
-          <p:cNvPr id="11" name="TextBox 10"/>
-          <p:cNvSpPr txBox="1"/>
-          <p:nvPr/>
-        </p:nvSpPr>
-        <p:spPr>
-          <a:xfrm>
-            <a:off x="731520" y="3904488"/>
-            <a:ext cx="10728655" cy="457200"/>
-          </a:xfrm>
-          <a:prstGeom prst="rect">
-            <a:avLst/>
-          </a:prstGeom>
-          <a:noFill/>
-        </p:spPr>
-        <p:txBody>
-          <a:bodyPr wrap="square" anchor="ctr" lIns="45720" rIns="45720" tIns="27432" bIns="27432">
-            <a:spAutoFit/>
-          </a:bodyPr>
-          <a:lstStyle/>
-          <a:p>
-            <a:pPr algn="l"/>
-            <a:r>
-              <a:rPr sz="1700" b="0" i="0">
+              <a:t>•  All four answers are about the same length. The long one is not a hint.</a:t>
+            </a:r>
+          </a:p>
+          <a:p>
+            <a:pPr>
+              <a:spcAft>
+                <a:spcPts val="1000"/>
+              </a:spcAft>
+            </a:pPr>
+            <a:r>
+              <a:rPr sz="1800">
                 <a:solidFill>
                   <a:srgbClr val="111111"/>
                 </a:solidFill>
                 <a:latin typeface="Calibri"/>
               </a:rPr>
-              <a:t>C.  It always sends its output to a human</a:t>
-            </a:r>
-          </a:p>
-        </p:txBody>
-      </p:sp>
-      <p:sp>
-        <p:nvSpPr>
-          <p:cNvPr id="12" name="Rounded Rectangle 11"/>
-          <p:cNvSpPr/>
-          <p:nvPr/>
-        </p:nvSpPr>
-        <p:spPr>
-          <a:xfrm>
-            <a:off x="548640" y="4489704"/>
-            <a:ext cx="11094415" cy="566928"/>
-          </a:xfrm>
-          <a:prstGeom prst="roundRect">
-            <a:avLst/>
-          </a:prstGeom>
-          <a:solidFill>
-            <a:srgbClr val="F2F2F2"/>
-          </a:solidFill>
-          <a:ln w="12700">
-            <a:solidFill>
-              <a:srgbClr val="DDDDDD"/>
-            </a:solidFill>
-          </a:ln>
-          <a:effectLst/>
-        </p:spPr>
-        <p:style>
-          <a:lnRef idx="1">
-            <a:schemeClr val="accent1"/>
-          </a:lnRef>
-          <a:fillRef idx="3">
-            <a:schemeClr val="accent1"/>
-          </a:fillRef>
-          <a:effectRef idx="2">
-            <a:schemeClr val="accent1"/>
-          </a:effectRef>
-          <a:fontRef idx="minor">
-            <a:schemeClr val="lt1"/>
-          </a:fontRef>
-        </p:style>
-        <p:txBody>
-          <a:bodyPr rtlCol="0" anchor="ctr"/>
-          <a:lstStyle/>
-          <a:p>
-            <a:pPr algn="ctr"/>
-          </a:p>
-        </p:txBody>
-      </p:sp>
-      <p:sp>
-        <p:nvSpPr>
-          <p:cNvPr id="13" name="TextBox 12"/>
-          <p:cNvSpPr txBox="1"/>
-          <p:nvPr/>
-        </p:nvSpPr>
-        <p:spPr>
-          <a:xfrm>
-            <a:off x="731520" y="4562856"/>
-            <a:ext cx="10728655" cy="457200"/>
-          </a:xfrm>
-          <a:prstGeom prst="rect">
-            <a:avLst/>
-          </a:prstGeom>
-          <a:noFill/>
-        </p:spPr>
-        <p:txBody>
-          <a:bodyPr wrap="square" anchor="ctr" lIns="45720" rIns="45720" tIns="27432" bIns="27432">
-            <a:spAutoFit/>
-          </a:bodyPr>
-          <a:lstStyle/>
-          <a:p>
-            <a:pPr algn="l"/>
-            <a:r>
-              <a:rPr sz="1700" b="0" i="0">
+              <a:t>•  Correct answers are spread evenly over the four colours.</a:t>
+            </a:r>
+          </a:p>
+          <a:p>
+            <a:pPr>
+              <a:spcAft>
+                <a:spcPts val="1000"/>
+              </a:spcAft>
+            </a:pPr>
+            <a:r>
+              <a:rPr sz="1800">
                 <a:solidFill>
                   <a:srgbClr val="111111"/>
                 </a:solidFill>
                 <a:latin typeface="Calibri"/>
               </a:rPr>
-              <a:t>D.  It cannot use external tools</a:t>
-            </a:r>
-          </a:p>
-        </p:txBody>
-      </p:sp>
-      <p:sp>
-        <p:nvSpPr>
-          <p:cNvPr id="14" name="Rectangle 13"/>
+              <a:t>•  We run as many as time allows in the room</a:t>
+            </a:r>
+          </a:p>
+          <a:p>
+            <a:pPr>
+              <a:spcAft>
+                <a:spcPts val="1000"/>
+              </a:spcAft>
+            </a:pPr>
+            <a:r>
+              <a:rPr sz="1800">
+                <a:solidFill>
+                  <a:srgbClr val="111111"/>
+                </a:solidFill>
+                <a:latin typeface="Calibri"/>
+              </a:rPr>
+              <a:t>•  The rest arrive as a Kahoot challenge link for homework</a:t>
+            </a:r>
+          </a:p>
+        </p:txBody>
+      </p:sp>
+      <p:sp>
+        <p:nvSpPr>
+          <p:cNvPr id="11" name="Rectangle 10"/>
           <p:cNvSpPr/>
           <p:nvPr/>
         </p:nvSpPr>
@@ -31531,7 +30807,7 @@
       </p:sp>
       <p:sp>
         <p:nvSpPr>
-          <p:cNvPr id="15" name="TextBox 14"/>
+          <p:cNvPr id="12" name="TextBox 11"/>
           <p:cNvSpPr txBox="1"/>
           <p:nvPr/>
         </p:nvSpPr>
@@ -31566,7 +30842,7 @@
       </p:sp>
       <p:sp>
         <p:nvSpPr>
-          <p:cNvPr id="16" name="TextBox 15"/>
+          <p:cNvPr id="13" name="TextBox 12"/>
           <p:cNvSpPr txBox="1"/>
           <p:nvPr/>
         </p:nvSpPr>
@@ -32005,7 +31281,7 @@
                 </a:solidFill>
                 <a:latin typeface="Calibri"/>
               </a:rPr>
-              <a:t>Question 1 · answer</a:t>
+              <a:t>Key takeaways</a:t>
             </a:r>
           </a:p>
         </p:txBody>
@@ -32106,8 +31382,8 @@
         </p:nvSpPr>
         <p:spPr>
           <a:xfrm>
-            <a:off x="548640" y="1325880"/>
-            <a:ext cx="11094415" cy="1097280"/>
+            <a:off x="548640" y="1371600"/>
+            <a:ext cx="11094415" cy="4937760"/>
           </a:xfrm>
           <a:prstGeom prst="rect">
             <a:avLst/>
@@ -32115,386 +31391,79 @@
           <a:noFill/>
         </p:spPr>
         <p:txBody>
-          <a:bodyPr wrap="square" anchor="t" lIns="45720" rIns="45720" tIns="27432" bIns="27432">
+          <a:bodyPr wrap="square" lIns="45720" rIns="45720">
             <a:spAutoFit/>
           </a:bodyPr>
           <a:lstStyle/>
           <a:p>
-            <a:pPr algn="l"/>
-            <a:r>
-              <a:rPr sz="2200" b="1" i="0">
+            <a:pPr>
+              <a:spcAft>
+                <a:spcPts val="1200"/>
+              </a:spcAft>
+            </a:pPr>
+            <a:r>
+              <a:rPr sz="2200">
                 <a:solidFill>
                   <a:srgbClr val="111111"/>
                 </a:solidFill>
                 <a:latin typeface="Calibri"/>
               </a:rPr>
-              <a:t>Which statement best describes an agent, as opposed to an automation?</a:t>
-            </a:r>
-          </a:p>
-        </p:txBody>
-      </p:sp>
-      <p:sp>
-        <p:nvSpPr>
-          <p:cNvPr id="6" name="Rounded Rectangle 5"/>
-          <p:cNvSpPr/>
-          <p:nvPr/>
-        </p:nvSpPr>
-        <p:spPr>
-          <a:xfrm>
-            <a:off x="548640" y="2514600"/>
-            <a:ext cx="11094415" cy="566928"/>
-          </a:xfrm>
-          <a:prstGeom prst="roundRect">
-            <a:avLst/>
-          </a:prstGeom>
-          <a:solidFill>
-            <a:srgbClr val="F2F2F2"/>
-          </a:solidFill>
-          <a:ln w="12700">
-            <a:solidFill>
-              <a:srgbClr val="DDDDDD"/>
-            </a:solidFill>
-          </a:ln>
-          <a:effectLst/>
-        </p:spPr>
-        <p:style>
-          <a:lnRef idx="1">
-            <a:schemeClr val="accent1"/>
-          </a:lnRef>
-          <a:fillRef idx="3">
-            <a:schemeClr val="accent1"/>
-          </a:fillRef>
-          <a:effectRef idx="2">
-            <a:schemeClr val="accent1"/>
-          </a:effectRef>
-          <a:fontRef idx="minor">
-            <a:schemeClr val="lt1"/>
-          </a:fontRef>
-        </p:style>
-        <p:txBody>
-          <a:bodyPr rtlCol="0" anchor="ctr"/>
-          <a:lstStyle/>
-          <a:p>
-            <a:pPr algn="ctr"/>
-          </a:p>
-        </p:txBody>
-      </p:sp>
-      <p:sp>
-        <p:nvSpPr>
-          <p:cNvPr id="7" name="TextBox 6"/>
-          <p:cNvSpPr txBox="1"/>
-          <p:nvPr/>
-        </p:nvSpPr>
-        <p:spPr>
-          <a:xfrm>
-            <a:off x="731520" y="2587752"/>
-            <a:ext cx="10728655" cy="457200"/>
-          </a:xfrm>
-          <a:prstGeom prst="rect">
-            <a:avLst/>
-          </a:prstGeom>
-          <a:noFill/>
-        </p:spPr>
-        <p:txBody>
-          <a:bodyPr wrap="square" anchor="ctr" lIns="45720" rIns="45720" tIns="27432" bIns="27432">
-            <a:spAutoFit/>
-          </a:bodyPr>
-          <a:lstStyle/>
-          <a:p>
-            <a:pPr algn="l"/>
-            <a:r>
-              <a:rPr sz="1700" b="0" i="0">
+              <a:t>•  Automations follow fixed steps; agents let a model choose the steps. Most useful systems are workflows with a few AI steps.</a:t>
+            </a:r>
+          </a:p>
+          <a:p>
+            <a:pPr>
+              <a:spcAft>
+                <a:spcPts val="1200"/>
+              </a:spcAft>
+            </a:pPr>
+            <a:r>
+              <a:rPr sz="2200">
                 <a:solidFill>
                   <a:srgbClr val="111111"/>
                 </a:solidFill>
                 <a:latin typeface="Calibri"/>
               </a:rPr>
-              <a:t>A.  It runs on a schedule instead of a trigger</a:t>
-            </a:r>
-          </a:p>
-        </p:txBody>
-      </p:sp>
-      <p:sp>
-        <p:nvSpPr>
-          <p:cNvPr id="8" name="Rounded Rectangle 7"/>
-          <p:cNvSpPr/>
-          <p:nvPr/>
-        </p:nvSpPr>
-        <p:spPr>
-          <a:xfrm>
-            <a:off x="548640" y="3172968"/>
-            <a:ext cx="11094415" cy="566928"/>
-          </a:xfrm>
-          <a:prstGeom prst="roundRect">
-            <a:avLst/>
-          </a:prstGeom>
-          <a:solidFill>
-            <a:srgbClr val="FFFFFF"/>
-          </a:solidFill>
-          <a:ln w="31750">
-            <a:solidFill>
-              <a:srgbClr val="F7A11A"/>
-            </a:solidFill>
-          </a:ln>
-          <a:effectLst/>
-        </p:spPr>
-        <p:style>
-          <a:lnRef idx="1">
-            <a:schemeClr val="accent1"/>
-          </a:lnRef>
-          <a:fillRef idx="3">
-            <a:schemeClr val="accent1"/>
-          </a:fillRef>
-          <a:effectRef idx="2">
-            <a:schemeClr val="accent1"/>
-          </a:effectRef>
-          <a:fontRef idx="minor">
-            <a:schemeClr val="lt1"/>
-          </a:fontRef>
-        </p:style>
-        <p:txBody>
-          <a:bodyPr rtlCol="0" anchor="ctr"/>
-          <a:lstStyle/>
-          <a:p>
-            <a:pPr algn="ctr"/>
-          </a:p>
-        </p:txBody>
-      </p:sp>
-      <p:sp>
-        <p:nvSpPr>
-          <p:cNvPr id="9" name="TextBox 8"/>
-          <p:cNvSpPr txBox="1"/>
-          <p:nvPr/>
-        </p:nvSpPr>
-        <p:spPr>
-          <a:xfrm>
-            <a:off x="731520" y="3246120"/>
-            <a:ext cx="10728655" cy="457200"/>
-          </a:xfrm>
-          <a:prstGeom prst="rect">
-            <a:avLst/>
-          </a:prstGeom>
-          <a:noFill/>
-        </p:spPr>
-        <p:txBody>
-          <a:bodyPr wrap="square" anchor="ctr" lIns="45720" rIns="45720" tIns="27432" bIns="27432">
-            <a:spAutoFit/>
-          </a:bodyPr>
-          <a:lstStyle/>
-          <a:p>
-            <a:pPr algn="l"/>
-            <a:r>
-              <a:rPr sz="1700" b="1" i="0">
+              <a:t>•  Every agent is model + tools + memory + instructions. Instructions and tool permissions are your control surface.</a:t>
+            </a:r>
+          </a:p>
+          <a:p>
+            <a:pPr>
+              <a:spcAft>
+                <a:spcPts val="1200"/>
+              </a:spcAft>
+            </a:pPr>
+            <a:r>
+              <a:rPr sz="2200">
                 <a:solidFill>
                   <a:srgbClr val="111111"/>
                 </a:solidFill>
                 <a:latin typeface="Calibri"/>
               </a:rPr>
-              <a:t>B.  A language model decides the steps at run time</a:t>
-            </a:r>
-          </a:p>
-        </p:txBody>
-      </p:sp>
-      <p:sp>
-        <p:nvSpPr>
-          <p:cNvPr id="10" name="Rounded Rectangle 9"/>
-          <p:cNvSpPr/>
-          <p:nvPr/>
-        </p:nvSpPr>
-        <p:spPr>
-          <a:xfrm>
-            <a:off x="548640" y="3831336"/>
-            <a:ext cx="11094415" cy="566928"/>
-          </a:xfrm>
-          <a:prstGeom prst="roundRect">
-            <a:avLst/>
-          </a:prstGeom>
-          <a:solidFill>
-            <a:srgbClr val="F2F2F2"/>
-          </a:solidFill>
-          <a:ln w="12700">
-            <a:solidFill>
-              <a:srgbClr val="DDDDDD"/>
-            </a:solidFill>
-          </a:ln>
-          <a:effectLst/>
-        </p:spPr>
-        <p:style>
-          <a:lnRef idx="1">
-            <a:schemeClr val="accent1"/>
-          </a:lnRef>
-          <a:fillRef idx="3">
-            <a:schemeClr val="accent1"/>
-          </a:fillRef>
-          <a:effectRef idx="2">
-            <a:schemeClr val="accent1"/>
-          </a:effectRef>
-          <a:fontRef idx="minor">
-            <a:schemeClr val="lt1"/>
-          </a:fontRef>
-        </p:style>
-        <p:txBody>
-          <a:bodyPr rtlCol="0" anchor="ctr"/>
-          <a:lstStyle/>
-          <a:p>
-            <a:pPr algn="ctr"/>
-          </a:p>
-        </p:txBody>
-      </p:sp>
-      <p:sp>
-        <p:nvSpPr>
-          <p:cNvPr id="11" name="TextBox 10"/>
-          <p:cNvSpPr txBox="1"/>
-          <p:nvPr/>
-        </p:nvSpPr>
-        <p:spPr>
-          <a:xfrm>
-            <a:off x="731520" y="3904488"/>
-            <a:ext cx="10728655" cy="457200"/>
-          </a:xfrm>
-          <a:prstGeom prst="rect">
-            <a:avLst/>
-          </a:prstGeom>
-          <a:noFill/>
-        </p:spPr>
-        <p:txBody>
-          <a:bodyPr wrap="square" anchor="ctr" lIns="45720" rIns="45720" tIns="27432" bIns="27432">
-            <a:spAutoFit/>
-          </a:bodyPr>
-          <a:lstStyle/>
-          <a:p>
-            <a:pPr algn="l"/>
-            <a:r>
-              <a:rPr sz="1700" b="0" i="0">
+              <a:t>•  Agents run a think, act, observe loop and need iteration limits and good tools.</a:t>
+            </a:r>
+          </a:p>
+          <a:p>
+            <a:pPr>
+              <a:spcAft>
+                <a:spcPts val="1200"/>
+              </a:spcAft>
+            </a:pPr>
+            <a:r>
+              <a:rPr sz="2200">
                 <a:solidFill>
                   <a:srgbClr val="111111"/>
                 </a:solidFill>
                 <a:latin typeface="Calibri"/>
               </a:rPr>
-              <a:t>C.  It always sends its output to a human</a:t>
-            </a:r>
-          </a:p>
-        </p:txBody>
-      </p:sp>
-      <p:sp>
-        <p:nvSpPr>
-          <p:cNvPr id="12" name="Rounded Rectangle 11"/>
-          <p:cNvSpPr/>
-          <p:nvPr/>
-        </p:nvSpPr>
-        <p:spPr>
-          <a:xfrm>
-            <a:off x="548640" y="4489704"/>
-            <a:ext cx="11094415" cy="566928"/>
-          </a:xfrm>
-          <a:prstGeom prst="roundRect">
-            <a:avLst/>
-          </a:prstGeom>
-          <a:solidFill>
-            <a:srgbClr val="F2F2F2"/>
-          </a:solidFill>
-          <a:ln w="12700">
-            <a:solidFill>
-              <a:srgbClr val="DDDDDD"/>
-            </a:solidFill>
-          </a:ln>
-          <a:effectLst/>
-        </p:spPr>
-        <p:style>
-          <a:lnRef idx="1">
-            <a:schemeClr val="accent1"/>
-          </a:lnRef>
-          <a:fillRef idx="3">
-            <a:schemeClr val="accent1"/>
-          </a:fillRef>
-          <a:effectRef idx="2">
-            <a:schemeClr val="accent1"/>
-          </a:effectRef>
-          <a:fontRef idx="minor">
-            <a:schemeClr val="lt1"/>
-          </a:fontRef>
-        </p:style>
-        <p:txBody>
-          <a:bodyPr rtlCol="0" anchor="ctr"/>
-          <a:lstStyle/>
-          <a:p>
-            <a:pPr algn="ctr"/>
-          </a:p>
-        </p:txBody>
-      </p:sp>
-      <p:sp>
-        <p:nvSpPr>
-          <p:cNvPr id="13" name="TextBox 12"/>
-          <p:cNvSpPr txBox="1"/>
-          <p:nvPr/>
-        </p:nvSpPr>
-        <p:spPr>
-          <a:xfrm>
-            <a:off x="731520" y="4562856"/>
-            <a:ext cx="10728655" cy="457200"/>
-          </a:xfrm>
-          <a:prstGeom prst="rect">
-            <a:avLst/>
-          </a:prstGeom>
-          <a:noFill/>
-        </p:spPr>
-        <p:txBody>
-          <a:bodyPr wrap="square" anchor="ctr" lIns="45720" rIns="45720" tIns="27432" bIns="27432">
-            <a:spAutoFit/>
-          </a:bodyPr>
-          <a:lstStyle/>
-          <a:p>
-            <a:pPr algn="l"/>
-            <a:r>
-              <a:rPr sz="1700" b="0" i="0">
-                <a:solidFill>
-                  <a:srgbClr val="111111"/>
-                </a:solidFill>
-                <a:latin typeface="Calibri"/>
-              </a:rPr>
-              <a:t>D.  It cannot use external tools</a:t>
-            </a:r>
-          </a:p>
-        </p:txBody>
-      </p:sp>
-      <p:sp>
-        <p:nvSpPr>
-          <p:cNvPr id="14" name="TextBox 13"/>
-          <p:cNvSpPr txBox="1"/>
-          <p:nvPr/>
-        </p:nvSpPr>
-        <p:spPr>
-          <a:xfrm>
-            <a:off x="548640" y="5239512"/>
-            <a:ext cx="11094415" cy="822960"/>
-          </a:xfrm>
-          <a:prstGeom prst="rect">
-            <a:avLst/>
-          </a:prstGeom>
-          <a:noFill/>
-        </p:spPr>
-        <p:txBody>
-          <a:bodyPr wrap="square" anchor="t" lIns="45720" rIns="45720" tIns="27432" bIns="27432">
-            <a:spAutoFit/>
-          </a:bodyPr>
-          <a:lstStyle/>
-          <a:p>
-            <a:pPr algn="l"/>
-            <a:r>
-              <a:rPr sz="1500" b="0" i="1">
-                <a:solidFill>
-                  <a:srgbClr val="666666"/>
-                </a:solidFill>
-                <a:latin typeface="Calibri"/>
-              </a:rPr>
-              <a:t>Why: In an automation every step is fixed in advance; in an agent the model chooses which tool to use next and when to stop.</a:t>
-            </a:r>
-          </a:p>
-        </p:txBody>
-      </p:sp>
-      <p:sp>
-        <p:nvSpPr>
-          <p:cNvPr id="15" name="Rectangle 14"/>
+              <a:t>•  Automation removes copying and chasing; deciding stays with people, always where money, people or law are involved.</a:t>
+            </a:r>
+          </a:p>
+        </p:txBody>
+      </p:sp>
+      <p:sp>
+        <p:nvSpPr>
+          <p:cNvPr id="6" name="Rectangle 5"/>
           <p:cNvSpPr/>
           <p:nvPr/>
         </p:nvSpPr>
@@ -32538,7 +31507,7 @@
       </p:sp>
       <p:sp>
         <p:nvSpPr>
-          <p:cNvPr id="16" name="TextBox 15"/>
+          <p:cNvPr id="7" name="TextBox 6"/>
           <p:cNvSpPr txBox="1"/>
           <p:nvPr/>
         </p:nvSpPr>
@@ -32573,7 +31542,7 @@
       </p:sp>
       <p:sp>
         <p:nvSpPr>
-          <p:cNvPr id="17" name="TextBox 16"/>
+          <p:cNvPr id="8" name="TextBox 7"/>
           <p:cNvSpPr txBox="1"/>
           <p:nvPr/>
         </p:nvSpPr>
@@ -32648,13 +31617,13 @@
           <a:p>
             <a:pPr algn="l"/>
             <a:r>
-              <a:rPr sz="3000" b="1" i="0">
+              <a:rPr sz="2600" b="1" i="0">
                 <a:solidFill>
                   <a:srgbClr val="111111"/>
                 </a:solidFill>
                 <a:latin typeface="Calibri"/>
               </a:rPr>
-              <a:t>Question 2</a:t>
+              <a:t>Further reading</a:t>
             </a:r>
           </a:p>
         </p:txBody>
@@ -32747,16 +31716,40 @@
           </a:p>
         </p:txBody>
       </p:sp>
-      <p:sp>
-        <p:nvSpPr>
-          <p:cNvPr id="5" name="TextBox 4"/>
+      <p:pic>
+        <p:nvPicPr>
+          <p:cNvPr id="5" name="Picture 4" descr="local-book.jpg"/>
+          <p:cNvPicPr>
+            <a:picLocks noChangeAspect="1"/>
+          </p:cNvPicPr>
+          <p:nvPr/>
+        </p:nvPicPr>
+        <p:blipFill>
+          <a:blip r:embed="rId2"/>
+          <a:stretch>
+            <a:fillRect/>
+          </a:stretch>
+        </p:blipFill>
+        <p:spPr>
+          <a:xfrm>
+            <a:off x="2425244" y="1280160"/>
+            <a:ext cx="3196232" cy="4160520"/>
+          </a:xfrm>
+          <a:prstGeom prst="rect">
+            <a:avLst/>
+          </a:prstGeom>
+        </p:spPr>
+      </p:pic>
+      <p:sp>
+        <p:nvSpPr>
+          <p:cNvPr id="6" name="TextBox 5"/>
           <p:cNvSpPr txBox="1"/>
           <p:nvPr/>
         </p:nvSpPr>
         <p:spPr>
           <a:xfrm>
-            <a:off x="548640" y="1325880"/>
-            <a:ext cx="11094415" cy="1097280"/>
+            <a:off x="548640" y="5486400"/>
+            <a:ext cx="6949440" cy="502920"/>
           </a:xfrm>
           <a:prstGeom prst="rect">
             <a:avLst/>
@@ -32771,60 +31764,14 @@
           <a:p>
             <a:pPr algn="l"/>
             <a:r>
-              <a:rPr sz="2200" b="1" i="0">
-                <a:solidFill>
-                  <a:srgbClr val="111111"/>
-                </a:solidFill>
-                <a:latin typeface="Calibri"/>
-              </a:rPr>
-              <a:t>Which of these is NOT one of the four building blocks of an agent?</a:t>
-            </a:r>
-          </a:p>
-        </p:txBody>
-      </p:sp>
-      <p:sp>
-        <p:nvSpPr>
-          <p:cNvPr id="6" name="Rounded Rectangle 5"/>
-          <p:cNvSpPr/>
-          <p:nvPr/>
-        </p:nvSpPr>
-        <p:spPr>
-          <a:xfrm>
-            <a:off x="548640" y="2514600"/>
-            <a:ext cx="11094415" cy="566928"/>
-          </a:xfrm>
-          <a:prstGeom prst="roundRect">
-            <a:avLst/>
-          </a:prstGeom>
-          <a:solidFill>
-            <a:srgbClr val="F2F2F2"/>
-          </a:solidFill>
-          <a:ln w="12700">
-            <a:solidFill>
-              <a:srgbClr val="DDDDDD"/>
-            </a:solidFill>
-          </a:ln>
-          <a:effectLst/>
-        </p:spPr>
-        <p:style>
-          <a:lnRef idx="1">
-            <a:schemeClr val="accent1"/>
-          </a:lnRef>
-          <a:fillRef idx="3">
-            <a:schemeClr val="accent1"/>
-          </a:fillRef>
-          <a:effectRef idx="2">
-            <a:schemeClr val="accent1"/>
-          </a:effectRef>
-          <a:fontRef idx="minor">
-            <a:schemeClr val="lt1"/>
-          </a:fontRef>
-        </p:style>
-        <p:txBody>
-          <a:bodyPr rtlCol="0" anchor="ctr"/>
-          <a:lstStyle/>
-          <a:p>
-            <a:pPr algn="ctr"/>
+              <a:rPr sz="1300" b="0" i="1">
+                <a:solidFill>
+                  <a:srgbClr val="666666"/>
+                </a:solidFill>
+                <a:latin typeface="Calibri"/>
+              </a:rPr>
+              <a:t>Hands-On Large Language Models (Alammar and Grootendorst, O'Reilly 2024), whose visual style the figures in this deck follow.</a:t>
+            </a:r>
           </a:p>
         </p:txBody>
       </p:sp>
@@ -32836,8 +31783,8 @@
         </p:nvSpPr>
         <p:spPr>
           <a:xfrm>
-            <a:off x="731520" y="2587752"/>
-            <a:ext cx="10728655" cy="457200"/>
+            <a:off x="7863840" y="1417320"/>
+            <a:ext cx="3779215" cy="4160520"/>
           </a:xfrm>
           <a:prstGeom prst="rect">
             <a:avLst/>
@@ -32845,80 +31792,86 @@
           <a:noFill/>
         </p:spPr>
         <p:txBody>
-          <a:bodyPr wrap="square" anchor="ctr" lIns="45720" rIns="45720" tIns="27432" bIns="27432">
+          <a:bodyPr wrap="square" lIns="45720" rIns="45720">
             <a:spAutoFit/>
           </a:bodyPr>
           <a:lstStyle/>
           <a:p>
-            <a:pPr algn="l"/>
-            <a:r>
-              <a:rPr sz="1700" b="0" i="0">
+            <a:pPr>
+              <a:spcAft>
+                <a:spcPts val="1000"/>
+              </a:spcAft>
+            </a:pPr>
+            <a:r>
+              <a:rPr sz="1800">
                 <a:solidFill>
                   <a:srgbClr val="111111"/>
                 </a:solidFill>
                 <a:latin typeface="Calibri"/>
               </a:rPr>
-              <a:t>A.  Model</a:t>
-            </a:r>
-          </a:p>
-        </p:txBody>
-      </p:sp>
-      <p:sp>
-        <p:nvSpPr>
-          <p:cNvPr id="8" name="Rounded Rectangle 7"/>
-          <p:cNvSpPr/>
-          <p:nvPr/>
-        </p:nvSpPr>
-        <p:spPr>
-          <a:xfrm>
-            <a:off x="548640" y="3172968"/>
-            <a:ext cx="11094415" cy="566928"/>
-          </a:xfrm>
-          <a:prstGeom prst="roundRect">
-            <a:avLst/>
-          </a:prstGeom>
-          <a:solidFill>
-            <a:srgbClr val="F2F2F2"/>
-          </a:solidFill>
-          <a:ln w="12700">
-            <a:solidFill>
-              <a:srgbClr val="DDDDDD"/>
-            </a:solidFill>
-          </a:ln>
-          <a:effectLst/>
-        </p:spPr>
-        <p:style>
-          <a:lnRef idx="1">
-            <a:schemeClr val="accent1"/>
-          </a:lnRef>
-          <a:fillRef idx="3">
-            <a:schemeClr val="accent1"/>
-          </a:fillRef>
-          <a:effectRef idx="2">
-            <a:schemeClr val="accent1"/>
-          </a:effectRef>
-          <a:fontRef idx="minor">
-            <a:schemeClr val="lt1"/>
-          </a:fontRef>
-        </p:style>
-        <p:txBody>
-          <a:bodyPr rtlCol="0" anchor="ctr"/>
-          <a:lstStyle/>
-          <a:p>
-            <a:pPr algn="ctr"/>
-          </a:p>
-        </p:txBody>
-      </p:sp>
-      <p:sp>
-        <p:nvSpPr>
-          <p:cNvPr id="9" name="TextBox 8"/>
+              <a:t>•  Module 1 online, with the lab and quiz: albanna-tutorials.com/ai-administrator</a:t>
+            </a:r>
+          </a:p>
+          <a:p>
+            <a:pPr>
+              <a:spcAft>
+                <a:spcPts val="1000"/>
+              </a:spcAft>
+            </a:pPr>
+            <a:r>
+              <a:rPr sz="1800">
+                <a:solidFill>
+                  <a:srgbClr val="111111"/>
+                </a:solidFill>
+                <a:latin typeface="Calibri"/>
+              </a:rPr>
+              <a:t>•  LLM Agents explained visually: albanna-tutorials.com/llm_agents.html</a:t>
+            </a:r>
+          </a:p>
+          <a:p>
+            <a:pPr>
+              <a:spcAft>
+                <a:spcPts val="1000"/>
+              </a:spcAft>
+            </a:pPr>
+            <a:r>
+              <a:rPr sz="1800">
+                <a:solidFill>
+                  <a:srgbClr val="111111"/>
+                </a:solidFill>
+                <a:latin typeface="Calibri"/>
+              </a:rPr>
+              <a:t>•  A Visual Guide to LLM Agents (M. Grootendorst)</a:t>
+            </a:r>
+          </a:p>
+          <a:p>
+            <a:pPr>
+              <a:spcAft>
+                <a:spcPts val="1000"/>
+              </a:spcAft>
+            </a:pPr>
+            <a:r>
+              <a:rPr sz="1800">
+                <a:solidFill>
+                  <a:srgbClr val="111111"/>
+                </a:solidFill>
+                <a:latin typeface="Calibri"/>
+              </a:rPr>
+              <a:t>•  Next session: Prompting for Operators</a:t>
+            </a:r>
+          </a:p>
+        </p:txBody>
+      </p:sp>
+      <p:sp>
+        <p:nvSpPr>
+          <p:cNvPr id="8" name="TextBox 7"/>
           <p:cNvSpPr txBox="1"/>
           <p:nvPr/>
         </p:nvSpPr>
         <p:spPr>
           <a:xfrm>
-            <a:off x="731520" y="3246120"/>
-            <a:ext cx="10728655" cy="457200"/>
+            <a:off x="7071055" y="6016752"/>
+            <a:ext cx="4572000" cy="274320"/>
           </a:xfrm>
           <a:prstGeom prst="rect">
             <a:avLst/>
@@ -32926,189 +31879,27 @@
           <a:noFill/>
         </p:spPr>
         <p:txBody>
-          <a:bodyPr wrap="square" anchor="ctr" lIns="45720" rIns="45720" tIns="27432" bIns="27432">
+          <a:bodyPr wrap="square" anchor="t" lIns="45720" rIns="45720" tIns="27432" bIns="27432">
             <a:spAutoFit/>
           </a:bodyPr>
           <a:lstStyle/>
           <a:p>
-            <a:pPr algn="l"/>
-            <a:r>
-              <a:rPr sz="1700" b="0" i="0">
-                <a:solidFill>
-                  <a:srgbClr val="111111"/>
-                </a:solidFill>
-                <a:latin typeface="Calibri"/>
-              </a:rPr>
-              <a:t>B.  Tools</a:t>
-            </a:r>
-          </a:p>
-        </p:txBody>
-      </p:sp>
-      <p:sp>
-        <p:nvSpPr>
-          <p:cNvPr id="10" name="Rounded Rectangle 9"/>
-          <p:cNvSpPr/>
-          <p:nvPr/>
-        </p:nvSpPr>
-        <p:spPr>
-          <a:xfrm>
-            <a:off x="548640" y="3831336"/>
-            <a:ext cx="11094415" cy="566928"/>
-          </a:xfrm>
-          <a:prstGeom prst="roundRect">
-            <a:avLst/>
-          </a:prstGeom>
-          <a:solidFill>
-            <a:srgbClr val="F2F2F2"/>
-          </a:solidFill>
-          <a:ln w="12700">
-            <a:solidFill>
-              <a:srgbClr val="DDDDDD"/>
-            </a:solidFill>
-          </a:ln>
-          <a:effectLst/>
-        </p:spPr>
-        <p:style>
-          <a:lnRef idx="1">
-            <a:schemeClr val="accent1"/>
-          </a:lnRef>
-          <a:fillRef idx="3">
-            <a:schemeClr val="accent1"/>
-          </a:fillRef>
-          <a:effectRef idx="2">
-            <a:schemeClr val="accent1"/>
-          </a:effectRef>
-          <a:fontRef idx="minor">
-            <a:schemeClr val="lt1"/>
-          </a:fontRef>
-        </p:style>
-        <p:txBody>
-          <a:bodyPr rtlCol="0" anchor="ctr"/>
-          <a:lstStyle/>
-          <a:p>
-            <a:pPr algn="ctr"/>
-          </a:p>
-        </p:txBody>
-      </p:sp>
-      <p:sp>
-        <p:nvSpPr>
-          <p:cNvPr id="11" name="TextBox 10"/>
-          <p:cNvSpPr txBox="1"/>
-          <p:nvPr/>
-        </p:nvSpPr>
-        <p:spPr>
-          <a:xfrm>
-            <a:off x="731520" y="3904488"/>
-            <a:ext cx="10728655" cy="457200"/>
-          </a:xfrm>
-          <a:prstGeom prst="rect">
-            <a:avLst/>
-          </a:prstGeom>
-          <a:noFill/>
-        </p:spPr>
-        <p:txBody>
-          <a:bodyPr wrap="square" anchor="ctr" lIns="45720" rIns="45720" tIns="27432" bIns="27432">
-            <a:spAutoFit/>
-          </a:bodyPr>
-          <a:lstStyle/>
-          <a:p>
-            <a:pPr algn="l"/>
-            <a:r>
-              <a:rPr sz="1700" b="0" i="0">
-                <a:solidFill>
-                  <a:srgbClr val="111111"/>
-                </a:solidFill>
-                <a:latin typeface="Calibri"/>
-              </a:rPr>
-              <a:t>C.  Memory</a:t>
-            </a:r>
-          </a:p>
-        </p:txBody>
-      </p:sp>
-      <p:sp>
-        <p:nvSpPr>
-          <p:cNvPr id="12" name="Rounded Rectangle 11"/>
-          <p:cNvSpPr/>
-          <p:nvPr/>
-        </p:nvSpPr>
-        <p:spPr>
-          <a:xfrm>
-            <a:off x="548640" y="4489704"/>
-            <a:ext cx="11094415" cy="566928"/>
-          </a:xfrm>
-          <a:prstGeom prst="roundRect">
-            <a:avLst/>
-          </a:prstGeom>
-          <a:solidFill>
-            <a:srgbClr val="F2F2F2"/>
-          </a:solidFill>
-          <a:ln w="12700">
-            <a:solidFill>
-              <a:srgbClr val="DDDDDD"/>
-            </a:solidFill>
-          </a:ln>
-          <a:effectLst/>
-        </p:spPr>
-        <p:style>
-          <a:lnRef idx="1">
-            <a:schemeClr val="accent1"/>
-          </a:lnRef>
-          <a:fillRef idx="3">
-            <a:schemeClr val="accent1"/>
-          </a:fillRef>
-          <a:effectRef idx="2">
-            <a:schemeClr val="accent1"/>
-          </a:effectRef>
-          <a:fontRef idx="minor">
-            <a:schemeClr val="lt1"/>
-          </a:fontRef>
-        </p:style>
-        <p:txBody>
-          <a:bodyPr rtlCol="0" anchor="ctr"/>
-          <a:lstStyle/>
-          <a:p>
-            <a:pPr algn="ctr"/>
-          </a:p>
-        </p:txBody>
-      </p:sp>
-      <p:sp>
-        <p:nvSpPr>
-          <p:cNvPr id="13" name="TextBox 12"/>
-          <p:cNvSpPr txBox="1"/>
-          <p:nvPr/>
-        </p:nvSpPr>
-        <p:spPr>
-          <a:xfrm>
-            <a:off x="731520" y="4562856"/>
-            <a:ext cx="10728655" cy="457200"/>
-          </a:xfrm>
-          <a:prstGeom prst="rect">
-            <a:avLst/>
-          </a:prstGeom>
-          <a:noFill/>
-        </p:spPr>
-        <p:txBody>
-          <a:bodyPr wrap="square" anchor="ctr" lIns="45720" rIns="45720" tIns="27432" bIns="27432">
-            <a:spAutoFit/>
-          </a:bodyPr>
-          <a:lstStyle/>
-          <a:p>
-            <a:pPr algn="l"/>
-            <a:r>
-              <a:rPr sz="1700" b="0" i="0">
-                <a:solidFill>
-                  <a:srgbClr val="111111"/>
-                </a:solidFill>
-                <a:latin typeface="Calibri"/>
-              </a:rPr>
-              <a:t>D.  Dashboard</a:t>
-            </a:r>
-          </a:p>
-        </p:txBody>
-      </p:sp>
-      <p:sp>
-        <p:nvSpPr>
-          <p:cNvPr id="14" name="Rectangle 13"/>
+            <a:pPr algn="r"/>
+            <a:r>
+              <a:rPr sz="900" b="0" i="1">
+                <a:solidFill>
+                  <a:srgbClr val="666666"/>
+                </a:solidFill>
+                <a:latin typeface="Calibri"/>
+              </a:rPr>
+              <a:t>Figure: Alammar, J. and Grootendorst, M. (2024). Hands-On Large Language Models. O'Reilly Media</a:t>
+            </a:r>
+          </a:p>
+        </p:txBody>
+      </p:sp>
+      <p:sp>
+        <p:nvSpPr>
+          <p:cNvPr id="9" name="Rectangle 8"/>
           <p:cNvSpPr/>
           <p:nvPr/>
         </p:nvSpPr>
@@ -33152,7 +31943,7 @@
       </p:sp>
       <p:sp>
         <p:nvSpPr>
-          <p:cNvPr id="15" name="TextBox 14"/>
+          <p:cNvPr id="10" name="TextBox 9"/>
           <p:cNvSpPr txBox="1"/>
           <p:nvPr/>
         </p:nvSpPr>
@@ -33187,7 +31978,7 @@
       </p:sp>
       <p:sp>
         <p:nvSpPr>
-          <p:cNvPr id="16" name="TextBox 15"/>
+          <p:cNvPr id="11" name="TextBox 10"/>
           <p:cNvSpPr txBox="1"/>
           <p:nvPr/>
         </p:nvSpPr>
@@ -33268,7 +32059,7 @@
                 </a:solidFill>
                 <a:latin typeface="Calibri"/>
               </a:rPr>
-              <a:t>Question 2 · answer</a:t>
+              <a:t>Latest reading on agents at work (2026)</a:t>
             </a:r>
           </a:p>
         </p:txBody>
@@ -33370,7 +32161,7 @@
         <p:spPr>
           <a:xfrm>
             <a:off x="548640" y="1325880"/>
-            <a:ext cx="11094415" cy="1097280"/>
+            <a:ext cx="11094415" cy="411480"/>
           </a:xfrm>
           <a:prstGeom prst="rect">
             <a:avLst/>
@@ -33385,60 +32176,49 @@
           <a:p>
             <a:pPr algn="l"/>
             <a:r>
-              <a:rPr sz="2200" b="1" i="0">
+              <a:rPr sz="1600" b="1" i="0">
                 <a:solidFill>
                   <a:srgbClr val="111111"/>
                 </a:solidFill>
                 <a:latin typeface="Calibri"/>
               </a:rPr>
-              <a:t>Which of these is NOT one of the four building blocks of an agent?</a:t>
-            </a:r>
-          </a:p>
-        </p:txBody>
-      </p:sp>
-      <p:sp>
-        <p:nvSpPr>
-          <p:cNvPr id="6" name="Rounded Rectangle 5"/>
-          <p:cNvSpPr/>
-          <p:nvPr/>
-        </p:nvSpPr>
-        <p:spPr>
-          <a:xfrm>
-            <a:off x="548640" y="2514600"/>
-            <a:ext cx="11094415" cy="566928"/>
-          </a:xfrm>
-          <a:prstGeom prst="roundRect">
-            <a:avLst/>
-          </a:prstGeom>
-          <a:solidFill>
-            <a:srgbClr val="F2F2F2"/>
-          </a:solidFill>
-          <a:ln w="12700">
-            <a:solidFill>
-              <a:srgbClr val="DDDDDD"/>
-            </a:solidFill>
-          </a:ln>
-          <a:effectLst/>
-        </p:spPr>
-        <p:style>
-          <a:lnRef idx="1">
-            <a:schemeClr val="accent1"/>
-          </a:lnRef>
-          <a:fillRef idx="3">
-            <a:schemeClr val="accent1"/>
-          </a:fillRef>
-          <a:effectRef idx="2">
-            <a:schemeClr val="accent1"/>
-          </a:effectRef>
-          <a:fontRef idx="minor">
-            <a:schemeClr val="lt1"/>
-          </a:fontRef>
-        </p:style>
-        <p:txBody>
-          <a:bodyPr rtlCol="0" anchor="ctr"/>
-          <a:lstStyle/>
-          <a:p>
-            <a:pPr algn="ctr"/>
+              <a:t>How AI agents will reshape digital workplace IT operations</a:t>
+            </a:r>
+          </a:p>
+        </p:txBody>
+      </p:sp>
+      <p:sp>
+        <p:nvSpPr>
+          <p:cNvPr id="6" name="TextBox 5"/>
+          <p:cNvSpPr txBox="1"/>
+          <p:nvPr/>
+        </p:nvSpPr>
+        <p:spPr>
+          <a:xfrm>
+            <a:off x="548640" y="1691640"/>
+            <a:ext cx="11094415" cy="320040"/>
+          </a:xfrm>
+          <a:prstGeom prst="rect">
+            <a:avLst/>
+          </a:prstGeom>
+          <a:noFill/>
+        </p:spPr>
+        <p:txBody>
+          <a:bodyPr wrap="square" anchor="t" lIns="45720" rIns="45720" tIns="27432" bIns="27432">
+            <a:spAutoFit/>
+          </a:bodyPr>
+          <a:lstStyle/>
+          <a:p>
+            <a:pPr algn="l"/>
+            <a:r>
+              <a:rPr sz="1100" b="0" i="0">
+                <a:solidFill>
+                  <a:srgbClr val="666666"/>
+                </a:solidFill>
+                <a:latin typeface="Calibri"/>
+              </a:rPr>
+              <a:t>CIO Dive, by Autumn Stanish (Gartner) · 19 March 2026 · ciodive.com/news/agentic-AI-IT-operations-gartner-digital-workplace/814244</a:t>
+            </a:r>
           </a:p>
         </p:txBody>
       </p:sp>
@@ -33450,286 +32230,8 @@
         </p:nvSpPr>
         <p:spPr>
           <a:xfrm>
-            <a:off x="731520" y="2587752"/>
-            <a:ext cx="10728655" cy="457200"/>
-          </a:xfrm>
-          <a:prstGeom prst="rect">
-            <a:avLst/>
-          </a:prstGeom>
-          <a:noFill/>
-        </p:spPr>
-        <p:txBody>
-          <a:bodyPr wrap="square" anchor="ctr" lIns="45720" rIns="45720" tIns="27432" bIns="27432">
-            <a:spAutoFit/>
-          </a:bodyPr>
-          <a:lstStyle/>
-          <a:p>
-            <a:pPr algn="l"/>
-            <a:r>
-              <a:rPr sz="1700" b="0" i="0">
-                <a:solidFill>
-                  <a:srgbClr val="111111"/>
-                </a:solidFill>
-                <a:latin typeface="Calibri"/>
-              </a:rPr>
-              <a:t>A.  Model</a:t>
-            </a:r>
-          </a:p>
-        </p:txBody>
-      </p:sp>
-      <p:sp>
-        <p:nvSpPr>
-          <p:cNvPr id="8" name="Rounded Rectangle 7"/>
-          <p:cNvSpPr/>
-          <p:nvPr/>
-        </p:nvSpPr>
-        <p:spPr>
-          <a:xfrm>
-            <a:off x="548640" y="3172968"/>
-            <a:ext cx="11094415" cy="566928"/>
-          </a:xfrm>
-          <a:prstGeom prst="roundRect">
-            <a:avLst/>
-          </a:prstGeom>
-          <a:solidFill>
-            <a:srgbClr val="F2F2F2"/>
-          </a:solidFill>
-          <a:ln w="12700">
-            <a:solidFill>
-              <a:srgbClr val="DDDDDD"/>
-            </a:solidFill>
-          </a:ln>
-          <a:effectLst/>
-        </p:spPr>
-        <p:style>
-          <a:lnRef idx="1">
-            <a:schemeClr val="accent1"/>
-          </a:lnRef>
-          <a:fillRef idx="3">
-            <a:schemeClr val="accent1"/>
-          </a:fillRef>
-          <a:effectRef idx="2">
-            <a:schemeClr val="accent1"/>
-          </a:effectRef>
-          <a:fontRef idx="minor">
-            <a:schemeClr val="lt1"/>
-          </a:fontRef>
-        </p:style>
-        <p:txBody>
-          <a:bodyPr rtlCol="0" anchor="ctr"/>
-          <a:lstStyle/>
-          <a:p>
-            <a:pPr algn="ctr"/>
-          </a:p>
-        </p:txBody>
-      </p:sp>
-      <p:sp>
-        <p:nvSpPr>
-          <p:cNvPr id="9" name="TextBox 8"/>
-          <p:cNvSpPr txBox="1"/>
-          <p:nvPr/>
-        </p:nvSpPr>
-        <p:spPr>
-          <a:xfrm>
-            <a:off x="731520" y="3246120"/>
-            <a:ext cx="10728655" cy="457200"/>
-          </a:xfrm>
-          <a:prstGeom prst="rect">
-            <a:avLst/>
-          </a:prstGeom>
-          <a:noFill/>
-        </p:spPr>
-        <p:txBody>
-          <a:bodyPr wrap="square" anchor="ctr" lIns="45720" rIns="45720" tIns="27432" bIns="27432">
-            <a:spAutoFit/>
-          </a:bodyPr>
-          <a:lstStyle/>
-          <a:p>
-            <a:pPr algn="l"/>
-            <a:r>
-              <a:rPr sz="1700" b="0" i="0">
-                <a:solidFill>
-                  <a:srgbClr val="111111"/>
-                </a:solidFill>
-                <a:latin typeface="Calibri"/>
-              </a:rPr>
-              <a:t>B.  Tools</a:t>
-            </a:r>
-          </a:p>
-        </p:txBody>
-      </p:sp>
-      <p:sp>
-        <p:nvSpPr>
-          <p:cNvPr id="10" name="Rounded Rectangle 9"/>
-          <p:cNvSpPr/>
-          <p:nvPr/>
-        </p:nvSpPr>
-        <p:spPr>
-          <a:xfrm>
-            <a:off x="548640" y="3831336"/>
-            <a:ext cx="11094415" cy="566928"/>
-          </a:xfrm>
-          <a:prstGeom prst="roundRect">
-            <a:avLst/>
-          </a:prstGeom>
-          <a:solidFill>
-            <a:srgbClr val="F2F2F2"/>
-          </a:solidFill>
-          <a:ln w="12700">
-            <a:solidFill>
-              <a:srgbClr val="DDDDDD"/>
-            </a:solidFill>
-          </a:ln>
-          <a:effectLst/>
-        </p:spPr>
-        <p:style>
-          <a:lnRef idx="1">
-            <a:schemeClr val="accent1"/>
-          </a:lnRef>
-          <a:fillRef idx="3">
-            <a:schemeClr val="accent1"/>
-          </a:fillRef>
-          <a:effectRef idx="2">
-            <a:schemeClr val="accent1"/>
-          </a:effectRef>
-          <a:fontRef idx="minor">
-            <a:schemeClr val="lt1"/>
-          </a:fontRef>
-        </p:style>
-        <p:txBody>
-          <a:bodyPr rtlCol="0" anchor="ctr"/>
-          <a:lstStyle/>
-          <a:p>
-            <a:pPr algn="ctr"/>
-          </a:p>
-        </p:txBody>
-      </p:sp>
-      <p:sp>
-        <p:nvSpPr>
-          <p:cNvPr id="11" name="TextBox 10"/>
-          <p:cNvSpPr txBox="1"/>
-          <p:nvPr/>
-        </p:nvSpPr>
-        <p:spPr>
-          <a:xfrm>
-            <a:off x="731520" y="3904488"/>
-            <a:ext cx="10728655" cy="457200"/>
-          </a:xfrm>
-          <a:prstGeom prst="rect">
-            <a:avLst/>
-          </a:prstGeom>
-          <a:noFill/>
-        </p:spPr>
-        <p:txBody>
-          <a:bodyPr wrap="square" anchor="ctr" lIns="45720" rIns="45720" tIns="27432" bIns="27432">
-            <a:spAutoFit/>
-          </a:bodyPr>
-          <a:lstStyle/>
-          <a:p>
-            <a:pPr algn="l"/>
-            <a:r>
-              <a:rPr sz="1700" b="0" i="0">
-                <a:solidFill>
-                  <a:srgbClr val="111111"/>
-                </a:solidFill>
-                <a:latin typeface="Calibri"/>
-              </a:rPr>
-              <a:t>C.  Memory</a:t>
-            </a:r>
-          </a:p>
-        </p:txBody>
-      </p:sp>
-      <p:sp>
-        <p:nvSpPr>
-          <p:cNvPr id="12" name="Rounded Rectangle 11"/>
-          <p:cNvSpPr/>
-          <p:nvPr/>
-        </p:nvSpPr>
-        <p:spPr>
-          <a:xfrm>
-            <a:off x="548640" y="4489704"/>
-            <a:ext cx="11094415" cy="566928"/>
-          </a:xfrm>
-          <a:prstGeom prst="roundRect">
-            <a:avLst/>
-          </a:prstGeom>
-          <a:solidFill>
-            <a:srgbClr val="FFFFFF"/>
-          </a:solidFill>
-          <a:ln w="31750">
-            <a:solidFill>
-              <a:srgbClr val="F7A11A"/>
-            </a:solidFill>
-          </a:ln>
-          <a:effectLst/>
-        </p:spPr>
-        <p:style>
-          <a:lnRef idx="1">
-            <a:schemeClr val="accent1"/>
-          </a:lnRef>
-          <a:fillRef idx="3">
-            <a:schemeClr val="accent1"/>
-          </a:fillRef>
-          <a:effectRef idx="2">
-            <a:schemeClr val="accent1"/>
-          </a:effectRef>
-          <a:fontRef idx="minor">
-            <a:schemeClr val="lt1"/>
-          </a:fontRef>
-        </p:style>
-        <p:txBody>
-          <a:bodyPr rtlCol="0" anchor="ctr"/>
-          <a:lstStyle/>
-          <a:p>
-            <a:pPr algn="ctr"/>
-          </a:p>
-        </p:txBody>
-      </p:sp>
-      <p:sp>
-        <p:nvSpPr>
-          <p:cNvPr id="13" name="TextBox 12"/>
-          <p:cNvSpPr txBox="1"/>
-          <p:nvPr/>
-        </p:nvSpPr>
-        <p:spPr>
-          <a:xfrm>
-            <a:off x="731520" y="4562856"/>
-            <a:ext cx="10728655" cy="457200"/>
-          </a:xfrm>
-          <a:prstGeom prst="rect">
-            <a:avLst/>
-          </a:prstGeom>
-          <a:noFill/>
-        </p:spPr>
-        <p:txBody>
-          <a:bodyPr wrap="square" anchor="ctr" lIns="45720" rIns="45720" tIns="27432" bIns="27432">
-            <a:spAutoFit/>
-          </a:bodyPr>
-          <a:lstStyle/>
-          <a:p>
-            <a:pPr algn="l"/>
-            <a:r>
-              <a:rPr sz="1700" b="1" i="0">
-                <a:solidFill>
-                  <a:srgbClr val="111111"/>
-                </a:solidFill>
-                <a:latin typeface="Calibri"/>
-              </a:rPr>
-              <a:t>D.  Dashboard</a:t>
-            </a:r>
-          </a:p>
-        </p:txBody>
-      </p:sp>
-      <p:sp>
-        <p:nvSpPr>
-          <p:cNvPr id="14" name="TextBox 13"/>
-          <p:cNvSpPr txBox="1"/>
-          <p:nvPr/>
-        </p:nvSpPr>
-        <p:spPr>
-          <a:xfrm>
-            <a:off x="548640" y="5239512"/>
-            <a:ext cx="11094415" cy="822960"/>
+            <a:off x="548640" y="1965960"/>
+            <a:ext cx="11094415" cy="502920"/>
           </a:xfrm>
           <a:prstGeom prst="rect">
             <a:avLst/>
@@ -33744,26 +32246,26 @@
           <a:p>
             <a:pPr algn="l"/>
             <a:r>
-              <a:rPr sz="1500" b="0" i="1">
-                <a:solidFill>
-                  <a:srgbClr val="666666"/>
-                </a:solidFill>
-                <a:latin typeface="Calibri"/>
-              </a:rPr>
-              <a:t>Why: The four parts are model, tools, memory and instructions. A dashboard is a way to monitor, not a part of the agent.</a:t>
-            </a:r>
-          </a:p>
-        </p:txBody>
-      </p:sp>
-      <p:sp>
-        <p:nvSpPr>
-          <p:cNvPr id="15" name="Rectangle 14"/>
+              <a:rPr sz="1300" b="0" i="0">
+                <a:solidFill>
+                  <a:srgbClr val="111111"/>
+                </a:solidFill>
+                <a:latin typeface="Calibri"/>
+              </a:rPr>
+              <a:t>Gartner expects nearly a third of organisations to run 80% of digital-workplace services autonomously by 2030, from zero in 2025; 84% of IT leaders say extra controls will be needed to govern agents. Controls are the job, not the afterthought.</a:t>
+            </a:r>
+          </a:p>
+        </p:txBody>
+      </p:sp>
+      <p:sp>
+        <p:nvSpPr>
+          <p:cNvPr id="8" name="Rectangle 7"/>
           <p:cNvSpPr/>
           <p:nvPr/>
         </p:nvSpPr>
         <p:spPr>
           <a:xfrm>
-            <a:off x="548640" y="6309360"/>
+            <a:off x="548640" y="2468880"/>
             <a:ext cx="11094415" cy="19050"/>
           </a:xfrm>
           <a:prstGeom prst="rect">
@@ -33801,7 +32303,454 @@
       </p:sp>
       <p:sp>
         <p:nvSpPr>
-          <p:cNvPr id="16" name="TextBox 15"/>
+          <p:cNvPr id="9" name="TextBox 8"/>
+          <p:cNvSpPr txBox="1"/>
+          <p:nvPr/>
+        </p:nvSpPr>
+        <p:spPr>
+          <a:xfrm>
+            <a:off x="548640" y="2514600"/>
+            <a:ext cx="11094415" cy="411480"/>
+          </a:xfrm>
+          <a:prstGeom prst="rect">
+            <a:avLst/>
+          </a:prstGeom>
+          <a:noFill/>
+        </p:spPr>
+        <p:txBody>
+          <a:bodyPr wrap="square" anchor="t" lIns="45720" rIns="45720" tIns="27432" bIns="27432">
+            <a:spAutoFit/>
+          </a:bodyPr>
+          <a:lstStyle/>
+          <a:p>
+            <a:pPr algn="l"/>
+            <a:r>
+              <a:rPr sz="1600" b="1" i="0">
+                <a:solidFill>
+                  <a:srgbClr val="111111"/>
+                </a:solidFill>
+                <a:latin typeface="Calibri"/>
+              </a:rPr>
+              <a:t>State of AI trust in 2026: shifting to the agentic era</a:t>
+            </a:r>
+          </a:p>
+        </p:txBody>
+      </p:sp>
+      <p:sp>
+        <p:nvSpPr>
+          <p:cNvPr id="10" name="TextBox 9"/>
+          <p:cNvSpPr txBox="1"/>
+          <p:nvPr/>
+        </p:nvSpPr>
+        <p:spPr>
+          <a:xfrm>
+            <a:off x="548640" y="2880360"/>
+            <a:ext cx="11094415" cy="320040"/>
+          </a:xfrm>
+          <a:prstGeom prst="rect">
+            <a:avLst/>
+          </a:prstGeom>
+          <a:noFill/>
+        </p:spPr>
+        <p:txBody>
+          <a:bodyPr wrap="square" anchor="t" lIns="45720" rIns="45720" tIns="27432" bIns="27432">
+            <a:spAutoFit/>
+          </a:bodyPr>
+          <a:lstStyle/>
+          <a:p>
+            <a:pPr algn="l"/>
+            <a:r>
+              <a:rPr sz="1100" b="0" i="0">
+                <a:solidFill>
+                  <a:srgbClr val="666666"/>
+                </a:solidFill>
+                <a:latin typeface="Calibri"/>
+              </a:rPr>
+              <a:t>McKinsey · 25 March 2026 · mckinsey.com/capabilities/tech-and-ai/our-insights/tech-forward/state-of-ai-trust-in-2026-shifting-to-the-agentic-era</a:t>
+            </a:r>
+          </a:p>
+        </p:txBody>
+      </p:sp>
+      <p:sp>
+        <p:nvSpPr>
+          <p:cNvPr id="11" name="TextBox 10"/>
+          <p:cNvSpPr txBox="1"/>
+          <p:nvPr/>
+        </p:nvSpPr>
+        <p:spPr>
+          <a:xfrm>
+            <a:off x="548640" y="3154680"/>
+            <a:ext cx="11094415" cy="502920"/>
+          </a:xfrm>
+          <a:prstGeom prst="rect">
+            <a:avLst/>
+          </a:prstGeom>
+          <a:noFill/>
+        </p:spPr>
+        <p:txBody>
+          <a:bodyPr wrap="square" anchor="t" lIns="45720" rIns="45720" tIns="27432" bIns="27432">
+            <a:spAutoFit/>
+          </a:bodyPr>
+          <a:lstStyle/>
+          <a:p>
+            <a:pPr algn="l"/>
+            <a:r>
+              <a:rPr sz="1300" b="0" i="0">
+                <a:solidFill>
+                  <a:srgbClr val="111111"/>
+                </a:solidFill>
+                <a:latin typeface="Calibri"/>
+              </a:rPr>
+              <a:t>Adoption is moving from pilots to scaled, increasingly agentic deployments, but only about 30% of organisations reach a mature level of strategy, governance and agent controls. The gap this course fills.</a:t>
+            </a:r>
+          </a:p>
+        </p:txBody>
+      </p:sp>
+      <p:sp>
+        <p:nvSpPr>
+          <p:cNvPr id="12" name="Rectangle 11"/>
+          <p:cNvSpPr/>
+          <p:nvPr/>
+        </p:nvSpPr>
+        <p:spPr>
+          <a:xfrm>
+            <a:off x="548640" y="3657600"/>
+            <a:ext cx="11094415" cy="19050"/>
+          </a:xfrm>
+          <a:prstGeom prst="rect">
+            <a:avLst/>
+          </a:prstGeom>
+          <a:solidFill>
+            <a:srgbClr val="DDDDDD"/>
+          </a:solidFill>
+          <a:ln>
+            <a:noFill/>
+          </a:ln>
+          <a:effectLst/>
+        </p:spPr>
+        <p:style>
+          <a:lnRef idx="1">
+            <a:schemeClr val="accent1"/>
+          </a:lnRef>
+          <a:fillRef idx="3">
+            <a:schemeClr val="accent1"/>
+          </a:fillRef>
+          <a:effectRef idx="2">
+            <a:schemeClr val="accent1"/>
+          </a:effectRef>
+          <a:fontRef idx="minor">
+            <a:schemeClr val="lt1"/>
+          </a:fontRef>
+        </p:style>
+        <p:txBody>
+          <a:bodyPr rtlCol="0" anchor="ctr"/>
+          <a:lstStyle/>
+          <a:p>
+            <a:pPr algn="ctr"/>
+          </a:p>
+        </p:txBody>
+      </p:sp>
+      <p:sp>
+        <p:nvSpPr>
+          <p:cNvPr id="13" name="TextBox 12"/>
+          <p:cNvSpPr txBox="1"/>
+          <p:nvPr/>
+        </p:nvSpPr>
+        <p:spPr>
+          <a:xfrm>
+            <a:off x="548640" y="3703320"/>
+            <a:ext cx="11094415" cy="411480"/>
+          </a:xfrm>
+          <a:prstGeom prst="rect">
+            <a:avLst/>
+          </a:prstGeom>
+          <a:noFill/>
+        </p:spPr>
+        <p:txBody>
+          <a:bodyPr wrap="square" anchor="t" lIns="45720" rIns="45720" tIns="27432" bIns="27432">
+            <a:spAutoFit/>
+          </a:bodyPr>
+          <a:lstStyle/>
+          <a:p>
+            <a:pPr algn="l"/>
+            <a:r>
+              <a:rPr sz="1600" b="1" i="0">
+                <a:solidFill>
+                  <a:srgbClr val="111111"/>
+                </a:solidFill>
+                <a:latin typeface="Calibri"/>
+              </a:rPr>
+              <a:t>Future of Work with AI Agents: auditing automation and augmentation potential across the U.S. workforce</a:t>
+            </a:r>
+          </a:p>
+        </p:txBody>
+      </p:sp>
+      <p:sp>
+        <p:nvSpPr>
+          <p:cNvPr id="14" name="TextBox 13"/>
+          <p:cNvSpPr txBox="1"/>
+          <p:nvPr/>
+        </p:nvSpPr>
+        <p:spPr>
+          <a:xfrm>
+            <a:off x="548640" y="4069080"/>
+            <a:ext cx="11094415" cy="320040"/>
+          </a:xfrm>
+          <a:prstGeom prst="rect">
+            <a:avLst/>
+          </a:prstGeom>
+          <a:noFill/>
+        </p:spPr>
+        <p:txBody>
+          <a:bodyPr wrap="square" anchor="t" lIns="45720" rIns="45720" tIns="27432" bIns="27432">
+            <a:spAutoFit/>
+          </a:bodyPr>
+          <a:lstStyle/>
+          <a:p>
+            <a:pPr algn="l"/>
+            <a:r>
+              <a:rPr sz="1100" b="0" i="0">
+                <a:solidFill>
+                  <a:srgbClr val="666666"/>
+                </a:solidFill>
+                <a:latin typeface="Calibri"/>
+              </a:rPr>
+              <a:t>Stanford (Shao, Brynjolfsson, Yang et al.), arXiv 2506.06576 · revised 1 February 2026 · arxiv.org/abs/2506.06576</a:t>
+            </a:r>
+          </a:p>
+        </p:txBody>
+      </p:sp>
+      <p:sp>
+        <p:nvSpPr>
+          <p:cNvPr id="15" name="TextBox 14"/>
+          <p:cNvSpPr txBox="1"/>
+          <p:nvPr/>
+        </p:nvSpPr>
+        <p:spPr>
+          <a:xfrm>
+            <a:off x="548640" y="4343400"/>
+            <a:ext cx="11094415" cy="502920"/>
+          </a:xfrm>
+          <a:prstGeom prst="rect">
+            <a:avLst/>
+          </a:prstGeom>
+          <a:noFill/>
+        </p:spPr>
+        <p:txBody>
+          <a:bodyPr wrap="square" anchor="t" lIns="45720" rIns="45720" tIns="27432" bIns="27432">
+            <a:spAutoFit/>
+          </a:bodyPr>
+          <a:lstStyle/>
+          <a:p>
+            <a:pPr algn="l"/>
+            <a:r>
+              <a:rPr sz="1300" b="0" i="0">
+                <a:solidFill>
+                  <a:srgbClr val="111111"/>
+                </a:solidFill>
+                <a:latin typeface="Calibri"/>
+              </a:rPr>
+              <a:t>An audit of 844 tasks in 104 occupations: workers want agents on the information-heavy, repetitive tasks and want to keep the interpersonal and judgement ones. Exactly the automation-versus-keep-human split in today's lab.</a:t>
+            </a:r>
+          </a:p>
+        </p:txBody>
+      </p:sp>
+      <p:sp>
+        <p:nvSpPr>
+          <p:cNvPr id="16" name="Rectangle 15"/>
+          <p:cNvSpPr/>
+          <p:nvPr/>
+        </p:nvSpPr>
+        <p:spPr>
+          <a:xfrm>
+            <a:off x="548640" y="4846320"/>
+            <a:ext cx="11094415" cy="19050"/>
+          </a:xfrm>
+          <a:prstGeom prst="rect">
+            <a:avLst/>
+          </a:prstGeom>
+          <a:solidFill>
+            <a:srgbClr val="DDDDDD"/>
+          </a:solidFill>
+          <a:ln>
+            <a:noFill/>
+          </a:ln>
+          <a:effectLst/>
+        </p:spPr>
+        <p:style>
+          <a:lnRef idx="1">
+            <a:schemeClr val="accent1"/>
+          </a:lnRef>
+          <a:fillRef idx="3">
+            <a:schemeClr val="accent1"/>
+          </a:fillRef>
+          <a:effectRef idx="2">
+            <a:schemeClr val="accent1"/>
+          </a:effectRef>
+          <a:fontRef idx="minor">
+            <a:schemeClr val="lt1"/>
+          </a:fontRef>
+        </p:style>
+        <p:txBody>
+          <a:bodyPr rtlCol="0" anchor="ctr"/>
+          <a:lstStyle/>
+          <a:p>
+            <a:pPr algn="ctr"/>
+          </a:p>
+        </p:txBody>
+      </p:sp>
+      <p:sp>
+        <p:nvSpPr>
+          <p:cNvPr id="17" name="TextBox 16"/>
+          <p:cNvSpPr txBox="1"/>
+          <p:nvPr/>
+        </p:nvSpPr>
+        <p:spPr>
+          <a:xfrm>
+            <a:off x="548640" y="4892040"/>
+            <a:ext cx="11094415" cy="411480"/>
+          </a:xfrm>
+          <a:prstGeom prst="rect">
+            <a:avLst/>
+          </a:prstGeom>
+          <a:noFill/>
+        </p:spPr>
+        <p:txBody>
+          <a:bodyPr wrap="square" anchor="t" lIns="45720" rIns="45720" tIns="27432" bIns="27432">
+            <a:spAutoFit/>
+          </a:bodyPr>
+          <a:lstStyle/>
+          <a:p>
+            <a:pPr algn="l"/>
+            <a:r>
+              <a:rPr sz="1600" b="1" i="0">
+                <a:solidFill>
+                  <a:srgbClr val="111111"/>
+                </a:solidFill>
+                <a:latin typeface="Calibri"/>
+              </a:rPr>
+              <a:t>Context Engineering: from prompts to corporate multi-agent architecture</a:t>
+            </a:r>
+          </a:p>
+        </p:txBody>
+      </p:sp>
+      <p:sp>
+        <p:nvSpPr>
+          <p:cNvPr id="18" name="TextBox 17"/>
+          <p:cNvSpPr txBox="1"/>
+          <p:nvPr/>
+        </p:nvSpPr>
+        <p:spPr>
+          <a:xfrm>
+            <a:off x="548640" y="5257800"/>
+            <a:ext cx="11094415" cy="320040"/>
+          </a:xfrm>
+          <a:prstGeom prst="rect">
+            <a:avLst/>
+          </a:prstGeom>
+          <a:noFill/>
+        </p:spPr>
+        <p:txBody>
+          <a:bodyPr wrap="square" anchor="t" lIns="45720" rIns="45720" tIns="27432" bIns="27432">
+            <a:spAutoFit/>
+          </a:bodyPr>
+          <a:lstStyle/>
+          <a:p>
+            <a:pPr algn="l"/>
+            <a:r>
+              <a:rPr sz="1100" b="0" i="0">
+                <a:solidFill>
+                  <a:srgbClr val="666666"/>
+                </a:solidFill>
+                <a:latin typeface="Calibri"/>
+              </a:rPr>
+              <a:t>V. Vishnyakova, arXiv 2603.09619 · 10 March 2026 · arxiv.org/abs/2603.09619</a:t>
+            </a:r>
+          </a:p>
+        </p:txBody>
+      </p:sp>
+      <p:sp>
+        <p:nvSpPr>
+          <p:cNvPr id="19" name="TextBox 18"/>
+          <p:cNvSpPr txBox="1"/>
+          <p:nvPr/>
+        </p:nvSpPr>
+        <p:spPr>
+          <a:xfrm>
+            <a:off x="548640" y="5532120"/>
+            <a:ext cx="11094415" cy="502920"/>
+          </a:xfrm>
+          <a:prstGeom prst="rect">
+            <a:avLst/>
+          </a:prstGeom>
+          <a:noFill/>
+        </p:spPr>
+        <p:txBody>
+          <a:bodyPr wrap="square" anchor="t" lIns="45720" rIns="45720" tIns="27432" bIns="27432">
+            <a:spAutoFit/>
+          </a:bodyPr>
+          <a:lstStyle/>
+          <a:p>
+            <a:pPr algn="l"/>
+            <a:r>
+              <a:rPr sz="1300" b="0" i="0">
+                <a:solidFill>
+                  <a:srgbClr val="111111"/>
+                </a:solidFill>
+                <a:latin typeface="Calibri"/>
+              </a:rPr>
+              <a:t>Argues that managing what an agent knows (its context) is a discipline of its own, with a four-level maturity model. The 'memory' and 'instructions' parts of today's four-part agent, taken seriously at company scale.</a:t>
+            </a:r>
+          </a:p>
+        </p:txBody>
+      </p:sp>
+      <p:sp>
+        <p:nvSpPr>
+          <p:cNvPr id="20" name="Rectangle 19"/>
+          <p:cNvSpPr/>
+          <p:nvPr/>
+        </p:nvSpPr>
+        <p:spPr>
+          <a:xfrm>
+            <a:off x="548640" y="6309360"/>
+            <a:ext cx="11094415" cy="19050"/>
+          </a:xfrm>
+          <a:prstGeom prst="rect">
+            <a:avLst/>
+          </a:prstGeom>
+          <a:solidFill>
+            <a:srgbClr val="DDDDDD"/>
+          </a:solidFill>
+          <a:ln>
+            <a:noFill/>
+          </a:ln>
+          <a:effectLst/>
+        </p:spPr>
+        <p:style>
+          <a:lnRef idx="1">
+            <a:schemeClr val="accent1"/>
+          </a:lnRef>
+          <a:fillRef idx="3">
+            <a:schemeClr val="accent1"/>
+          </a:fillRef>
+          <a:effectRef idx="2">
+            <a:schemeClr val="accent1"/>
+          </a:effectRef>
+          <a:fontRef idx="minor">
+            <a:schemeClr val="lt1"/>
+          </a:fontRef>
+        </p:style>
+        <p:txBody>
+          <a:bodyPr rtlCol="0" anchor="ctr"/>
+          <a:lstStyle/>
+          <a:p>
+            <a:pPr algn="ctr"/>
+          </a:p>
+        </p:txBody>
+      </p:sp>
+      <p:sp>
+        <p:nvSpPr>
+          <p:cNvPr id="21" name="TextBox 20"/>
           <p:cNvSpPr txBox="1"/>
           <p:nvPr/>
         </p:nvSpPr>
@@ -33836,7 +32785,7 @@
       </p:sp>
       <p:sp>
         <p:nvSpPr>
-          <p:cNvPr id="17" name="TextBox 16"/>
+          <p:cNvPr id="22" name="TextBox 21"/>
           <p:cNvSpPr txBox="1"/>
           <p:nvPr/>
         </p:nvSpPr>
@@ -33917,7 +32866,7 @@
                 </a:solidFill>
                 <a:latin typeface="Calibri"/>
               </a:rPr>
-              <a:t>Question 3</a:t>
+              <a:t>References</a:t>
             </a:r>
           </a:p>
         </p:txBody>
@@ -34018,8 +32967,8 @@
         </p:nvSpPr>
         <p:spPr>
           <a:xfrm>
-            <a:off x="548640" y="1325880"/>
-            <a:ext cx="11094415" cy="1097280"/>
+            <a:off x="548640" y="1371600"/>
+            <a:ext cx="11094415" cy="4663440"/>
           </a:xfrm>
           <a:prstGeom prst="rect">
             <a:avLst/>
@@ -34027,351 +32976,175 @@
           <a:noFill/>
         </p:spPr>
         <p:txBody>
-          <a:bodyPr wrap="square" anchor="t" lIns="45720" rIns="45720" tIns="27432" bIns="27432">
+          <a:bodyPr wrap="square" lIns="45720" rIns="45720">
             <a:spAutoFit/>
           </a:bodyPr>
           <a:lstStyle/>
           <a:p>
-            <a:pPr algn="l"/>
-            <a:r>
-              <a:rPr sz="2200" b="1" i="0">
+            <a:pPr>
+              <a:spcAft>
+                <a:spcPts val="600"/>
+              </a:spcAft>
+            </a:pPr>
+            <a:r>
+              <a:rPr sz="1400">
                 <a:solidFill>
                   <a:srgbClr val="111111"/>
                 </a:solidFill>
                 <a:latin typeface="Calibri"/>
               </a:rPr>
-              <a:t>Sorting support emails into billing, technical and sales is best built as a...</a:t>
-            </a:r>
-          </a:p>
-        </p:txBody>
-      </p:sp>
-      <p:sp>
-        <p:nvSpPr>
-          <p:cNvPr id="6" name="Rounded Rectangle 5"/>
-          <p:cNvSpPr/>
-          <p:nvPr/>
-        </p:nvSpPr>
-        <p:spPr>
-          <a:xfrm>
-            <a:off x="548640" y="2514600"/>
-            <a:ext cx="11094415" cy="566928"/>
-          </a:xfrm>
-          <a:prstGeom prst="roundRect">
-            <a:avLst/>
-          </a:prstGeom>
-          <a:solidFill>
-            <a:srgbClr val="F2F2F2"/>
-          </a:solidFill>
-          <a:ln w="12700">
-            <a:solidFill>
-              <a:srgbClr val="DDDDDD"/>
-            </a:solidFill>
-          </a:ln>
-          <a:effectLst/>
-        </p:spPr>
-        <p:style>
-          <a:lnRef idx="1">
-            <a:schemeClr val="accent1"/>
-          </a:lnRef>
-          <a:fillRef idx="3">
-            <a:schemeClr val="accent1"/>
-          </a:fillRef>
-          <a:effectRef idx="2">
-            <a:schemeClr val="accent1"/>
-          </a:effectRef>
-          <a:fontRef idx="minor">
-            <a:schemeClr val="lt1"/>
-          </a:fontRef>
-        </p:style>
-        <p:txBody>
-          <a:bodyPr rtlCol="0" anchor="ctr"/>
-          <a:lstStyle/>
-          <a:p>
-            <a:pPr algn="ctr"/>
-          </a:p>
-        </p:txBody>
-      </p:sp>
-      <p:sp>
-        <p:nvSpPr>
-          <p:cNvPr id="7" name="TextBox 6"/>
-          <p:cNvSpPr txBox="1"/>
-          <p:nvPr/>
-        </p:nvSpPr>
-        <p:spPr>
-          <a:xfrm>
-            <a:off x="731520" y="2587752"/>
-            <a:ext cx="10728655" cy="457200"/>
-          </a:xfrm>
-          <a:prstGeom prst="rect">
-            <a:avLst/>
-          </a:prstGeom>
-          <a:noFill/>
-        </p:spPr>
-        <p:txBody>
-          <a:bodyPr wrap="square" anchor="ctr" lIns="45720" rIns="45720" tIns="27432" bIns="27432">
-            <a:spAutoFit/>
-          </a:bodyPr>
-          <a:lstStyle/>
-          <a:p>
-            <a:pPr algn="l"/>
-            <a:r>
-              <a:rPr sz="1700" b="0" i="0">
+              <a:t>1.  Hermes Agent documentation and source (Nous Research, MIT licence). hermes-agent.nousresearch.com/docs · github.com/NousResearch/hermes-agent</a:t>
+            </a:r>
+          </a:p>
+          <a:p>
+            <a:pPr>
+              <a:spcAft>
+                <a:spcPts val="600"/>
+              </a:spcAft>
+            </a:pPr>
+            <a:r>
+              <a:rPr sz="1400">
                 <a:solidFill>
                   <a:srgbClr val="111111"/>
                 </a:solidFill>
                 <a:latin typeface="Calibri"/>
               </a:rPr>
-              <a:t>A.  Full autonomous agent</a:t>
-            </a:r>
-          </a:p>
-        </p:txBody>
-      </p:sp>
-      <p:sp>
-        <p:nvSpPr>
-          <p:cNvPr id="8" name="Rounded Rectangle 7"/>
-          <p:cNvSpPr/>
-          <p:nvPr/>
-        </p:nvSpPr>
-        <p:spPr>
-          <a:xfrm>
-            <a:off x="548640" y="3172968"/>
-            <a:ext cx="11094415" cy="566928"/>
-          </a:xfrm>
-          <a:prstGeom prst="roundRect">
-            <a:avLst/>
-          </a:prstGeom>
-          <a:solidFill>
-            <a:srgbClr val="F2F2F2"/>
-          </a:solidFill>
-          <a:ln w="12700">
-            <a:solidFill>
-              <a:srgbClr val="DDDDDD"/>
-            </a:solidFill>
-          </a:ln>
-          <a:effectLst/>
-        </p:spPr>
-        <p:style>
-          <a:lnRef idx="1">
-            <a:schemeClr val="accent1"/>
-          </a:lnRef>
-          <a:fillRef idx="3">
-            <a:schemeClr val="accent1"/>
-          </a:fillRef>
-          <a:effectRef idx="2">
-            <a:schemeClr val="accent1"/>
-          </a:effectRef>
-          <a:fontRef idx="minor">
-            <a:schemeClr val="lt1"/>
-          </a:fontRef>
-        </p:style>
-        <p:txBody>
-          <a:bodyPr rtlCol="0" anchor="ctr"/>
-          <a:lstStyle/>
-          <a:p>
-            <a:pPr algn="ctr"/>
-          </a:p>
-        </p:txBody>
-      </p:sp>
-      <p:sp>
-        <p:nvSpPr>
-          <p:cNvPr id="9" name="TextBox 8"/>
-          <p:cNvSpPr txBox="1"/>
-          <p:nvPr/>
-        </p:nvSpPr>
-        <p:spPr>
-          <a:xfrm>
-            <a:off x="731520" y="3246120"/>
-            <a:ext cx="10728655" cy="457200"/>
-          </a:xfrm>
-          <a:prstGeom prst="rect">
-            <a:avLst/>
-          </a:prstGeom>
-          <a:noFill/>
-        </p:spPr>
-        <p:txBody>
-          <a:bodyPr wrap="square" anchor="ctr" lIns="45720" rIns="45720" tIns="27432" bIns="27432">
-            <a:spAutoFit/>
-          </a:bodyPr>
-          <a:lstStyle/>
-          <a:p>
-            <a:pPr algn="l"/>
-            <a:r>
-              <a:rPr sz="1700" b="0" i="0">
+              <a:t>2.  Al-Banna, A. (2026). AI Administrator, Module 1: Agents and Automation, Explained. albanna-tutorials.com/ai-administrator/01_agents_and_automation.html</a:t>
+            </a:r>
+          </a:p>
+          <a:p>
+            <a:pPr>
+              <a:spcAft>
+                <a:spcPts val="600"/>
+              </a:spcAft>
+            </a:pPr>
+            <a:r>
+              <a:rPr sz="1400">
                 <a:solidFill>
                   <a:srgbClr val="111111"/>
                 </a:solidFill>
                 <a:latin typeface="Calibri"/>
               </a:rPr>
-              <a:t>B.  Workflow with an AI classification step</a:t>
-            </a:r>
-          </a:p>
-        </p:txBody>
-      </p:sp>
-      <p:sp>
-        <p:nvSpPr>
-          <p:cNvPr id="10" name="Rounded Rectangle 9"/>
-          <p:cNvSpPr/>
-          <p:nvPr/>
-        </p:nvSpPr>
-        <p:spPr>
-          <a:xfrm>
-            <a:off x="548640" y="3831336"/>
-            <a:ext cx="11094415" cy="566928"/>
-          </a:xfrm>
-          <a:prstGeom prst="roundRect">
-            <a:avLst/>
-          </a:prstGeom>
-          <a:solidFill>
-            <a:srgbClr val="F2F2F2"/>
-          </a:solidFill>
-          <a:ln w="12700">
-            <a:solidFill>
-              <a:srgbClr val="DDDDDD"/>
-            </a:solidFill>
-          </a:ln>
-          <a:effectLst/>
-        </p:spPr>
-        <p:style>
-          <a:lnRef idx="1">
-            <a:schemeClr val="accent1"/>
-          </a:lnRef>
-          <a:fillRef idx="3">
-            <a:schemeClr val="accent1"/>
-          </a:fillRef>
-          <a:effectRef idx="2">
-            <a:schemeClr val="accent1"/>
-          </a:effectRef>
-          <a:fontRef idx="minor">
-            <a:schemeClr val="lt1"/>
-          </a:fontRef>
-        </p:style>
-        <p:txBody>
-          <a:bodyPr rtlCol="0" anchor="ctr"/>
-          <a:lstStyle/>
-          <a:p>
-            <a:pPr algn="ctr"/>
-          </a:p>
-        </p:txBody>
-      </p:sp>
-      <p:sp>
-        <p:nvSpPr>
-          <p:cNvPr id="11" name="TextBox 10"/>
-          <p:cNvSpPr txBox="1"/>
-          <p:nvPr/>
-        </p:nvSpPr>
-        <p:spPr>
-          <a:xfrm>
-            <a:off x="731520" y="3904488"/>
-            <a:ext cx="10728655" cy="457200"/>
-          </a:xfrm>
-          <a:prstGeom prst="rect">
-            <a:avLst/>
-          </a:prstGeom>
-          <a:noFill/>
-        </p:spPr>
-        <p:txBody>
-          <a:bodyPr wrap="square" anchor="ctr" lIns="45720" rIns="45720" tIns="27432" bIns="27432">
-            <a:spAutoFit/>
-          </a:bodyPr>
-          <a:lstStyle/>
-          <a:p>
-            <a:pPr algn="l"/>
-            <a:r>
-              <a:rPr sz="1700" b="0" i="0">
+              <a:t>3.  Al-Banna, A. (2025). LLM Agents, explained visually (tutorial). albanna-tutorials.com/llm_agents.html</a:t>
+            </a:r>
+          </a:p>
+          <a:p>
+            <a:pPr>
+              <a:spcAft>
+                <a:spcPts val="600"/>
+              </a:spcAft>
+            </a:pPr>
+            <a:r>
+              <a:rPr sz="1400">
                 <a:solidFill>
                   <a:srgbClr val="111111"/>
                 </a:solidFill>
                 <a:latin typeface="Calibri"/>
               </a:rPr>
-              <a:t>C.  Manual task</a:t>
-            </a:r>
-          </a:p>
-        </p:txBody>
-      </p:sp>
-      <p:sp>
-        <p:nvSpPr>
-          <p:cNvPr id="12" name="Rounded Rectangle 11"/>
-          <p:cNvSpPr/>
-          <p:nvPr/>
-        </p:nvSpPr>
-        <p:spPr>
-          <a:xfrm>
-            <a:off x="548640" y="4489704"/>
-            <a:ext cx="11094415" cy="566928"/>
-          </a:xfrm>
-          <a:prstGeom prst="roundRect">
-            <a:avLst/>
-          </a:prstGeom>
-          <a:solidFill>
-            <a:srgbClr val="F2F2F2"/>
-          </a:solidFill>
-          <a:ln w="12700">
-            <a:solidFill>
-              <a:srgbClr val="DDDDDD"/>
-            </a:solidFill>
-          </a:ln>
-          <a:effectLst/>
-        </p:spPr>
-        <p:style>
-          <a:lnRef idx="1">
-            <a:schemeClr val="accent1"/>
-          </a:lnRef>
-          <a:fillRef idx="3">
-            <a:schemeClr val="accent1"/>
-          </a:fillRef>
-          <a:effectRef idx="2">
-            <a:schemeClr val="accent1"/>
-          </a:effectRef>
-          <a:fontRef idx="minor">
-            <a:schemeClr val="lt1"/>
-          </a:fontRef>
-        </p:style>
-        <p:txBody>
-          <a:bodyPr rtlCol="0" anchor="ctr"/>
-          <a:lstStyle/>
-          <a:p>
-            <a:pPr algn="ctr"/>
-          </a:p>
-        </p:txBody>
-      </p:sp>
-      <p:sp>
-        <p:nvSpPr>
-          <p:cNvPr id="13" name="TextBox 12"/>
-          <p:cNvSpPr txBox="1"/>
-          <p:nvPr/>
-        </p:nvSpPr>
-        <p:spPr>
-          <a:xfrm>
-            <a:off x="731520" y="4562856"/>
-            <a:ext cx="10728655" cy="457200"/>
-          </a:xfrm>
-          <a:prstGeom prst="rect">
-            <a:avLst/>
-          </a:prstGeom>
-          <a:noFill/>
-        </p:spPr>
-        <p:txBody>
-          <a:bodyPr wrap="square" anchor="ctr" lIns="45720" rIns="45720" tIns="27432" bIns="27432">
-            <a:spAutoFit/>
-          </a:bodyPr>
-          <a:lstStyle/>
-          <a:p>
-            <a:pPr algn="l"/>
-            <a:r>
-              <a:rPr sz="1700" b="0" i="0">
+              <a:t>4.  Grootendorst, M. (2025). A Visual Guide to LLM Agents. newsletter.maartengrootendorst.com (online version of the same diagrams)</a:t>
+            </a:r>
+          </a:p>
+          <a:p>
+            <a:pPr>
+              <a:spcAft>
+                <a:spcPts val="600"/>
+              </a:spcAft>
+            </a:pPr>
+            <a:r>
+              <a:rPr sz="1400">
                 <a:solidFill>
                   <a:srgbClr val="111111"/>
                 </a:solidFill>
                 <a:latin typeface="Calibri"/>
               </a:rPr>
-              <a:t>D.  Scheduled report</a:t>
-            </a:r>
-          </a:p>
-        </p:txBody>
-      </p:sp>
-      <p:sp>
-        <p:nvSpPr>
-          <p:cNvPr id="14" name="Rectangle 13"/>
+              <a:t>5.  Alammar, J. and Grootendorst, M. (2024). Hands-On Large Language Models. O'Reilly Media</a:t>
+            </a:r>
+          </a:p>
+          <a:p>
+            <a:pPr>
+              <a:spcAft>
+                <a:spcPts val="600"/>
+              </a:spcAft>
+            </a:pPr>
+            <a:r>
+              <a:rPr sz="1400">
+                <a:solidFill>
+                  <a:srgbClr val="111111"/>
+                </a:solidFill>
+                <a:latin typeface="Calibri"/>
+              </a:rPr>
+              <a:t>6.  Yao, S. et al. (2023). ReAct: Synergizing Reasoning and Acting in Language Models. ICLR 2023</a:t>
+            </a:r>
+          </a:p>
+          <a:p>
+            <a:pPr>
+              <a:spcAft>
+                <a:spcPts val="600"/>
+              </a:spcAft>
+            </a:pPr>
+            <a:r>
+              <a:rPr sz="1400">
+                <a:solidFill>
+                  <a:srgbClr val="111111"/>
+                </a:solidFill>
+                <a:latin typeface="Calibri"/>
+              </a:rPr>
+              <a:t>7.  Schick, T. et al. (2023). Toolformer: Language Models Can Teach Themselves to Use Tools. NeurIPS 2023</a:t>
+            </a:r>
+          </a:p>
+          <a:p>
+            <a:pPr>
+              <a:spcAft>
+                <a:spcPts val="600"/>
+              </a:spcAft>
+            </a:pPr>
+            <a:r>
+              <a:rPr sz="1400">
+                <a:solidFill>
+                  <a:srgbClr val="111111"/>
+                </a:solidFill>
+                <a:latin typeface="Calibri"/>
+              </a:rPr>
+              <a:t>8.  Anthropic (2024). Introducing the Model Context Protocol. modelcontextprotocol.io</a:t>
+            </a:r>
+          </a:p>
+          <a:p>
+            <a:pPr>
+              <a:spcAft>
+                <a:spcPts val="600"/>
+              </a:spcAft>
+            </a:pPr>
+            <a:r>
+              <a:rPr sz="1400">
+                <a:solidFill>
+                  <a:srgbClr val="111111"/>
+                </a:solidFill>
+                <a:latin typeface="Calibri"/>
+              </a:rPr>
+              <a:t>9.  Anthropic (2024). Building Effective Agents. anthropic.com/research/building-effective-agents</a:t>
+            </a:r>
+          </a:p>
+          <a:p>
+            <a:pPr>
+              <a:spcAft>
+                <a:spcPts val="600"/>
+              </a:spcAft>
+            </a:pPr>
+            <a:r>
+              <a:rPr sz="1400">
+                <a:solidFill>
+                  <a:srgbClr val="111111"/>
+                </a:solidFill>
+                <a:latin typeface="Calibri"/>
+              </a:rPr>
+              <a:t>10.  IEEE CS Region 8 AI Caravan (2026). AI Administrator Track Curriculum. aicaravan.org</a:t>
+            </a:r>
+          </a:p>
+        </p:txBody>
+      </p:sp>
+      <p:sp>
+        <p:nvSpPr>
+          <p:cNvPr id="6" name="Rectangle 5"/>
           <p:cNvSpPr/>
           <p:nvPr/>
         </p:nvSpPr>
@@ -34415,7 +33188,7 @@
       </p:sp>
       <p:sp>
         <p:nvSpPr>
-          <p:cNvPr id="15" name="TextBox 14"/>
+          <p:cNvPr id="7" name="TextBox 6"/>
           <p:cNvSpPr txBox="1"/>
           <p:nvPr/>
         </p:nvSpPr>
@@ -34450,7 +33223,7 @@
       </p:sp>
       <p:sp>
         <p:nvSpPr>
-          <p:cNvPr id="16" name="TextBox 15"/>
+          <p:cNvPr id="8" name="TextBox 7"/>
           <p:cNvSpPr txBox="1"/>
           <p:nvPr/>
         </p:nvSpPr>
@@ -34479,3523 +33252,6 @@
                 <a:latin typeface="Calibri"/>
               </a:rPr>
               <a:t>63</a:t>
-            </a:r>
-          </a:p>
-        </p:txBody>
-      </p:sp>
-    </p:spTree>
-  </p:cSld>
-  <p:clrMapOvr>
-    <a:masterClrMapping/>
-  </p:clrMapOvr>
-</p:sld>
-</file>
-
-<file path=ppt/slides/slide64.xml><?xml version="1.0" encoding="utf-8"?>
-<p:sld xmlns:a="http://schemas.openxmlformats.org/drawingml/2006/main" xmlns:p="http://schemas.openxmlformats.org/presentationml/2006/main" xmlns:r="http://schemas.openxmlformats.org/officeDocument/2006/relationships">
-  <p:cSld>
-    <p:spTree>
-      <p:nvGrpSpPr>
-        <p:cNvPr id="1" name=""/>
-        <p:cNvGrpSpPr/>
-        <p:nvPr/>
-      </p:nvGrpSpPr>
-      <p:grpSpPr/>
-      <p:sp>
-        <p:nvSpPr>
-          <p:cNvPr id="2" name="TextBox 1"/>
-          <p:cNvSpPr txBox="1"/>
-          <p:nvPr/>
-        </p:nvSpPr>
-        <p:spPr>
-          <a:xfrm>
-            <a:off x="548640" y="365760"/>
-            <a:ext cx="11094415" cy="777240"/>
-          </a:xfrm>
-          <a:prstGeom prst="rect">
-            <a:avLst/>
-          </a:prstGeom>
-          <a:noFill/>
-        </p:spPr>
-        <p:txBody>
-          <a:bodyPr wrap="square" anchor="b" lIns="45720" rIns="45720" tIns="27432" bIns="27432">
-            <a:spAutoFit/>
-          </a:bodyPr>
-          <a:lstStyle/>
-          <a:p>
-            <a:pPr algn="l"/>
-            <a:r>
-              <a:rPr sz="3000" b="1" i="0">
-                <a:solidFill>
-                  <a:srgbClr val="111111"/>
-                </a:solidFill>
-                <a:latin typeface="Calibri"/>
-              </a:rPr>
-              <a:t>Question 3 · answer</a:t>
-            </a:r>
-          </a:p>
-        </p:txBody>
-      </p:sp>
-      <p:sp>
-        <p:nvSpPr>
-          <p:cNvPr id="3" name="Rectangle 2"/>
-          <p:cNvSpPr/>
-          <p:nvPr/>
-        </p:nvSpPr>
-        <p:spPr>
-          <a:xfrm>
-            <a:off x="548640" y="1115568"/>
-            <a:ext cx="1097280" cy="38100"/>
-          </a:xfrm>
-          <a:prstGeom prst="rect">
-            <a:avLst/>
-          </a:prstGeom>
-          <a:solidFill>
-            <a:srgbClr val="F7A11A"/>
-          </a:solidFill>
-          <a:ln>
-            <a:noFill/>
-          </a:ln>
-          <a:effectLst/>
-        </p:spPr>
-        <p:style>
-          <a:lnRef idx="1">
-            <a:schemeClr val="accent1"/>
-          </a:lnRef>
-          <a:fillRef idx="3">
-            <a:schemeClr val="accent1"/>
-          </a:fillRef>
-          <a:effectRef idx="2">
-            <a:schemeClr val="accent1"/>
-          </a:effectRef>
-          <a:fontRef idx="minor">
-            <a:schemeClr val="lt1"/>
-          </a:fontRef>
-        </p:style>
-        <p:txBody>
-          <a:bodyPr rtlCol="0" anchor="ctr"/>
-          <a:lstStyle/>
-          <a:p>
-            <a:pPr algn="ctr"/>
-          </a:p>
-        </p:txBody>
-      </p:sp>
-      <p:sp>
-        <p:nvSpPr>
-          <p:cNvPr id="4" name="Rectangle 3"/>
-          <p:cNvSpPr/>
-          <p:nvPr/>
-        </p:nvSpPr>
-        <p:spPr>
-          <a:xfrm>
-            <a:off x="1645920" y="1115568"/>
-            <a:ext cx="9997135" cy="19050"/>
-          </a:xfrm>
-          <a:prstGeom prst="rect">
-            <a:avLst/>
-          </a:prstGeom>
-          <a:solidFill>
-            <a:srgbClr val="DDDDDD"/>
-          </a:solidFill>
-          <a:ln>
-            <a:noFill/>
-          </a:ln>
-          <a:effectLst/>
-        </p:spPr>
-        <p:style>
-          <a:lnRef idx="1">
-            <a:schemeClr val="accent1"/>
-          </a:lnRef>
-          <a:fillRef idx="3">
-            <a:schemeClr val="accent1"/>
-          </a:fillRef>
-          <a:effectRef idx="2">
-            <a:schemeClr val="accent1"/>
-          </a:effectRef>
-          <a:fontRef idx="minor">
-            <a:schemeClr val="lt1"/>
-          </a:fontRef>
-        </p:style>
-        <p:txBody>
-          <a:bodyPr rtlCol="0" anchor="ctr"/>
-          <a:lstStyle/>
-          <a:p>
-            <a:pPr algn="ctr"/>
-          </a:p>
-        </p:txBody>
-      </p:sp>
-      <p:sp>
-        <p:nvSpPr>
-          <p:cNvPr id="5" name="TextBox 4"/>
-          <p:cNvSpPr txBox="1"/>
-          <p:nvPr/>
-        </p:nvSpPr>
-        <p:spPr>
-          <a:xfrm>
-            <a:off x="548640" y="1325880"/>
-            <a:ext cx="11094415" cy="1097280"/>
-          </a:xfrm>
-          <a:prstGeom prst="rect">
-            <a:avLst/>
-          </a:prstGeom>
-          <a:noFill/>
-        </p:spPr>
-        <p:txBody>
-          <a:bodyPr wrap="square" anchor="t" lIns="45720" rIns="45720" tIns="27432" bIns="27432">
-            <a:spAutoFit/>
-          </a:bodyPr>
-          <a:lstStyle/>
-          <a:p>
-            <a:pPr algn="l"/>
-            <a:r>
-              <a:rPr sz="2200" b="1" i="0">
-                <a:solidFill>
-                  <a:srgbClr val="111111"/>
-                </a:solidFill>
-                <a:latin typeface="Calibri"/>
-              </a:rPr>
-              <a:t>Sorting support emails into billing, technical and sales is best built as a...</a:t>
-            </a:r>
-          </a:p>
-        </p:txBody>
-      </p:sp>
-      <p:sp>
-        <p:nvSpPr>
-          <p:cNvPr id="6" name="Rounded Rectangle 5"/>
-          <p:cNvSpPr/>
-          <p:nvPr/>
-        </p:nvSpPr>
-        <p:spPr>
-          <a:xfrm>
-            <a:off x="548640" y="2514600"/>
-            <a:ext cx="11094415" cy="566928"/>
-          </a:xfrm>
-          <a:prstGeom prst="roundRect">
-            <a:avLst/>
-          </a:prstGeom>
-          <a:solidFill>
-            <a:srgbClr val="F2F2F2"/>
-          </a:solidFill>
-          <a:ln w="12700">
-            <a:solidFill>
-              <a:srgbClr val="DDDDDD"/>
-            </a:solidFill>
-          </a:ln>
-          <a:effectLst/>
-        </p:spPr>
-        <p:style>
-          <a:lnRef idx="1">
-            <a:schemeClr val="accent1"/>
-          </a:lnRef>
-          <a:fillRef idx="3">
-            <a:schemeClr val="accent1"/>
-          </a:fillRef>
-          <a:effectRef idx="2">
-            <a:schemeClr val="accent1"/>
-          </a:effectRef>
-          <a:fontRef idx="minor">
-            <a:schemeClr val="lt1"/>
-          </a:fontRef>
-        </p:style>
-        <p:txBody>
-          <a:bodyPr rtlCol="0" anchor="ctr"/>
-          <a:lstStyle/>
-          <a:p>
-            <a:pPr algn="ctr"/>
-          </a:p>
-        </p:txBody>
-      </p:sp>
-      <p:sp>
-        <p:nvSpPr>
-          <p:cNvPr id="7" name="TextBox 6"/>
-          <p:cNvSpPr txBox="1"/>
-          <p:nvPr/>
-        </p:nvSpPr>
-        <p:spPr>
-          <a:xfrm>
-            <a:off x="731520" y="2587752"/>
-            <a:ext cx="10728655" cy="457200"/>
-          </a:xfrm>
-          <a:prstGeom prst="rect">
-            <a:avLst/>
-          </a:prstGeom>
-          <a:noFill/>
-        </p:spPr>
-        <p:txBody>
-          <a:bodyPr wrap="square" anchor="ctr" lIns="45720" rIns="45720" tIns="27432" bIns="27432">
-            <a:spAutoFit/>
-          </a:bodyPr>
-          <a:lstStyle/>
-          <a:p>
-            <a:pPr algn="l"/>
-            <a:r>
-              <a:rPr sz="1700" b="0" i="0">
-                <a:solidFill>
-                  <a:srgbClr val="111111"/>
-                </a:solidFill>
-                <a:latin typeface="Calibri"/>
-              </a:rPr>
-              <a:t>A.  Full autonomous agent</a:t>
-            </a:r>
-          </a:p>
-        </p:txBody>
-      </p:sp>
-      <p:sp>
-        <p:nvSpPr>
-          <p:cNvPr id="8" name="Rounded Rectangle 7"/>
-          <p:cNvSpPr/>
-          <p:nvPr/>
-        </p:nvSpPr>
-        <p:spPr>
-          <a:xfrm>
-            <a:off x="548640" y="3172968"/>
-            <a:ext cx="11094415" cy="566928"/>
-          </a:xfrm>
-          <a:prstGeom prst="roundRect">
-            <a:avLst/>
-          </a:prstGeom>
-          <a:solidFill>
-            <a:srgbClr val="FFFFFF"/>
-          </a:solidFill>
-          <a:ln w="31750">
-            <a:solidFill>
-              <a:srgbClr val="F7A11A"/>
-            </a:solidFill>
-          </a:ln>
-          <a:effectLst/>
-        </p:spPr>
-        <p:style>
-          <a:lnRef idx="1">
-            <a:schemeClr val="accent1"/>
-          </a:lnRef>
-          <a:fillRef idx="3">
-            <a:schemeClr val="accent1"/>
-          </a:fillRef>
-          <a:effectRef idx="2">
-            <a:schemeClr val="accent1"/>
-          </a:effectRef>
-          <a:fontRef idx="minor">
-            <a:schemeClr val="lt1"/>
-          </a:fontRef>
-        </p:style>
-        <p:txBody>
-          <a:bodyPr rtlCol="0" anchor="ctr"/>
-          <a:lstStyle/>
-          <a:p>
-            <a:pPr algn="ctr"/>
-          </a:p>
-        </p:txBody>
-      </p:sp>
-      <p:sp>
-        <p:nvSpPr>
-          <p:cNvPr id="9" name="TextBox 8"/>
-          <p:cNvSpPr txBox="1"/>
-          <p:nvPr/>
-        </p:nvSpPr>
-        <p:spPr>
-          <a:xfrm>
-            <a:off x="731520" y="3246120"/>
-            <a:ext cx="10728655" cy="457200"/>
-          </a:xfrm>
-          <a:prstGeom prst="rect">
-            <a:avLst/>
-          </a:prstGeom>
-          <a:noFill/>
-        </p:spPr>
-        <p:txBody>
-          <a:bodyPr wrap="square" anchor="ctr" lIns="45720" rIns="45720" tIns="27432" bIns="27432">
-            <a:spAutoFit/>
-          </a:bodyPr>
-          <a:lstStyle/>
-          <a:p>
-            <a:pPr algn="l"/>
-            <a:r>
-              <a:rPr sz="1700" b="1" i="0">
-                <a:solidFill>
-                  <a:srgbClr val="111111"/>
-                </a:solidFill>
-                <a:latin typeface="Calibri"/>
-              </a:rPr>
-              <a:t>B.  Workflow with an AI classification step</a:t>
-            </a:r>
-          </a:p>
-        </p:txBody>
-      </p:sp>
-      <p:sp>
-        <p:nvSpPr>
-          <p:cNvPr id="10" name="Rounded Rectangle 9"/>
-          <p:cNvSpPr/>
-          <p:nvPr/>
-        </p:nvSpPr>
-        <p:spPr>
-          <a:xfrm>
-            <a:off x="548640" y="3831336"/>
-            <a:ext cx="11094415" cy="566928"/>
-          </a:xfrm>
-          <a:prstGeom prst="roundRect">
-            <a:avLst/>
-          </a:prstGeom>
-          <a:solidFill>
-            <a:srgbClr val="F2F2F2"/>
-          </a:solidFill>
-          <a:ln w="12700">
-            <a:solidFill>
-              <a:srgbClr val="DDDDDD"/>
-            </a:solidFill>
-          </a:ln>
-          <a:effectLst/>
-        </p:spPr>
-        <p:style>
-          <a:lnRef idx="1">
-            <a:schemeClr val="accent1"/>
-          </a:lnRef>
-          <a:fillRef idx="3">
-            <a:schemeClr val="accent1"/>
-          </a:fillRef>
-          <a:effectRef idx="2">
-            <a:schemeClr val="accent1"/>
-          </a:effectRef>
-          <a:fontRef idx="minor">
-            <a:schemeClr val="lt1"/>
-          </a:fontRef>
-        </p:style>
-        <p:txBody>
-          <a:bodyPr rtlCol="0" anchor="ctr"/>
-          <a:lstStyle/>
-          <a:p>
-            <a:pPr algn="ctr"/>
-          </a:p>
-        </p:txBody>
-      </p:sp>
-      <p:sp>
-        <p:nvSpPr>
-          <p:cNvPr id="11" name="TextBox 10"/>
-          <p:cNvSpPr txBox="1"/>
-          <p:nvPr/>
-        </p:nvSpPr>
-        <p:spPr>
-          <a:xfrm>
-            <a:off x="731520" y="3904488"/>
-            <a:ext cx="10728655" cy="457200"/>
-          </a:xfrm>
-          <a:prstGeom prst="rect">
-            <a:avLst/>
-          </a:prstGeom>
-          <a:noFill/>
-        </p:spPr>
-        <p:txBody>
-          <a:bodyPr wrap="square" anchor="ctr" lIns="45720" rIns="45720" tIns="27432" bIns="27432">
-            <a:spAutoFit/>
-          </a:bodyPr>
-          <a:lstStyle/>
-          <a:p>
-            <a:pPr algn="l"/>
-            <a:r>
-              <a:rPr sz="1700" b="0" i="0">
-                <a:solidFill>
-                  <a:srgbClr val="111111"/>
-                </a:solidFill>
-                <a:latin typeface="Calibri"/>
-              </a:rPr>
-              <a:t>C.  Manual task</a:t>
-            </a:r>
-          </a:p>
-        </p:txBody>
-      </p:sp>
-      <p:sp>
-        <p:nvSpPr>
-          <p:cNvPr id="12" name="Rounded Rectangle 11"/>
-          <p:cNvSpPr/>
-          <p:nvPr/>
-        </p:nvSpPr>
-        <p:spPr>
-          <a:xfrm>
-            <a:off x="548640" y="4489704"/>
-            <a:ext cx="11094415" cy="566928"/>
-          </a:xfrm>
-          <a:prstGeom prst="roundRect">
-            <a:avLst/>
-          </a:prstGeom>
-          <a:solidFill>
-            <a:srgbClr val="F2F2F2"/>
-          </a:solidFill>
-          <a:ln w="12700">
-            <a:solidFill>
-              <a:srgbClr val="DDDDDD"/>
-            </a:solidFill>
-          </a:ln>
-          <a:effectLst/>
-        </p:spPr>
-        <p:style>
-          <a:lnRef idx="1">
-            <a:schemeClr val="accent1"/>
-          </a:lnRef>
-          <a:fillRef idx="3">
-            <a:schemeClr val="accent1"/>
-          </a:fillRef>
-          <a:effectRef idx="2">
-            <a:schemeClr val="accent1"/>
-          </a:effectRef>
-          <a:fontRef idx="minor">
-            <a:schemeClr val="lt1"/>
-          </a:fontRef>
-        </p:style>
-        <p:txBody>
-          <a:bodyPr rtlCol="0" anchor="ctr"/>
-          <a:lstStyle/>
-          <a:p>
-            <a:pPr algn="ctr"/>
-          </a:p>
-        </p:txBody>
-      </p:sp>
-      <p:sp>
-        <p:nvSpPr>
-          <p:cNvPr id="13" name="TextBox 12"/>
-          <p:cNvSpPr txBox="1"/>
-          <p:nvPr/>
-        </p:nvSpPr>
-        <p:spPr>
-          <a:xfrm>
-            <a:off x="731520" y="4562856"/>
-            <a:ext cx="10728655" cy="457200"/>
-          </a:xfrm>
-          <a:prstGeom prst="rect">
-            <a:avLst/>
-          </a:prstGeom>
-          <a:noFill/>
-        </p:spPr>
-        <p:txBody>
-          <a:bodyPr wrap="square" anchor="ctr" lIns="45720" rIns="45720" tIns="27432" bIns="27432">
-            <a:spAutoFit/>
-          </a:bodyPr>
-          <a:lstStyle/>
-          <a:p>
-            <a:pPr algn="l"/>
-            <a:r>
-              <a:rPr sz="1700" b="0" i="0">
-                <a:solidFill>
-                  <a:srgbClr val="111111"/>
-                </a:solidFill>
-                <a:latin typeface="Calibri"/>
-              </a:rPr>
-              <a:t>D.  Scheduled report</a:t>
-            </a:r>
-          </a:p>
-        </p:txBody>
-      </p:sp>
-      <p:sp>
-        <p:nvSpPr>
-          <p:cNvPr id="14" name="TextBox 13"/>
-          <p:cNvSpPr txBox="1"/>
-          <p:nvPr/>
-        </p:nvSpPr>
-        <p:spPr>
-          <a:xfrm>
-            <a:off x="548640" y="5239512"/>
-            <a:ext cx="11094415" cy="822960"/>
-          </a:xfrm>
-          <a:prstGeom prst="rect">
-            <a:avLst/>
-          </a:prstGeom>
-          <a:noFill/>
-        </p:spPr>
-        <p:txBody>
-          <a:bodyPr wrap="square" anchor="t" lIns="45720" rIns="45720" tIns="27432" bIns="27432">
-            <a:spAutoFit/>
-          </a:bodyPr>
-          <a:lstStyle/>
-          <a:p>
-            <a:pPr algn="l"/>
-            <a:r>
-              <a:rPr sz="1500" b="0" i="1">
-                <a:solidFill>
-                  <a:srgbClr val="666666"/>
-                </a:solidFill>
-                <a:latin typeface="Calibri"/>
-              </a:rPr>
-              <a:t>Why: The path is fixed (read, classify, route) and only one step needs a model. That is the workflow-with-AI-step pattern.</a:t>
-            </a:r>
-          </a:p>
-        </p:txBody>
-      </p:sp>
-      <p:sp>
-        <p:nvSpPr>
-          <p:cNvPr id="15" name="Rectangle 14"/>
-          <p:cNvSpPr/>
-          <p:nvPr/>
-        </p:nvSpPr>
-        <p:spPr>
-          <a:xfrm>
-            <a:off x="548640" y="6309360"/>
-            <a:ext cx="11094415" cy="19050"/>
-          </a:xfrm>
-          <a:prstGeom prst="rect">
-            <a:avLst/>
-          </a:prstGeom>
-          <a:solidFill>
-            <a:srgbClr val="DDDDDD"/>
-          </a:solidFill>
-          <a:ln>
-            <a:noFill/>
-          </a:ln>
-          <a:effectLst/>
-        </p:spPr>
-        <p:style>
-          <a:lnRef idx="1">
-            <a:schemeClr val="accent1"/>
-          </a:lnRef>
-          <a:fillRef idx="3">
-            <a:schemeClr val="accent1"/>
-          </a:fillRef>
-          <a:effectRef idx="2">
-            <a:schemeClr val="accent1"/>
-          </a:effectRef>
-          <a:fontRef idx="minor">
-            <a:schemeClr val="lt1"/>
-          </a:fontRef>
-        </p:style>
-        <p:txBody>
-          <a:bodyPr rtlCol="0" anchor="ctr"/>
-          <a:lstStyle/>
-          <a:p>
-            <a:pPr algn="ctr"/>
-          </a:p>
-        </p:txBody>
-      </p:sp>
-      <p:sp>
-        <p:nvSpPr>
-          <p:cNvPr id="16" name="TextBox 15"/>
-          <p:cNvSpPr txBox="1"/>
-          <p:nvPr/>
-        </p:nvSpPr>
-        <p:spPr>
-          <a:xfrm>
-            <a:off x="548640" y="6355080"/>
-            <a:ext cx="9144000" cy="365760"/>
-          </a:xfrm>
-          <a:prstGeom prst="rect">
-            <a:avLst/>
-          </a:prstGeom>
-          <a:noFill/>
-        </p:spPr>
-        <p:txBody>
-          <a:bodyPr wrap="square" anchor="t" lIns="45720" rIns="45720" tIns="27432" bIns="27432">
-            <a:spAutoFit/>
-          </a:bodyPr>
-          <a:lstStyle/>
-          <a:p>
-            <a:pPr algn="l"/>
-            <a:r>
-              <a:rPr sz="1000" b="0" i="0">
-                <a:solidFill>
-                  <a:srgbClr val="666666"/>
-                </a:solidFill>
-                <a:latin typeface="Calibri"/>
-              </a:rPr>
-              <a:t>IEEE CS Region 8 AI Caravan 2026 · AI Administrator · Day 1 · Session 1</a:t>
-            </a:r>
-          </a:p>
-        </p:txBody>
-      </p:sp>
-      <p:sp>
-        <p:nvSpPr>
-          <p:cNvPr id="17" name="TextBox 16"/>
-          <p:cNvSpPr txBox="1"/>
-          <p:nvPr/>
-        </p:nvSpPr>
-        <p:spPr>
-          <a:xfrm>
-            <a:off x="10271455" y="6355080"/>
-            <a:ext cx="1371600" cy="365760"/>
-          </a:xfrm>
-          <a:prstGeom prst="rect">
-            <a:avLst/>
-          </a:prstGeom>
-          <a:noFill/>
-        </p:spPr>
-        <p:txBody>
-          <a:bodyPr wrap="square" anchor="t" lIns="45720" rIns="45720" tIns="27432" bIns="27432">
-            <a:spAutoFit/>
-          </a:bodyPr>
-          <a:lstStyle/>
-          <a:p>
-            <a:pPr algn="r"/>
-            <a:r>
-              <a:rPr sz="1000" b="0" i="0">
-                <a:solidFill>
-                  <a:srgbClr val="666666"/>
-                </a:solidFill>
-                <a:latin typeface="Calibri"/>
-              </a:rPr>
-              <a:t>64</a:t>
-            </a:r>
-          </a:p>
-        </p:txBody>
-      </p:sp>
-    </p:spTree>
-  </p:cSld>
-  <p:clrMapOvr>
-    <a:masterClrMapping/>
-  </p:clrMapOvr>
-</p:sld>
-</file>
-
-<file path=ppt/slides/slide65.xml><?xml version="1.0" encoding="utf-8"?>
-<p:sld xmlns:a="http://schemas.openxmlformats.org/drawingml/2006/main" xmlns:p="http://schemas.openxmlformats.org/presentationml/2006/main" xmlns:r="http://schemas.openxmlformats.org/officeDocument/2006/relationships">
-  <p:cSld>
-    <p:spTree>
-      <p:nvGrpSpPr>
-        <p:cNvPr id="1" name=""/>
-        <p:cNvGrpSpPr/>
-        <p:nvPr/>
-      </p:nvGrpSpPr>
-      <p:grpSpPr/>
-      <p:sp>
-        <p:nvSpPr>
-          <p:cNvPr id="2" name="TextBox 1"/>
-          <p:cNvSpPr txBox="1"/>
-          <p:nvPr/>
-        </p:nvSpPr>
-        <p:spPr>
-          <a:xfrm>
-            <a:off x="548640" y="365760"/>
-            <a:ext cx="11094415" cy="777240"/>
-          </a:xfrm>
-          <a:prstGeom prst="rect">
-            <a:avLst/>
-          </a:prstGeom>
-          <a:noFill/>
-        </p:spPr>
-        <p:txBody>
-          <a:bodyPr wrap="square" anchor="b" lIns="45720" rIns="45720" tIns="27432" bIns="27432">
-            <a:spAutoFit/>
-          </a:bodyPr>
-          <a:lstStyle/>
-          <a:p>
-            <a:pPr algn="l"/>
-            <a:r>
-              <a:rPr sz="3000" b="1" i="0">
-                <a:solidFill>
-                  <a:srgbClr val="111111"/>
-                </a:solidFill>
-                <a:latin typeface="Calibri"/>
-              </a:rPr>
-              <a:t>Question 4</a:t>
-            </a:r>
-          </a:p>
-        </p:txBody>
-      </p:sp>
-      <p:sp>
-        <p:nvSpPr>
-          <p:cNvPr id="3" name="Rectangle 2"/>
-          <p:cNvSpPr/>
-          <p:nvPr/>
-        </p:nvSpPr>
-        <p:spPr>
-          <a:xfrm>
-            <a:off x="548640" y="1115568"/>
-            <a:ext cx="1097280" cy="38100"/>
-          </a:xfrm>
-          <a:prstGeom prst="rect">
-            <a:avLst/>
-          </a:prstGeom>
-          <a:solidFill>
-            <a:srgbClr val="F7A11A"/>
-          </a:solidFill>
-          <a:ln>
-            <a:noFill/>
-          </a:ln>
-          <a:effectLst/>
-        </p:spPr>
-        <p:style>
-          <a:lnRef idx="1">
-            <a:schemeClr val="accent1"/>
-          </a:lnRef>
-          <a:fillRef idx="3">
-            <a:schemeClr val="accent1"/>
-          </a:fillRef>
-          <a:effectRef idx="2">
-            <a:schemeClr val="accent1"/>
-          </a:effectRef>
-          <a:fontRef idx="minor">
-            <a:schemeClr val="lt1"/>
-          </a:fontRef>
-        </p:style>
-        <p:txBody>
-          <a:bodyPr rtlCol="0" anchor="ctr"/>
-          <a:lstStyle/>
-          <a:p>
-            <a:pPr algn="ctr"/>
-          </a:p>
-        </p:txBody>
-      </p:sp>
-      <p:sp>
-        <p:nvSpPr>
-          <p:cNvPr id="4" name="Rectangle 3"/>
-          <p:cNvSpPr/>
-          <p:nvPr/>
-        </p:nvSpPr>
-        <p:spPr>
-          <a:xfrm>
-            <a:off x="1645920" y="1115568"/>
-            <a:ext cx="9997135" cy="19050"/>
-          </a:xfrm>
-          <a:prstGeom prst="rect">
-            <a:avLst/>
-          </a:prstGeom>
-          <a:solidFill>
-            <a:srgbClr val="DDDDDD"/>
-          </a:solidFill>
-          <a:ln>
-            <a:noFill/>
-          </a:ln>
-          <a:effectLst/>
-        </p:spPr>
-        <p:style>
-          <a:lnRef idx="1">
-            <a:schemeClr val="accent1"/>
-          </a:lnRef>
-          <a:fillRef idx="3">
-            <a:schemeClr val="accent1"/>
-          </a:fillRef>
-          <a:effectRef idx="2">
-            <a:schemeClr val="accent1"/>
-          </a:effectRef>
-          <a:fontRef idx="minor">
-            <a:schemeClr val="lt1"/>
-          </a:fontRef>
-        </p:style>
-        <p:txBody>
-          <a:bodyPr rtlCol="0" anchor="ctr"/>
-          <a:lstStyle/>
-          <a:p>
-            <a:pPr algn="ctr"/>
-          </a:p>
-        </p:txBody>
-      </p:sp>
-      <p:sp>
-        <p:nvSpPr>
-          <p:cNvPr id="5" name="TextBox 4"/>
-          <p:cNvSpPr txBox="1"/>
-          <p:nvPr/>
-        </p:nvSpPr>
-        <p:spPr>
-          <a:xfrm>
-            <a:off x="548640" y="1325880"/>
-            <a:ext cx="11094415" cy="1097280"/>
-          </a:xfrm>
-          <a:prstGeom prst="rect">
-            <a:avLst/>
-          </a:prstGeom>
-          <a:noFill/>
-        </p:spPr>
-        <p:txBody>
-          <a:bodyPr wrap="square" anchor="t" lIns="45720" rIns="45720" tIns="27432" bIns="27432">
-            <a:spAutoFit/>
-          </a:bodyPr>
-          <a:lstStyle/>
-          <a:p>
-            <a:pPr algn="l"/>
-            <a:r>
-              <a:rPr sz="2200" b="1" i="0">
-                <a:solidFill>
-                  <a:srgbClr val="111111"/>
-                </a:solidFill>
-                <a:latin typeface="Calibri"/>
-              </a:rPr>
-              <a:t>Why does an agent need an iteration limit?</a:t>
-            </a:r>
-          </a:p>
-        </p:txBody>
-      </p:sp>
-      <p:sp>
-        <p:nvSpPr>
-          <p:cNvPr id="6" name="Rounded Rectangle 5"/>
-          <p:cNvSpPr/>
-          <p:nvPr/>
-        </p:nvSpPr>
-        <p:spPr>
-          <a:xfrm>
-            <a:off x="548640" y="2514600"/>
-            <a:ext cx="11094415" cy="566928"/>
-          </a:xfrm>
-          <a:prstGeom prst="roundRect">
-            <a:avLst/>
-          </a:prstGeom>
-          <a:solidFill>
-            <a:srgbClr val="F2F2F2"/>
-          </a:solidFill>
-          <a:ln w="12700">
-            <a:solidFill>
-              <a:srgbClr val="DDDDDD"/>
-            </a:solidFill>
-          </a:ln>
-          <a:effectLst/>
-        </p:spPr>
-        <p:style>
-          <a:lnRef idx="1">
-            <a:schemeClr val="accent1"/>
-          </a:lnRef>
-          <a:fillRef idx="3">
-            <a:schemeClr val="accent1"/>
-          </a:fillRef>
-          <a:effectRef idx="2">
-            <a:schemeClr val="accent1"/>
-          </a:effectRef>
-          <a:fontRef idx="minor">
-            <a:schemeClr val="lt1"/>
-          </a:fontRef>
-        </p:style>
-        <p:txBody>
-          <a:bodyPr rtlCol="0" anchor="ctr"/>
-          <a:lstStyle/>
-          <a:p>
-            <a:pPr algn="ctr"/>
-          </a:p>
-        </p:txBody>
-      </p:sp>
-      <p:sp>
-        <p:nvSpPr>
-          <p:cNvPr id="7" name="TextBox 6"/>
-          <p:cNvSpPr txBox="1"/>
-          <p:nvPr/>
-        </p:nvSpPr>
-        <p:spPr>
-          <a:xfrm>
-            <a:off x="731520" y="2587752"/>
-            <a:ext cx="10728655" cy="457200"/>
-          </a:xfrm>
-          <a:prstGeom prst="rect">
-            <a:avLst/>
-          </a:prstGeom>
-          <a:noFill/>
-        </p:spPr>
-        <p:txBody>
-          <a:bodyPr wrap="square" anchor="ctr" lIns="45720" rIns="45720" tIns="27432" bIns="27432">
-            <a:spAutoFit/>
-          </a:bodyPr>
-          <a:lstStyle/>
-          <a:p>
-            <a:pPr algn="l"/>
-            <a:r>
-              <a:rPr sz="1700" b="0" i="0">
-                <a:solidFill>
-                  <a:srgbClr val="111111"/>
-                </a:solidFill>
-                <a:latin typeface="Calibri"/>
-              </a:rPr>
-              <a:t>A.  To make it run faster</a:t>
-            </a:r>
-          </a:p>
-        </p:txBody>
-      </p:sp>
-      <p:sp>
-        <p:nvSpPr>
-          <p:cNvPr id="8" name="Rounded Rectangle 7"/>
-          <p:cNvSpPr/>
-          <p:nvPr/>
-        </p:nvSpPr>
-        <p:spPr>
-          <a:xfrm>
-            <a:off x="548640" y="3172968"/>
-            <a:ext cx="11094415" cy="566928"/>
-          </a:xfrm>
-          <a:prstGeom prst="roundRect">
-            <a:avLst/>
-          </a:prstGeom>
-          <a:solidFill>
-            <a:srgbClr val="F2F2F2"/>
-          </a:solidFill>
-          <a:ln w="12700">
-            <a:solidFill>
-              <a:srgbClr val="DDDDDD"/>
-            </a:solidFill>
-          </a:ln>
-          <a:effectLst/>
-        </p:spPr>
-        <p:style>
-          <a:lnRef idx="1">
-            <a:schemeClr val="accent1"/>
-          </a:lnRef>
-          <a:fillRef idx="3">
-            <a:schemeClr val="accent1"/>
-          </a:fillRef>
-          <a:effectRef idx="2">
-            <a:schemeClr val="accent1"/>
-          </a:effectRef>
-          <a:fontRef idx="minor">
-            <a:schemeClr val="lt1"/>
-          </a:fontRef>
-        </p:style>
-        <p:txBody>
-          <a:bodyPr rtlCol="0" anchor="ctr"/>
-          <a:lstStyle/>
-          <a:p>
-            <a:pPr algn="ctr"/>
-          </a:p>
-        </p:txBody>
-      </p:sp>
-      <p:sp>
-        <p:nvSpPr>
-          <p:cNvPr id="9" name="TextBox 8"/>
-          <p:cNvSpPr txBox="1"/>
-          <p:nvPr/>
-        </p:nvSpPr>
-        <p:spPr>
-          <a:xfrm>
-            <a:off x="731520" y="3246120"/>
-            <a:ext cx="10728655" cy="457200"/>
-          </a:xfrm>
-          <a:prstGeom prst="rect">
-            <a:avLst/>
-          </a:prstGeom>
-          <a:noFill/>
-        </p:spPr>
-        <p:txBody>
-          <a:bodyPr wrap="square" anchor="ctr" lIns="45720" rIns="45720" tIns="27432" bIns="27432">
-            <a:spAutoFit/>
-          </a:bodyPr>
-          <a:lstStyle/>
-          <a:p>
-            <a:pPr algn="l"/>
-            <a:r>
-              <a:rPr sz="1700" b="0" i="0">
-                <a:solidFill>
-                  <a:srgbClr val="111111"/>
-                </a:solidFill>
-                <a:latin typeface="Calibri"/>
-              </a:rPr>
-              <a:t>B.  Because each loop costs tokens and a confused agent can keep going in the wrong direction</a:t>
-            </a:r>
-          </a:p>
-        </p:txBody>
-      </p:sp>
-      <p:sp>
-        <p:nvSpPr>
-          <p:cNvPr id="10" name="Rounded Rectangle 9"/>
-          <p:cNvSpPr/>
-          <p:nvPr/>
-        </p:nvSpPr>
-        <p:spPr>
-          <a:xfrm>
-            <a:off x="548640" y="3831336"/>
-            <a:ext cx="11094415" cy="566928"/>
-          </a:xfrm>
-          <a:prstGeom prst="roundRect">
-            <a:avLst/>
-          </a:prstGeom>
-          <a:solidFill>
-            <a:srgbClr val="F2F2F2"/>
-          </a:solidFill>
-          <a:ln w="12700">
-            <a:solidFill>
-              <a:srgbClr val="DDDDDD"/>
-            </a:solidFill>
-          </a:ln>
-          <a:effectLst/>
-        </p:spPr>
-        <p:style>
-          <a:lnRef idx="1">
-            <a:schemeClr val="accent1"/>
-          </a:lnRef>
-          <a:fillRef idx="3">
-            <a:schemeClr val="accent1"/>
-          </a:fillRef>
-          <a:effectRef idx="2">
-            <a:schemeClr val="accent1"/>
-          </a:effectRef>
-          <a:fontRef idx="minor">
-            <a:schemeClr val="lt1"/>
-          </a:fontRef>
-        </p:style>
-        <p:txBody>
-          <a:bodyPr rtlCol="0" anchor="ctr"/>
-          <a:lstStyle/>
-          <a:p>
-            <a:pPr algn="ctr"/>
-          </a:p>
-        </p:txBody>
-      </p:sp>
-      <p:sp>
-        <p:nvSpPr>
-          <p:cNvPr id="11" name="TextBox 10"/>
-          <p:cNvSpPr txBox="1"/>
-          <p:nvPr/>
-        </p:nvSpPr>
-        <p:spPr>
-          <a:xfrm>
-            <a:off x="731520" y="3904488"/>
-            <a:ext cx="10728655" cy="457200"/>
-          </a:xfrm>
-          <a:prstGeom prst="rect">
-            <a:avLst/>
-          </a:prstGeom>
-          <a:noFill/>
-        </p:spPr>
-        <p:txBody>
-          <a:bodyPr wrap="square" anchor="ctr" lIns="45720" rIns="45720" tIns="27432" bIns="27432">
-            <a:spAutoFit/>
-          </a:bodyPr>
-          <a:lstStyle/>
-          <a:p>
-            <a:pPr algn="l"/>
-            <a:r>
-              <a:rPr sz="1700" b="0" i="0">
-                <a:solidFill>
-                  <a:srgbClr val="111111"/>
-                </a:solidFill>
-                <a:latin typeface="Calibri"/>
-              </a:rPr>
-              <a:t>C.  So it can use more tools</a:t>
-            </a:r>
-          </a:p>
-        </p:txBody>
-      </p:sp>
-      <p:sp>
-        <p:nvSpPr>
-          <p:cNvPr id="12" name="Rounded Rectangle 11"/>
-          <p:cNvSpPr/>
-          <p:nvPr/>
-        </p:nvSpPr>
-        <p:spPr>
-          <a:xfrm>
-            <a:off x="548640" y="4489704"/>
-            <a:ext cx="11094415" cy="566928"/>
-          </a:xfrm>
-          <a:prstGeom prst="roundRect">
-            <a:avLst/>
-          </a:prstGeom>
-          <a:solidFill>
-            <a:srgbClr val="F2F2F2"/>
-          </a:solidFill>
-          <a:ln w="12700">
-            <a:solidFill>
-              <a:srgbClr val="DDDDDD"/>
-            </a:solidFill>
-          </a:ln>
-          <a:effectLst/>
-        </p:spPr>
-        <p:style>
-          <a:lnRef idx="1">
-            <a:schemeClr val="accent1"/>
-          </a:lnRef>
-          <a:fillRef idx="3">
-            <a:schemeClr val="accent1"/>
-          </a:fillRef>
-          <a:effectRef idx="2">
-            <a:schemeClr val="accent1"/>
-          </a:effectRef>
-          <a:fontRef idx="minor">
-            <a:schemeClr val="lt1"/>
-          </a:fontRef>
-        </p:style>
-        <p:txBody>
-          <a:bodyPr rtlCol="0" anchor="ctr"/>
-          <a:lstStyle/>
-          <a:p>
-            <a:pPr algn="ctr"/>
-          </a:p>
-        </p:txBody>
-      </p:sp>
-      <p:sp>
-        <p:nvSpPr>
-          <p:cNvPr id="13" name="TextBox 12"/>
-          <p:cNvSpPr txBox="1"/>
-          <p:nvPr/>
-        </p:nvSpPr>
-        <p:spPr>
-          <a:xfrm>
-            <a:off x="731520" y="4562856"/>
-            <a:ext cx="10728655" cy="457200"/>
-          </a:xfrm>
-          <a:prstGeom prst="rect">
-            <a:avLst/>
-          </a:prstGeom>
-          <a:noFill/>
-        </p:spPr>
-        <p:txBody>
-          <a:bodyPr wrap="square" anchor="ctr" lIns="45720" rIns="45720" tIns="27432" bIns="27432">
-            <a:spAutoFit/>
-          </a:bodyPr>
-          <a:lstStyle/>
-          <a:p>
-            <a:pPr algn="l"/>
-            <a:r>
-              <a:rPr sz="1700" b="0" i="0">
-                <a:solidFill>
-                  <a:srgbClr val="111111"/>
-                </a:solidFill>
-                <a:latin typeface="Calibri"/>
-              </a:rPr>
-              <a:t>D.  Because models forget after ten steps</a:t>
-            </a:r>
-          </a:p>
-        </p:txBody>
-      </p:sp>
-      <p:sp>
-        <p:nvSpPr>
-          <p:cNvPr id="14" name="Rectangle 13"/>
-          <p:cNvSpPr/>
-          <p:nvPr/>
-        </p:nvSpPr>
-        <p:spPr>
-          <a:xfrm>
-            <a:off x="548640" y="6309360"/>
-            <a:ext cx="11094415" cy="19050"/>
-          </a:xfrm>
-          <a:prstGeom prst="rect">
-            <a:avLst/>
-          </a:prstGeom>
-          <a:solidFill>
-            <a:srgbClr val="DDDDDD"/>
-          </a:solidFill>
-          <a:ln>
-            <a:noFill/>
-          </a:ln>
-          <a:effectLst/>
-        </p:spPr>
-        <p:style>
-          <a:lnRef idx="1">
-            <a:schemeClr val="accent1"/>
-          </a:lnRef>
-          <a:fillRef idx="3">
-            <a:schemeClr val="accent1"/>
-          </a:fillRef>
-          <a:effectRef idx="2">
-            <a:schemeClr val="accent1"/>
-          </a:effectRef>
-          <a:fontRef idx="minor">
-            <a:schemeClr val="lt1"/>
-          </a:fontRef>
-        </p:style>
-        <p:txBody>
-          <a:bodyPr rtlCol="0" anchor="ctr"/>
-          <a:lstStyle/>
-          <a:p>
-            <a:pPr algn="ctr"/>
-          </a:p>
-        </p:txBody>
-      </p:sp>
-      <p:sp>
-        <p:nvSpPr>
-          <p:cNvPr id="15" name="TextBox 14"/>
-          <p:cNvSpPr txBox="1"/>
-          <p:nvPr/>
-        </p:nvSpPr>
-        <p:spPr>
-          <a:xfrm>
-            <a:off x="548640" y="6355080"/>
-            <a:ext cx="9144000" cy="365760"/>
-          </a:xfrm>
-          <a:prstGeom prst="rect">
-            <a:avLst/>
-          </a:prstGeom>
-          <a:noFill/>
-        </p:spPr>
-        <p:txBody>
-          <a:bodyPr wrap="square" anchor="t" lIns="45720" rIns="45720" tIns="27432" bIns="27432">
-            <a:spAutoFit/>
-          </a:bodyPr>
-          <a:lstStyle/>
-          <a:p>
-            <a:pPr algn="l"/>
-            <a:r>
-              <a:rPr sz="1000" b="0" i="0">
-                <a:solidFill>
-                  <a:srgbClr val="666666"/>
-                </a:solidFill>
-                <a:latin typeface="Calibri"/>
-              </a:rPr>
-              <a:t>IEEE CS Region 8 AI Caravan 2026 · AI Administrator · Day 1 · Session 1</a:t>
-            </a:r>
-          </a:p>
-        </p:txBody>
-      </p:sp>
-      <p:sp>
-        <p:nvSpPr>
-          <p:cNvPr id="16" name="TextBox 15"/>
-          <p:cNvSpPr txBox="1"/>
-          <p:nvPr/>
-        </p:nvSpPr>
-        <p:spPr>
-          <a:xfrm>
-            <a:off x="10271455" y="6355080"/>
-            <a:ext cx="1371600" cy="365760"/>
-          </a:xfrm>
-          <a:prstGeom prst="rect">
-            <a:avLst/>
-          </a:prstGeom>
-          <a:noFill/>
-        </p:spPr>
-        <p:txBody>
-          <a:bodyPr wrap="square" anchor="t" lIns="45720" rIns="45720" tIns="27432" bIns="27432">
-            <a:spAutoFit/>
-          </a:bodyPr>
-          <a:lstStyle/>
-          <a:p>
-            <a:pPr algn="r"/>
-            <a:r>
-              <a:rPr sz="1000" b="0" i="0">
-                <a:solidFill>
-                  <a:srgbClr val="666666"/>
-                </a:solidFill>
-                <a:latin typeface="Calibri"/>
-              </a:rPr>
-              <a:t>65</a:t>
-            </a:r>
-          </a:p>
-        </p:txBody>
-      </p:sp>
-    </p:spTree>
-  </p:cSld>
-  <p:clrMapOvr>
-    <a:masterClrMapping/>
-  </p:clrMapOvr>
-</p:sld>
-</file>
-
-<file path=ppt/slides/slide66.xml><?xml version="1.0" encoding="utf-8"?>
-<p:sld xmlns:a="http://schemas.openxmlformats.org/drawingml/2006/main" xmlns:p="http://schemas.openxmlformats.org/presentationml/2006/main" xmlns:r="http://schemas.openxmlformats.org/officeDocument/2006/relationships">
-  <p:cSld>
-    <p:spTree>
-      <p:nvGrpSpPr>
-        <p:cNvPr id="1" name=""/>
-        <p:cNvGrpSpPr/>
-        <p:nvPr/>
-      </p:nvGrpSpPr>
-      <p:grpSpPr/>
-      <p:sp>
-        <p:nvSpPr>
-          <p:cNvPr id="2" name="TextBox 1"/>
-          <p:cNvSpPr txBox="1"/>
-          <p:nvPr/>
-        </p:nvSpPr>
-        <p:spPr>
-          <a:xfrm>
-            <a:off x="548640" y="365760"/>
-            <a:ext cx="11094415" cy="777240"/>
-          </a:xfrm>
-          <a:prstGeom prst="rect">
-            <a:avLst/>
-          </a:prstGeom>
-          <a:noFill/>
-        </p:spPr>
-        <p:txBody>
-          <a:bodyPr wrap="square" anchor="b" lIns="45720" rIns="45720" tIns="27432" bIns="27432">
-            <a:spAutoFit/>
-          </a:bodyPr>
-          <a:lstStyle/>
-          <a:p>
-            <a:pPr algn="l"/>
-            <a:r>
-              <a:rPr sz="3000" b="1" i="0">
-                <a:solidFill>
-                  <a:srgbClr val="111111"/>
-                </a:solidFill>
-                <a:latin typeface="Calibri"/>
-              </a:rPr>
-              <a:t>Question 4 · answer</a:t>
-            </a:r>
-          </a:p>
-        </p:txBody>
-      </p:sp>
-      <p:sp>
-        <p:nvSpPr>
-          <p:cNvPr id="3" name="Rectangle 2"/>
-          <p:cNvSpPr/>
-          <p:nvPr/>
-        </p:nvSpPr>
-        <p:spPr>
-          <a:xfrm>
-            <a:off x="548640" y="1115568"/>
-            <a:ext cx="1097280" cy="38100"/>
-          </a:xfrm>
-          <a:prstGeom prst="rect">
-            <a:avLst/>
-          </a:prstGeom>
-          <a:solidFill>
-            <a:srgbClr val="F7A11A"/>
-          </a:solidFill>
-          <a:ln>
-            <a:noFill/>
-          </a:ln>
-          <a:effectLst/>
-        </p:spPr>
-        <p:style>
-          <a:lnRef idx="1">
-            <a:schemeClr val="accent1"/>
-          </a:lnRef>
-          <a:fillRef idx="3">
-            <a:schemeClr val="accent1"/>
-          </a:fillRef>
-          <a:effectRef idx="2">
-            <a:schemeClr val="accent1"/>
-          </a:effectRef>
-          <a:fontRef idx="minor">
-            <a:schemeClr val="lt1"/>
-          </a:fontRef>
-        </p:style>
-        <p:txBody>
-          <a:bodyPr rtlCol="0" anchor="ctr"/>
-          <a:lstStyle/>
-          <a:p>
-            <a:pPr algn="ctr"/>
-          </a:p>
-        </p:txBody>
-      </p:sp>
-      <p:sp>
-        <p:nvSpPr>
-          <p:cNvPr id="4" name="Rectangle 3"/>
-          <p:cNvSpPr/>
-          <p:nvPr/>
-        </p:nvSpPr>
-        <p:spPr>
-          <a:xfrm>
-            <a:off x="1645920" y="1115568"/>
-            <a:ext cx="9997135" cy="19050"/>
-          </a:xfrm>
-          <a:prstGeom prst="rect">
-            <a:avLst/>
-          </a:prstGeom>
-          <a:solidFill>
-            <a:srgbClr val="DDDDDD"/>
-          </a:solidFill>
-          <a:ln>
-            <a:noFill/>
-          </a:ln>
-          <a:effectLst/>
-        </p:spPr>
-        <p:style>
-          <a:lnRef idx="1">
-            <a:schemeClr val="accent1"/>
-          </a:lnRef>
-          <a:fillRef idx="3">
-            <a:schemeClr val="accent1"/>
-          </a:fillRef>
-          <a:effectRef idx="2">
-            <a:schemeClr val="accent1"/>
-          </a:effectRef>
-          <a:fontRef idx="minor">
-            <a:schemeClr val="lt1"/>
-          </a:fontRef>
-        </p:style>
-        <p:txBody>
-          <a:bodyPr rtlCol="0" anchor="ctr"/>
-          <a:lstStyle/>
-          <a:p>
-            <a:pPr algn="ctr"/>
-          </a:p>
-        </p:txBody>
-      </p:sp>
-      <p:sp>
-        <p:nvSpPr>
-          <p:cNvPr id="5" name="TextBox 4"/>
-          <p:cNvSpPr txBox="1"/>
-          <p:nvPr/>
-        </p:nvSpPr>
-        <p:spPr>
-          <a:xfrm>
-            <a:off x="548640" y="1325880"/>
-            <a:ext cx="11094415" cy="1097280"/>
-          </a:xfrm>
-          <a:prstGeom prst="rect">
-            <a:avLst/>
-          </a:prstGeom>
-          <a:noFill/>
-        </p:spPr>
-        <p:txBody>
-          <a:bodyPr wrap="square" anchor="t" lIns="45720" rIns="45720" tIns="27432" bIns="27432">
-            <a:spAutoFit/>
-          </a:bodyPr>
-          <a:lstStyle/>
-          <a:p>
-            <a:pPr algn="l"/>
-            <a:r>
-              <a:rPr sz="2200" b="1" i="0">
-                <a:solidFill>
-                  <a:srgbClr val="111111"/>
-                </a:solidFill>
-                <a:latin typeface="Calibri"/>
-              </a:rPr>
-              <a:t>Why does an agent need an iteration limit?</a:t>
-            </a:r>
-          </a:p>
-        </p:txBody>
-      </p:sp>
-      <p:sp>
-        <p:nvSpPr>
-          <p:cNvPr id="6" name="Rounded Rectangle 5"/>
-          <p:cNvSpPr/>
-          <p:nvPr/>
-        </p:nvSpPr>
-        <p:spPr>
-          <a:xfrm>
-            <a:off x="548640" y="2514600"/>
-            <a:ext cx="11094415" cy="566928"/>
-          </a:xfrm>
-          <a:prstGeom prst="roundRect">
-            <a:avLst/>
-          </a:prstGeom>
-          <a:solidFill>
-            <a:srgbClr val="F2F2F2"/>
-          </a:solidFill>
-          <a:ln w="12700">
-            <a:solidFill>
-              <a:srgbClr val="DDDDDD"/>
-            </a:solidFill>
-          </a:ln>
-          <a:effectLst/>
-        </p:spPr>
-        <p:style>
-          <a:lnRef idx="1">
-            <a:schemeClr val="accent1"/>
-          </a:lnRef>
-          <a:fillRef idx="3">
-            <a:schemeClr val="accent1"/>
-          </a:fillRef>
-          <a:effectRef idx="2">
-            <a:schemeClr val="accent1"/>
-          </a:effectRef>
-          <a:fontRef idx="minor">
-            <a:schemeClr val="lt1"/>
-          </a:fontRef>
-        </p:style>
-        <p:txBody>
-          <a:bodyPr rtlCol="0" anchor="ctr"/>
-          <a:lstStyle/>
-          <a:p>
-            <a:pPr algn="ctr"/>
-          </a:p>
-        </p:txBody>
-      </p:sp>
-      <p:sp>
-        <p:nvSpPr>
-          <p:cNvPr id="7" name="TextBox 6"/>
-          <p:cNvSpPr txBox="1"/>
-          <p:nvPr/>
-        </p:nvSpPr>
-        <p:spPr>
-          <a:xfrm>
-            <a:off x="731520" y="2587752"/>
-            <a:ext cx="10728655" cy="457200"/>
-          </a:xfrm>
-          <a:prstGeom prst="rect">
-            <a:avLst/>
-          </a:prstGeom>
-          <a:noFill/>
-        </p:spPr>
-        <p:txBody>
-          <a:bodyPr wrap="square" anchor="ctr" lIns="45720" rIns="45720" tIns="27432" bIns="27432">
-            <a:spAutoFit/>
-          </a:bodyPr>
-          <a:lstStyle/>
-          <a:p>
-            <a:pPr algn="l"/>
-            <a:r>
-              <a:rPr sz="1700" b="0" i="0">
-                <a:solidFill>
-                  <a:srgbClr val="111111"/>
-                </a:solidFill>
-                <a:latin typeface="Calibri"/>
-              </a:rPr>
-              <a:t>A.  To make it run faster</a:t>
-            </a:r>
-          </a:p>
-        </p:txBody>
-      </p:sp>
-      <p:sp>
-        <p:nvSpPr>
-          <p:cNvPr id="8" name="Rounded Rectangle 7"/>
-          <p:cNvSpPr/>
-          <p:nvPr/>
-        </p:nvSpPr>
-        <p:spPr>
-          <a:xfrm>
-            <a:off x="548640" y="3172968"/>
-            <a:ext cx="11094415" cy="566928"/>
-          </a:xfrm>
-          <a:prstGeom prst="roundRect">
-            <a:avLst/>
-          </a:prstGeom>
-          <a:solidFill>
-            <a:srgbClr val="FFFFFF"/>
-          </a:solidFill>
-          <a:ln w="31750">
-            <a:solidFill>
-              <a:srgbClr val="F7A11A"/>
-            </a:solidFill>
-          </a:ln>
-          <a:effectLst/>
-        </p:spPr>
-        <p:style>
-          <a:lnRef idx="1">
-            <a:schemeClr val="accent1"/>
-          </a:lnRef>
-          <a:fillRef idx="3">
-            <a:schemeClr val="accent1"/>
-          </a:fillRef>
-          <a:effectRef idx="2">
-            <a:schemeClr val="accent1"/>
-          </a:effectRef>
-          <a:fontRef idx="minor">
-            <a:schemeClr val="lt1"/>
-          </a:fontRef>
-        </p:style>
-        <p:txBody>
-          <a:bodyPr rtlCol="0" anchor="ctr"/>
-          <a:lstStyle/>
-          <a:p>
-            <a:pPr algn="ctr"/>
-          </a:p>
-        </p:txBody>
-      </p:sp>
-      <p:sp>
-        <p:nvSpPr>
-          <p:cNvPr id="9" name="TextBox 8"/>
-          <p:cNvSpPr txBox="1"/>
-          <p:nvPr/>
-        </p:nvSpPr>
-        <p:spPr>
-          <a:xfrm>
-            <a:off x="731520" y="3246120"/>
-            <a:ext cx="10728655" cy="457200"/>
-          </a:xfrm>
-          <a:prstGeom prst="rect">
-            <a:avLst/>
-          </a:prstGeom>
-          <a:noFill/>
-        </p:spPr>
-        <p:txBody>
-          <a:bodyPr wrap="square" anchor="ctr" lIns="45720" rIns="45720" tIns="27432" bIns="27432">
-            <a:spAutoFit/>
-          </a:bodyPr>
-          <a:lstStyle/>
-          <a:p>
-            <a:pPr algn="l"/>
-            <a:r>
-              <a:rPr sz="1700" b="1" i="0">
-                <a:solidFill>
-                  <a:srgbClr val="111111"/>
-                </a:solidFill>
-                <a:latin typeface="Calibri"/>
-              </a:rPr>
-              <a:t>B.  Because each loop costs tokens and a confused agent can keep going in the wrong direction</a:t>
-            </a:r>
-          </a:p>
-        </p:txBody>
-      </p:sp>
-      <p:sp>
-        <p:nvSpPr>
-          <p:cNvPr id="10" name="Rounded Rectangle 9"/>
-          <p:cNvSpPr/>
-          <p:nvPr/>
-        </p:nvSpPr>
-        <p:spPr>
-          <a:xfrm>
-            <a:off x="548640" y="3831336"/>
-            <a:ext cx="11094415" cy="566928"/>
-          </a:xfrm>
-          <a:prstGeom prst="roundRect">
-            <a:avLst/>
-          </a:prstGeom>
-          <a:solidFill>
-            <a:srgbClr val="F2F2F2"/>
-          </a:solidFill>
-          <a:ln w="12700">
-            <a:solidFill>
-              <a:srgbClr val="DDDDDD"/>
-            </a:solidFill>
-          </a:ln>
-          <a:effectLst/>
-        </p:spPr>
-        <p:style>
-          <a:lnRef idx="1">
-            <a:schemeClr val="accent1"/>
-          </a:lnRef>
-          <a:fillRef idx="3">
-            <a:schemeClr val="accent1"/>
-          </a:fillRef>
-          <a:effectRef idx="2">
-            <a:schemeClr val="accent1"/>
-          </a:effectRef>
-          <a:fontRef idx="minor">
-            <a:schemeClr val="lt1"/>
-          </a:fontRef>
-        </p:style>
-        <p:txBody>
-          <a:bodyPr rtlCol="0" anchor="ctr"/>
-          <a:lstStyle/>
-          <a:p>
-            <a:pPr algn="ctr"/>
-          </a:p>
-        </p:txBody>
-      </p:sp>
-      <p:sp>
-        <p:nvSpPr>
-          <p:cNvPr id="11" name="TextBox 10"/>
-          <p:cNvSpPr txBox="1"/>
-          <p:nvPr/>
-        </p:nvSpPr>
-        <p:spPr>
-          <a:xfrm>
-            <a:off x="731520" y="3904488"/>
-            <a:ext cx="10728655" cy="457200"/>
-          </a:xfrm>
-          <a:prstGeom prst="rect">
-            <a:avLst/>
-          </a:prstGeom>
-          <a:noFill/>
-        </p:spPr>
-        <p:txBody>
-          <a:bodyPr wrap="square" anchor="ctr" lIns="45720" rIns="45720" tIns="27432" bIns="27432">
-            <a:spAutoFit/>
-          </a:bodyPr>
-          <a:lstStyle/>
-          <a:p>
-            <a:pPr algn="l"/>
-            <a:r>
-              <a:rPr sz="1700" b="0" i="0">
-                <a:solidFill>
-                  <a:srgbClr val="111111"/>
-                </a:solidFill>
-                <a:latin typeface="Calibri"/>
-              </a:rPr>
-              <a:t>C.  So it can use more tools</a:t>
-            </a:r>
-          </a:p>
-        </p:txBody>
-      </p:sp>
-      <p:sp>
-        <p:nvSpPr>
-          <p:cNvPr id="12" name="Rounded Rectangle 11"/>
-          <p:cNvSpPr/>
-          <p:nvPr/>
-        </p:nvSpPr>
-        <p:spPr>
-          <a:xfrm>
-            <a:off x="548640" y="4489704"/>
-            <a:ext cx="11094415" cy="566928"/>
-          </a:xfrm>
-          <a:prstGeom prst="roundRect">
-            <a:avLst/>
-          </a:prstGeom>
-          <a:solidFill>
-            <a:srgbClr val="F2F2F2"/>
-          </a:solidFill>
-          <a:ln w="12700">
-            <a:solidFill>
-              <a:srgbClr val="DDDDDD"/>
-            </a:solidFill>
-          </a:ln>
-          <a:effectLst/>
-        </p:spPr>
-        <p:style>
-          <a:lnRef idx="1">
-            <a:schemeClr val="accent1"/>
-          </a:lnRef>
-          <a:fillRef idx="3">
-            <a:schemeClr val="accent1"/>
-          </a:fillRef>
-          <a:effectRef idx="2">
-            <a:schemeClr val="accent1"/>
-          </a:effectRef>
-          <a:fontRef idx="minor">
-            <a:schemeClr val="lt1"/>
-          </a:fontRef>
-        </p:style>
-        <p:txBody>
-          <a:bodyPr rtlCol="0" anchor="ctr"/>
-          <a:lstStyle/>
-          <a:p>
-            <a:pPr algn="ctr"/>
-          </a:p>
-        </p:txBody>
-      </p:sp>
-      <p:sp>
-        <p:nvSpPr>
-          <p:cNvPr id="13" name="TextBox 12"/>
-          <p:cNvSpPr txBox="1"/>
-          <p:nvPr/>
-        </p:nvSpPr>
-        <p:spPr>
-          <a:xfrm>
-            <a:off x="731520" y="4562856"/>
-            <a:ext cx="10728655" cy="457200"/>
-          </a:xfrm>
-          <a:prstGeom prst="rect">
-            <a:avLst/>
-          </a:prstGeom>
-          <a:noFill/>
-        </p:spPr>
-        <p:txBody>
-          <a:bodyPr wrap="square" anchor="ctr" lIns="45720" rIns="45720" tIns="27432" bIns="27432">
-            <a:spAutoFit/>
-          </a:bodyPr>
-          <a:lstStyle/>
-          <a:p>
-            <a:pPr algn="l"/>
-            <a:r>
-              <a:rPr sz="1700" b="0" i="0">
-                <a:solidFill>
-                  <a:srgbClr val="111111"/>
-                </a:solidFill>
-                <a:latin typeface="Calibri"/>
-              </a:rPr>
-              <a:t>D.  Because models forget after ten steps</a:t>
-            </a:r>
-          </a:p>
-        </p:txBody>
-      </p:sp>
-      <p:sp>
-        <p:nvSpPr>
-          <p:cNvPr id="14" name="TextBox 13"/>
-          <p:cNvSpPr txBox="1"/>
-          <p:nvPr/>
-        </p:nvSpPr>
-        <p:spPr>
-          <a:xfrm>
-            <a:off x="548640" y="5239512"/>
-            <a:ext cx="11094415" cy="822960"/>
-          </a:xfrm>
-          <a:prstGeom prst="rect">
-            <a:avLst/>
-          </a:prstGeom>
-          <a:noFill/>
-        </p:spPr>
-        <p:txBody>
-          <a:bodyPr wrap="square" anchor="t" lIns="45720" rIns="45720" tIns="27432" bIns="27432">
-            <a:spAutoFit/>
-          </a:bodyPr>
-          <a:lstStyle/>
-          <a:p>
-            <a:pPr algn="l"/>
-            <a:r>
-              <a:rPr sz="1500" b="0" i="1">
-                <a:solidFill>
-                  <a:srgbClr val="666666"/>
-                </a:solidFill>
-                <a:latin typeface="Calibri"/>
-              </a:rPr>
-              <a:t>Why: Without a limit a stuck agent burns money and may take more actions than intended. The limit is a basic control.</a:t>
-            </a:r>
-          </a:p>
-        </p:txBody>
-      </p:sp>
-      <p:sp>
-        <p:nvSpPr>
-          <p:cNvPr id="15" name="Rectangle 14"/>
-          <p:cNvSpPr/>
-          <p:nvPr/>
-        </p:nvSpPr>
-        <p:spPr>
-          <a:xfrm>
-            <a:off x="548640" y="6309360"/>
-            <a:ext cx="11094415" cy="19050"/>
-          </a:xfrm>
-          <a:prstGeom prst="rect">
-            <a:avLst/>
-          </a:prstGeom>
-          <a:solidFill>
-            <a:srgbClr val="DDDDDD"/>
-          </a:solidFill>
-          <a:ln>
-            <a:noFill/>
-          </a:ln>
-          <a:effectLst/>
-        </p:spPr>
-        <p:style>
-          <a:lnRef idx="1">
-            <a:schemeClr val="accent1"/>
-          </a:lnRef>
-          <a:fillRef idx="3">
-            <a:schemeClr val="accent1"/>
-          </a:fillRef>
-          <a:effectRef idx="2">
-            <a:schemeClr val="accent1"/>
-          </a:effectRef>
-          <a:fontRef idx="minor">
-            <a:schemeClr val="lt1"/>
-          </a:fontRef>
-        </p:style>
-        <p:txBody>
-          <a:bodyPr rtlCol="0" anchor="ctr"/>
-          <a:lstStyle/>
-          <a:p>
-            <a:pPr algn="ctr"/>
-          </a:p>
-        </p:txBody>
-      </p:sp>
-      <p:sp>
-        <p:nvSpPr>
-          <p:cNvPr id="16" name="TextBox 15"/>
-          <p:cNvSpPr txBox="1"/>
-          <p:nvPr/>
-        </p:nvSpPr>
-        <p:spPr>
-          <a:xfrm>
-            <a:off x="548640" y="6355080"/>
-            <a:ext cx="9144000" cy="365760"/>
-          </a:xfrm>
-          <a:prstGeom prst="rect">
-            <a:avLst/>
-          </a:prstGeom>
-          <a:noFill/>
-        </p:spPr>
-        <p:txBody>
-          <a:bodyPr wrap="square" anchor="t" lIns="45720" rIns="45720" tIns="27432" bIns="27432">
-            <a:spAutoFit/>
-          </a:bodyPr>
-          <a:lstStyle/>
-          <a:p>
-            <a:pPr algn="l"/>
-            <a:r>
-              <a:rPr sz="1000" b="0" i="0">
-                <a:solidFill>
-                  <a:srgbClr val="666666"/>
-                </a:solidFill>
-                <a:latin typeface="Calibri"/>
-              </a:rPr>
-              <a:t>IEEE CS Region 8 AI Caravan 2026 · AI Administrator · Day 1 · Session 1</a:t>
-            </a:r>
-          </a:p>
-        </p:txBody>
-      </p:sp>
-      <p:sp>
-        <p:nvSpPr>
-          <p:cNvPr id="17" name="TextBox 16"/>
-          <p:cNvSpPr txBox="1"/>
-          <p:nvPr/>
-        </p:nvSpPr>
-        <p:spPr>
-          <a:xfrm>
-            <a:off x="10271455" y="6355080"/>
-            <a:ext cx="1371600" cy="365760"/>
-          </a:xfrm>
-          <a:prstGeom prst="rect">
-            <a:avLst/>
-          </a:prstGeom>
-          <a:noFill/>
-        </p:spPr>
-        <p:txBody>
-          <a:bodyPr wrap="square" anchor="t" lIns="45720" rIns="45720" tIns="27432" bIns="27432">
-            <a:spAutoFit/>
-          </a:bodyPr>
-          <a:lstStyle/>
-          <a:p>
-            <a:pPr algn="r"/>
-            <a:r>
-              <a:rPr sz="1000" b="0" i="0">
-                <a:solidFill>
-                  <a:srgbClr val="666666"/>
-                </a:solidFill>
-                <a:latin typeface="Calibri"/>
-              </a:rPr>
-              <a:t>66</a:t>
-            </a:r>
-          </a:p>
-        </p:txBody>
-      </p:sp>
-    </p:spTree>
-  </p:cSld>
-  <p:clrMapOvr>
-    <a:masterClrMapping/>
-  </p:clrMapOvr>
-</p:sld>
-</file>
-
-<file path=ppt/slides/slide67.xml><?xml version="1.0" encoding="utf-8"?>
-<p:sld xmlns:a="http://schemas.openxmlformats.org/drawingml/2006/main" xmlns:p="http://schemas.openxmlformats.org/presentationml/2006/main" xmlns:r="http://schemas.openxmlformats.org/officeDocument/2006/relationships">
-  <p:cSld>
-    <p:spTree>
-      <p:nvGrpSpPr>
-        <p:cNvPr id="1" name=""/>
-        <p:cNvGrpSpPr/>
-        <p:nvPr/>
-      </p:nvGrpSpPr>
-      <p:grpSpPr/>
-      <p:sp>
-        <p:nvSpPr>
-          <p:cNvPr id="2" name="TextBox 1"/>
-          <p:cNvSpPr txBox="1"/>
-          <p:nvPr/>
-        </p:nvSpPr>
-        <p:spPr>
-          <a:xfrm>
-            <a:off x="548640" y="365760"/>
-            <a:ext cx="11094415" cy="777240"/>
-          </a:xfrm>
-          <a:prstGeom prst="rect">
-            <a:avLst/>
-          </a:prstGeom>
-          <a:noFill/>
-        </p:spPr>
-        <p:txBody>
-          <a:bodyPr wrap="square" anchor="b" lIns="45720" rIns="45720" tIns="27432" bIns="27432">
-            <a:spAutoFit/>
-          </a:bodyPr>
-          <a:lstStyle/>
-          <a:p>
-            <a:pPr algn="l"/>
-            <a:r>
-              <a:rPr sz="3000" b="1" i="0">
-                <a:solidFill>
-                  <a:srgbClr val="111111"/>
-                </a:solidFill>
-                <a:latin typeface="Calibri"/>
-              </a:rPr>
-              <a:t>Question 5</a:t>
-            </a:r>
-          </a:p>
-        </p:txBody>
-      </p:sp>
-      <p:sp>
-        <p:nvSpPr>
-          <p:cNvPr id="3" name="Rectangle 2"/>
-          <p:cNvSpPr/>
-          <p:nvPr/>
-        </p:nvSpPr>
-        <p:spPr>
-          <a:xfrm>
-            <a:off x="548640" y="1115568"/>
-            <a:ext cx="1097280" cy="38100"/>
-          </a:xfrm>
-          <a:prstGeom prst="rect">
-            <a:avLst/>
-          </a:prstGeom>
-          <a:solidFill>
-            <a:srgbClr val="F7A11A"/>
-          </a:solidFill>
-          <a:ln>
-            <a:noFill/>
-          </a:ln>
-          <a:effectLst/>
-        </p:spPr>
-        <p:style>
-          <a:lnRef idx="1">
-            <a:schemeClr val="accent1"/>
-          </a:lnRef>
-          <a:fillRef idx="3">
-            <a:schemeClr val="accent1"/>
-          </a:fillRef>
-          <a:effectRef idx="2">
-            <a:schemeClr val="accent1"/>
-          </a:effectRef>
-          <a:fontRef idx="minor">
-            <a:schemeClr val="lt1"/>
-          </a:fontRef>
-        </p:style>
-        <p:txBody>
-          <a:bodyPr rtlCol="0" anchor="ctr"/>
-          <a:lstStyle/>
-          <a:p>
-            <a:pPr algn="ctr"/>
-          </a:p>
-        </p:txBody>
-      </p:sp>
-      <p:sp>
-        <p:nvSpPr>
-          <p:cNvPr id="4" name="Rectangle 3"/>
-          <p:cNvSpPr/>
-          <p:nvPr/>
-        </p:nvSpPr>
-        <p:spPr>
-          <a:xfrm>
-            <a:off x="1645920" y="1115568"/>
-            <a:ext cx="9997135" cy="19050"/>
-          </a:xfrm>
-          <a:prstGeom prst="rect">
-            <a:avLst/>
-          </a:prstGeom>
-          <a:solidFill>
-            <a:srgbClr val="DDDDDD"/>
-          </a:solidFill>
-          <a:ln>
-            <a:noFill/>
-          </a:ln>
-          <a:effectLst/>
-        </p:spPr>
-        <p:style>
-          <a:lnRef idx="1">
-            <a:schemeClr val="accent1"/>
-          </a:lnRef>
-          <a:fillRef idx="3">
-            <a:schemeClr val="accent1"/>
-          </a:fillRef>
-          <a:effectRef idx="2">
-            <a:schemeClr val="accent1"/>
-          </a:effectRef>
-          <a:fontRef idx="minor">
-            <a:schemeClr val="lt1"/>
-          </a:fontRef>
-        </p:style>
-        <p:txBody>
-          <a:bodyPr rtlCol="0" anchor="ctr"/>
-          <a:lstStyle/>
-          <a:p>
-            <a:pPr algn="ctr"/>
-          </a:p>
-        </p:txBody>
-      </p:sp>
-      <p:sp>
-        <p:nvSpPr>
-          <p:cNvPr id="5" name="TextBox 4"/>
-          <p:cNvSpPr txBox="1"/>
-          <p:nvPr/>
-        </p:nvSpPr>
-        <p:spPr>
-          <a:xfrm>
-            <a:off x="548640" y="1325880"/>
-            <a:ext cx="11094415" cy="1097280"/>
-          </a:xfrm>
-          <a:prstGeom prst="rect">
-            <a:avLst/>
-          </a:prstGeom>
-          <a:noFill/>
-        </p:spPr>
-        <p:txBody>
-          <a:bodyPr wrap="square" anchor="t" lIns="45720" rIns="45720" tIns="27432" bIns="27432">
-            <a:spAutoFit/>
-          </a:bodyPr>
-          <a:lstStyle/>
-          <a:p>
-            <a:pPr algn="l"/>
-            <a:r>
-              <a:rPr sz="2200" b="1" i="0">
-                <a:solidFill>
-                  <a:srgbClr val="111111"/>
-                </a:solidFill>
-                <a:latin typeface="Calibri"/>
-              </a:rPr>
-              <a:t>Which task should generally stay with a person rather than be automated?</a:t>
-            </a:r>
-          </a:p>
-        </p:txBody>
-      </p:sp>
-      <p:sp>
-        <p:nvSpPr>
-          <p:cNvPr id="6" name="Rounded Rectangle 5"/>
-          <p:cNvSpPr/>
-          <p:nvPr/>
-        </p:nvSpPr>
-        <p:spPr>
-          <a:xfrm>
-            <a:off x="548640" y="2514600"/>
-            <a:ext cx="11094415" cy="566928"/>
-          </a:xfrm>
-          <a:prstGeom prst="roundRect">
-            <a:avLst/>
-          </a:prstGeom>
-          <a:solidFill>
-            <a:srgbClr val="F2F2F2"/>
-          </a:solidFill>
-          <a:ln w="12700">
-            <a:solidFill>
-              <a:srgbClr val="DDDDDD"/>
-            </a:solidFill>
-          </a:ln>
-          <a:effectLst/>
-        </p:spPr>
-        <p:style>
-          <a:lnRef idx="1">
-            <a:schemeClr val="accent1"/>
-          </a:lnRef>
-          <a:fillRef idx="3">
-            <a:schemeClr val="accent1"/>
-          </a:fillRef>
-          <a:effectRef idx="2">
-            <a:schemeClr val="accent1"/>
-          </a:effectRef>
-          <a:fontRef idx="minor">
-            <a:schemeClr val="lt1"/>
-          </a:fontRef>
-        </p:style>
-        <p:txBody>
-          <a:bodyPr rtlCol="0" anchor="ctr"/>
-          <a:lstStyle/>
-          <a:p>
-            <a:pPr algn="ctr"/>
-          </a:p>
-        </p:txBody>
-      </p:sp>
-      <p:sp>
-        <p:nvSpPr>
-          <p:cNvPr id="7" name="TextBox 6"/>
-          <p:cNvSpPr txBox="1"/>
-          <p:nvPr/>
-        </p:nvSpPr>
-        <p:spPr>
-          <a:xfrm>
-            <a:off x="731520" y="2587752"/>
-            <a:ext cx="10728655" cy="457200"/>
-          </a:xfrm>
-          <a:prstGeom prst="rect">
-            <a:avLst/>
-          </a:prstGeom>
-          <a:noFill/>
-        </p:spPr>
-        <p:txBody>
-          <a:bodyPr wrap="square" anchor="ctr" lIns="45720" rIns="45720" tIns="27432" bIns="27432">
-            <a:spAutoFit/>
-          </a:bodyPr>
-          <a:lstStyle/>
-          <a:p>
-            <a:pPr algn="l"/>
-            <a:r>
-              <a:rPr sz="1700" b="0" i="0">
-                <a:solidFill>
-                  <a:srgbClr val="111111"/>
-                </a:solidFill>
-                <a:latin typeface="Calibri"/>
-              </a:rPr>
-              <a:t>A.  Creating accounts for a new hire</a:t>
-            </a:r>
-          </a:p>
-        </p:txBody>
-      </p:sp>
-      <p:sp>
-        <p:nvSpPr>
-          <p:cNvPr id="8" name="Rounded Rectangle 7"/>
-          <p:cNvSpPr/>
-          <p:nvPr/>
-        </p:nvSpPr>
-        <p:spPr>
-          <a:xfrm>
-            <a:off x="548640" y="3172968"/>
-            <a:ext cx="11094415" cy="566928"/>
-          </a:xfrm>
-          <a:prstGeom prst="roundRect">
-            <a:avLst/>
-          </a:prstGeom>
-          <a:solidFill>
-            <a:srgbClr val="F2F2F2"/>
-          </a:solidFill>
-          <a:ln w="12700">
-            <a:solidFill>
-              <a:srgbClr val="DDDDDD"/>
-            </a:solidFill>
-          </a:ln>
-          <a:effectLst/>
-        </p:spPr>
-        <p:style>
-          <a:lnRef idx="1">
-            <a:schemeClr val="accent1"/>
-          </a:lnRef>
-          <a:fillRef idx="3">
-            <a:schemeClr val="accent1"/>
-          </a:fillRef>
-          <a:effectRef idx="2">
-            <a:schemeClr val="accent1"/>
-          </a:effectRef>
-          <a:fontRef idx="minor">
-            <a:schemeClr val="lt1"/>
-          </a:fontRef>
-        </p:style>
-        <p:txBody>
-          <a:bodyPr rtlCol="0" anchor="ctr"/>
-          <a:lstStyle/>
-          <a:p>
-            <a:pPr algn="ctr"/>
-          </a:p>
-        </p:txBody>
-      </p:sp>
-      <p:sp>
-        <p:nvSpPr>
-          <p:cNvPr id="9" name="TextBox 8"/>
-          <p:cNvSpPr txBox="1"/>
-          <p:nvPr/>
-        </p:nvSpPr>
-        <p:spPr>
-          <a:xfrm>
-            <a:off x="731520" y="3246120"/>
-            <a:ext cx="10728655" cy="457200"/>
-          </a:xfrm>
-          <a:prstGeom prst="rect">
-            <a:avLst/>
-          </a:prstGeom>
-          <a:noFill/>
-        </p:spPr>
-        <p:txBody>
-          <a:bodyPr wrap="square" anchor="ctr" lIns="45720" rIns="45720" tIns="27432" bIns="27432">
-            <a:spAutoFit/>
-          </a:bodyPr>
-          <a:lstStyle/>
-          <a:p>
-            <a:pPr algn="l"/>
-            <a:r>
-              <a:rPr sz="1700" b="0" i="0">
-                <a:solidFill>
-                  <a:srgbClr val="111111"/>
-                </a:solidFill>
-                <a:latin typeface="Calibri"/>
-              </a:rPr>
-              <a:t>B.  Summarising five trackers into a report draft</a:t>
-            </a:r>
-          </a:p>
-        </p:txBody>
-      </p:sp>
-      <p:sp>
-        <p:nvSpPr>
-          <p:cNvPr id="10" name="Rounded Rectangle 9"/>
-          <p:cNvSpPr/>
-          <p:nvPr/>
-        </p:nvSpPr>
-        <p:spPr>
-          <a:xfrm>
-            <a:off x="548640" y="3831336"/>
-            <a:ext cx="11094415" cy="566928"/>
-          </a:xfrm>
-          <a:prstGeom prst="roundRect">
-            <a:avLst/>
-          </a:prstGeom>
-          <a:solidFill>
-            <a:srgbClr val="F2F2F2"/>
-          </a:solidFill>
-          <a:ln w="12700">
-            <a:solidFill>
-              <a:srgbClr val="DDDDDD"/>
-            </a:solidFill>
-          </a:ln>
-          <a:effectLst/>
-        </p:spPr>
-        <p:style>
-          <a:lnRef idx="1">
-            <a:schemeClr val="accent1"/>
-          </a:lnRef>
-          <a:fillRef idx="3">
-            <a:schemeClr val="accent1"/>
-          </a:fillRef>
-          <a:effectRef idx="2">
-            <a:schemeClr val="accent1"/>
-          </a:effectRef>
-          <a:fontRef idx="minor">
-            <a:schemeClr val="lt1"/>
-          </a:fontRef>
-        </p:style>
-        <p:txBody>
-          <a:bodyPr rtlCol="0" anchor="ctr"/>
-          <a:lstStyle/>
-          <a:p>
-            <a:pPr algn="ctr"/>
-          </a:p>
-        </p:txBody>
-      </p:sp>
-      <p:sp>
-        <p:nvSpPr>
-          <p:cNvPr id="11" name="TextBox 10"/>
-          <p:cNvSpPr txBox="1"/>
-          <p:nvPr/>
-        </p:nvSpPr>
-        <p:spPr>
-          <a:xfrm>
-            <a:off x="731520" y="3904488"/>
-            <a:ext cx="10728655" cy="457200"/>
-          </a:xfrm>
-          <a:prstGeom prst="rect">
-            <a:avLst/>
-          </a:prstGeom>
-          <a:noFill/>
-        </p:spPr>
-        <p:txBody>
-          <a:bodyPr wrap="square" anchor="ctr" lIns="45720" rIns="45720" tIns="27432" bIns="27432">
-            <a:spAutoFit/>
-          </a:bodyPr>
-          <a:lstStyle/>
-          <a:p>
-            <a:pPr algn="l"/>
-            <a:r>
-              <a:rPr sz="1700" b="0" i="0">
-                <a:solidFill>
-                  <a:srgbClr val="111111"/>
-                </a:solidFill>
-                <a:latin typeface="Calibri"/>
-              </a:rPr>
-              <a:t>C.  Approving a refund above the policy limit</a:t>
-            </a:r>
-          </a:p>
-        </p:txBody>
-      </p:sp>
-      <p:sp>
-        <p:nvSpPr>
-          <p:cNvPr id="12" name="Rounded Rectangle 11"/>
-          <p:cNvSpPr/>
-          <p:nvPr/>
-        </p:nvSpPr>
-        <p:spPr>
-          <a:xfrm>
-            <a:off x="548640" y="4489704"/>
-            <a:ext cx="11094415" cy="566928"/>
-          </a:xfrm>
-          <a:prstGeom prst="roundRect">
-            <a:avLst/>
-          </a:prstGeom>
-          <a:solidFill>
-            <a:srgbClr val="F2F2F2"/>
-          </a:solidFill>
-          <a:ln w="12700">
-            <a:solidFill>
-              <a:srgbClr val="DDDDDD"/>
-            </a:solidFill>
-          </a:ln>
-          <a:effectLst/>
-        </p:spPr>
-        <p:style>
-          <a:lnRef idx="1">
-            <a:schemeClr val="accent1"/>
-          </a:lnRef>
-          <a:fillRef idx="3">
-            <a:schemeClr val="accent1"/>
-          </a:fillRef>
-          <a:effectRef idx="2">
-            <a:schemeClr val="accent1"/>
-          </a:effectRef>
-          <a:fontRef idx="minor">
-            <a:schemeClr val="lt1"/>
-          </a:fontRef>
-        </p:style>
-        <p:txBody>
-          <a:bodyPr rtlCol="0" anchor="ctr"/>
-          <a:lstStyle/>
-          <a:p>
-            <a:pPr algn="ctr"/>
-          </a:p>
-        </p:txBody>
-      </p:sp>
-      <p:sp>
-        <p:nvSpPr>
-          <p:cNvPr id="13" name="TextBox 12"/>
-          <p:cNvSpPr txBox="1"/>
-          <p:nvPr/>
-        </p:nvSpPr>
-        <p:spPr>
-          <a:xfrm>
-            <a:off x="731520" y="4562856"/>
-            <a:ext cx="10728655" cy="457200"/>
-          </a:xfrm>
-          <a:prstGeom prst="rect">
-            <a:avLst/>
-          </a:prstGeom>
-          <a:noFill/>
-        </p:spPr>
-        <p:txBody>
-          <a:bodyPr wrap="square" anchor="ctr" lIns="45720" rIns="45720" tIns="27432" bIns="27432">
-            <a:spAutoFit/>
-          </a:bodyPr>
-          <a:lstStyle/>
-          <a:p>
-            <a:pPr algn="l"/>
-            <a:r>
-              <a:rPr sz="1700" b="0" i="0">
-                <a:solidFill>
-                  <a:srgbClr val="111111"/>
-                </a:solidFill>
-                <a:latin typeface="Calibri"/>
-              </a:rPr>
-              <a:t>D.  Chasing late timesheets</a:t>
-            </a:r>
-          </a:p>
-        </p:txBody>
-      </p:sp>
-      <p:sp>
-        <p:nvSpPr>
-          <p:cNvPr id="14" name="Rectangle 13"/>
-          <p:cNvSpPr/>
-          <p:nvPr/>
-        </p:nvSpPr>
-        <p:spPr>
-          <a:xfrm>
-            <a:off x="548640" y="6309360"/>
-            <a:ext cx="11094415" cy="19050"/>
-          </a:xfrm>
-          <a:prstGeom prst="rect">
-            <a:avLst/>
-          </a:prstGeom>
-          <a:solidFill>
-            <a:srgbClr val="DDDDDD"/>
-          </a:solidFill>
-          <a:ln>
-            <a:noFill/>
-          </a:ln>
-          <a:effectLst/>
-        </p:spPr>
-        <p:style>
-          <a:lnRef idx="1">
-            <a:schemeClr val="accent1"/>
-          </a:lnRef>
-          <a:fillRef idx="3">
-            <a:schemeClr val="accent1"/>
-          </a:fillRef>
-          <a:effectRef idx="2">
-            <a:schemeClr val="accent1"/>
-          </a:effectRef>
-          <a:fontRef idx="minor">
-            <a:schemeClr val="lt1"/>
-          </a:fontRef>
-        </p:style>
-        <p:txBody>
-          <a:bodyPr rtlCol="0" anchor="ctr"/>
-          <a:lstStyle/>
-          <a:p>
-            <a:pPr algn="ctr"/>
-          </a:p>
-        </p:txBody>
-      </p:sp>
-      <p:sp>
-        <p:nvSpPr>
-          <p:cNvPr id="15" name="TextBox 14"/>
-          <p:cNvSpPr txBox="1"/>
-          <p:nvPr/>
-        </p:nvSpPr>
-        <p:spPr>
-          <a:xfrm>
-            <a:off x="548640" y="6355080"/>
-            <a:ext cx="9144000" cy="365760"/>
-          </a:xfrm>
-          <a:prstGeom prst="rect">
-            <a:avLst/>
-          </a:prstGeom>
-          <a:noFill/>
-        </p:spPr>
-        <p:txBody>
-          <a:bodyPr wrap="square" anchor="t" lIns="45720" rIns="45720" tIns="27432" bIns="27432">
-            <a:spAutoFit/>
-          </a:bodyPr>
-          <a:lstStyle/>
-          <a:p>
-            <a:pPr algn="l"/>
-            <a:r>
-              <a:rPr sz="1000" b="0" i="0">
-                <a:solidFill>
-                  <a:srgbClr val="666666"/>
-                </a:solidFill>
-                <a:latin typeface="Calibri"/>
-              </a:rPr>
-              <a:t>IEEE CS Region 8 AI Caravan 2026 · AI Administrator · Day 1 · Session 1</a:t>
-            </a:r>
-          </a:p>
-        </p:txBody>
-      </p:sp>
-      <p:sp>
-        <p:nvSpPr>
-          <p:cNvPr id="16" name="TextBox 15"/>
-          <p:cNvSpPr txBox="1"/>
-          <p:nvPr/>
-        </p:nvSpPr>
-        <p:spPr>
-          <a:xfrm>
-            <a:off x="10271455" y="6355080"/>
-            <a:ext cx="1371600" cy="365760"/>
-          </a:xfrm>
-          <a:prstGeom prst="rect">
-            <a:avLst/>
-          </a:prstGeom>
-          <a:noFill/>
-        </p:spPr>
-        <p:txBody>
-          <a:bodyPr wrap="square" anchor="t" lIns="45720" rIns="45720" tIns="27432" bIns="27432">
-            <a:spAutoFit/>
-          </a:bodyPr>
-          <a:lstStyle/>
-          <a:p>
-            <a:pPr algn="r"/>
-            <a:r>
-              <a:rPr sz="1000" b="0" i="0">
-                <a:solidFill>
-                  <a:srgbClr val="666666"/>
-                </a:solidFill>
-                <a:latin typeface="Calibri"/>
-              </a:rPr>
-              <a:t>67</a:t>
-            </a:r>
-          </a:p>
-        </p:txBody>
-      </p:sp>
-    </p:spTree>
-  </p:cSld>
-  <p:clrMapOvr>
-    <a:masterClrMapping/>
-  </p:clrMapOvr>
-</p:sld>
-</file>
-
-<file path=ppt/slides/slide68.xml><?xml version="1.0" encoding="utf-8"?>
-<p:sld xmlns:a="http://schemas.openxmlformats.org/drawingml/2006/main" xmlns:p="http://schemas.openxmlformats.org/presentationml/2006/main" xmlns:r="http://schemas.openxmlformats.org/officeDocument/2006/relationships">
-  <p:cSld>
-    <p:spTree>
-      <p:nvGrpSpPr>
-        <p:cNvPr id="1" name=""/>
-        <p:cNvGrpSpPr/>
-        <p:nvPr/>
-      </p:nvGrpSpPr>
-      <p:grpSpPr/>
-      <p:sp>
-        <p:nvSpPr>
-          <p:cNvPr id="2" name="TextBox 1"/>
-          <p:cNvSpPr txBox="1"/>
-          <p:nvPr/>
-        </p:nvSpPr>
-        <p:spPr>
-          <a:xfrm>
-            <a:off x="548640" y="365760"/>
-            <a:ext cx="11094415" cy="777240"/>
-          </a:xfrm>
-          <a:prstGeom prst="rect">
-            <a:avLst/>
-          </a:prstGeom>
-          <a:noFill/>
-        </p:spPr>
-        <p:txBody>
-          <a:bodyPr wrap="square" anchor="b" lIns="45720" rIns="45720" tIns="27432" bIns="27432">
-            <a:spAutoFit/>
-          </a:bodyPr>
-          <a:lstStyle/>
-          <a:p>
-            <a:pPr algn="l"/>
-            <a:r>
-              <a:rPr sz="3000" b="1" i="0">
-                <a:solidFill>
-                  <a:srgbClr val="111111"/>
-                </a:solidFill>
-                <a:latin typeface="Calibri"/>
-              </a:rPr>
-              <a:t>Question 5 · answer</a:t>
-            </a:r>
-          </a:p>
-        </p:txBody>
-      </p:sp>
-      <p:sp>
-        <p:nvSpPr>
-          <p:cNvPr id="3" name="Rectangle 2"/>
-          <p:cNvSpPr/>
-          <p:nvPr/>
-        </p:nvSpPr>
-        <p:spPr>
-          <a:xfrm>
-            <a:off x="548640" y="1115568"/>
-            <a:ext cx="1097280" cy="38100"/>
-          </a:xfrm>
-          <a:prstGeom prst="rect">
-            <a:avLst/>
-          </a:prstGeom>
-          <a:solidFill>
-            <a:srgbClr val="F7A11A"/>
-          </a:solidFill>
-          <a:ln>
-            <a:noFill/>
-          </a:ln>
-          <a:effectLst/>
-        </p:spPr>
-        <p:style>
-          <a:lnRef idx="1">
-            <a:schemeClr val="accent1"/>
-          </a:lnRef>
-          <a:fillRef idx="3">
-            <a:schemeClr val="accent1"/>
-          </a:fillRef>
-          <a:effectRef idx="2">
-            <a:schemeClr val="accent1"/>
-          </a:effectRef>
-          <a:fontRef idx="minor">
-            <a:schemeClr val="lt1"/>
-          </a:fontRef>
-        </p:style>
-        <p:txBody>
-          <a:bodyPr rtlCol="0" anchor="ctr"/>
-          <a:lstStyle/>
-          <a:p>
-            <a:pPr algn="ctr"/>
-          </a:p>
-        </p:txBody>
-      </p:sp>
-      <p:sp>
-        <p:nvSpPr>
-          <p:cNvPr id="4" name="Rectangle 3"/>
-          <p:cNvSpPr/>
-          <p:nvPr/>
-        </p:nvSpPr>
-        <p:spPr>
-          <a:xfrm>
-            <a:off x="1645920" y="1115568"/>
-            <a:ext cx="9997135" cy="19050"/>
-          </a:xfrm>
-          <a:prstGeom prst="rect">
-            <a:avLst/>
-          </a:prstGeom>
-          <a:solidFill>
-            <a:srgbClr val="DDDDDD"/>
-          </a:solidFill>
-          <a:ln>
-            <a:noFill/>
-          </a:ln>
-          <a:effectLst/>
-        </p:spPr>
-        <p:style>
-          <a:lnRef idx="1">
-            <a:schemeClr val="accent1"/>
-          </a:lnRef>
-          <a:fillRef idx="3">
-            <a:schemeClr val="accent1"/>
-          </a:fillRef>
-          <a:effectRef idx="2">
-            <a:schemeClr val="accent1"/>
-          </a:effectRef>
-          <a:fontRef idx="minor">
-            <a:schemeClr val="lt1"/>
-          </a:fontRef>
-        </p:style>
-        <p:txBody>
-          <a:bodyPr rtlCol="0" anchor="ctr"/>
-          <a:lstStyle/>
-          <a:p>
-            <a:pPr algn="ctr"/>
-          </a:p>
-        </p:txBody>
-      </p:sp>
-      <p:sp>
-        <p:nvSpPr>
-          <p:cNvPr id="5" name="TextBox 4"/>
-          <p:cNvSpPr txBox="1"/>
-          <p:nvPr/>
-        </p:nvSpPr>
-        <p:spPr>
-          <a:xfrm>
-            <a:off x="548640" y="1325880"/>
-            <a:ext cx="11094415" cy="1097280"/>
-          </a:xfrm>
-          <a:prstGeom prst="rect">
-            <a:avLst/>
-          </a:prstGeom>
-          <a:noFill/>
-        </p:spPr>
-        <p:txBody>
-          <a:bodyPr wrap="square" anchor="t" lIns="45720" rIns="45720" tIns="27432" bIns="27432">
-            <a:spAutoFit/>
-          </a:bodyPr>
-          <a:lstStyle/>
-          <a:p>
-            <a:pPr algn="l"/>
-            <a:r>
-              <a:rPr sz="2200" b="1" i="0">
-                <a:solidFill>
-                  <a:srgbClr val="111111"/>
-                </a:solidFill>
-                <a:latin typeface="Calibri"/>
-              </a:rPr>
-              <a:t>Which task should generally stay with a person rather than be automated?</a:t>
-            </a:r>
-          </a:p>
-        </p:txBody>
-      </p:sp>
-      <p:sp>
-        <p:nvSpPr>
-          <p:cNvPr id="6" name="Rounded Rectangle 5"/>
-          <p:cNvSpPr/>
-          <p:nvPr/>
-        </p:nvSpPr>
-        <p:spPr>
-          <a:xfrm>
-            <a:off x="548640" y="2514600"/>
-            <a:ext cx="11094415" cy="566928"/>
-          </a:xfrm>
-          <a:prstGeom prst="roundRect">
-            <a:avLst/>
-          </a:prstGeom>
-          <a:solidFill>
-            <a:srgbClr val="F2F2F2"/>
-          </a:solidFill>
-          <a:ln w="12700">
-            <a:solidFill>
-              <a:srgbClr val="DDDDDD"/>
-            </a:solidFill>
-          </a:ln>
-          <a:effectLst/>
-        </p:spPr>
-        <p:style>
-          <a:lnRef idx="1">
-            <a:schemeClr val="accent1"/>
-          </a:lnRef>
-          <a:fillRef idx="3">
-            <a:schemeClr val="accent1"/>
-          </a:fillRef>
-          <a:effectRef idx="2">
-            <a:schemeClr val="accent1"/>
-          </a:effectRef>
-          <a:fontRef idx="minor">
-            <a:schemeClr val="lt1"/>
-          </a:fontRef>
-        </p:style>
-        <p:txBody>
-          <a:bodyPr rtlCol="0" anchor="ctr"/>
-          <a:lstStyle/>
-          <a:p>
-            <a:pPr algn="ctr"/>
-          </a:p>
-        </p:txBody>
-      </p:sp>
-      <p:sp>
-        <p:nvSpPr>
-          <p:cNvPr id="7" name="TextBox 6"/>
-          <p:cNvSpPr txBox="1"/>
-          <p:nvPr/>
-        </p:nvSpPr>
-        <p:spPr>
-          <a:xfrm>
-            <a:off x="731520" y="2587752"/>
-            <a:ext cx="10728655" cy="457200"/>
-          </a:xfrm>
-          <a:prstGeom prst="rect">
-            <a:avLst/>
-          </a:prstGeom>
-          <a:noFill/>
-        </p:spPr>
-        <p:txBody>
-          <a:bodyPr wrap="square" anchor="ctr" lIns="45720" rIns="45720" tIns="27432" bIns="27432">
-            <a:spAutoFit/>
-          </a:bodyPr>
-          <a:lstStyle/>
-          <a:p>
-            <a:pPr algn="l"/>
-            <a:r>
-              <a:rPr sz="1700" b="0" i="0">
-                <a:solidFill>
-                  <a:srgbClr val="111111"/>
-                </a:solidFill>
-                <a:latin typeface="Calibri"/>
-              </a:rPr>
-              <a:t>A.  Creating accounts for a new hire</a:t>
-            </a:r>
-          </a:p>
-        </p:txBody>
-      </p:sp>
-      <p:sp>
-        <p:nvSpPr>
-          <p:cNvPr id="8" name="Rounded Rectangle 7"/>
-          <p:cNvSpPr/>
-          <p:nvPr/>
-        </p:nvSpPr>
-        <p:spPr>
-          <a:xfrm>
-            <a:off x="548640" y="3172968"/>
-            <a:ext cx="11094415" cy="566928"/>
-          </a:xfrm>
-          <a:prstGeom prst="roundRect">
-            <a:avLst/>
-          </a:prstGeom>
-          <a:solidFill>
-            <a:srgbClr val="F2F2F2"/>
-          </a:solidFill>
-          <a:ln w="12700">
-            <a:solidFill>
-              <a:srgbClr val="DDDDDD"/>
-            </a:solidFill>
-          </a:ln>
-          <a:effectLst/>
-        </p:spPr>
-        <p:style>
-          <a:lnRef idx="1">
-            <a:schemeClr val="accent1"/>
-          </a:lnRef>
-          <a:fillRef idx="3">
-            <a:schemeClr val="accent1"/>
-          </a:fillRef>
-          <a:effectRef idx="2">
-            <a:schemeClr val="accent1"/>
-          </a:effectRef>
-          <a:fontRef idx="minor">
-            <a:schemeClr val="lt1"/>
-          </a:fontRef>
-        </p:style>
-        <p:txBody>
-          <a:bodyPr rtlCol="0" anchor="ctr"/>
-          <a:lstStyle/>
-          <a:p>
-            <a:pPr algn="ctr"/>
-          </a:p>
-        </p:txBody>
-      </p:sp>
-      <p:sp>
-        <p:nvSpPr>
-          <p:cNvPr id="9" name="TextBox 8"/>
-          <p:cNvSpPr txBox="1"/>
-          <p:nvPr/>
-        </p:nvSpPr>
-        <p:spPr>
-          <a:xfrm>
-            <a:off x="731520" y="3246120"/>
-            <a:ext cx="10728655" cy="457200"/>
-          </a:xfrm>
-          <a:prstGeom prst="rect">
-            <a:avLst/>
-          </a:prstGeom>
-          <a:noFill/>
-        </p:spPr>
-        <p:txBody>
-          <a:bodyPr wrap="square" anchor="ctr" lIns="45720" rIns="45720" tIns="27432" bIns="27432">
-            <a:spAutoFit/>
-          </a:bodyPr>
-          <a:lstStyle/>
-          <a:p>
-            <a:pPr algn="l"/>
-            <a:r>
-              <a:rPr sz="1700" b="0" i="0">
-                <a:solidFill>
-                  <a:srgbClr val="111111"/>
-                </a:solidFill>
-                <a:latin typeface="Calibri"/>
-              </a:rPr>
-              <a:t>B.  Summarising five trackers into a report draft</a:t>
-            </a:r>
-          </a:p>
-        </p:txBody>
-      </p:sp>
-      <p:sp>
-        <p:nvSpPr>
-          <p:cNvPr id="10" name="Rounded Rectangle 9"/>
-          <p:cNvSpPr/>
-          <p:nvPr/>
-        </p:nvSpPr>
-        <p:spPr>
-          <a:xfrm>
-            <a:off x="548640" y="3831336"/>
-            <a:ext cx="11094415" cy="566928"/>
-          </a:xfrm>
-          <a:prstGeom prst="roundRect">
-            <a:avLst/>
-          </a:prstGeom>
-          <a:solidFill>
-            <a:srgbClr val="FFFFFF"/>
-          </a:solidFill>
-          <a:ln w="31750">
-            <a:solidFill>
-              <a:srgbClr val="F7A11A"/>
-            </a:solidFill>
-          </a:ln>
-          <a:effectLst/>
-        </p:spPr>
-        <p:style>
-          <a:lnRef idx="1">
-            <a:schemeClr val="accent1"/>
-          </a:lnRef>
-          <a:fillRef idx="3">
-            <a:schemeClr val="accent1"/>
-          </a:fillRef>
-          <a:effectRef idx="2">
-            <a:schemeClr val="accent1"/>
-          </a:effectRef>
-          <a:fontRef idx="minor">
-            <a:schemeClr val="lt1"/>
-          </a:fontRef>
-        </p:style>
-        <p:txBody>
-          <a:bodyPr rtlCol="0" anchor="ctr"/>
-          <a:lstStyle/>
-          <a:p>
-            <a:pPr algn="ctr"/>
-          </a:p>
-        </p:txBody>
-      </p:sp>
-      <p:sp>
-        <p:nvSpPr>
-          <p:cNvPr id="11" name="TextBox 10"/>
-          <p:cNvSpPr txBox="1"/>
-          <p:nvPr/>
-        </p:nvSpPr>
-        <p:spPr>
-          <a:xfrm>
-            <a:off x="731520" y="3904488"/>
-            <a:ext cx="10728655" cy="457200"/>
-          </a:xfrm>
-          <a:prstGeom prst="rect">
-            <a:avLst/>
-          </a:prstGeom>
-          <a:noFill/>
-        </p:spPr>
-        <p:txBody>
-          <a:bodyPr wrap="square" anchor="ctr" lIns="45720" rIns="45720" tIns="27432" bIns="27432">
-            <a:spAutoFit/>
-          </a:bodyPr>
-          <a:lstStyle/>
-          <a:p>
-            <a:pPr algn="l"/>
-            <a:r>
-              <a:rPr sz="1700" b="1" i="0">
-                <a:solidFill>
-                  <a:srgbClr val="111111"/>
-                </a:solidFill>
-                <a:latin typeface="Calibri"/>
-              </a:rPr>
-              <a:t>C.  Approving a refund above the policy limit</a:t>
-            </a:r>
-          </a:p>
-        </p:txBody>
-      </p:sp>
-      <p:sp>
-        <p:nvSpPr>
-          <p:cNvPr id="12" name="Rounded Rectangle 11"/>
-          <p:cNvSpPr/>
-          <p:nvPr/>
-        </p:nvSpPr>
-        <p:spPr>
-          <a:xfrm>
-            <a:off x="548640" y="4489704"/>
-            <a:ext cx="11094415" cy="566928"/>
-          </a:xfrm>
-          <a:prstGeom prst="roundRect">
-            <a:avLst/>
-          </a:prstGeom>
-          <a:solidFill>
-            <a:srgbClr val="F2F2F2"/>
-          </a:solidFill>
-          <a:ln w="12700">
-            <a:solidFill>
-              <a:srgbClr val="DDDDDD"/>
-            </a:solidFill>
-          </a:ln>
-          <a:effectLst/>
-        </p:spPr>
-        <p:style>
-          <a:lnRef idx="1">
-            <a:schemeClr val="accent1"/>
-          </a:lnRef>
-          <a:fillRef idx="3">
-            <a:schemeClr val="accent1"/>
-          </a:fillRef>
-          <a:effectRef idx="2">
-            <a:schemeClr val="accent1"/>
-          </a:effectRef>
-          <a:fontRef idx="minor">
-            <a:schemeClr val="lt1"/>
-          </a:fontRef>
-        </p:style>
-        <p:txBody>
-          <a:bodyPr rtlCol="0" anchor="ctr"/>
-          <a:lstStyle/>
-          <a:p>
-            <a:pPr algn="ctr"/>
-          </a:p>
-        </p:txBody>
-      </p:sp>
-      <p:sp>
-        <p:nvSpPr>
-          <p:cNvPr id="13" name="TextBox 12"/>
-          <p:cNvSpPr txBox="1"/>
-          <p:nvPr/>
-        </p:nvSpPr>
-        <p:spPr>
-          <a:xfrm>
-            <a:off x="731520" y="4562856"/>
-            <a:ext cx="10728655" cy="457200"/>
-          </a:xfrm>
-          <a:prstGeom prst="rect">
-            <a:avLst/>
-          </a:prstGeom>
-          <a:noFill/>
-        </p:spPr>
-        <p:txBody>
-          <a:bodyPr wrap="square" anchor="ctr" lIns="45720" rIns="45720" tIns="27432" bIns="27432">
-            <a:spAutoFit/>
-          </a:bodyPr>
-          <a:lstStyle/>
-          <a:p>
-            <a:pPr algn="l"/>
-            <a:r>
-              <a:rPr sz="1700" b="0" i="0">
-                <a:solidFill>
-                  <a:srgbClr val="111111"/>
-                </a:solidFill>
-                <a:latin typeface="Calibri"/>
-              </a:rPr>
-              <a:t>D.  Chasing late timesheets</a:t>
-            </a:r>
-          </a:p>
-        </p:txBody>
-      </p:sp>
-      <p:sp>
-        <p:nvSpPr>
-          <p:cNvPr id="14" name="TextBox 13"/>
-          <p:cNvSpPr txBox="1"/>
-          <p:nvPr/>
-        </p:nvSpPr>
-        <p:spPr>
-          <a:xfrm>
-            <a:off x="548640" y="5239512"/>
-            <a:ext cx="11094415" cy="822960"/>
-          </a:xfrm>
-          <a:prstGeom prst="rect">
-            <a:avLst/>
-          </a:prstGeom>
-          <a:noFill/>
-        </p:spPr>
-        <p:txBody>
-          <a:bodyPr wrap="square" anchor="t" lIns="45720" rIns="45720" tIns="27432" bIns="27432">
-            <a:spAutoFit/>
-          </a:bodyPr>
-          <a:lstStyle/>
-          <a:p>
-            <a:pPr algn="l"/>
-            <a:r>
-              <a:rPr sz="1500" b="0" i="1">
-                <a:solidFill>
-                  <a:srgbClr val="666666"/>
-                </a:solidFill>
-                <a:latin typeface="Calibri"/>
-              </a:rPr>
-              <a:t>Why: Automation removes copying and chasing. Decisions involving money, people or legal exposure need human accountability.</a:t>
-            </a:r>
-          </a:p>
-        </p:txBody>
-      </p:sp>
-      <p:sp>
-        <p:nvSpPr>
-          <p:cNvPr id="15" name="Rectangle 14"/>
-          <p:cNvSpPr/>
-          <p:nvPr/>
-        </p:nvSpPr>
-        <p:spPr>
-          <a:xfrm>
-            <a:off x="548640" y="6309360"/>
-            <a:ext cx="11094415" cy="19050"/>
-          </a:xfrm>
-          <a:prstGeom prst="rect">
-            <a:avLst/>
-          </a:prstGeom>
-          <a:solidFill>
-            <a:srgbClr val="DDDDDD"/>
-          </a:solidFill>
-          <a:ln>
-            <a:noFill/>
-          </a:ln>
-          <a:effectLst/>
-        </p:spPr>
-        <p:style>
-          <a:lnRef idx="1">
-            <a:schemeClr val="accent1"/>
-          </a:lnRef>
-          <a:fillRef idx="3">
-            <a:schemeClr val="accent1"/>
-          </a:fillRef>
-          <a:effectRef idx="2">
-            <a:schemeClr val="accent1"/>
-          </a:effectRef>
-          <a:fontRef idx="minor">
-            <a:schemeClr val="lt1"/>
-          </a:fontRef>
-        </p:style>
-        <p:txBody>
-          <a:bodyPr rtlCol="0" anchor="ctr"/>
-          <a:lstStyle/>
-          <a:p>
-            <a:pPr algn="ctr"/>
-          </a:p>
-        </p:txBody>
-      </p:sp>
-      <p:sp>
-        <p:nvSpPr>
-          <p:cNvPr id="16" name="TextBox 15"/>
-          <p:cNvSpPr txBox="1"/>
-          <p:nvPr/>
-        </p:nvSpPr>
-        <p:spPr>
-          <a:xfrm>
-            <a:off x="548640" y="6355080"/>
-            <a:ext cx="9144000" cy="365760"/>
-          </a:xfrm>
-          <a:prstGeom prst="rect">
-            <a:avLst/>
-          </a:prstGeom>
-          <a:noFill/>
-        </p:spPr>
-        <p:txBody>
-          <a:bodyPr wrap="square" anchor="t" lIns="45720" rIns="45720" tIns="27432" bIns="27432">
-            <a:spAutoFit/>
-          </a:bodyPr>
-          <a:lstStyle/>
-          <a:p>
-            <a:pPr algn="l"/>
-            <a:r>
-              <a:rPr sz="1000" b="0" i="0">
-                <a:solidFill>
-                  <a:srgbClr val="666666"/>
-                </a:solidFill>
-                <a:latin typeface="Calibri"/>
-              </a:rPr>
-              <a:t>IEEE CS Region 8 AI Caravan 2026 · AI Administrator · Day 1 · Session 1</a:t>
-            </a:r>
-          </a:p>
-        </p:txBody>
-      </p:sp>
-      <p:sp>
-        <p:nvSpPr>
-          <p:cNvPr id="17" name="TextBox 16"/>
-          <p:cNvSpPr txBox="1"/>
-          <p:nvPr/>
-        </p:nvSpPr>
-        <p:spPr>
-          <a:xfrm>
-            <a:off x="10271455" y="6355080"/>
-            <a:ext cx="1371600" cy="365760"/>
-          </a:xfrm>
-          <a:prstGeom prst="rect">
-            <a:avLst/>
-          </a:prstGeom>
-          <a:noFill/>
-        </p:spPr>
-        <p:txBody>
-          <a:bodyPr wrap="square" anchor="t" lIns="45720" rIns="45720" tIns="27432" bIns="27432">
-            <a:spAutoFit/>
-          </a:bodyPr>
-          <a:lstStyle/>
-          <a:p>
-            <a:pPr algn="r"/>
-            <a:r>
-              <a:rPr sz="1000" b="0" i="0">
-                <a:solidFill>
-                  <a:srgbClr val="666666"/>
-                </a:solidFill>
-                <a:latin typeface="Calibri"/>
-              </a:rPr>
-              <a:t>68</a:t>
-            </a:r>
-          </a:p>
-        </p:txBody>
-      </p:sp>
-    </p:spTree>
-  </p:cSld>
-  <p:clrMapOvr>
-    <a:masterClrMapping/>
-  </p:clrMapOvr>
-</p:sld>
-</file>
-
-<file path=ppt/slides/slide69.xml><?xml version="1.0" encoding="utf-8"?>
-<p:sld xmlns:a="http://schemas.openxmlformats.org/drawingml/2006/main" xmlns:p="http://schemas.openxmlformats.org/presentationml/2006/main" xmlns:r="http://schemas.openxmlformats.org/officeDocument/2006/relationships">
-  <p:cSld>
-    <p:spTree>
-      <p:nvGrpSpPr>
-        <p:cNvPr id="1" name=""/>
-        <p:cNvGrpSpPr/>
-        <p:nvPr/>
-      </p:nvGrpSpPr>
-      <p:grpSpPr/>
-      <p:sp>
-        <p:nvSpPr>
-          <p:cNvPr id="2" name="TextBox 1"/>
-          <p:cNvSpPr txBox="1"/>
-          <p:nvPr/>
-        </p:nvSpPr>
-        <p:spPr>
-          <a:xfrm>
-            <a:off x="548640" y="365760"/>
-            <a:ext cx="11094415" cy="777240"/>
-          </a:xfrm>
-          <a:prstGeom prst="rect">
-            <a:avLst/>
-          </a:prstGeom>
-          <a:noFill/>
-        </p:spPr>
-        <p:txBody>
-          <a:bodyPr wrap="square" anchor="b" lIns="45720" rIns="45720" tIns="27432" bIns="27432">
-            <a:spAutoFit/>
-          </a:bodyPr>
-          <a:lstStyle/>
-          <a:p>
-            <a:pPr algn="l"/>
-            <a:r>
-              <a:rPr sz="3000" b="1" i="0">
-                <a:solidFill>
-                  <a:srgbClr val="111111"/>
-                </a:solidFill>
-                <a:latin typeface="Calibri"/>
-              </a:rPr>
-              <a:t>Key takeaways</a:t>
-            </a:r>
-          </a:p>
-        </p:txBody>
-      </p:sp>
-      <p:sp>
-        <p:nvSpPr>
-          <p:cNvPr id="3" name="Rectangle 2"/>
-          <p:cNvSpPr/>
-          <p:nvPr/>
-        </p:nvSpPr>
-        <p:spPr>
-          <a:xfrm>
-            <a:off x="548640" y="1115568"/>
-            <a:ext cx="1097280" cy="38100"/>
-          </a:xfrm>
-          <a:prstGeom prst="rect">
-            <a:avLst/>
-          </a:prstGeom>
-          <a:solidFill>
-            <a:srgbClr val="F7A11A"/>
-          </a:solidFill>
-          <a:ln>
-            <a:noFill/>
-          </a:ln>
-          <a:effectLst/>
-        </p:spPr>
-        <p:style>
-          <a:lnRef idx="1">
-            <a:schemeClr val="accent1"/>
-          </a:lnRef>
-          <a:fillRef idx="3">
-            <a:schemeClr val="accent1"/>
-          </a:fillRef>
-          <a:effectRef idx="2">
-            <a:schemeClr val="accent1"/>
-          </a:effectRef>
-          <a:fontRef idx="minor">
-            <a:schemeClr val="lt1"/>
-          </a:fontRef>
-        </p:style>
-        <p:txBody>
-          <a:bodyPr rtlCol="0" anchor="ctr"/>
-          <a:lstStyle/>
-          <a:p>
-            <a:pPr algn="ctr"/>
-          </a:p>
-        </p:txBody>
-      </p:sp>
-      <p:sp>
-        <p:nvSpPr>
-          <p:cNvPr id="4" name="Rectangle 3"/>
-          <p:cNvSpPr/>
-          <p:nvPr/>
-        </p:nvSpPr>
-        <p:spPr>
-          <a:xfrm>
-            <a:off x="1645920" y="1115568"/>
-            <a:ext cx="9997135" cy="19050"/>
-          </a:xfrm>
-          <a:prstGeom prst="rect">
-            <a:avLst/>
-          </a:prstGeom>
-          <a:solidFill>
-            <a:srgbClr val="DDDDDD"/>
-          </a:solidFill>
-          <a:ln>
-            <a:noFill/>
-          </a:ln>
-          <a:effectLst/>
-        </p:spPr>
-        <p:style>
-          <a:lnRef idx="1">
-            <a:schemeClr val="accent1"/>
-          </a:lnRef>
-          <a:fillRef idx="3">
-            <a:schemeClr val="accent1"/>
-          </a:fillRef>
-          <a:effectRef idx="2">
-            <a:schemeClr val="accent1"/>
-          </a:effectRef>
-          <a:fontRef idx="minor">
-            <a:schemeClr val="lt1"/>
-          </a:fontRef>
-        </p:style>
-        <p:txBody>
-          <a:bodyPr rtlCol="0" anchor="ctr"/>
-          <a:lstStyle/>
-          <a:p>
-            <a:pPr algn="ctr"/>
-          </a:p>
-        </p:txBody>
-      </p:sp>
-      <p:sp>
-        <p:nvSpPr>
-          <p:cNvPr id="5" name="TextBox 4"/>
-          <p:cNvSpPr txBox="1"/>
-          <p:nvPr/>
-        </p:nvSpPr>
-        <p:spPr>
-          <a:xfrm>
-            <a:off x="548640" y="1371600"/>
-            <a:ext cx="11094415" cy="4937760"/>
-          </a:xfrm>
-          <a:prstGeom prst="rect">
-            <a:avLst/>
-          </a:prstGeom>
-          <a:noFill/>
-        </p:spPr>
-        <p:txBody>
-          <a:bodyPr wrap="square" lIns="45720" rIns="45720">
-            <a:spAutoFit/>
-          </a:bodyPr>
-          <a:lstStyle/>
-          <a:p>
-            <a:pPr>
-              <a:spcAft>
-                <a:spcPts val="1200"/>
-              </a:spcAft>
-            </a:pPr>
-            <a:r>
-              <a:rPr sz="2200">
-                <a:solidFill>
-                  <a:srgbClr val="111111"/>
-                </a:solidFill>
-                <a:latin typeface="Calibri"/>
-              </a:rPr>
-              <a:t>•  Automations follow fixed steps; agents let a model choose the steps. Most useful systems are workflows with a few AI steps.</a:t>
-            </a:r>
-          </a:p>
-          <a:p>
-            <a:pPr>
-              <a:spcAft>
-                <a:spcPts val="1200"/>
-              </a:spcAft>
-            </a:pPr>
-            <a:r>
-              <a:rPr sz="2200">
-                <a:solidFill>
-                  <a:srgbClr val="111111"/>
-                </a:solidFill>
-                <a:latin typeface="Calibri"/>
-              </a:rPr>
-              <a:t>•  Every agent is model + tools + memory + instructions. Instructions and tool permissions are your control surface.</a:t>
-            </a:r>
-          </a:p>
-          <a:p>
-            <a:pPr>
-              <a:spcAft>
-                <a:spcPts val="1200"/>
-              </a:spcAft>
-            </a:pPr>
-            <a:r>
-              <a:rPr sz="2200">
-                <a:solidFill>
-                  <a:srgbClr val="111111"/>
-                </a:solidFill>
-                <a:latin typeface="Calibri"/>
-              </a:rPr>
-              <a:t>•  Agents run a think, act, observe loop and need iteration limits and good tools.</a:t>
-            </a:r>
-          </a:p>
-          <a:p>
-            <a:pPr>
-              <a:spcAft>
-                <a:spcPts val="1200"/>
-              </a:spcAft>
-            </a:pPr>
-            <a:r>
-              <a:rPr sz="2200">
-                <a:solidFill>
-                  <a:srgbClr val="111111"/>
-                </a:solidFill>
-                <a:latin typeface="Calibri"/>
-              </a:rPr>
-              <a:t>•  Automation removes copying and chasing; deciding stays with people, always where money, people or law are involved.</a:t>
-            </a:r>
-          </a:p>
-        </p:txBody>
-      </p:sp>
-      <p:sp>
-        <p:nvSpPr>
-          <p:cNvPr id="6" name="Rectangle 5"/>
-          <p:cNvSpPr/>
-          <p:nvPr/>
-        </p:nvSpPr>
-        <p:spPr>
-          <a:xfrm>
-            <a:off x="548640" y="6309360"/>
-            <a:ext cx="11094415" cy="19050"/>
-          </a:xfrm>
-          <a:prstGeom prst="rect">
-            <a:avLst/>
-          </a:prstGeom>
-          <a:solidFill>
-            <a:srgbClr val="DDDDDD"/>
-          </a:solidFill>
-          <a:ln>
-            <a:noFill/>
-          </a:ln>
-          <a:effectLst/>
-        </p:spPr>
-        <p:style>
-          <a:lnRef idx="1">
-            <a:schemeClr val="accent1"/>
-          </a:lnRef>
-          <a:fillRef idx="3">
-            <a:schemeClr val="accent1"/>
-          </a:fillRef>
-          <a:effectRef idx="2">
-            <a:schemeClr val="accent1"/>
-          </a:effectRef>
-          <a:fontRef idx="minor">
-            <a:schemeClr val="lt1"/>
-          </a:fontRef>
-        </p:style>
-        <p:txBody>
-          <a:bodyPr rtlCol="0" anchor="ctr"/>
-          <a:lstStyle/>
-          <a:p>
-            <a:pPr algn="ctr"/>
-          </a:p>
-        </p:txBody>
-      </p:sp>
-      <p:sp>
-        <p:nvSpPr>
-          <p:cNvPr id="7" name="TextBox 6"/>
-          <p:cNvSpPr txBox="1"/>
-          <p:nvPr/>
-        </p:nvSpPr>
-        <p:spPr>
-          <a:xfrm>
-            <a:off x="548640" y="6355080"/>
-            <a:ext cx="9144000" cy="365760"/>
-          </a:xfrm>
-          <a:prstGeom prst="rect">
-            <a:avLst/>
-          </a:prstGeom>
-          <a:noFill/>
-        </p:spPr>
-        <p:txBody>
-          <a:bodyPr wrap="square" anchor="t" lIns="45720" rIns="45720" tIns="27432" bIns="27432">
-            <a:spAutoFit/>
-          </a:bodyPr>
-          <a:lstStyle/>
-          <a:p>
-            <a:pPr algn="l"/>
-            <a:r>
-              <a:rPr sz="1000" b="0" i="0">
-                <a:solidFill>
-                  <a:srgbClr val="666666"/>
-                </a:solidFill>
-                <a:latin typeface="Calibri"/>
-              </a:rPr>
-              <a:t>IEEE CS Region 8 AI Caravan 2026 · AI Administrator · Day 1 · Session 1</a:t>
-            </a:r>
-          </a:p>
-        </p:txBody>
-      </p:sp>
-      <p:sp>
-        <p:nvSpPr>
-          <p:cNvPr id="8" name="TextBox 7"/>
-          <p:cNvSpPr txBox="1"/>
-          <p:nvPr/>
-        </p:nvSpPr>
-        <p:spPr>
-          <a:xfrm>
-            <a:off x="10271455" y="6355080"/>
-            <a:ext cx="1371600" cy="365760"/>
-          </a:xfrm>
-          <a:prstGeom prst="rect">
-            <a:avLst/>
-          </a:prstGeom>
-          <a:noFill/>
-        </p:spPr>
-        <p:txBody>
-          <a:bodyPr wrap="square" anchor="t" lIns="45720" rIns="45720" tIns="27432" bIns="27432">
-            <a:spAutoFit/>
-          </a:bodyPr>
-          <a:lstStyle/>
-          <a:p>
-            <a:pPr algn="r"/>
-            <a:r>
-              <a:rPr sz="1000" b="0" i="0">
-                <a:solidFill>
-                  <a:srgbClr val="666666"/>
-                </a:solidFill>
-                <a:latin typeface="Calibri"/>
-              </a:rPr>
-              <a:t>69</a:t>
             </a:r>
           </a:p>
         </p:txBody>
@@ -38345,1687 +33601,6 @@
                 <a:latin typeface="Calibri"/>
               </a:rPr>
               <a:t>7</a:t>
-            </a:r>
-          </a:p>
-        </p:txBody>
-      </p:sp>
-    </p:spTree>
-  </p:cSld>
-  <p:clrMapOvr>
-    <a:masterClrMapping/>
-  </p:clrMapOvr>
-</p:sld>
-</file>
-
-<file path=ppt/slides/slide70.xml><?xml version="1.0" encoding="utf-8"?>
-<p:sld xmlns:a="http://schemas.openxmlformats.org/drawingml/2006/main" xmlns:p="http://schemas.openxmlformats.org/presentationml/2006/main" xmlns:r="http://schemas.openxmlformats.org/officeDocument/2006/relationships">
-  <p:cSld>
-    <p:spTree>
-      <p:nvGrpSpPr>
-        <p:cNvPr id="1" name=""/>
-        <p:cNvGrpSpPr/>
-        <p:nvPr/>
-      </p:nvGrpSpPr>
-      <p:grpSpPr/>
-      <p:sp>
-        <p:nvSpPr>
-          <p:cNvPr id="2" name="TextBox 1"/>
-          <p:cNvSpPr txBox="1"/>
-          <p:nvPr/>
-        </p:nvSpPr>
-        <p:spPr>
-          <a:xfrm>
-            <a:off x="548640" y="365760"/>
-            <a:ext cx="11094415" cy="777240"/>
-          </a:xfrm>
-          <a:prstGeom prst="rect">
-            <a:avLst/>
-          </a:prstGeom>
-          <a:noFill/>
-        </p:spPr>
-        <p:txBody>
-          <a:bodyPr wrap="square" anchor="b" lIns="45720" rIns="45720" tIns="27432" bIns="27432">
-            <a:spAutoFit/>
-          </a:bodyPr>
-          <a:lstStyle/>
-          <a:p>
-            <a:pPr algn="l"/>
-            <a:r>
-              <a:rPr sz="2600" b="1" i="0">
-                <a:solidFill>
-                  <a:srgbClr val="111111"/>
-                </a:solidFill>
-                <a:latin typeface="Calibri"/>
-              </a:rPr>
-              <a:t>Further reading</a:t>
-            </a:r>
-          </a:p>
-        </p:txBody>
-      </p:sp>
-      <p:sp>
-        <p:nvSpPr>
-          <p:cNvPr id="3" name="Rectangle 2"/>
-          <p:cNvSpPr/>
-          <p:nvPr/>
-        </p:nvSpPr>
-        <p:spPr>
-          <a:xfrm>
-            <a:off x="548640" y="1115568"/>
-            <a:ext cx="1097280" cy="38100"/>
-          </a:xfrm>
-          <a:prstGeom prst="rect">
-            <a:avLst/>
-          </a:prstGeom>
-          <a:solidFill>
-            <a:srgbClr val="F7A11A"/>
-          </a:solidFill>
-          <a:ln>
-            <a:noFill/>
-          </a:ln>
-          <a:effectLst/>
-        </p:spPr>
-        <p:style>
-          <a:lnRef idx="1">
-            <a:schemeClr val="accent1"/>
-          </a:lnRef>
-          <a:fillRef idx="3">
-            <a:schemeClr val="accent1"/>
-          </a:fillRef>
-          <a:effectRef idx="2">
-            <a:schemeClr val="accent1"/>
-          </a:effectRef>
-          <a:fontRef idx="minor">
-            <a:schemeClr val="lt1"/>
-          </a:fontRef>
-        </p:style>
-        <p:txBody>
-          <a:bodyPr rtlCol="0" anchor="ctr"/>
-          <a:lstStyle/>
-          <a:p>
-            <a:pPr algn="ctr"/>
-          </a:p>
-        </p:txBody>
-      </p:sp>
-      <p:sp>
-        <p:nvSpPr>
-          <p:cNvPr id="4" name="Rectangle 3"/>
-          <p:cNvSpPr/>
-          <p:nvPr/>
-        </p:nvSpPr>
-        <p:spPr>
-          <a:xfrm>
-            <a:off x="1645920" y="1115568"/>
-            <a:ext cx="9997135" cy="19050"/>
-          </a:xfrm>
-          <a:prstGeom prst="rect">
-            <a:avLst/>
-          </a:prstGeom>
-          <a:solidFill>
-            <a:srgbClr val="DDDDDD"/>
-          </a:solidFill>
-          <a:ln>
-            <a:noFill/>
-          </a:ln>
-          <a:effectLst/>
-        </p:spPr>
-        <p:style>
-          <a:lnRef idx="1">
-            <a:schemeClr val="accent1"/>
-          </a:lnRef>
-          <a:fillRef idx="3">
-            <a:schemeClr val="accent1"/>
-          </a:fillRef>
-          <a:effectRef idx="2">
-            <a:schemeClr val="accent1"/>
-          </a:effectRef>
-          <a:fontRef idx="minor">
-            <a:schemeClr val="lt1"/>
-          </a:fontRef>
-        </p:style>
-        <p:txBody>
-          <a:bodyPr rtlCol="0" anchor="ctr"/>
-          <a:lstStyle/>
-          <a:p>
-            <a:pPr algn="ctr"/>
-          </a:p>
-        </p:txBody>
-      </p:sp>
-      <p:pic>
-        <p:nvPicPr>
-          <p:cNvPr id="5" name="Picture 4" descr="local-book.jpg"/>
-          <p:cNvPicPr>
-            <a:picLocks noChangeAspect="1"/>
-          </p:cNvPicPr>
-          <p:nvPr/>
-        </p:nvPicPr>
-        <p:blipFill>
-          <a:blip r:embed="rId2"/>
-          <a:stretch>
-            <a:fillRect/>
-          </a:stretch>
-        </p:blipFill>
-        <p:spPr>
-          <a:xfrm>
-            <a:off x="2425244" y="1280160"/>
-            <a:ext cx="3196232" cy="4160520"/>
-          </a:xfrm>
-          <a:prstGeom prst="rect">
-            <a:avLst/>
-          </a:prstGeom>
-        </p:spPr>
-      </p:pic>
-      <p:sp>
-        <p:nvSpPr>
-          <p:cNvPr id="6" name="TextBox 5"/>
-          <p:cNvSpPr txBox="1"/>
-          <p:nvPr/>
-        </p:nvSpPr>
-        <p:spPr>
-          <a:xfrm>
-            <a:off x="548640" y="5486400"/>
-            <a:ext cx="6949440" cy="502920"/>
-          </a:xfrm>
-          <a:prstGeom prst="rect">
-            <a:avLst/>
-          </a:prstGeom>
-          <a:noFill/>
-        </p:spPr>
-        <p:txBody>
-          <a:bodyPr wrap="square" anchor="t" lIns="45720" rIns="45720" tIns="27432" bIns="27432">
-            <a:spAutoFit/>
-          </a:bodyPr>
-          <a:lstStyle/>
-          <a:p>
-            <a:pPr algn="l"/>
-            <a:r>
-              <a:rPr sz="1300" b="0" i="1">
-                <a:solidFill>
-                  <a:srgbClr val="666666"/>
-                </a:solidFill>
-                <a:latin typeface="Calibri"/>
-              </a:rPr>
-              <a:t>Hands-On Large Language Models (Alammar and Grootendorst, O'Reilly 2024), whose visual style the figures in this deck follow.</a:t>
-            </a:r>
-          </a:p>
-        </p:txBody>
-      </p:sp>
-      <p:sp>
-        <p:nvSpPr>
-          <p:cNvPr id="7" name="TextBox 6"/>
-          <p:cNvSpPr txBox="1"/>
-          <p:nvPr/>
-        </p:nvSpPr>
-        <p:spPr>
-          <a:xfrm>
-            <a:off x="7863840" y="1417320"/>
-            <a:ext cx="3779215" cy="4160520"/>
-          </a:xfrm>
-          <a:prstGeom prst="rect">
-            <a:avLst/>
-          </a:prstGeom>
-          <a:noFill/>
-        </p:spPr>
-        <p:txBody>
-          <a:bodyPr wrap="square" lIns="45720" rIns="45720">
-            <a:spAutoFit/>
-          </a:bodyPr>
-          <a:lstStyle/>
-          <a:p>
-            <a:pPr>
-              <a:spcAft>
-                <a:spcPts val="1000"/>
-              </a:spcAft>
-            </a:pPr>
-            <a:r>
-              <a:rPr sz="1800">
-                <a:solidFill>
-                  <a:srgbClr val="111111"/>
-                </a:solidFill>
-                <a:latin typeface="Calibri"/>
-              </a:rPr>
-              <a:t>•  Module 1 online, with the lab and quiz: albanna-tutorials.com/ai-administrator</a:t>
-            </a:r>
-          </a:p>
-          <a:p>
-            <a:pPr>
-              <a:spcAft>
-                <a:spcPts val="1000"/>
-              </a:spcAft>
-            </a:pPr>
-            <a:r>
-              <a:rPr sz="1800">
-                <a:solidFill>
-                  <a:srgbClr val="111111"/>
-                </a:solidFill>
-                <a:latin typeface="Calibri"/>
-              </a:rPr>
-              <a:t>•  LLM Agents explained visually: albanna-tutorials.com/llm_agents.html</a:t>
-            </a:r>
-          </a:p>
-          <a:p>
-            <a:pPr>
-              <a:spcAft>
-                <a:spcPts val="1000"/>
-              </a:spcAft>
-            </a:pPr>
-            <a:r>
-              <a:rPr sz="1800">
-                <a:solidFill>
-                  <a:srgbClr val="111111"/>
-                </a:solidFill>
-                <a:latin typeface="Calibri"/>
-              </a:rPr>
-              <a:t>•  A Visual Guide to LLM Agents (M. Grootendorst)</a:t>
-            </a:r>
-          </a:p>
-          <a:p>
-            <a:pPr>
-              <a:spcAft>
-                <a:spcPts val="1000"/>
-              </a:spcAft>
-            </a:pPr>
-            <a:r>
-              <a:rPr sz="1800">
-                <a:solidFill>
-                  <a:srgbClr val="111111"/>
-                </a:solidFill>
-                <a:latin typeface="Calibri"/>
-              </a:rPr>
-              <a:t>•  Next session: Prompting for Operators</a:t>
-            </a:r>
-          </a:p>
-        </p:txBody>
-      </p:sp>
-      <p:sp>
-        <p:nvSpPr>
-          <p:cNvPr id="8" name="TextBox 7"/>
-          <p:cNvSpPr txBox="1"/>
-          <p:nvPr/>
-        </p:nvSpPr>
-        <p:spPr>
-          <a:xfrm>
-            <a:off x="7071055" y="6016752"/>
-            <a:ext cx="4572000" cy="274320"/>
-          </a:xfrm>
-          <a:prstGeom prst="rect">
-            <a:avLst/>
-          </a:prstGeom>
-          <a:noFill/>
-        </p:spPr>
-        <p:txBody>
-          <a:bodyPr wrap="square" anchor="t" lIns="45720" rIns="45720" tIns="27432" bIns="27432">
-            <a:spAutoFit/>
-          </a:bodyPr>
-          <a:lstStyle/>
-          <a:p>
-            <a:pPr algn="r"/>
-            <a:r>
-              <a:rPr sz="900" b="0" i="1">
-                <a:solidFill>
-                  <a:srgbClr val="666666"/>
-                </a:solidFill>
-                <a:latin typeface="Calibri"/>
-              </a:rPr>
-              <a:t>Figure: Alammar, J. and Grootendorst, M. (2024). Hands-On Large Language Models. O'Reilly Media</a:t>
-            </a:r>
-          </a:p>
-        </p:txBody>
-      </p:sp>
-      <p:sp>
-        <p:nvSpPr>
-          <p:cNvPr id="9" name="Rectangle 8"/>
-          <p:cNvSpPr/>
-          <p:nvPr/>
-        </p:nvSpPr>
-        <p:spPr>
-          <a:xfrm>
-            <a:off x="548640" y="6309360"/>
-            <a:ext cx="11094415" cy="19050"/>
-          </a:xfrm>
-          <a:prstGeom prst="rect">
-            <a:avLst/>
-          </a:prstGeom>
-          <a:solidFill>
-            <a:srgbClr val="DDDDDD"/>
-          </a:solidFill>
-          <a:ln>
-            <a:noFill/>
-          </a:ln>
-          <a:effectLst/>
-        </p:spPr>
-        <p:style>
-          <a:lnRef idx="1">
-            <a:schemeClr val="accent1"/>
-          </a:lnRef>
-          <a:fillRef idx="3">
-            <a:schemeClr val="accent1"/>
-          </a:fillRef>
-          <a:effectRef idx="2">
-            <a:schemeClr val="accent1"/>
-          </a:effectRef>
-          <a:fontRef idx="minor">
-            <a:schemeClr val="lt1"/>
-          </a:fontRef>
-        </p:style>
-        <p:txBody>
-          <a:bodyPr rtlCol="0" anchor="ctr"/>
-          <a:lstStyle/>
-          <a:p>
-            <a:pPr algn="ctr"/>
-          </a:p>
-        </p:txBody>
-      </p:sp>
-      <p:sp>
-        <p:nvSpPr>
-          <p:cNvPr id="10" name="TextBox 9"/>
-          <p:cNvSpPr txBox="1"/>
-          <p:nvPr/>
-        </p:nvSpPr>
-        <p:spPr>
-          <a:xfrm>
-            <a:off x="548640" y="6355080"/>
-            <a:ext cx="9144000" cy="365760"/>
-          </a:xfrm>
-          <a:prstGeom prst="rect">
-            <a:avLst/>
-          </a:prstGeom>
-          <a:noFill/>
-        </p:spPr>
-        <p:txBody>
-          <a:bodyPr wrap="square" anchor="t" lIns="45720" rIns="45720" tIns="27432" bIns="27432">
-            <a:spAutoFit/>
-          </a:bodyPr>
-          <a:lstStyle/>
-          <a:p>
-            <a:pPr algn="l"/>
-            <a:r>
-              <a:rPr sz="1000" b="0" i="0">
-                <a:solidFill>
-                  <a:srgbClr val="666666"/>
-                </a:solidFill>
-                <a:latin typeface="Calibri"/>
-              </a:rPr>
-              <a:t>IEEE CS Region 8 AI Caravan 2026 · AI Administrator · Day 1 · Session 1</a:t>
-            </a:r>
-          </a:p>
-        </p:txBody>
-      </p:sp>
-      <p:sp>
-        <p:nvSpPr>
-          <p:cNvPr id="11" name="TextBox 10"/>
-          <p:cNvSpPr txBox="1"/>
-          <p:nvPr/>
-        </p:nvSpPr>
-        <p:spPr>
-          <a:xfrm>
-            <a:off x="10271455" y="6355080"/>
-            <a:ext cx="1371600" cy="365760"/>
-          </a:xfrm>
-          <a:prstGeom prst="rect">
-            <a:avLst/>
-          </a:prstGeom>
-          <a:noFill/>
-        </p:spPr>
-        <p:txBody>
-          <a:bodyPr wrap="square" anchor="t" lIns="45720" rIns="45720" tIns="27432" bIns="27432">
-            <a:spAutoFit/>
-          </a:bodyPr>
-          <a:lstStyle/>
-          <a:p>
-            <a:pPr algn="r"/>
-            <a:r>
-              <a:rPr sz="1000" b="0" i="0">
-                <a:solidFill>
-                  <a:srgbClr val="666666"/>
-                </a:solidFill>
-                <a:latin typeface="Calibri"/>
-              </a:rPr>
-              <a:t>70</a:t>
-            </a:r>
-          </a:p>
-        </p:txBody>
-      </p:sp>
-    </p:spTree>
-  </p:cSld>
-  <p:clrMapOvr>
-    <a:masterClrMapping/>
-  </p:clrMapOvr>
-</p:sld>
-</file>
-
-<file path=ppt/slides/slide71.xml><?xml version="1.0" encoding="utf-8"?>
-<p:sld xmlns:a="http://schemas.openxmlformats.org/drawingml/2006/main" xmlns:p="http://schemas.openxmlformats.org/presentationml/2006/main" xmlns:r="http://schemas.openxmlformats.org/officeDocument/2006/relationships">
-  <p:cSld>
-    <p:spTree>
-      <p:nvGrpSpPr>
-        <p:cNvPr id="1" name=""/>
-        <p:cNvGrpSpPr/>
-        <p:nvPr/>
-      </p:nvGrpSpPr>
-      <p:grpSpPr/>
-      <p:sp>
-        <p:nvSpPr>
-          <p:cNvPr id="2" name="TextBox 1"/>
-          <p:cNvSpPr txBox="1"/>
-          <p:nvPr/>
-        </p:nvSpPr>
-        <p:spPr>
-          <a:xfrm>
-            <a:off x="548640" y="365760"/>
-            <a:ext cx="11094415" cy="777240"/>
-          </a:xfrm>
-          <a:prstGeom prst="rect">
-            <a:avLst/>
-          </a:prstGeom>
-          <a:noFill/>
-        </p:spPr>
-        <p:txBody>
-          <a:bodyPr wrap="square" anchor="b" lIns="45720" rIns="45720" tIns="27432" bIns="27432">
-            <a:spAutoFit/>
-          </a:bodyPr>
-          <a:lstStyle/>
-          <a:p>
-            <a:pPr algn="l"/>
-            <a:r>
-              <a:rPr sz="3000" b="1" i="0">
-                <a:solidFill>
-                  <a:srgbClr val="111111"/>
-                </a:solidFill>
-                <a:latin typeface="Calibri"/>
-              </a:rPr>
-              <a:t>Latest reading on agents at work (2026)</a:t>
-            </a:r>
-          </a:p>
-        </p:txBody>
-      </p:sp>
-      <p:sp>
-        <p:nvSpPr>
-          <p:cNvPr id="3" name="Rectangle 2"/>
-          <p:cNvSpPr/>
-          <p:nvPr/>
-        </p:nvSpPr>
-        <p:spPr>
-          <a:xfrm>
-            <a:off x="548640" y="1115568"/>
-            <a:ext cx="1097280" cy="38100"/>
-          </a:xfrm>
-          <a:prstGeom prst="rect">
-            <a:avLst/>
-          </a:prstGeom>
-          <a:solidFill>
-            <a:srgbClr val="F7A11A"/>
-          </a:solidFill>
-          <a:ln>
-            <a:noFill/>
-          </a:ln>
-          <a:effectLst/>
-        </p:spPr>
-        <p:style>
-          <a:lnRef idx="1">
-            <a:schemeClr val="accent1"/>
-          </a:lnRef>
-          <a:fillRef idx="3">
-            <a:schemeClr val="accent1"/>
-          </a:fillRef>
-          <a:effectRef idx="2">
-            <a:schemeClr val="accent1"/>
-          </a:effectRef>
-          <a:fontRef idx="minor">
-            <a:schemeClr val="lt1"/>
-          </a:fontRef>
-        </p:style>
-        <p:txBody>
-          <a:bodyPr rtlCol="0" anchor="ctr"/>
-          <a:lstStyle/>
-          <a:p>
-            <a:pPr algn="ctr"/>
-          </a:p>
-        </p:txBody>
-      </p:sp>
-      <p:sp>
-        <p:nvSpPr>
-          <p:cNvPr id="4" name="Rectangle 3"/>
-          <p:cNvSpPr/>
-          <p:nvPr/>
-        </p:nvSpPr>
-        <p:spPr>
-          <a:xfrm>
-            <a:off x="1645920" y="1115568"/>
-            <a:ext cx="9997135" cy="19050"/>
-          </a:xfrm>
-          <a:prstGeom prst="rect">
-            <a:avLst/>
-          </a:prstGeom>
-          <a:solidFill>
-            <a:srgbClr val="DDDDDD"/>
-          </a:solidFill>
-          <a:ln>
-            <a:noFill/>
-          </a:ln>
-          <a:effectLst/>
-        </p:spPr>
-        <p:style>
-          <a:lnRef idx="1">
-            <a:schemeClr val="accent1"/>
-          </a:lnRef>
-          <a:fillRef idx="3">
-            <a:schemeClr val="accent1"/>
-          </a:fillRef>
-          <a:effectRef idx="2">
-            <a:schemeClr val="accent1"/>
-          </a:effectRef>
-          <a:fontRef idx="minor">
-            <a:schemeClr val="lt1"/>
-          </a:fontRef>
-        </p:style>
-        <p:txBody>
-          <a:bodyPr rtlCol="0" anchor="ctr"/>
-          <a:lstStyle/>
-          <a:p>
-            <a:pPr algn="ctr"/>
-          </a:p>
-        </p:txBody>
-      </p:sp>
-      <p:sp>
-        <p:nvSpPr>
-          <p:cNvPr id="5" name="TextBox 4"/>
-          <p:cNvSpPr txBox="1"/>
-          <p:nvPr/>
-        </p:nvSpPr>
-        <p:spPr>
-          <a:xfrm>
-            <a:off x="548640" y="1325880"/>
-            <a:ext cx="11094415" cy="411480"/>
-          </a:xfrm>
-          <a:prstGeom prst="rect">
-            <a:avLst/>
-          </a:prstGeom>
-          <a:noFill/>
-        </p:spPr>
-        <p:txBody>
-          <a:bodyPr wrap="square" anchor="t" lIns="45720" rIns="45720" tIns="27432" bIns="27432">
-            <a:spAutoFit/>
-          </a:bodyPr>
-          <a:lstStyle/>
-          <a:p>
-            <a:pPr algn="l"/>
-            <a:r>
-              <a:rPr sz="1600" b="1" i="0">
-                <a:solidFill>
-                  <a:srgbClr val="111111"/>
-                </a:solidFill>
-                <a:latin typeface="Calibri"/>
-              </a:rPr>
-              <a:t>How AI agents will reshape digital workplace IT operations</a:t>
-            </a:r>
-          </a:p>
-        </p:txBody>
-      </p:sp>
-      <p:sp>
-        <p:nvSpPr>
-          <p:cNvPr id="6" name="TextBox 5"/>
-          <p:cNvSpPr txBox="1"/>
-          <p:nvPr/>
-        </p:nvSpPr>
-        <p:spPr>
-          <a:xfrm>
-            <a:off x="548640" y="1691640"/>
-            <a:ext cx="11094415" cy="320040"/>
-          </a:xfrm>
-          <a:prstGeom prst="rect">
-            <a:avLst/>
-          </a:prstGeom>
-          <a:noFill/>
-        </p:spPr>
-        <p:txBody>
-          <a:bodyPr wrap="square" anchor="t" lIns="45720" rIns="45720" tIns="27432" bIns="27432">
-            <a:spAutoFit/>
-          </a:bodyPr>
-          <a:lstStyle/>
-          <a:p>
-            <a:pPr algn="l"/>
-            <a:r>
-              <a:rPr sz="1100" b="0" i="0">
-                <a:solidFill>
-                  <a:srgbClr val="666666"/>
-                </a:solidFill>
-                <a:latin typeface="Calibri"/>
-              </a:rPr>
-              <a:t>CIO Dive, by Autumn Stanish (Gartner) · 19 March 2026 · ciodive.com/news/agentic-AI-IT-operations-gartner-digital-workplace/814244</a:t>
-            </a:r>
-          </a:p>
-        </p:txBody>
-      </p:sp>
-      <p:sp>
-        <p:nvSpPr>
-          <p:cNvPr id="7" name="TextBox 6"/>
-          <p:cNvSpPr txBox="1"/>
-          <p:nvPr/>
-        </p:nvSpPr>
-        <p:spPr>
-          <a:xfrm>
-            <a:off x="548640" y="1965960"/>
-            <a:ext cx="11094415" cy="502920"/>
-          </a:xfrm>
-          <a:prstGeom prst="rect">
-            <a:avLst/>
-          </a:prstGeom>
-          <a:noFill/>
-        </p:spPr>
-        <p:txBody>
-          <a:bodyPr wrap="square" anchor="t" lIns="45720" rIns="45720" tIns="27432" bIns="27432">
-            <a:spAutoFit/>
-          </a:bodyPr>
-          <a:lstStyle/>
-          <a:p>
-            <a:pPr algn="l"/>
-            <a:r>
-              <a:rPr sz="1300" b="0" i="0">
-                <a:solidFill>
-                  <a:srgbClr val="111111"/>
-                </a:solidFill>
-                <a:latin typeface="Calibri"/>
-              </a:rPr>
-              <a:t>Gartner expects nearly a third of organisations to run 80% of digital-workplace services autonomously by 2030, from zero in 2025; 84% of IT leaders say extra controls will be needed to govern agents. Controls are the job, not the afterthought.</a:t>
-            </a:r>
-          </a:p>
-        </p:txBody>
-      </p:sp>
-      <p:sp>
-        <p:nvSpPr>
-          <p:cNvPr id="8" name="Rectangle 7"/>
-          <p:cNvSpPr/>
-          <p:nvPr/>
-        </p:nvSpPr>
-        <p:spPr>
-          <a:xfrm>
-            <a:off x="548640" y="2468880"/>
-            <a:ext cx="11094415" cy="19050"/>
-          </a:xfrm>
-          <a:prstGeom prst="rect">
-            <a:avLst/>
-          </a:prstGeom>
-          <a:solidFill>
-            <a:srgbClr val="DDDDDD"/>
-          </a:solidFill>
-          <a:ln>
-            <a:noFill/>
-          </a:ln>
-          <a:effectLst/>
-        </p:spPr>
-        <p:style>
-          <a:lnRef idx="1">
-            <a:schemeClr val="accent1"/>
-          </a:lnRef>
-          <a:fillRef idx="3">
-            <a:schemeClr val="accent1"/>
-          </a:fillRef>
-          <a:effectRef idx="2">
-            <a:schemeClr val="accent1"/>
-          </a:effectRef>
-          <a:fontRef idx="minor">
-            <a:schemeClr val="lt1"/>
-          </a:fontRef>
-        </p:style>
-        <p:txBody>
-          <a:bodyPr rtlCol="0" anchor="ctr"/>
-          <a:lstStyle/>
-          <a:p>
-            <a:pPr algn="ctr"/>
-          </a:p>
-        </p:txBody>
-      </p:sp>
-      <p:sp>
-        <p:nvSpPr>
-          <p:cNvPr id="9" name="TextBox 8"/>
-          <p:cNvSpPr txBox="1"/>
-          <p:nvPr/>
-        </p:nvSpPr>
-        <p:spPr>
-          <a:xfrm>
-            <a:off x="548640" y="2514600"/>
-            <a:ext cx="11094415" cy="411480"/>
-          </a:xfrm>
-          <a:prstGeom prst="rect">
-            <a:avLst/>
-          </a:prstGeom>
-          <a:noFill/>
-        </p:spPr>
-        <p:txBody>
-          <a:bodyPr wrap="square" anchor="t" lIns="45720" rIns="45720" tIns="27432" bIns="27432">
-            <a:spAutoFit/>
-          </a:bodyPr>
-          <a:lstStyle/>
-          <a:p>
-            <a:pPr algn="l"/>
-            <a:r>
-              <a:rPr sz="1600" b="1" i="0">
-                <a:solidFill>
-                  <a:srgbClr val="111111"/>
-                </a:solidFill>
-                <a:latin typeface="Calibri"/>
-              </a:rPr>
-              <a:t>State of AI trust in 2026: shifting to the agentic era</a:t>
-            </a:r>
-          </a:p>
-        </p:txBody>
-      </p:sp>
-      <p:sp>
-        <p:nvSpPr>
-          <p:cNvPr id="10" name="TextBox 9"/>
-          <p:cNvSpPr txBox="1"/>
-          <p:nvPr/>
-        </p:nvSpPr>
-        <p:spPr>
-          <a:xfrm>
-            <a:off x="548640" y="2880360"/>
-            <a:ext cx="11094415" cy="320040"/>
-          </a:xfrm>
-          <a:prstGeom prst="rect">
-            <a:avLst/>
-          </a:prstGeom>
-          <a:noFill/>
-        </p:spPr>
-        <p:txBody>
-          <a:bodyPr wrap="square" anchor="t" lIns="45720" rIns="45720" tIns="27432" bIns="27432">
-            <a:spAutoFit/>
-          </a:bodyPr>
-          <a:lstStyle/>
-          <a:p>
-            <a:pPr algn="l"/>
-            <a:r>
-              <a:rPr sz="1100" b="0" i="0">
-                <a:solidFill>
-                  <a:srgbClr val="666666"/>
-                </a:solidFill>
-                <a:latin typeface="Calibri"/>
-              </a:rPr>
-              <a:t>McKinsey · 25 March 2026 · mckinsey.com/capabilities/tech-and-ai/our-insights/tech-forward/state-of-ai-trust-in-2026-shifting-to-the-agentic-era</a:t>
-            </a:r>
-          </a:p>
-        </p:txBody>
-      </p:sp>
-      <p:sp>
-        <p:nvSpPr>
-          <p:cNvPr id="11" name="TextBox 10"/>
-          <p:cNvSpPr txBox="1"/>
-          <p:nvPr/>
-        </p:nvSpPr>
-        <p:spPr>
-          <a:xfrm>
-            <a:off x="548640" y="3154680"/>
-            <a:ext cx="11094415" cy="502920"/>
-          </a:xfrm>
-          <a:prstGeom prst="rect">
-            <a:avLst/>
-          </a:prstGeom>
-          <a:noFill/>
-        </p:spPr>
-        <p:txBody>
-          <a:bodyPr wrap="square" anchor="t" lIns="45720" rIns="45720" tIns="27432" bIns="27432">
-            <a:spAutoFit/>
-          </a:bodyPr>
-          <a:lstStyle/>
-          <a:p>
-            <a:pPr algn="l"/>
-            <a:r>
-              <a:rPr sz="1300" b="0" i="0">
-                <a:solidFill>
-                  <a:srgbClr val="111111"/>
-                </a:solidFill>
-                <a:latin typeface="Calibri"/>
-              </a:rPr>
-              <a:t>Adoption is moving from pilots to scaled, increasingly agentic deployments, but only about 30% of organisations reach a mature level of strategy, governance and agent controls. The gap this course fills.</a:t>
-            </a:r>
-          </a:p>
-        </p:txBody>
-      </p:sp>
-      <p:sp>
-        <p:nvSpPr>
-          <p:cNvPr id="12" name="Rectangle 11"/>
-          <p:cNvSpPr/>
-          <p:nvPr/>
-        </p:nvSpPr>
-        <p:spPr>
-          <a:xfrm>
-            <a:off x="548640" y="3657600"/>
-            <a:ext cx="11094415" cy="19050"/>
-          </a:xfrm>
-          <a:prstGeom prst="rect">
-            <a:avLst/>
-          </a:prstGeom>
-          <a:solidFill>
-            <a:srgbClr val="DDDDDD"/>
-          </a:solidFill>
-          <a:ln>
-            <a:noFill/>
-          </a:ln>
-          <a:effectLst/>
-        </p:spPr>
-        <p:style>
-          <a:lnRef idx="1">
-            <a:schemeClr val="accent1"/>
-          </a:lnRef>
-          <a:fillRef idx="3">
-            <a:schemeClr val="accent1"/>
-          </a:fillRef>
-          <a:effectRef idx="2">
-            <a:schemeClr val="accent1"/>
-          </a:effectRef>
-          <a:fontRef idx="minor">
-            <a:schemeClr val="lt1"/>
-          </a:fontRef>
-        </p:style>
-        <p:txBody>
-          <a:bodyPr rtlCol="0" anchor="ctr"/>
-          <a:lstStyle/>
-          <a:p>
-            <a:pPr algn="ctr"/>
-          </a:p>
-        </p:txBody>
-      </p:sp>
-      <p:sp>
-        <p:nvSpPr>
-          <p:cNvPr id="13" name="TextBox 12"/>
-          <p:cNvSpPr txBox="1"/>
-          <p:nvPr/>
-        </p:nvSpPr>
-        <p:spPr>
-          <a:xfrm>
-            <a:off x="548640" y="3703320"/>
-            <a:ext cx="11094415" cy="411480"/>
-          </a:xfrm>
-          <a:prstGeom prst="rect">
-            <a:avLst/>
-          </a:prstGeom>
-          <a:noFill/>
-        </p:spPr>
-        <p:txBody>
-          <a:bodyPr wrap="square" anchor="t" lIns="45720" rIns="45720" tIns="27432" bIns="27432">
-            <a:spAutoFit/>
-          </a:bodyPr>
-          <a:lstStyle/>
-          <a:p>
-            <a:pPr algn="l"/>
-            <a:r>
-              <a:rPr sz="1600" b="1" i="0">
-                <a:solidFill>
-                  <a:srgbClr val="111111"/>
-                </a:solidFill>
-                <a:latin typeface="Calibri"/>
-              </a:rPr>
-              <a:t>Future of Work with AI Agents: auditing automation and augmentation potential across the U.S. workforce</a:t>
-            </a:r>
-          </a:p>
-        </p:txBody>
-      </p:sp>
-      <p:sp>
-        <p:nvSpPr>
-          <p:cNvPr id="14" name="TextBox 13"/>
-          <p:cNvSpPr txBox="1"/>
-          <p:nvPr/>
-        </p:nvSpPr>
-        <p:spPr>
-          <a:xfrm>
-            <a:off x="548640" y="4069080"/>
-            <a:ext cx="11094415" cy="320040"/>
-          </a:xfrm>
-          <a:prstGeom prst="rect">
-            <a:avLst/>
-          </a:prstGeom>
-          <a:noFill/>
-        </p:spPr>
-        <p:txBody>
-          <a:bodyPr wrap="square" anchor="t" lIns="45720" rIns="45720" tIns="27432" bIns="27432">
-            <a:spAutoFit/>
-          </a:bodyPr>
-          <a:lstStyle/>
-          <a:p>
-            <a:pPr algn="l"/>
-            <a:r>
-              <a:rPr sz="1100" b="0" i="0">
-                <a:solidFill>
-                  <a:srgbClr val="666666"/>
-                </a:solidFill>
-                <a:latin typeface="Calibri"/>
-              </a:rPr>
-              <a:t>Stanford (Shao, Brynjolfsson, Yang et al.), arXiv 2506.06576 · revised 1 February 2026 · arxiv.org/abs/2506.06576</a:t>
-            </a:r>
-          </a:p>
-        </p:txBody>
-      </p:sp>
-      <p:sp>
-        <p:nvSpPr>
-          <p:cNvPr id="15" name="TextBox 14"/>
-          <p:cNvSpPr txBox="1"/>
-          <p:nvPr/>
-        </p:nvSpPr>
-        <p:spPr>
-          <a:xfrm>
-            <a:off x="548640" y="4343400"/>
-            <a:ext cx="11094415" cy="502920"/>
-          </a:xfrm>
-          <a:prstGeom prst="rect">
-            <a:avLst/>
-          </a:prstGeom>
-          <a:noFill/>
-        </p:spPr>
-        <p:txBody>
-          <a:bodyPr wrap="square" anchor="t" lIns="45720" rIns="45720" tIns="27432" bIns="27432">
-            <a:spAutoFit/>
-          </a:bodyPr>
-          <a:lstStyle/>
-          <a:p>
-            <a:pPr algn="l"/>
-            <a:r>
-              <a:rPr sz="1300" b="0" i="0">
-                <a:solidFill>
-                  <a:srgbClr val="111111"/>
-                </a:solidFill>
-                <a:latin typeface="Calibri"/>
-              </a:rPr>
-              <a:t>An audit of 844 tasks in 104 occupations: workers want agents on the information-heavy, repetitive tasks and want to keep the interpersonal and judgement ones. Exactly the automation-versus-keep-human split in today's lab.</a:t>
-            </a:r>
-          </a:p>
-        </p:txBody>
-      </p:sp>
-      <p:sp>
-        <p:nvSpPr>
-          <p:cNvPr id="16" name="Rectangle 15"/>
-          <p:cNvSpPr/>
-          <p:nvPr/>
-        </p:nvSpPr>
-        <p:spPr>
-          <a:xfrm>
-            <a:off x="548640" y="4846320"/>
-            <a:ext cx="11094415" cy="19050"/>
-          </a:xfrm>
-          <a:prstGeom prst="rect">
-            <a:avLst/>
-          </a:prstGeom>
-          <a:solidFill>
-            <a:srgbClr val="DDDDDD"/>
-          </a:solidFill>
-          <a:ln>
-            <a:noFill/>
-          </a:ln>
-          <a:effectLst/>
-        </p:spPr>
-        <p:style>
-          <a:lnRef idx="1">
-            <a:schemeClr val="accent1"/>
-          </a:lnRef>
-          <a:fillRef idx="3">
-            <a:schemeClr val="accent1"/>
-          </a:fillRef>
-          <a:effectRef idx="2">
-            <a:schemeClr val="accent1"/>
-          </a:effectRef>
-          <a:fontRef idx="minor">
-            <a:schemeClr val="lt1"/>
-          </a:fontRef>
-        </p:style>
-        <p:txBody>
-          <a:bodyPr rtlCol="0" anchor="ctr"/>
-          <a:lstStyle/>
-          <a:p>
-            <a:pPr algn="ctr"/>
-          </a:p>
-        </p:txBody>
-      </p:sp>
-      <p:sp>
-        <p:nvSpPr>
-          <p:cNvPr id="17" name="TextBox 16"/>
-          <p:cNvSpPr txBox="1"/>
-          <p:nvPr/>
-        </p:nvSpPr>
-        <p:spPr>
-          <a:xfrm>
-            <a:off x="548640" y="4892040"/>
-            <a:ext cx="11094415" cy="411480"/>
-          </a:xfrm>
-          <a:prstGeom prst="rect">
-            <a:avLst/>
-          </a:prstGeom>
-          <a:noFill/>
-        </p:spPr>
-        <p:txBody>
-          <a:bodyPr wrap="square" anchor="t" lIns="45720" rIns="45720" tIns="27432" bIns="27432">
-            <a:spAutoFit/>
-          </a:bodyPr>
-          <a:lstStyle/>
-          <a:p>
-            <a:pPr algn="l"/>
-            <a:r>
-              <a:rPr sz="1600" b="1" i="0">
-                <a:solidFill>
-                  <a:srgbClr val="111111"/>
-                </a:solidFill>
-                <a:latin typeface="Calibri"/>
-              </a:rPr>
-              <a:t>Context Engineering: from prompts to corporate multi-agent architecture</a:t>
-            </a:r>
-          </a:p>
-        </p:txBody>
-      </p:sp>
-      <p:sp>
-        <p:nvSpPr>
-          <p:cNvPr id="18" name="TextBox 17"/>
-          <p:cNvSpPr txBox="1"/>
-          <p:nvPr/>
-        </p:nvSpPr>
-        <p:spPr>
-          <a:xfrm>
-            <a:off x="548640" y="5257800"/>
-            <a:ext cx="11094415" cy="320040"/>
-          </a:xfrm>
-          <a:prstGeom prst="rect">
-            <a:avLst/>
-          </a:prstGeom>
-          <a:noFill/>
-        </p:spPr>
-        <p:txBody>
-          <a:bodyPr wrap="square" anchor="t" lIns="45720" rIns="45720" tIns="27432" bIns="27432">
-            <a:spAutoFit/>
-          </a:bodyPr>
-          <a:lstStyle/>
-          <a:p>
-            <a:pPr algn="l"/>
-            <a:r>
-              <a:rPr sz="1100" b="0" i="0">
-                <a:solidFill>
-                  <a:srgbClr val="666666"/>
-                </a:solidFill>
-                <a:latin typeface="Calibri"/>
-              </a:rPr>
-              <a:t>V. Vishnyakova, arXiv 2603.09619 · 10 March 2026 · arxiv.org/abs/2603.09619</a:t>
-            </a:r>
-          </a:p>
-        </p:txBody>
-      </p:sp>
-      <p:sp>
-        <p:nvSpPr>
-          <p:cNvPr id="19" name="TextBox 18"/>
-          <p:cNvSpPr txBox="1"/>
-          <p:nvPr/>
-        </p:nvSpPr>
-        <p:spPr>
-          <a:xfrm>
-            <a:off x="548640" y="5532120"/>
-            <a:ext cx="11094415" cy="502920"/>
-          </a:xfrm>
-          <a:prstGeom prst="rect">
-            <a:avLst/>
-          </a:prstGeom>
-          <a:noFill/>
-        </p:spPr>
-        <p:txBody>
-          <a:bodyPr wrap="square" anchor="t" lIns="45720" rIns="45720" tIns="27432" bIns="27432">
-            <a:spAutoFit/>
-          </a:bodyPr>
-          <a:lstStyle/>
-          <a:p>
-            <a:pPr algn="l"/>
-            <a:r>
-              <a:rPr sz="1300" b="0" i="0">
-                <a:solidFill>
-                  <a:srgbClr val="111111"/>
-                </a:solidFill>
-                <a:latin typeface="Calibri"/>
-              </a:rPr>
-              <a:t>Argues that managing what an agent knows (its context) is a discipline of its own, with a four-level maturity model. The 'memory' and 'instructions' parts of today's four-part agent, taken seriously at company scale.</a:t>
-            </a:r>
-          </a:p>
-        </p:txBody>
-      </p:sp>
-      <p:sp>
-        <p:nvSpPr>
-          <p:cNvPr id="20" name="Rectangle 19"/>
-          <p:cNvSpPr/>
-          <p:nvPr/>
-        </p:nvSpPr>
-        <p:spPr>
-          <a:xfrm>
-            <a:off x="548640" y="6309360"/>
-            <a:ext cx="11094415" cy="19050"/>
-          </a:xfrm>
-          <a:prstGeom prst="rect">
-            <a:avLst/>
-          </a:prstGeom>
-          <a:solidFill>
-            <a:srgbClr val="DDDDDD"/>
-          </a:solidFill>
-          <a:ln>
-            <a:noFill/>
-          </a:ln>
-          <a:effectLst/>
-        </p:spPr>
-        <p:style>
-          <a:lnRef idx="1">
-            <a:schemeClr val="accent1"/>
-          </a:lnRef>
-          <a:fillRef idx="3">
-            <a:schemeClr val="accent1"/>
-          </a:fillRef>
-          <a:effectRef idx="2">
-            <a:schemeClr val="accent1"/>
-          </a:effectRef>
-          <a:fontRef idx="minor">
-            <a:schemeClr val="lt1"/>
-          </a:fontRef>
-        </p:style>
-        <p:txBody>
-          <a:bodyPr rtlCol="0" anchor="ctr"/>
-          <a:lstStyle/>
-          <a:p>
-            <a:pPr algn="ctr"/>
-          </a:p>
-        </p:txBody>
-      </p:sp>
-      <p:sp>
-        <p:nvSpPr>
-          <p:cNvPr id="21" name="TextBox 20"/>
-          <p:cNvSpPr txBox="1"/>
-          <p:nvPr/>
-        </p:nvSpPr>
-        <p:spPr>
-          <a:xfrm>
-            <a:off x="548640" y="6355080"/>
-            <a:ext cx="9144000" cy="365760"/>
-          </a:xfrm>
-          <a:prstGeom prst="rect">
-            <a:avLst/>
-          </a:prstGeom>
-          <a:noFill/>
-        </p:spPr>
-        <p:txBody>
-          <a:bodyPr wrap="square" anchor="t" lIns="45720" rIns="45720" tIns="27432" bIns="27432">
-            <a:spAutoFit/>
-          </a:bodyPr>
-          <a:lstStyle/>
-          <a:p>
-            <a:pPr algn="l"/>
-            <a:r>
-              <a:rPr sz="1000" b="0" i="0">
-                <a:solidFill>
-                  <a:srgbClr val="666666"/>
-                </a:solidFill>
-                <a:latin typeface="Calibri"/>
-              </a:rPr>
-              <a:t>IEEE CS Region 8 AI Caravan 2026 · AI Administrator · Day 1 · Session 1</a:t>
-            </a:r>
-          </a:p>
-        </p:txBody>
-      </p:sp>
-      <p:sp>
-        <p:nvSpPr>
-          <p:cNvPr id="22" name="TextBox 21"/>
-          <p:cNvSpPr txBox="1"/>
-          <p:nvPr/>
-        </p:nvSpPr>
-        <p:spPr>
-          <a:xfrm>
-            <a:off x="10271455" y="6355080"/>
-            <a:ext cx="1371600" cy="365760"/>
-          </a:xfrm>
-          <a:prstGeom prst="rect">
-            <a:avLst/>
-          </a:prstGeom>
-          <a:noFill/>
-        </p:spPr>
-        <p:txBody>
-          <a:bodyPr wrap="square" anchor="t" lIns="45720" rIns="45720" tIns="27432" bIns="27432">
-            <a:spAutoFit/>
-          </a:bodyPr>
-          <a:lstStyle/>
-          <a:p>
-            <a:pPr algn="r"/>
-            <a:r>
-              <a:rPr sz="1000" b="0" i="0">
-                <a:solidFill>
-                  <a:srgbClr val="666666"/>
-                </a:solidFill>
-                <a:latin typeface="Calibri"/>
-              </a:rPr>
-              <a:t>71</a:t>
-            </a:r>
-          </a:p>
-        </p:txBody>
-      </p:sp>
-    </p:spTree>
-  </p:cSld>
-  <p:clrMapOvr>
-    <a:masterClrMapping/>
-  </p:clrMapOvr>
-</p:sld>
-</file>
-
-<file path=ppt/slides/slide72.xml><?xml version="1.0" encoding="utf-8"?>
-<p:sld xmlns:a="http://schemas.openxmlformats.org/drawingml/2006/main" xmlns:p="http://schemas.openxmlformats.org/presentationml/2006/main" xmlns:r="http://schemas.openxmlformats.org/officeDocument/2006/relationships">
-  <p:cSld>
-    <p:spTree>
-      <p:nvGrpSpPr>
-        <p:cNvPr id="1" name=""/>
-        <p:cNvGrpSpPr/>
-        <p:nvPr/>
-      </p:nvGrpSpPr>
-      <p:grpSpPr/>
-      <p:sp>
-        <p:nvSpPr>
-          <p:cNvPr id="2" name="TextBox 1"/>
-          <p:cNvSpPr txBox="1"/>
-          <p:nvPr/>
-        </p:nvSpPr>
-        <p:spPr>
-          <a:xfrm>
-            <a:off x="548640" y="365760"/>
-            <a:ext cx="11094415" cy="777240"/>
-          </a:xfrm>
-          <a:prstGeom prst="rect">
-            <a:avLst/>
-          </a:prstGeom>
-          <a:noFill/>
-        </p:spPr>
-        <p:txBody>
-          <a:bodyPr wrap="square" anchor="b" lIns="45720" rIns="45720" tIns="27432" bIns="27432">
-            <a:spAutoFit/>
-          </a:bodyPr>
-          <a:lstStyle/>
-          <a:p>
-            <a:pPr algn="l"/>
-            <a:r>
-              <a:rPr sz="3000" b="1" i="0">
-                <a:solidFill>
-                  <a:srgbClr val="111111"/>
-                </a:solidFill>
-                <a:latin typeface="Calibri"/>
-              </a:rPr>
-              <a:t>References</a:t>
-            </a:r>
-          </a:p>
-        </p:txBody>
-      </p:sp>
-      <p:sp>
-        <p:nvSpPr>
-          <p:cNvPr id="3" name="Rectangle 2"/>
-          <p:cNvSpPr/>
-          <p:nvPr/>
-        </p:nvSpPr>
-        <p:spPr>
-          <a:xfrm>
-            <a:off x="548640" y="1115568"/>
-            <a:ext cx="1097280" cy="38100"/>
-          </a:xfrm>
-          <a:prstGeom prst="rect">
-            <a:avLst/>
-          </a:prstGeom>
-          <a:solidFill>
-            <a:srgbClr val="F7A11A"/>
-          </a:solidFill>
-          <a:ln>
-            <a:noFill/>
-          </a:ln>
-          <a:effectLst/>
-        </p:spPr>
-        <p:style>
-          <a:lnRef idx="1">
-            <a:schemeClr val="accent1"/>
-          </a:lnRef>
-          <a:fillRef idx="3">
-            <a:schemeClr val="accent1"/>
-          </a:fillRef>
-          <a:effectRef idx="2">
-            <a:schemeClr val="accent1"/>
-          </a:effectRef>
-          <a:fontRef idx="minor">
-            <a:schemeClr val="lt1"/>
-          </a:fontRef>
-        </p:style>
-        <p:txBody>
-          <a:bodyPr rtlCol="0" anchor="ctr"/>
-          <a:lstStyle/>
-          <a:p>
-            <a:pPr algn="ctr"/>
-          </a:p>
-        </p:txBody>
-      </p:sp>
-      <p:sp>
-        <p:nvSpPr>
-          <p:cNvPr id="4" name="Rectangle 3"/>
-          <p:cNvSpPr/>
-          <p:nvPr/>
-        </p:nvSpPr>
-        <p:spPr>
-          <a:xfrm>
-            <a:off x="1645920" y="1115568"/>
-            <a:ext cx="9997135" cy="19050"/>
-          </a:xfrm>
-          <a:prstGeom prst="rect">
-            <a:avLst/>
-          </a:prstGeom>
-          <a:solidFill>
-            <a:srgbClr val="DDDDDD"/>
-          </a:solidFill>
-          <a:ln>
-            <a:noFill/>
-          </a:ln>
-          <a:effectLst/>
-        </p:spPr>
-        <p:style>
-          <a:lnRef idx="1">
-            <a:schemeClr val="accent1"/>
-          </a:lnRef>
-          <a:fillRef idx="3">
-            <a:schemeClr val="accent1"/>
-          </a:fillRef>
-          <a:effectRef idx="2">
-            <a:schemeClr val="accent1"/>
-          </a:effectRef>
-          <a:fontRef idx="minor">
-            <a:schemeClr val="lt1"/>
-          </a:fontRef>
-        </p:style>
-        <p:txBody>
-          <a:bodyPr rtlCol="0" anchor="ctr"/>
-          <a:lstStyle/>
-          <a:p>
-            <a:pPr algn="ctr"/>
-          </a:p>
-        </p:txBody>
-      </p:sp>
-      <p:sp>
-        <p:nvSpPr>
-          <p:cNvPr id="5" name="TextBox 4"/>
-          <p:cNvSpPr txBox="1"/>
-          <p:nvPr/>
-        </p:nvSpPr>
-        <p:spPr>
-          <a:xfrm>
-            <a:off x="548640" y="1371600"/>
-            <a:ext cx="11094415" cy="4663440"/>
-          </a:xfrm>
-          <a:prstGeom prst="rect">
-            <a:avLst/>
-          </a:prstGeom>
-          <a:noFill/>
-        </p:spPr>
-        <p:txBody>
-          <a:bodyPr wrap="square" lIns="45720" rIns="45720">
-            <a:spAutoFit/>
-          </a:bodyPr>
-          <a:lstStyle/>
-          <a:p>
-            <a:pPr>
-              <a:spcAft>
-                <a:spcPts val="600"/>
-              </a:spcAft>
-            </a:pPr>
-            <a:r>
-              <a:rPr sz="1400">
-                <a:solidFill>
-                  <a:srgbClr val="111111"/>
-                </a:solidFill>
-                <a:latin typeface="Calibri"/>
-              </a:rPr>
-              <a:t>1.  Hermes Agent documentation and source (Nous Research, MIT licence). hermes-agent.nousresearch.com/docs · github.com/NousResearch/hermes-agent</a:t>
-            </a:r>
-          </a:p>
-          <a:p>
-            <a:pPr>
-              <a:spcAft>
-                <a:spcPts val="600"/>
-              </a:spcAft>
-            </a:pPr>
-            <a:r>
-              <a:rPr sz="1400">
-                <a:solidFill>
-                  <a:srgbClr val="111111"/>
-                </a:solidFill>
-                <a:latin typeface="Calibri"/>
-              </a:rPr>
-              <a:t>2.  Al-Banna, A. (2026). AI Administrator, Module 1: Agents and Automation, Explained. albanna-tutorials.com/ai-administrator/01_agents_and_automation.html</a:t>
-            </a:r>
-          </a:p>
-          <a:p>
-            <a:pPr>
-              <a:spcAft>
-                <a:spcPts val="600"/>
-              </a:spcAft>
-            </a:pPr>
-            <a:r>
-              <a:rPr sz="1400">
-                <a:solidFill>
-                  <a:srgbClr val="111111"/>
-                </a:solidFill>
-                <a:latin typeface="Calibri"/>
-              </a:rPr>
-              <a:t>3.  Al-Banna, A. (2025). LLM Agents, explained visually (tutorial). albanna-tutorials.com/llm_agents.html</a:t>
-            </a:r>
-          </a:p>
-          <a:p>
-            <a:pPr>
-              <a:spcAft>
-                <a:spcPts val="600"/>
-              </a:spcAft>
-            </a:pPr>
-            <a:r>
-              <a:rPr sz="1400">
-                <a:solidFill>
-                  <a:srgbClr val="111111"/>
-                </a:solidFill>
-                <a:latin typeface="Calibri"/>
-              </a:rPr>
-              <a:t>4.  Grootendorst, M. (2025). A Visual Guide to LLM Agents. newsletter.maartengrootendorst.com (online version of the same diagrams)</a:t>
-            </a:r>
-          </a:p>
-          <a:p>
-            <a:pPr>
-              <a:spcAft>
-                <a:spcPts val="600"/>
-              </a:spcAft>
-            </a:pPr>
-            <a:r>
-              <a:rPr sz="1400">
-                <a:solidFill>
-                  <a:srgbClr val="111111"/>
-                </a:solidFill>
-                <a:latin typeface="Calibri"/>
-              </a:rPr>
-              <a:t>5.  Alammar, J. and Grootendorst, M. (2024). Hands-On Large Language Models. O'Reilly Media</a:t>
-            </a:r>
-          </a:p>
-          <a:p>
-            <a:pPr>
-              <a:spcAft>
-                <a:spcPts val="600"/>
-              </a:spcAft>
-            </a:pPr>
-            <a:r>
-              <a:rPr sz="1400">
-                <a:solidFill>
-                  <a:srgbClr val="111111"/>
-                </a:solidFill>
-                <a:latin typeface="Calibri"/>
-              </a:rPr>
-              <a:t>6.  Yao, S. et al. (2023). ReAct: Synergizing Reasoning and Acting in Language Models. ICLR 2023</a:t>
-            </a:r>
-          </a:p>
-          <a:p>
-            <a:pPr>
-              <a:spcAft>
-                <a:spcPts val="600"/>
-              </a:spcAft>
-            </a:pPr>
-            <a:r>
-              <a:rPr sz="1400">
-                <a:solidFill>
-                  <a:srgbClr val="111111"/>
-                </a:solidFill>
-                <a:latin typeface="Calibri"/>
-              </a:rPr>
-              <a:t>7.  Schick, T. et al. (2023). Toolformer: Language Models Can Teach Themselves to Use Tools. NeurIPS 2023</a:t>
-            </a:r>
-          </a:p>
-          <a:p>
-            <a:pPr>
-              <a:spcAft>
-                <a:spcPts val="600"/>
-              </a:spcAft>
-            </a:pPr>
-            <a:r>
-              <a:rPr sz="1400">
-                <a:solidFill>
-                  <a:srgbClr val="111111"/>
-                </a:solidFill>
-                <a:latin typeface="Calibri"/>
-              </a:rPr>
-              <a:t>8.  Anthropic (2024). Introducing the Model Context Protocol. modelcontextprotocol.io</a:t>
-            </a:r>
-          </a:p>
-          <a:p>
-            <a:pPr>
-              <a:spcAft>
-                <a:spcPts val="600"/>
-              </a:spcAft>
-            </a:pPr>
-            <a:r>
-              <a:rPr sz="1400">
-                <a:solidFill>
-                  <a:srgbClr val="111111"/>
-                </a:solidFill>
-                <a:latin typeface="Calibri"/>
-              </a:rPr>
-              <a:t>9.  Anthropic (2024). Building Effective Agents. anthropic.com/research/building-effective-agents</a:t>
-            </a:r>
-          </a:p>
-          <a:p>
-            <a:pPr>
-              <a:spcAft>
-                <a:spcPts val="600"/>
-              </a:spcAft>
-            </a:pPr>
-            <a:r>
-              <a:rPr sz="1400">
-                <a:solidFill>
-                  <a:srgbClr val="111111"/>
-                </a:solidFill>
-                <a:latin typeface="Calibri"/>
-              </a:rPr>
-              <a:t>10.  IEEE CS Region 8 AI Caravan (2026). AI Administrator Track Curriculum. aicaravan.org</a:t>
-            </a:r>
-          </a:p>
-        </p:txBody>
-      </p:sp>
-      <p:sp>
-        <p:nvSpPr>
-          <p:cNvPr id="6" name="Rectangle 5"/>
-          <p:cNvSpPr/>
-          <p:nvPr/>
-        </p:nvSpPr>
-        <p:spPr>
-          <a:xfrm>
-            <a:off x="548640" y="6309360"/>
-            <a:ext cx="11094415" cy="19050"/>
-          </a:xfrm>
-          <a:prstGeom prst="rect">
-            <a:avLst/>
-          </a:prstGeom>
-          <a:solidFill>
-            <a:srgbClr val="DDDDDD"/>
-          </a:solidFill>
-          <a:ln>
-            <a:noFill/>
-          </a:ln>
-          <a:effectLst/>
-        </p:spPr>
-        <p:style>
-          <a:lnRef idx="1">
-            <a:schemeClr val="accent1"/>
-          </a:lnRef>
-          <a:fillRef idx="3">
-            <a:schemeClr val="accent1"/>
-          </a:fillRef>
-          <a:effectRef idx="2">
-            <a:schemeClr val="accent1"/>
-          </a:effectRef>
-          <a:fontRef idx="minor">
-            <a:schemeClr val="lt1"/>
-          </a:fontRef>
-        </p:style>
-        <p:txBody>
-          <a:bodyPr rtlCol="0" anchor="ctr"/>
-          <a:lstStyle/>
-          <a:p>
-            <a:pPr algn="ctr"/>
-          </a:p>
-        </p:txBody>
-      </p:sp>
-      <p:sp>
-        <p:nvSpPr>
-          <p:cNvPr id="7" name="TextBox 6"/>
-          <p:cNvSpPr txBox="1"/>
-          <p:nvPr/>
-        </p:nvSpPr>
-        <p:spPr>
-          <a:xfrm>
-            <a:off x="548640" y="6355080"/>
-            <a:ext cx="9144000" cy="365760"/>
-          </a:xfrm>
-          <a:prstGeom prst="rect">
-            <a:avLst/>
-          </a:prstGeom>
-          <a:noFill/>
-        </p:spPr>
-        <p:txBody>
-          <a:bodyPr wrap="square" anchor="t" lIns="45720" rIns="45720" tIns="27432" bIns="27432">
-            <a:spAutoFit/>
-          </a:bodyPr>
-          <a:lstStyle/>
-          <a:p>
-            <a:pPr algn="l"/>
-            <a:r>
-              <a:rPr sz="1000" b="0" i="0">
-                <a:solidFill>
-                  <a:srgbClr val="666666"/>
-                </a:solidFill>
-                <a:latin typeface="Calibri"/>
-              </a:rPr>
-              <a:t>IEEE CS Region 8 AI Caravan 2026 · AI Administrator · Day 1 · Session 1</a:t>
-            </a:r>
-          </a:p>
-        </p:txBody>
-      </p:sp>
-      <p:sp>
-        <p:nvSpPr>
-          <p:cNvPr id="8" name="TextBox 7"/>
-          <p:cNvSpPr txBox="1"/>
-          <p:nvPr/>
-        </p:nvSpPr>
-        <p:spPr>
-          <a:xfrm>
-            <a:off x="10271455" y="6355080"/>
-            <a:ext cx="1371600" cy="365760"/>
-          </a:xfrm>
-          <a:prstGeom prst="rect">
-            <a:avLst/>
-          </a:prstGeom>
-          <a:noFill/>
-        </p:spPr>
-        <p:txBody>
-          <a:bodyPr wrap="square" anchor="t" lIns="45720" rIns="45720" tIns="27432" bIns="27432">
-            <a:spAutoFit/>
-          </a:bodyPr>
-          <a:lstStyle/>
-          <a:p>
-            <a:pPr algn="r"/>
-            <a:r>
-              <a:rPr sz="1000" b="0" i="0">
-                <a:solidFill>
-                  <a:srgbClr val="666666"/>
-                </a:solidFill>
-                <a:latin typeface="Calibri"/>
-              </a:rPr>
-              <a:t>72</a:t>
             </a:r>
           </a:p>
         </p:txBody>

--- a/instructor/ai-administrator/out/day1/Day1_S1_Foundations.pptx
+++ b/instructor/ai-administrator/out/day1/Day1_S1_Foundations.pptx
@@ -2104,7 +2104,7 @@
           <a:lstStyle/>
           <a:p>
             <a:r>
-              <a:t>Read the objectives quickly. The last one is the lab deliverable: a one-page task inventory. Everything else in the course builds on that inventory, so it matters more than the quiz.</a:t>
+              <a:t>Read the objectives quickly. Mention the Kahoot so phones are ready and attention holds to the end. The last one is the lab deliverable: a one-page task inventory. Everything else in the course builds on that inventory, so it matters more than the quiz.</a:t>
             </a:r>
           </a:p>
         </p:txBody>
@@ -3574,7 +3574,7 @@
           <a:lstStyle/>
           <a:p>
             <a:r>
-              <a:t>Share the handout and the spreadsheet template in the chat. Walk through the five steps in eight minutes; the inventory itself is homework. The common mistake is tasks that are too vague. Step 4 is where participants get their first taste of using an assistant as a colleague.</a:t>
+              <a:t>Import Day1_S1_Kahoot.xlsx into Kahoot beforehand (Create, then Import spreadsheet). Launch in Classic mode, show the PIN on this slide. Ten minutes covers roughly 15 to 20 questions with brief comments; assign the remainder as a challenge with a one-week deadline. The answer key with rationales is Day1_S1_Kahoot_Answer_Key.pdf. Say out loud that answer lengths are balanced, so participants stop guessing by length.</a:t>
             </a:r>
           </a:p>
         </p:txBody>
@@ -3714,7 +3714,7 @@
           <a:lstStyle/>
           <a:p>
             <a:r>
-              <a:t>Read it aloud and point at the parts: a role, a description of the input, a task, an output order, a constraint ('be brief'). Say: 'Tomorrow in Session 2 you will learn why this prompt is shaped like this.'</a:t>
+              <a:t>Share the handout and the spreadsheet template in the chat. Walk through the five steps in eight minutes; the inventory itself is homework. The common mistake is tasks that are too vague. Step 4 is where participants get their first taste of using an assistant as a colleague.</a:t>
             </a:r>
           </a:p>
         </p:txBody>
@@ -3784,7 +3784,7 @@
           <a:lstStyle/>
           <a:p>
             <a:r>
-              <a:t>Be explicit that this document is reused on Days 2, 3 and 5. Participants who skip it will have nothing to map tomorrow.</a:t>
+              <a:t>Read it aloud and point at the parts: a role, a description of the input, a task, an output order, a constraint ('be brief'). Say: 'Tomorrow in Session 2 you will learn why this prompt is shaped like this.'</a:t>
             </a:r>
           </a:p>
         </p:txBody>
@@ -3854,7 +3854,7 @@
           <a:lstStyle/>
           <a:p>
             <a:r>
-              <a:t>Import Day1_S1_Kahoot.xlsx into Kahoot beforehand (Create, then Import spreadsheet). Launch in Classic mode, show the PIN on this slide. Ten minutes covers roughly 15 to 20 questions with brief comments; assign the remainder as a challenge with a one-week deadline. The answer key with rationales is Day1_S1_Kahoot_Answer_Key.pdf. Say out loud that answer lengths are balanced, so participants stop guessing by length.</a:t>
+              <a:t>Be explicit that this document is reused on Days 2, 3 and 5. Participants who skip it will have nothing to map tomorrow.</a:t>
             </a:r>
           </a:p>
         </p:txBody>
@@ -12136,6 +12136,22 @@
               <a:t>•  Day 5 and 6: multi-agent, controls, security, monitoring · Day 7 and 8: capstone and exam</a:t>
             </a:r>
           </a:p>
+          <a:p>
+            <a:pPr>
+              <a:spcAft>
+                <a:spcPts val="1200"/>
+              </a:spcAft>
+            </a:pPr>
+            <a:r>
+              <a:rPr sz="2200">
+                <a:solidFill>
+                  <a:srgbClr val="111111"/>
+                </a:solidFill>
+                <a:latin typeface="Calibri"/>
+              </a:rPr>
+              <a:t>•  At minute 105 today: a Kahoot with 30 questions on this session. Keep your phone handy.</a:t>
+            </a:r>
+          </a:p>
         </p:txBody>
       </p:sp>
       <p:sp>
@@ -16155,6 +16171,22 @@
                 <a:latin typeface="Calibri"/>
               </a:rPr>
               <a:t>•  List three tasks from your own job that suit automation, and one that should stay with a person</a:t>
+            </a:r>
+          </a:p>
+          <a:p>
+            <a:pPr>
+              <a:spcAft>
+                <a:spcPts val="1200"/>
+              </a:spcAft>
+            </a:pPr>
+            <a:r>
+              <a:rPr sz="2200">
+                <a:solidFill>
+                  <a:srgbClr val="111111"/>
+                </a:solidFill>
+                <a:latin typeface="Calibri"/>
+              </a:rPr>
+              <a:t>•  Then prove it in a 30-question Kahoot at the end of the session</a:t>
             </a:r>
           </a:p>
         </p:txBody>
@@ -20973,7 +21005,7 @@
                           </a:solidFill>
                           <a:latin typeface="Calibri"/>
                         </a:rPr>
-                        <a:t>105 to 110</a:t>
+                        <a:t>105 to 115</a:t>
                       </a:r>
                     </a:p>
                   </a:txBody>
@@ -20995,7 +21027,7 @@
                           </a:solidFill>
                           <a:latin typeface="Calibri"/>
                         </a:rPr>
-                        <a:t>Lab kickoff</a:t>
+                        <a:t>Kahoot</a:t>
                       </a:r>
                     </a:p>
                   </a:txBody>
@@ -21017,7 +21049,7 @@
                           </a:solidFill>
                           <a:latin typeface="Calibri"/>
                         </a:rPr>
-                        <a:t>Task inventory steps shown; finished at home</a:t>
+                        <a:t>As many of the 30 questions as time allows; the rest as a challenge link</a:t>
                       </a:r>
                     </a:p>
                   </a:txBody>
@@ -21041,7 +21073,7 @@
                           </a:solidFill>
                           <a:latin typeface="Calibri"/>
                         </a:rPr>
-                        <a:t>110 to 120</a:t>
+                        <a:t>115 to 120</a:t>
                       </a:r>
                     </a:p>
                   </a:txBody>
@@ -21063,7 +21095,7 @@
                           </a:solidFill>
                           <a:latin typeface="Calibri"/>
                         </a:rPr>
-                        <a:t>Kahoot and wrap</a:t>
+                        <a:t>Lab kickoff and wrap</a:t>
                       </a:r>
                     </a:p>
                   </a:txBody>
@@ -21085,7 +21117,7 @@
                           </a:solidFill>
                           <a:latin typeface="Calibri"/>
                         </a:rPr>
-                        <a:t>As many of the 30 questions as time allows; the rest as a challenge link; key takeaways</a:t>
+                        <a:t>Task inventory steps shown, finished at home; key takeaways</a:t>
                       </a:r>
                     </a:p>
                   </a:txBody>
@@ -28019,7 +28051,7 @@
                 </a:solidFill>
                 <a:latin typeface="Calibri"/>
               </a:rPr>
-              <a:t>Practical lab: your task inventory</a:t>
+              <a:t>Kahoot: knowledge check</a:t>
             </a:r>
           </a:p>
         </p:txBody>
@@ -28054,7 +28086,7 @@
                 </a:solidFill>
                 <a:latin typeface="Calibri"/>
               </a:rPr>
-              <a:t>Steps shown now, finish at home, due before the next session</a:t>
+              <a:t>30 questions, 20 seconds each. Phones out.</a:t>
             </a:r>
           </a:p>
         </p:txBody>
@@ -28089,7 +28121,7 @@
                 </a:solidFill>
                 <a:latin typeface="Calibri"/>
               </a:rPr>
-              <a:t>About 5 minutes</a:t>
+              <a:t>About 10 minutes</a:t>
             </a:r>
           </a:p>
         </p:txBody>
@@ -28256,7 +28288,7 @@
                 </a:solidFill>
                 <a:latin typeface="Calibri"/>
               </a:rPr>
-              <a:t>Lab steps</a:t>
+              <a:t>Join the Kahoot</a:t>
             </a:r>
           </a:p>
         </p:txBody>
@@ -28349,18 +28381,77 @@
           </a:p>
         </p:txBody>
       </p:sp>
-      <p:sp>
-        <p:nvSpPr>
-          <p:cNvPr id="5" name="Oval 4"/>
+      <p:pic>
+        <p:nvPicPr>
+          <p:cNvPr id="5" name="Picture 4" descr="kahoot_logo.png"/>
+          <p:cNvPicPr>
+            <a:picLocks noChangeAspect="1"/>
+          </p:cNvPicPr>
+          <p:nvPr/>
+        </p:nvPicPr>
+        <p:blipFill>
+          <a:blip r:embed="rId2"/>
+          <a:stretch>
+            <a:fillRect/>
+          </a:stretch>
+        </p:blipFill>
+        <p:spPr>
+          <a:xfrm>
+            <a:off x="9315522" y="274320"/>
+            <a:ext cx="2277626" cy="777240"/>
+          </a:xfrm>
+          <a:prstGeom prst="rect">
+            <a:avLst/>
+          </a:prstGeom>
+        </p:spPr>
+      </p:pic>
+      <p:sp>
+        <p:nvSpPr>
+          <p:cNvPr id="6" name="TextBox 5"/>
+          <p:cNvSpPr txBox="1"/>
+          <p:nvPr/>
+        </p:nvSpPr>
+        <p:spPr>
+          <a:xfrm>
+            <a:off x="548640" y="1325880"/>
+            <a:ext cx="5318607" cy="457200"/>
+          </a:xfrm>
+          <a:prstGeom prst="rect">
+            <a:avLst/>
+          </a:prstGeom>
+          <a:noFill/>
+        </p:spPr>
+        <p:txBody>
+          <a:bodyPr wrap="square" anchor="t" lIns="45720" rIns="45720" tIns="27432" bIns="27432">
+            <a:spAutoFit/>
+          </a:bodyPr>
+          <a:lstStyle/>
+          <a:p>
+            <a:pPr algn="l"/>
+            <a:r>
+              <a:rPr sz="2000" b="1" i="0">
+                <a:solidFill>
+                  <a:srgbClr val="111111"/>
+                </a:solidFill>
+                <a:latin typeface="Calibri"/>
+              </a:rPr>
+              <a:t>How to join</a:t>
+            </a:r>
+          </a:p>
+        </p:txBody>
+      </p:sp>
+      <p:sp>
+        <p:nvSpPr>
+          <p:cNvPr id="7" name="Rectangle 6"/>
           <p:cNvSpPr/>
           <p:nvPr/>
         </p:nvSpPr>
         <p:spPr>
           <a:xfrm>
-            <a:off x="548640" y="1399032"/>
-            <a:ext cx="384048" cy="384048"/>
-          </a:xfrm>
-          <a:prstGeom prst="ellipse">
+            <a:off x="548640" y="1801368"/>
+            <a:ext cx="5318607" cy="25400"/>
+          </a:xfrm>
+          <a:prstGeom prst="rect">
             <a:avLst/>
           </a:prstGeom>
           <a:solidFill>
@@ -28386,32 +28477,110 @@
           </a:fontRef>
         </p:style>
         <p:txBody>
-          <a:bodyPr rtlCol="0" anchor="ctr" lIns="0" rIns="0"/>
+          <a:bodyPr rtlCol="0" anchor="ctr"/>
           <a:lstStyle/>
           <a:p>
             <a:pPr algn="ctr"/>
-            <a:r>
-              <a:rPr sz="1300" b="1">
-                <a:solidFill>
-                  <a:srgbClr val="FFFFFF"/>
-                </a:solidFill>
-                <a:latin typeface="Calibri"/>
-              </a:rPr>
-              <a:t>1</a:t>
-            </a:r>
-          </a:p>
-        </p:txBody>
-      </p:sp>
-      <p:sp>
-        <p:nvSpPr>
-          <p:cNvPr id="6" name="TextBox 5"/>
+          </a:p>
+        </p:txBody>
+      </p:sp>
+      <p:sp>
+        <p:nvSpPr>
+          <p:cNvPr id="8" name="TextBox 7"/>
           <p:cNvSpPr txBox="1"/>
           <p:nvPr/>
         </p:nvSpPr>
         <p:spPr>
           <a:xfrm>
-            <a:off x="1097280" y="1325880"/>
-            <a:ext cx="10545775" cy="457200"/>
+            <a:off x="548640" y="1920240"/>
+            <a:ext cx="5318607" cy="4297680"/>
+          </a:xfrm>
+          <a:prstGeom prst="rect">
+            <a:avLst/>
+          </a:prstGeom>
+          <a:noFill/>
+        </p:spPr>
+        <p:txBody>
+          <a:bodyPr wrap="square" lIns="45720" rIns="45720">
+            <a:spAutoFit/>
+          </a:bodyPr>
+          <a:lstStyle/>
+          <a:p>
+            <a:pPr>
+              <a:spcAft>
+                <a:spcPts val="1000"/>
+              </a:spcAft>
+            </a:pPr>
+            <a:r>
+              <a:rPr sz="1800">
+                <a:solidFill>
+                  <a:srgbClr val="111111"/>
+                </a:solidFill>
+                <a:latin typeface="Calibri"/>
+              </a:rPr>
+              <a:t>•  Open kahoot.it on your phone, or the Kahoot app</a:t>
+            </a:r>
+          </a:p>
+          <a:p>
+            <a:pPr>
+              <a:spcAft>
+                <a:spcPts val="1000"/>
+              </a:spcAft>
+            </a:pPr>
+            <a:r>
+              <a:rPr sz="1800">
+                <a:solidFill>
+                  <a:srgbClr val="111111"/>
+                </a:solidFill>
+                <a:latin typeface="Calibri"/>
+              </a:rPr>
+              <a:t>•  Enter the game PIN shown on the screen</a:t>
+            </a:r>
+          </a:p>
+          <a:p>
+            <a:pPr>
+              <a:spcAft>
+                <a:spcPts val="1000"/>
+              </a:spcAft>
+            </a:pPr>
+            <a:r>
+              <a:rPr sz="1800">
+                <a:solidFill>
+                  <a:srgbClr val="111111"/>
+                </a:solidFill>
+                <a:latin typeface="Calibri"/>
+              </a:rPr>
+              <a:t>•  Nickname: your first name</a:t>
+            </a:r>
+          </a:p>
+          <a:p>
+            <a:pPr>
+              <a:spcAft>
+                <a:spcPts val="1000"/>
+              </a:spcAft>
+            </a:pPr>
+            <a:r>
+              <a:rPr sz="1800">
+                <a:solidFill>
+                  <a:srgbClr val="111111"/>
+                </a:solidFill>
+                <a:latin typeface="Calibri"/>
+              </a:rPr>
+              <a:t>•  20 seconds per question; answer on your phone</a:t>
+            </a:r>
+          </a:p>
+        </p:txBody>
+      </p:sp>
+      <p:sp>
+        <p:nvSpPr>
+          <p:cNvPr id="9" name="TextBox 8"/>
+          <p:cNvSpPr txBox="1"/>
+          <p:nvPr/>
+        </p:nvSpPr>
+        <p:spPr>
+          <a:xfrm>
+            <a:off x="6324447" y="1325880"/>
+            <a:ext cx="5318607" cy="457200"/>
           </a:xfrm>
           <a:prstGeom prst="rect">
             <a:avLst/>
@@ -28426,27 +28595,71 @@
           <a:p>
             <a:pPr algn="l"/>
             <a:r>
-              <a:rPr sz="1800" b="1" i="0">
+              <a:rPr sz="2000" b="1" i="0">
                 <a:solidFill>
                   <a:srgbClr val="111111"/>
                 </a:solidFill>
                 <a:latin typeface="Calibri"/>
               </a:rPr>
-              <a:t>1. List ten recurring tasks</a:t>
-            </a:r>
-          </a:p>
-        </p:txBody>
-      </p:sp>
-      <p:sp>
-        <p:nvSpPr>
-          <p:cNvPr id="7" name="TextBox 6"/>
+              <a:t>Fair play notes</a:t>
+            </a:r>
+          </a:p>
+        </p:txBody>
+      </p:sp>
+      <p:sp>
+        <p:nvSpPr>
+          <p:cNvPr id="10" name="Rectangle 9"/>
+          <p:cNvSpPr/>
+          <p:nvPr/>
+        </p:nvSpPr>
+        <p:spPr>
+          <a:xfrm>
+            <a:off x="6324447" y="1801368"/>
+            <a:ext cx="5318607" cy="25400"/>
+          </a:xfrm>
+          <a:prstGeom prst="rect">
+            <a:avLst/>
+          </a:prstGeom>
+          <a:solidFill>
+            <a:srgbClr val="666666"/>
+          </a:solidFill>
+          <a:ln>
+            <a:noFill/>
+          </a:ln>
+          <a:effectLst/>
+        </p:spPr>
+        <p:style>
+          <a:lnRef idx="1">
+            <a:schemeClr val="accent1"/>
+          </a:lnRef>
+          <a:fillRef idx="3">
+            <a:schemeClr val="accent1"/>
+          </a:fillRef>
+          <a:effectRef idx="2">
+            <a:schemeClr val="accent1"/>
+          </a:effectRef>
+          <a:fontRef idx="minor">
+            <a:schemeClr val="lt1"/>
+          </a:fontRef>
+        </p:style>
+        <p:txBody>
+          <a:bodyPr rtlCol="0" anchor="ctr"/>
+          <a:lstStyle/>
+          <a:p>
+            <a:pPr algn="ctr"/>
+          </a:p>
+        </p:txBody>
+      </p:sp>
+      <p:sp>
+        <p:nvSpPr>
+          <p:cNvPr id="11" name="TextBox 10"/>
           <p:cNvSpPr txBox="1"/>
           <p:nvPr/>
         </p:nvSpPr>
         <p:spPr>
           <a:xfrm>
-            <a:off x="1097280" y="1737360"/>
-            <a:ext cx="10545775" cy="493776"/>
+            <a:off x="6324447" y="1920240"/>
+            <a:ext cx="5318607" cy="4297680"/>
           </a:xfrm>
           <a:prstGeom prst="rect">
             <a:avLst/>
@@ -28454,34 +28667,86 @@
           <a:noFill/>
         </p:spPr>
         <p:txBody>
-          <a:bodyPr wrap="square" anchor="t" lIns="45720" rIns="45720" tIns="27432" bIns="27432">
+          <a:bodyPr wrap="square" lIns="45720" rIns="45720">
             <a:spAutoFit/>
           </a:bodyPr>
           <a:lstStyle/>
           <a:p>
-            <a:pPr algn="l"/>
-            <a:r>
-              <a:rPr sz="1500" b="0" i="0">
+            <a:pPr>
+              <a:spcAft>
+                <a:spcPts val="1000"/>
+              </a:spcAft>
+            </a:pPr>
+            <a:r>
+              <a:rPr sz="1800">
                 <a:solidFill>
                   <a:srgbClr val="111111"/>
                 </a:solidFill>
                 <a:latin typeface="Calibri"/>
               </a:rPr>
-              <a:t>Things you do at least weekly. Concrete: 'reply to leave requests', not 'emails'.</a:t>
-            </a:r>
-          </a:p>
-        </p:txBody>
-      </p:sp>
-      <p:sp>
-        <p:nvSpPr>
-          <p:cNvPr id="8" name="Rectangle 7"/>
+              <a:t>•  All four answers are about the same length. The long one is not a hint.</a:t>
+            </a:r>
+          </a:p>
+          <a:p>
+            <a:pPr>
+              <a:spcAft>
+                <a:spcPts val="1000"/>
+              </a:spcAft>
+            </a:pPr>
+            <a:r>
+              <a:rPr sz="1800">
+                <a:solidFill>
+                  <a:srgbClr val="111111"/>
+                </a:solidFill>
+                <a:latin typeface="Calibri"/>
+              </a:rPr>
+              <a:t>•  Correct answers are spread evenly over the four colours.</a:t>
+            </a:r>
+          </a:p>
+          <a:p>
+            <a:pPr>
+              <a:spcAft>
+                <a:spcPts val="1000"/>
+              </a:spcAft>
+            </a:pPr>
+            <a:r>
+              <a:rPr sz="1800">
+                <a:solidFill>
+                  <a:srgbClr val="111111"/>
+                </a:solidFill>
+                <a:latin typeface="Calibri"/>
+              </a:rPr>
+              <a:t>•  We run as many as time allows in the room</a:t>
+            </a:r>
+          </a:p>
+          <a:p>
+            <a:pPr>
+              <a:spcAft>
+                <a:spcPts val="1000"/>
+              </a:spcAft>
+            </a:pPr>
+            <a:r>
+              <a:rPr sz="1800">
+                <a:solidFill>
+                  <a:srgbClr val="111111"/>
+                </a:solidFill>
+                <a:latin typeface="Calibri"/>
+              </a:rPr>
+              <a:t>•  The rest arrive as a Kahoot challenge link for homework</a:t>
+            </a:r>
+          </a:p>
+        </p:txBody>
+      </p:sp>
+      <p:sp>
+        <p:nvSpPr>
+          <p:cNvPr id="12" name="Rectangle 11"/>
           <p:cNvSpPr/>
           <p:nvPr/>
         </p:nvSpPr>
         <p:spPr>
           <a:xfrm>
-            <a:off x="1097280" y="2231136"/>
-            <a:ext cx="10545775" cy="19050"/>
+            <a:off x="548640" y="6309360"/>
+            <a:ext cx="11094415" cy="19050"/>
           </a:xfrm>
           <a:prstGeom prst="rect">
             <a:avLst/>
@@ -28518,67 +28783,14 @@
       </p:sp>
       <p:sp>
         <p:nvSpPr>
-          <p:cNvPr id="9" name="Oval 8"/>
-          <p:cNvSpPr/>
-          <p:nvPr/>
-        </p:nvSpPr>
-        <p:spPr>
-          <a:xfrm>
-            <a:off x="548640" y="2350008"/>
-            <a:ext cx="384048" cy="384048"/>
-          </a:xfrm>
-          <a:prstGeom prst="ellipse">
-            <a:avLst/>
-          </a:prstGeom>
-          <a:solidFill>
-            <a:srgbClr val="F7A11A"/>
-          </a:solidFill>
-          <a:ln>
-            <a:noFill/>
-          </a:ln>
-          <a:effectLst/>
-        </p:spPr>
-        <p:style>
-          <a:lnRef idx="1">
-            <a:schemeClr val="accent1"/>
-          </a:lnRef>
-          <a:fillRef idx="3">
-            <a:schemeClr val="accent1"/>
-          </a:fillRef>
-          <a:effectRef idx="2">
-            <a:schemeClr val="accent1"/>
-          </a:effectRef>
-          <a:fontRef idx="minor">
-            <a:schemeClr val="lt1"/>
-          </a:fontRef>
-        </p:style>
-        <p:txBody>
-          <a:bodyPr rtlCol="0" anchor="ctr" lIns="0" rIns="0"/>
-          <a:lstStyle/>
-          <a:p>
-            <a:pPr algn="ctr"/>
-            <a:r>
-              <a:rPr sz="1300" b="1">
-                <a:solidFill>
-                  <a:srgbClr val="FFFFFF"/>
-                </a:solidFill>
-                <a:latin typeface="Calibri"/>
-              </a:rPr>
-              <a:t>2</a:t>
-            </a:r>
-          </a:p>
-        </p:txBody>
-      </p:sp>
-      <p:sp>
-        <p:nvSpPr>
-          <p:cNvPr id="10" name="TextBox 9"/>
+          <p:cNvPr id="13" name="TextBox 12"/>
           <p:cNvSpPr txBox="1"/>
           <p:nvPr/>
         </p:nvSpPr>
         <p:spPr>
           <a:xfrm>
-            <a:off x="1097280" y="2276856"/>
-            <a:ext cx="10545775" cy="457200"/>
+            <a:off x="548640" y="6355080"/>
+            <a:ext cx="9144000" cy="365760"/>
           </a:xfrm>
           <a:prstGeom prst="rect">
             <a:avLst/>
@@ -28593,145 +28805,13 @@
           <a:p>
             <a:pPr algn="l"/>
             <a:r>
-              <a:rPr sz="1800" b="1" i="0">
-                <a:solidFill>
-                  <a:srgbClr val="111111"/>
-                </a:solidFill>
-                <a:latin typeface="Calibri"/>
-              </a:rPr>
-              <a:t>2. Tag each task</a:t>
-            </a:r>
-          </a:p>
-        </p:txBody>
-      </p:sp>
-      <p:sp>
-        <p:nvSpPr>
-          <p:cNvPr id="11" name="TextBox 10"/>
-          <p:cNvSpPr txBox="1"/>
-          <p:nvPr/>
-        </p:nvSpPr>
-        <p:spPr>
-          <a:xfrm>
-            <a:off x="1097280" y="2688336"/>
-            <a:ext cx="10545775" cy="493776"/>
-          </a:xfrm>
-          <a:prstGeom prst="rect">
-            <a:avLst/>
-          </a:prstGeom>
-          <a:noFill/>
-        </p:spPr>
-        <p:txBody>
-          <a:bodyPr wrap="square" anchor="t" lIns="45720" rIns="45720" tIns="27432" bIns="27432">
-            <a:spAutoFit/>
-          </a:bodyPr>
-          <a:lstStyle/>
-          <a:p>
-            <a:pPr algn="l"/>
-            <a:r>
-              <a:rPr sz="1500" b="0" i="0">
-                <a:solidFill>
-                  <a:srgbClr val="111111"/>
-                </a:solidFill>
-                <a:latin typeface="Calibri"/>
-              </a:rPr>
-              <a:t>Frequency (daily, weekly, monthly); Minutes per occurrence; Judgement needed (none, some, a lot).</a:t>
-            </a:r>
-          </a:p>
-        </p:txBody>
-      </p:sp>
-      <p:sp>
-        <p:nvSpPr>
-          <p:cNvPr id="12" name="Rectangle 11"/>
-          <p:cNvSpPr/>
-          <p:nvPr/>
-        </p:nvSpPr>
-        <p:spPr>
-          <a:xfrm>
-            <a:off x="1097280" y="3182112"/>
-            <a:ext cx="10545775" cy="19050"/>
-          </a:xfrm>
-          <a:prstGeom prst="rect">
-            <a:avLst/>
-          </a:prstGeom>
-          <a:solidFill>
-            <a:srgbClr val="DDDDDD"/>
-          </a:solidFill>
-          <a:ln>
-            <a:noFill/>
-          </a:ln>
-          <a:effectLst/>
-        </p:spPr>
-        <p:style>
-          <a:lnRef idx="1">
-            <a:schemeClr val="accent1"/>
-          </a:lnRef>
-          <a:fillRef idx="3">
-            <a:schemeClr val="accent1"/>
-          </a:fillRef>
-          <a:effectRef idx="2">
-            <a:schemeClr val="accent1"/>
-          </a:effectRef>
-          <a:fontRef idx="minor">
-            <a:schemeClr val="lt1"/>
-          </a:fontRef>
-        </p:style>
-        <p:txBody>
-          <a:bodyPr rtlCol="0" anchor="ctr"/>
-          <a:lstStyle/>
-          <a:p>
-            <a:pPr algn="ctr"/>
-          </a:p>
-        </p:txBody>
-      </p:sp>
-      <p:sp>
-        <p:nvSpPr>
-          <p:cNvPr id="13" name="Oval 12"/>
-          <p:cNvSpPr/>
-          <p:nvPr/>
-        </p:nvSpPr>
-        <p:spPr>
-          <a:xfrm>
-            <a:off x="548640" y="3300984"/>
-            <a:ext cx="384048" cy="384048"/>
-          </a:xfrm>
-          <a:prstGeom prst="ellipse">
-            <a:avLst/>
-          </a:prstGeom>
-          <a:solidFill>
-            <a:srgbClr val="F7A11A"/>
-          </a:solidFill>
-          <a:ln>
-            <a:noFill/>
-          </a:ln>
-          <a:effectLst/>
-        </p:spPr>
-        <p:style>
-          <a:lnRef idx="1">
-            <a:schemeClr val="accent1"/>
-          </a:lnRef>
-          <a:fillRef idx="3">
-            <a:schemeClr val="accent1"/>
-          </a:fillRef>
-          <a:effectRef idx="2">
-            <a:schemeClr val="accent1"/>
-          </a:effectRef>
-          <a:fontRef idx="minor">
-            <a:schemeClr val="lt1"/>
-          </a:fontRef>
-        </p:style>
-        <p:txBody>
-          <a:bodyPr rtlCol="0" anchor="ctr" lIns="0" rIns="0"/>
-          <a:lstStyle/>
-          <a:p>
-            <a:pPr algn="ctr"/>
-            <a:r>
-              <a:rPr sz="1300" b="1">
-                <a:solidFill>
-                  <a:srgbClr val="FFFFFF"/>
-                </a:solidFill>
-                <a:latin typeface="Calibri"/>
-              </a:rPr>
-              <a:t>3</a:t>
+              <a:rPr sz="1000" b="0" i="0">
+                <a:solidFill>
+                  <a:srgbClr val="666666"/>
+                </a:solidFill>
+                <a:latin typeface="Calibri"/>
+              </a:rPr>
+              <a:t>IEEE CS Region 8 AI Caravan 2026 · AI Administrator · Day 1 · Session 1</a:t>
             </a:r>
           </a:p>
         </p:txBody>
@@ -28739,489 +28819,6 @@
       <p:sp>
         <p:nvSpPr>
           <p:cNvPr id="14" name="TextBox 13"/>
-          <p:cNvSpPr txBox="1"/>
-          <p:nvPr/>
-        </p:nvSpPr>
-        <p:spPr>
-          <a:xfrm>
-            <a:off x="1097280" y="3227832"/>
-            <a:ext cx="10545775" cy="457200"/>
-          </a:xfrm>
-          <a:prstGeom prst="rect">
-            <a:avLst/>
-          </a:prstGeom>
-          <a:noFill/>
-        </p:spPr>
-        <p:txBody>
-          <a:bodyPr wrap="square" anchor="t" lIns="45720" rIns="45720" tIns="27432" bIns="27432">
-            <a:spAutoFit/>
-          </a:bodyPr>
-          <a:lstStyle/>
-          <a:p>
-            <a:pPr algn="l"/>
-            <a:r>
-              <a:rPr sz="1800" b="1" i="0">
-                <a:solidFill>
-                  <a:srgbClr val="111111"/>
-                </a:solidFill>
-                <a:latin typeface="Calibri"/>
-              </a:rPr>
-              <a:t>3. Classify the design</a:t>
-            </a:r>
-          </a:p>
-        </p:txBody>
-      </p:sp>
-      <p:sp>
-        <p:nvSpPr>
-          <p:cNvPr id="15" name="TextBox 14"/>
-          <p:cNvSpPr txBox="1"/>
-          <p:nvPr/>
-        </p:nvSpPr>
-        <p:spPr>
-          <a:xfrm>
-            <a:off x="1097280" y="3639312"/>
-            <a:ext cx="10545775" cy="493776"/>
-          </a:xfrm>
-          <a:prstGeom prst="rect">
-            <a:avLst/>
-          </a:prstGeom>
-          <a:noFill/>
-        </p:spPr>
-        <p:txBody>
-          <a:bodyPr wrap="square" anchor="t" lIns="45720" rIns="45720" tIns="27432" bIns="27432">
-            <a:spAutoFit/>
-          </a:bodyPr>
-          <a:lstStyle/>
-          <a:p>
-            <a:pPr algn="l"/>
-            <a:r>
-              <a:rPr sz="1500" b="0" i="0">
-                <a:solidFill>
-                  <a:srgbClr val="111111"/>
-                </a:solidFill>
-                <a:latin typeface="Calibri"/>
-              </a:rPr>
-              <a:t>Automation, Workflow with AI step, Agent, or Keep human. Use the five-tasks table as a guide.</a:t>
-            </a:r>
-          </a:p>
-        </p:txBody>
-      </p:sp>
-      <p:sp>
-        <p:nvSpPr>
-          <p:cNvPr id="16" name="Rectangle 15"/>
-          <p:cNvSpPr/>
-          <p:nvPr/>
-        </p:nvSpPr>
-        <p:spPr>
-          <a:xfrm>
-            <a:off x="1097280" y="4133088"/>
-            <a:ext cx="10545775" cy="19050"/>
-          </a:xfrm>
-          <a:prstGeom prst="rect">
-            <a:avLst/>
-          </a:prstGeom>
-          <a:solidFill>
-            <a:srgbClr val="DDDDDD"/>
-          </a:solidFill>
-          <a:ln>
-            <a:noFill/>
-          </a:ln>
-          <a:effectLst/>
-        </p:spPr>
-        <p:style>
-          <a:lnRef idx="1">
-            <a:schemeClr val="accent1"/>
-          </a:lnRef>
-          <a:fillRef idx="3">
-            <a:schemeClr val="accent1"/>
-          </a:fillRef>
-          <a:effectRef idx="2">
-            <a:schemeClr val="accent1"/>
-          </a:effectRef>
-          <a:fontRef idx="minor">
-            <a:schemeClr val="lt1"/>
-          </a:fontRef>
-        </p:style>
-        <p:txBody>
-          <a:bodyPr rtlCol="0" anchor="ctr"/>
-          <a:lstStyle/>
-          <a:p>
-            <a:pPr algn="ctr"/>
-          </a:p>
-        </p:txBody>
-      </p:sp>
-      <p:sp>
-        <p:nvSpPr>
-          <p:cNvPr id="17" name="Oval 16"/>
-          <p:cNvSpPr/>
-          <p:nvPr/>
-        </p:nvSpPr>
-        <p:spPr>
-          <a:xfrm>
-            <a:off x="548640" y="4251960"/>
-            <a:ext cx="384048" cy="384048"/>
-          </a:xfrm>
-          <a:prstGeom prst="ellipse">
-            <a:avLst/>
-          </a:prstGeom>
-          <a:solidFill>
-            <a:srgbClr val="F7A11A"/>
-          </a:solidFill>
-          <a:ln>
-            <a:noFill/>
-          </a:ln>
-          <a:effectLst/>
-        </p:spPr>
-        <p:style>
-          <a:lnRef idx="1">
-            <a:schemeClr val="accent1"/>
-          </a:lnRef>
-          <a:fillRef idx="3">
-            <a:schemeClr val="accent1"/>
-          </a:fillRef>
-          <a:effectRef idx="2">
-            <a:schemeClr val="accent1"/>
-          </a:effectRef>
-          <a:fontRef idx="minor">
-            <a:schemeClr val="lt1"/>
-          </a:fontRef>
-        </p:style>
-        <p:txBody>
-          <a:bodyPr rtlCol="0" anchor="ctr" lIns="0" rIns="0"/>
-          <a:lstStyle/>
-          <a:p>
-            <a:pPr algn="ctr"/>
-            <a:r>
-              <a:rPr sz="1300" b="1">
-                <a:solidFill>
-                  <a:srgbClr val="FFFFFF"/>
-                </a:solidFill>
-                <a:latin typeface="Calibri"/>
-              </a:rPr>
-              <a:t>4</a:t>
-            </a:r>
-          </a:p>
-        </p:txBody>
-      </p:sp>
-      <p:sp>
-        <p:nvSpPr>
-          <p:cNvPr id="18" name="TextBox 17"/>
-          <p:cNvSpPr txBox="1"/>
-          <p:nvPr/>
-        </p:nvSpPr>
-        <p:spPr>
-          <a:xfrm>
-            <a:off x="1097280" y="4178808"/>
-            <a:ext cx="10545775" cy="457200"/>
-          </a:xfrm>
-          <a:prstGeom prst="rect">
-            <a:avLst/>
-          </a:prstGeom>
-          <a:noFill/>
-        </p:spPr>
-        <p:txBody>
-          <a:bodyPr wrap="square" anchor="t" lIns="45720" rIns="45720" tIns="27432" bIns="27432">
-            <a:spAutoFit/>
-          </a:bodyPr>
-          <a:lstStyle/>
-          <a:p>
-            <a:pPr algn="l"/>
-            <a:r>
-              <a:rPr sz="1800" b="1" i="0">
-                <a:solidFill>
-                  <a:srgbClr val="111111"/>
-                </a:solidFill>
-                <a:latin typeface="Calibri"/>
-              </a:rPr>
-              <a:t>4. Ask your assistant to challenge you</a:t>
-            </a:r>
-          </a:p>
-        </p:txBody>
-      </p:sp>
-      <p:sp>
-        <p:nvSpPr>
-          <p:cNvPr id="19" name="TextBox 18"/>
-          <p:cNvSpPr txBox="1"/>
-          <p:nvPr/>
-        </p:nvSpPr>
-        <p:spPr>
-          <a:xfrm>
-            <a:off x="1097280" y="4590288"/>
-            <a:ext cx="10545775" cy="493776"/>
-          </a:xfrm>
-          <a:prstGeom prst="rect">
-            <a:avLst/>
-          </a:prstGeom>
-          <a:noFill/>
-        </p:spPr>
-        <p:txBody>
-          <a:bodyPr wrap="square" anchor="t" lIns="45720" rIns="45720" tIns="27432" bIns="27432">
-            <a:spAutoFit/>
-          </a:bodyPr>
-          <a:lstStyle/>
-          <a:p>
-            <a:pPr algn="l"/>
-            <a:r>
-              <a:rPr sz="1500" b="0" i="0">
-                <a:solidFill>
-                  <a:srgbClr val="111111"/>
-                </a:solidFill>
-                <a:latin typeface="Calibri"/>
-              </a:rPr>
-              <a:t>Paste the table with the prompt on the next slide. Note where it disagrees.</a:t>
-            </a:r>
-          </a:p>
-        </p:txBody>
-      </p:sp>
-      <p:sp>
-        <p:nvSpPr>
-          <p:cNvPr id="20" name="Rectangle 19"/>
-          <p:cNvSpPr/>
-          <p:nvPr/>
-        </p:nvSpPr>
-        <p:spPr>
-          <a:xfrm>
-            <a:off x="1097280" y="5084064"/>
-            <a:ext cx="10545775" cy="19050"/>
-          </a:xfrm>
-          <a:prstGeom prst="rect">
-            <a:avLst/>
-          </a:prstGeom>
-          <a:solidFill>
-            <a:srgbClr val="DDDDDD"/>
-          </a:solidFill>
-          <a:ln>
-            <a:noFill/>
-          </a:ln>
-          <a:effectLst/>
-        </p:spPr>
-        <p:style>
-          <a:lnRef idx="1">
-            <a:schemeClr val="accent1"/>
-          </a:lnRef>
-          <a:fillRef idx="3">
-            <a:schemeClr val="accent1"/>
-          </a:fillRef>
-          <a:effectRef idx="2">
-            <a:schemeClr val="accent1"/>
-          </a:effectRef>
-          <a:fontRef idx="minor">
-            <a:schemeClr val="lt1"/>
-          </a:fontRef>
-        </p:style>
-        <p:txBody>
-          <a:bodyPr rtlCol="0" anchor="ctr"/>
-          <a:lstStyle/>
-          <a:p>
-            <a:pPr algn="ctr"/>
-          </a:p>
-        </p:txBody>
-      </p:sp>
-      <p:sp>
-        <p:nvSpPr>
-          <p:cNvPr id="21" name="Oval 20"/>
-          <p:cNvSpPr/>
-          <p:nvPr/>
-        </p:nvSpPr>
-        <p:spPr>
-          <a:xfrm>
-            <a:off x="548640" y="5202936"/>
-            <a:ext cx="384048" cy="384048"/>
-          </a:xfrm>
-          <a:prstGeom prst="ellipse">
-            <a:avLst/>
-          </a:prstGeom>
-          <a:solidFill>
-            <a:srgbClr val="F7A11A"/>
-          </a:solidFill>
-          <a:ln>
-            <a:noFill/>
-          </a:ln>
-          <a:effectLst/>
-        </p:spPr>
-        <p:style>
-          <a:lnRef idx="1">
-            <a:schemeClr val="accent1"/>
-          </a:lnRef>
-          <a:fillRef idx="3">
-            <a:schemeClr val="accent1"/>
-          </a:fillRef>
-          <a:effectRef idx="2">
-            <a:schemeClr val="accent1"/>
-          </a:effectRef>
-          <a:fontRef idx="minor">
-            <a:schemeClr val="lt1"/>
-          </a:fontRef>
-        </p:style>
-        <p:txBody>
-          <a:bodyPr rtlCol="0" anchor="ctr" lIns="0" rIns="0"/>
-          <a:lstStyle/>
-          <a:p>
-            <a:pPr algn="ctr"/>
-            <a:r>
-              <a:rPr sz="1300" b="1">
-                <a:solidFill>
-                  <a:srgbClr val="FFFFFF"/>
-                </a:solidFill>
-                <a:latin typeface="Calibri"/>
-              </a:rPr>
-              <a:t>5</a:t>
-            </a:r>
-          </a:p>
-        </p:txBody>
-      </p:sp>
-      <p:sp>
-        <p:nvSpPr>
-          <p:cNvPr id="22" name="TextBox 21"/>
-          <p:cNvSpPr txBox="1"/>
-          <p:nvPr/>
-        </p:nvSpPr>
-        <p:spPr>
-          <a:xfrm>
-            <a:off x="1097280" y="5129784"/>
-            <a:ext cx="10545775" cy="457200"/>
-          </a:xfrm>
-          <a:prstGeom prst="rect">
-            <a:avLst/>
-          </a:prstGeom>
-          <a:noFill/>
-        </p:spPr>
-        <p:txBody>
-          <a:bodyPr wrap="square" anchor="t" lIns="45720" rIns="45720" tIns="27432" bIns="27432">
-            <a:spAutoFit/>
-          </a:bodyPr>
-          <a:lstStyle/>
-          <a:p>
-            <a:pPr algn="l"/>
-            <a:r>
-              <a:rPr sz="1800" b="1" i="0">
-                <a:solidFill>
-                  <a:srgbClr val="111111"/>
-                </a:solidFill>
-                <a:latin typeface="Calibri"/>
-              </a:rPr>
-              <a:t>5. Pick your course task</a:t>
-            </a:r>
-          </a:p>
-        </p:txBody>
-      </p:sp>
-      <p:sp>
-        <p:nvSpPr>
-          <p:cNvPr id="23" name="TextBox 22"/>
-          <p:cNvSpPr txBox="1"/>
-          <p:nvPr/>
-        </p:nvSpPr>
-        <p:spPr>
-          <a:xfrm>
-            <a:off x="1097280" y="5541264"/>
-            <a:ext cx="10545775" cy="493776"/>
-          </a:xfrm>
-          <a:prstGeom prst="rect">
-            <a:avLst/>
-          </a:prstGeom>
-          <a:noFill/>
-        </p:spPr>
-        <p:txBody>
-          <a:bodyPr wrap="square" anchor="t" lIns="45720" rIns="45720" tIns="27432" bIns="27432">
-            <a:spAutoFit/>
-          </a:bodyPr>
-          <a:lstStyle/>
-          <a:p>
-            <a:pPr algn="l"/>
-            <a:r>
-              <a:rPr sz="1500" b="0" i="0">
-                <a:solidFill>
-                  <a:srgbClr val="111111"/>
-                </a:solidFill>
-                <a:latin typeface="Calibri"/>
-              </a:rPr>
-              <a:t>One 'Workflow with AI step' task taking 30+ minutes a week. You will map, build and control it over the course.</a:t>
-            </a:r>
-          </a:p>
-        </p:txBody>
-      </p:sp>
-      <p:sp>
-        <p:nvSpPr>
-          <p:cNvPr id="24" name="Rectangle 23"/>
-          <p:cNvSpPr/>
-          <p:nvPr/>
-        </p:nvSpPr>
-        <p:spPr>
-          <a:xfrm>
-            <a:off x="548640" y="6309360"/>
-            <a:ext cx="11094415" cy="19050"/>
-          </a:xfrm>
-          <a:prstGeom prst="rect">
-            <a:avLst/>
-          </a:prstGeom>
-          <a:solidFill>
-            <a:srgbClr val="DDDDDD"/>
-          </a:solidFill>
-          <a:ln>
-            <a:noFill/>
-          </a:ln>
-          <a:effectLst/>
-        </p:spPr>
-        <p:style>
-          <a:lnRef idx="1">
-            <a:schemeClr val="accent1"/>
-          </a:lnRef>
-          <a:fillRef idx="3">
-            <a:schemeClr val="accent1"/>
-          </a:fillRef>
-          <a:effectRef idx="2">
-            <a:schemeClr val="accent1"/>
-          </a:effectRef>
-          <a:fontRef idx="minor">
-            <a:schemeClr val="lt1"/>
-          </a:fontRef>
-        </p:style>
-        <p:txBody>
-          <a:bodyPr rtlCol="0" anchor="ctr"/>
-          <a:lstStyle/>
-          <a:p>
-            <a:pPr algn="ctr"/>
-          </a:p>
-        </p:txBody>
-      </p:sp>
-      <p:sp>
-        <p:nvSpPr>
-          <p:cNvPr id="25" name="TextBox 24"/>
-          <p:cNvSpPr txBox="1"/>
-          <p:nvPr/>
-        </p:nvSpPr>
-        <p:spPr>
-          <a:xfrm>
-            <a:off x="548640" y="6355080"/>
-            <a:ext cx="9144000" cy="365760"/>
-          </a:xfrm>
-          <a:prstGeom prst="rect">
-            <a:avLst/>
-          </a:prstGeom>
-          <a:noFill/>
-        </p:spPr>
-        <p:txBody>
-          <a:bodyPr wrap="square" anchor="t" lIns="45720" rIns="45720" tIns="27432" bIns="27432">
-            <a:spAutoFit/>
-          </a:bodyPr>
-          <a:lstStyle/>
-          <a:p>
-            <a:pPr algn="l"/>
-            <a:r>
-              <a:rPr sz="1000" b="0" i="0">
-                <a:solidFill>
-                  <a:srgbClr val="666666"/>
-                </a:solidFill>
-                <a:latin typeface="Calibri"/>
-              </a:rPr>
-              <a:t>IEEE CS Region 8 AI Caravan 2026 · AI Administrator · Day 1 · Session 1</a:t>
-            </a:r>
-          </a:p>
-        </p:txBody>
-      </p:sp>
-      <p:sp>
-        <p:nvSpPr>
-          <p:cNvPr id="26" name="TextBox 25"/>
           <p:cNvSpPr txBox="1"/>
           <p:nvPr/>
         </p:nvSpPr>
@@ -29280,8 +28877,8 @@
         </p:nvSpPr>
         <p:spPr>
           <a:xfrm>
-            <a:off x="548640" y="365760"/>
-            <a:ext cx="11094415" cy="777240"/>
+            <a:off x="548640" y="2011680"/>
+            <a:ext cx="11094415" cy="457200"/>
           </a:xfrm>
           <a:prstGeom prst="rect">
             <a:avLst/>
@@ -29289,20 +28886,20 @@
           <a:noFill/>
         </p:spPr>
         <p:txBody>
-          <a:bodyPr wrap="square" anchor="b" lIns="45720" rIns="45720" tIns="27432" bIns="27432">
+          <a:bodyPr wrap="square" anchor="t" lIns="45720" rIns="45720" tIns="27432" bIns="27432">
             <a:spAutoFit/>
           </a:bodyPr>
           <a:lstStyle/>
           <a:p>
             <a:pPr algn="l"/>
             <a:r>
-              <a:rPr sz="3000" b="1" i="0">
-                <a:solidFill>
-                  <a:srgbClr val="111111"/>
-                </a:solidFill>
-                <a:latin typeface="Calibri"/>
-              </a:rPr>
-              <a:t>Step 4: the challenge prompt</a:t>
+              <a:rPr sz="1400" b="0" i="0">
+                <a:solidFill>
+                  <a:srgbClr val="666666"/>
+                </a:solidFill>
+                <a:latin typeface="Calibri"/>
+              </a:rPr>
+              <a:t>Section · minute 115</a:t>
             </a:r>
           </a:p>
         </p:txBody>
@@ -29315,8 +28912,8 @@
         </p:nvSpPr>
         <p:spPr>
           <a:xfrm>
-            <a:off x="548640" y="1115568"/>
-            <a:ext cx="1097280" cy="38100"/>
+            <a:off x="548640" y="2514600"/>
+            <a:ext cx="1463040" cy="50800"/>
           </a:xfrm>
           <a:prstGeom prst="rect">
             <a:avLst/>
@@ -29353,91 +28950,71 @@
       </p:sp>
       <p:sp>
         <p:nvSpPr>
-          <p:cNvPr id="4" name="Rectangle 3"/>
-          <p:cNvSpPr/>
-          <p:nvPr/>
-        </p:nvSpPr>
-        <p:spPr>
-          <a:xfrm>
-            <a:off x="1645920" y="1115568"/>
-            <a:ext cx="9997135" cy="19050"/>
-          </a:xfrm>
-          <a:prstGeom prst="rect">
-            <a:avLst/>
-          </a:prstGeom>
-          <a:solidFill>
-            <a:srgbClr val="DDDDDD"/>
-          </a:solidFill>
-          <a:ln>
-            <a:noFill/>
-          </a:ln>
-          <a:effectLst/>
-        </p:spPr>
-        <p:style>
-          <a:lnRef idx="1">
-            <a:schemeClr val="accent1"/>
-          </a:lnRef>
-          <a:fillRef idx="3">
-            <a:schemeClr val="accent1"/>
-          </a:fillRef>
-          <a:effectRef idx="2">
-            <a:schemeClr val="accent1"/>
-          </a:effectRef>
-          <a:fontRef idx="minor">
-            <a:schemeClr val="lt1"/>
-          </a:fontRef>
-        </p:style>
-        <p:txBody>
-          <a:bodyPr rtlCol="0" anchor="ctr"/>
-          <a:lstStyle/>
-          <a:p>
-            <a:pPr algn="ctr"/>
-          </a:p>
-        </p:txBody>
-      </p:sp>
-      <p:sp>
-        <p:nvSpPr>
-          <p:cNvPr id="5" name="Rectangle 4"/>
-          <p:cNvSpPr/>
-          <p:nvPr/>
-        </p:nvSpPr>
-        <p:spPr>
-          <a:xfrm>
-            <a:off x="548640" y="1371600"/>
-            <a:ext cx="11094415" cy="4663440"/>
-          </a:xfrm>
-          <a:prstGeom prst="rect">
-            <a:avLst/>
-          </a:prstGeom>
-          <a:solidFill>
-            <a:srgbClr val="F2F2F2"/>
-          </a:solidFill>
-          <a:ln>
-            <a:solidFill>
-              <a:srgbClr val="DDDDDD"/>
-            </a:solidFill>
-          </a:ln>
-          <a:effectLst/>
-        </p:spPr>
-        <p:style>
-          <a:lnRef idx="1">
-            <a:schemeClr val="accent1"/>
-          </a:lnRef>
-          <a:fillRef idx="3">
-            <a:schemeClr val="accent1"/>
-          </a:fillRef>
-          <a:effectRef idx="2">
-            <a:schemeClr val="accent1"/>
-          </a:effectRef>
-          <a:fontRef idx="minor">
-            <a:schemeClr val="lt1"/>
-          </a:fontRef>
-        </p:style>
-        <p:txBody>
-          <a:bodyPr rtlCol="0" anchor="ctr"/>
-          <a:lstStyle/>
-          <a:p>
-            <a:pPr algn="ctr"/>
+          <p:cNvPr id="4" name="TextBox 3"/>
+          <p:cNvSpPr txBox="1"/>
+          <p:nvPr/>
+        </p:nvSpPr>
+        <p:spPr>
+          <a:xfrm>
+            <a:off x="548640" y="2651760"/>
+            <a:ext cx="11094415" cy="1371600"/>
+          </a:xfrm>
+          <a:prstGeom prst="rect">
+            <a:avLst/>
+          </a:prstGeom>
+          <a:noFill/>
+        </p:spPr>
+        <p:txBody>
+          <a:bodyPr wrap="square" anchor="t" lIns="45720" rIns="45720" tIns="27432" bIns="27432">
+            <a:spAutoFit/>
+          </a:bodyPr>
+          <a:lstStyle/>
+          <a:p>
+            <a:pPr algn="l"/>
+            <a:r>
+              <a:rPr sz="3800" b="1" i="0">
+                <a:solidFill>
+                  <a:srgbClr val="111111"/>
+                </a:solidFill>
+                <a:latin typeface="Calibri"/>
+              </a:rPr>
+              <a:t>Practical lab: your task inventory</a:t>
+            </a:r>
+          </a:p>
+        </p:txBody>
+      </p:sp>
+      <p:sp>
+        <p:nvSpPr>
+          <p:cNvPr id="5" name="TextBox 4"/>
+          <p:cNvSpPr txBox="1"/>
+          <p:nvPr/>
+        </p:nvSpPr>
+        <p:spPr>
+          <a:xfrm>
+            <a:off x="548640" y="4023360"/>
+            <a:ext cx="11094415" cy="822960"/>
+          </a:xfrm>
+          <a:prstGeom prst="rect">
+            <a:avLst/>
+          </a:prstGeom>
+          <a:noFill/>
+        </p:spPr>
+        <p:txBody>
+          <a:bodyPr wrap="square" anchor="t" lIns="45720" rIns="45720" tIns="27432" bIns="27432">
+            <a:spAutoFit/>
+          </a:bodyPr>
+          <a:lstStyle/>
+          <a:p>
+            <a:pPr algn="l"/>
+            <a:r>
+              <a:rPr sz="2000" b="0" i="0">
+                <a:solidFill>
+                  <a:srgbClr val="666666"/>
+                </a:solidFill>
+                <a:latin typeface="Calibri"/>
+              </a:rPr>
+              <a:t>Steps shown now, finish at home, due before the next session</a:t>
+            </a:r>
           </a:p>
         </p:txBody>
       </p:sp>
@@ -29449,8 +29026,8 @@
         </p:nvSpPr>
         <p:spPr>
           <a:xfrm>
-            <a:off x="822960" y="1554480"/>
-            <a:ext cx="10545775" cy="4297680"/>
+            <a:off x="548640" y="4846320"/>
+            <a:ext cx="11094415" cy="457200"/>
           </a:xfrm>
           <a:prstGeom prst="rect">
             <a:avLst/>
@@ -29465,61 +29042,13 @@
           <a:p>
             <a:pPr algn="l"/>
             <a:r>
-              <a:rPr sz="1600" b="0" i="0">
-                <a:solidFill>
-                  <a:srgbClr val="111111"/>
-                </a:solidFill>
-                <a:latin typeface="Courier New"/>
-              </a:rPr>
-              <a:t>You are an operations consultant. Here is a table of my recurring tasks with my proposed design for each</a:t>
-            </a:r>
-          </a:p>
-          <a:p>
-            <a:pPr algn="l"/>
-            <a:r>
-              <a:rPr sz="1600" b="0" i="0">
-                <a:solidFill>
-                  <a:srgbClr val="111111"/>
-                </a:solidFill>
-                <a:latin typeface="Courier New"/>
-              </a:rPr>
-              <a:t>(Automation, Workflow with AI step, Agent, Keep human). For each row, say whether you agree, and if not, why.</a:t>
-            </a:r>
-          </a:p>
-          <a:p>
-            <a:pPr algn="l"/>
-            <a:r>
-              <a:rPr sz="1600" b="0" i="0">
-                <a:solidFill>
-                  <a:srgbClr val="111111"/>
-                </a:solidFill>
-                <a:latin typeface="Courier New"/>
-              </a:rPr>
-              <a:t>Then rank the top three tasks by time saved per week. Be brief.</a:t>
-            </a:r>
-          </a:p>
-          <a:p>
-            <a:pPr algn="l"/>
-            <a:r>
-              <a:rPr sz="1600" b="0" i="0">
-                <a:solidFill>
-                  <a:srgbClr val="111111"/>
-                </a:solidFill>
-                <a:latin typeface="Courier New"/>
-              </a:rPr>
-              <a:t/>
-            </a:r>
-          </a:p>
-          <a:p>
-            <a:pPr algn="l"/>
-            <a:r>
-              <a:rPr sz="1600" b="0" i="0">
-                <a:solidFill>
-                  <a:srgbClr val="111111"/>
-                </a:solidFill>
-                <a:latin typeface="Courier New"/>
-              </a:rPr>
-              <a:t>[paste your table here]</a:t>
+              <a:rPr sz="1400" b="0" i="0">
+                <a:solidFill>
+                  <a:srgbClr val="666666"/>
+                </a:solidFill>
+                <a:latin typeface="Calibri"/>
+              </a:rPr>
+              <a:t>About 5 minutes</a:t>
             </a:r>
           </a:p>
         </p:txBody>
@@ -29686,7 +29215,7 @@
                 </a:solidFill>
                 <a:latin typeface="Calibri"/>
               </a:rPr>
-              <a:t>Deliverable</a:t>
+              <a:t>Lab steps</a:t>
             </a:r>
           </a:p>
         </p:txBody>
@@ -29781,16 +29310,16 @@
       </p:sp>
       <p:sp>
         <p:nvSpPr>
-          <p:cNvPr id="5" name="Rectangle 4"/>
+          <p:cNvPr id="5" name="Oval 4"/>
           <p:cNvSpPr/>
           <p:nvPr/>
         </p:nvSpPr>
         <p:spPr>
           <a:xfrm>
-            <a:off x="548640" y="1783080"/>
-            <a:ext cx="76200" cy="2926080"/>
-          </a:xfrm>
-          <a:prstGeom prst="rect">
+            <a:off x="548640" y="1399032"/>
+            <a:ext cx="384048" cy="384048"/>
+          </a:xfrm>
+          <a:prstGeom prst="ellipse">
             <a:avLst/>
           </a:prstGeom>
           <a:solidFill>
@@ -29816,10 +29345,19 @@
           </a:fontRef>
         </p:style>
         <p:txBody>
-          <a:bodyPr rtlCol="0" anchor="ctr"/>
+          <a:bodyPr rtlCol="0" anchor="ctr" lIns="0" rIns="0"/>
           <a:lstStyle/>
           <a:p>
             <a:pPr algn="ctr"/>
+            <a:r>
+              <a:rPr sz="1300" b="1">
+                <a:solidFill>
+                  <a:srgbClr val="FFFFFF"/>
+                </a:solidFill>
+                <a:latin typeface="Calibri"/>
+              </a:rPr>
+              <a:t>1</a:t>
+            </a:r>
           </a:p>
         </p:txBody>
       </p:sp>
@@ -29831,8 +29369,8 @@
         </p:nvSpPr>
         <p:spPr>
           <a:xfrm>
-            <a:off x="914400" y="1783080"/>
-            <a:ext cx="10728655" cy="2926080"/>
+            <a:off x="1097280" y="1325880"/>
+            <a:ext cx="10545775" cy="457200"/>
           </a:xfrm>
           <a:prstGeom prst="rect">
             <a:avLst/>
@@ -29840,34 +29378,69 @@
           <a:noFill/>
         </p:spPr>
         <p:txBody>
-          <a:bodyPr wrap="square" anchor="ctr" lIns="45720" rIns="45720" tIns="27432" bIns="27432">
+          <a:bodyPr wrap="square" anchor="t" lIns="45720" rIns="45720" tIns="27432" bIns="27432">
             <a:spAutoFit/>
           </a:bodyPr>
           <a:lstStyle/>
           <a:p>
             <a:pPr algn="l"/>
             <a:r>
-              <a:rPr sz="2800" b="0" i="0">
+              <a:rPr sz="1800" b="1" i="0">
                 <a:solidFill>
                   <a:srgbClr val="111111"/>
                 </a:solidFill>
                 <a:latin typeface="Calibri"/>
               </a:rPr>
-              <a:t>A one-page task inventory (ten rows, four columns) with your chosen course task highlighted, saved as M1-task-inventory in your course folder. Bring it to the next session.</a:t>
-            </a:r>
-          </a:p>
-        </p:txBody>
-      </p:sp>
-      <p:sp>
-        <p:nvSpPr>
-          <p:cNvPr id="7" name="Rectangle 6"/>
+              <a:t>1. List ten recurring tasks</a:t>
+            </a:r>
+          </a:p>
+        </p:txBody>
+      </p:sp>
+      <p:sp>
+        <p:nvSpPr>
+          <p:cNvPr id="7" name="TextBox 6"/>
+          <p:cNvSpPr txBox="1"/>
+          <p:nvPr/>
+        </p:nvSpPr>
+        <p:spPr>
+          <a:xfrm>
+            <a:off x="1097280" y="1737360"/>
+            <a:ext cx="10545775" cy="493776"/>
+          </a:xfrm>
+          <a:prstGeom prst="rect">
+            <a:avLst/>
+          </a:prstGeom>
+          <a:noFill/>
+        </p:spPr>
+        <p:txBody>
+          <a:bodyPr wrap="square" anchor="t" lIns="45720" rIns="45720" tIns="27432" bIns="27432">
+            <a:spAutoFit/>
+          </a:bodyPr>
+          <a:lstStyle/>
+          <a:p>
+            <a:pPr algn="l"/>
+            <a:r>
+              <a:rPr sz="1500" b="0" i="0">
+                <a:solidFill>
+                  <a:srgbClr val="111111"/>
+                </a:solidFill>
+                <a:latin typeface="Calibri"/>
+              </a:rPr>
+              <a:t>Things you do at least weekly. Concrete: 'reply to leave requests', not 'emails'.</a:t>
+            </a:r>
+          </a:p>
+        </p:txBody>
+      </p:sp>
+      <p:sp>
+        <p:nvSpPr>
+          <p:cNvPr id="8" name="Rectangle 7"/>
           <p:cNvSpPr/>
           <p:nvPr/>
         </p:nvSpPr>
         <p:spPr>
           <a:xfrm>
-            <a:off x="548640" y="6309360"/>
-            <a:ext cx="11094415" cy="19050"/>
+            <a:off x="1097280" y="2231136"/>
+            <a:ext cx="10545775" cy="19050"/>
           </a:xfrm>
           <a:prstGeom prst="rect">
             <a:avLst/>
@@ -29904,7 +29477,675 @@
       </p:sp>
       <p:sp>
         <p:nvSpPr>
-          <p:cNvPr id="8" name="TextBox 7"/>
+          <p:cNvPr id="9" name="Oval 8"/>
+          <p:cNvSpPr/>
+          <p:nvPr/>
+        </p:nvSpPr>
+        <p:spPr>
+          <a:xfrm>
+            <a:off x="548640" y="2350008"/>
+            <a:ext cx="384048" cy="384048"/>
+          </a:xfrm>
+          <a:prstGeom prst="ellipse">
+            <a:avLst/>
+          </a:prstGeom>
+          <a:solidFill>
+            <a:srgbClr val="F7A11A"/>
+          </a:solidFill>
+          <a:ln>
+            <a:noFill/>
+          </a:ln>
+          <a:effectLst/>
+        </p:spPr>
+        <p:style>
+          <a:lnRef idx="1">
+            <a:schemeClr val="accent1"/>
+          </a:lnRef>
+          <a:fillRef idx="3">
+            <a:schemeClr val="accent1"/>
+          </a:fillRef>
+          <a:effectRef idx="2">
+            <a:schemeClr val="accent1"/>
+          </a:effectRef>
+          <a:fontRef idx="minor">
+            <a:schemeClr val="lt1"/>
+          </a:fontRef>
+        </p:style>
+        <p:txBody>
+          <a:bodyPr rtlCol="0" anchor="ctr" lIns="0" rIns="0"/>
+          <a:lstStyle/>
+          <a:p>
+            <a:pPr algn="ctr"/>
+            <a:r>
+              <a:rPr sz="1300" b="1">
+                <a:solidFill>
+                  <a:srgbClr val="FFFFFF"/>
+                </a:solidFill>
+                <a:latin typeface="Calibri"/>
+              </a:rPr>
+              <a:t>2</a:t>
+            </a:r>
+          </a:p>
+        </p:txBody>
+      </p:sp>
+      <p:sp>
+        <p:nvSpPr>
+          <p:cNvPr id="10" name="TextBox 9"/>
+          <p:cNvSpPr txBox="1"/>
+          <p:nvPr/>
+        </p:nvSpPr>
+        <p:spPr>
+          <a:xfrm>
+            <a:off x="1097280" y="2276856"/>
+            <a:ext cx="10545775" cy="457200"/>
+          </a:xfrm>
+          <a:prstGeom prst="rect">
+            <a:avLst/>
+          </a:prstGeom>
+          <a:noFill/>
+        </p:spPr>
+        <p:txBody>
+          <a:bodyPr wrap="square" anchor="t" lIns="45720" rIns="45720" tIns="27432" bIns="27432">
+            <a:spAutoFit/>
+          </a:bodyPr>
+          <a:lstStyle/>
+          <a:p>
+            <a:pPr algn="l"/>
+            <a:r>
+              <a:rPr sz="1800" b="1" i="0">
+                <a:solidFill>
+                  <a:srgbClr val="111111"/>
+                </a:solidFill>
+                <a:latin typeface="Calibri"/>
+              </a:rPr>
+              <a:t>2. Tag each task</a:t>
+            </a:r>
+          </a:p>
+        </p:txBody>
+      </p:sp>
+      <p:sp>
+        <p:nvSpPr>
+          <p:cNvPr id="11" name="TextBox 10"/>
+          <p:cNvSpPr txBox="1"/>
+          <p:nvPr/>
+        </p:nvSpPr>
+        <p:spPr>
+          <a:xfrm>
+            <a:off x="1097280" y="2688336"/>
+            <a:ext cx="10545775" cy="493776"/>
+          </a:xfrm>
+          <a:prstGeom prst="rect">
+            <a:avLst/>
+          </a:prstGeom>
+          <a:noFill/>
+        </p:spPr>
+        <p:txBody>
+          <a:bodyPr wrap="square" anchor="t" lIns="45720" rIns="45720" tIns="27432" bIns="27432">
+            <a:spAutoFit/>
+          </a:bodyPr>
+          <a:lstStyle/>
+          <a:p>
+            <a:pPr algn="l"/>
+            <a:r>
+              <a:rPr sz="1500" b="0" i="0">
+                <a:solidFill>
+                  <a:srgbClr val="111111"/>
+                </a:solidFill>
+                <a:latin typeface="Calibri"/>
+              </a:rPr>
+              <a:t>Frequency (daily, weekly, monthly); Minutes per occurrence; Judgement needed (none, some, a lot).</a:t>
+            </a:r>
+          </a:p>
+        </p:txBody>
+      </p:sp>
+      <p:sp>
+        <p:nvSpPr>
+          <p:cNvPr id="12" name="Rectangle 11"/>
+          <p:cNvSpPr/>
+          <p:nvPr/>
+        </p:nvSpPr>
+        <p:spPr>
+          <a:xfrm>
+            <a:off x="1097280" y="3182112"/>
+            <a:ext cx="10545775" cy="19050"/>
+          </a:xfrm>
+          <a:prstGeom prst="rect">
+            <a:avLst/>
+          </a:prstGeom>
+          <a:solidFill>
+            <a:srgbClr val="DDDDDD"/>
+          </a:solidFill>
+          <a:ln>
+            <a:noFill/>
+          </a:ln>
+          <a:effectLst/>
+        </p:spPr>
+        <p:style>
+          <a:lnRef idx="1">
+            <a:schemeClr val="accent1"/>
+          </a:lnRef>
+          <a:fillRef idx="3">
+            <a:schemeClr val="accent1"/>
+          </a:fillRef>
+          <a:effectRef idx="2">
+            <a:schemeClr val="accent1"/>
+          </a:effectRef>
+          <a:fontRef idx="minor">
+            <a:schemeClr val="lt1"/>
+          </a:fontRef>
+        </p:style>
+        <p:txBody>
+          <a:bodyPr rtlCol="0" anchor="ctr"/>
+          <a:lstStyle/>
+          <a:p>
+            <a:pPr algn="ctr"/>
+          </a:p>
+        </p:txBody>
+      </p:sp>
+      <p:sp>
+        <p:nvSpPr>
+          <p:cNvPr id="13" name="Oval 12"/>
+          <p:cNvSpPr/>
+          <p:nvPr/>
+        </p:nvSpPr>
+        <p:spPr>
+          <a:xfrm>
+            <a:off x="548640" y="3300984"/>
+            <a:ext cx="384048" cy="384048"/>
+          </a:xfrm>
+          <a:prstGeom prst="ellipse">
+            <a:avLst/>
+          </a:prstGeom>
+          <a:solidFill>
+            <a:srgbClr val="F7A11A"/>
+          </a:solidFill>
+          <a:ln>
+            <a:noFill/>
+          </a:ln>
+          <a:effectLst/>
+        </p:spPr>
+        <p:style>
+          <a:lnRef idx="1">
+            <a:schemeClr val="accent1"/>
+          </a:lnRef>
+          <a:fillRef idx="3">
+            <a:schemeClr val="accent1"/>
+          </a:fillRef>
+          <a:effectRef idx="2">
+            <a:schemeClr val="accent1"/>
+          </a:effectRef>
+          <a:fontRef idx="minor">
+            <a:schemeClr val="lt1"/>
+          </a:fontRef>
+        </p:style>
+        <p:txBody>
+          <a:bodyPr rtlCol="0" anchor="ctr" lIns="0" rIns="0"/>
+          <a:lstStyle/>
+          <a:p>
+            <a:pPr algn="ctr"/>
+            <a:r>
+              <a:rPr sz="1300" b="1">
+                <a:solidFill>
+                  <a:srgbClr val="FFFFFF"/>
+                </a:solidFill>
+                <a:latin typeface="Calibri"/>
+              </a:rPr>
+              <a:t>3</a:t>
+            </a:r>
+          </a:p>
+        </p:txBody>
+      </p:sp>
+      <p:sp>
+        <p:nvSpPr>
+          <p:cNvPr id="14" name="TextBox 13"/>
+          <p:cNvSpPr txBox="1"/>
+          <p:nvPr/>
+        </p:nvSpPr>
+        <p:spPr>
+          <a:xfrm>
+            <a:off x="1097280" y="3227832"/>
+            <a:ext cx="10545775" cy="457200"/>
+          </a:xfrm>
+          <a:prstGeom prst="rect">
+            <a:avLst/>
+          </a:prstGeom>
+          <a:noFill/>
+        </p:spPr>
+        <p:txBody>
+          <a:bodyPr wrap="square" anchor="t" lIns="45720" rIns="45720" tIns="27432" bIns="27432">
+            <a:spAutoFit/>
+          </a:bodyPr>
+          <a:lstStyle/>
+          <a:p>
+            <a:pPr algn="l"/>
+            <a:r>
+              <a:rPr sz="1800" b="1" i="0">
+                <a:solidFill>
+                  <a:srgbClr val="111111"/>
+                </a:solidFill>
+                <a:latin typeface="Calibri"/>
+              </a:rPr>
+              <a:t>3. Classify the design</a:t>
+            </a:r>
+          </a:p>
+        </p:txBody>
+      </p:sp>
+      <p:sp>
+        <p:nvSpPr>
+          <p:cNvPr id="15" name="TextBox 14"/>
+          <p:cNvSpPr txBox="1"/>
+          <p:nvPr/>
+        </p:nvSpPr>
+        <p:spPr>
+          <a:xfrm>
+            <a:off x="1097280" y="3639312"/>
+            <a:ext cx="10545775" cy="493776"/>
+          </a:xfrm>
+          <a:prstGeom prst="rect">
+            <a:avLst/>
+          </a:prstGeom>
+          <a:noFill/>
+        </p:spPr>
+        <p:txBody>
+          <a:bodyPr wrap="square" anchor="t" lIns="45720" rIns="45720" tIns="27432" bIns="27432">
+            <a:spAutoFit/>
+          </a:bodyPr>
+          <a:lstStyle/>
+          <a:p>
+            <a:pPr algn="l"/>
+            <a:r>
+              <a:rPr sz="1500" b="0" i="0">
+                <a:solidFill>
+                  <a:srgbClr val="111111"/>
+                </a:solidFill>
+                <a:latin typeface="Calibri"/>
+              </a:rPr>
+              <a:t>Automation, Workflow with AI step, Agent, or Keep human. Use the five-tasks table as a guide.</a:t>
+            </a:r>
+          </a:p>
+        </p:txBody>
+      </p:sp>
+      <p:sp>
+        <p:nvSpPr>
+          <p:cNvPr id="16" name="Rectangle 15"/>
+          <p:cNvSpPr/>
+          <p:nvPr/>
+        </p:nvSpPr>
+        <p:spPr>
+          <a:xfrm>
+            <a:off x="1097280" y="4133088"/>
+            <a:ext cx="10545775" cy="19050"/>
+          </a:xfrm>
+          <a:prstGeom prst="rect">
+            <a:avLst/>
+          </a:prstGeom>
+          <a:solidFill>
+            <a:srgbClr val="DDDDDD"/>
+          </a:solidFill>
+          <a:ln>
+            <a:noFill/>
+          </a:ln>
+          <a:effectLst/>
+        </p:spPr>
+        <p:style>
+          <a:lnRef idx="1">
+            <a:schemeClr val="accent1"/>
+          </a:lnRef>
+          <a:fillRef idx="3">
+            <a:schemeClr val="accent1"/>
+          </a:fillRef>
+          <a:effectRef idx="2">
+            <a:schemeClr val="accent1"/>
+          </a:effectRef>
+          <a:fontRef idx="minor">
+            <a:schemeClr val="lt1"/>
+          </a:fontRef>
+        </p:style>
+        <p:txBody>
+          <a:bodyPr rtlCol="0" anchor="ctr"/>
+          <a:lstStyle/>
+          <a:p>
+            <a:pPr algn="ctr"/>
+          </a:p>
+        </p:txBody>
+      </p:sp>
+      <p:sp>
+        <p:nvSpPr>
+          <p:cNvPr id="17" name="Oval 16"/>
+          <p:cNvSpPr/>
+          <p:nvPr/>
+        </p:nvSpPr>
+        <p:spPr>
+          <a:xfrm>
+            <a:off x="548640" y="4251960"/>
+            <a:ext cx="384048" cy="384048"/>
+          </a:xfrm>
+          <a:prstGeom prst="ellipse">
+            <a:avLst/>
+          </a:prstGeom>
+          <a:solidFill>
+            <a:srgbClr val="F7A11A"/>
+          </a:solidFill>
+          <a:ln>
+            <a:noFill/>
+          </a:ln>
+          <a:effectLst/>
+        </p:spPr>
+        <p:style>
+          <a:lnRef idx="1">
+            <a:schemeClr val="accent1"/>
+          </a:lnRef>
+          <a:fillRef idx="3">
+            <a:schemeClr val="accent1"/>
+          </a:fillRef>
+          <a:effectRef idx="2">
+            <a:schemeClr val="accent1"/>
+          </a:effectRef>
+          <a:fontRef idx="minor">
+            <a:schemeClr val="lt1"/>
+          </a:fontRef>
+        </p:style>
+        <p:txBody>
+          <a:bodyPr rtlCol="0" anchor="ctr" lIns="0" rIns="0"/>
+          <a:lstStyle/>
+          <a:p>
+            <a:pPr algn="ctr"/>
+            <a:r>
+              <a:rPr sz="1300" b="1">
+                <a:solidFill>
+                  <a:srgbClr val="FFFFFF"/>
+                </a:solidFill>
+                <a:latin typeface="Calibri"/>
+              </a:rPr>
+              <a:t>4</a:t>
+            </a:r>
+          </a:p>
+        </p:txBody>
+      </p:sp>
+      <p:sp>
+        <p:nvSpPr>
+          <p:cNvPr id="18" name="TextBox 17"/>
+          <p:cNvSpPr txBox="1"/>
+          <p:nvPr/>
+        </p:nvSpPr>
+        <p:spPr>
+          <a:xfrm>
+            <a:off x="1097280" y="4178808"/>
+            <a:ext cx="10545775" cy="457200"/>
+          </a:xfrm>
+          <a:prstGeom prst="rect">
+            <a:avLst/>
+          </a:prstGeom>
+          <a:noFill/>
+        </p:spPr>
+        <p:txBody>
+          <a:bodyPr wrap="square" anchor="t" lIns="45720" rIns="45720" tIns="27432" bIns="27432">
+            <a:spAutoFit/>
+          </a:bodyPr>
+          <a:lstStyle/>
+          <a:p>
+            <a:pPr algn="l"/>
+            <a:r>
+              <a:rPr sz="1800" b="1" i="0">
+                <a:solidFill>
+                  <a:srgbClr val="111111"/>
+                </a:solidFill>
+                <a:latin typeface="Calibri"/>
+              </a:rPr>
+              <a:t>4. Ask your assistant to challenge you</a:t>
+            </a:r>
+          </a:p>
+        </p:txBody>
+      </p:sp>
+      <p:sp>
+        <p:nvSpPr>
+          <p:cNvPr id="19" name="TextBox 18"/>
+          <p:cNvSpPr txBox="1"/>
+          <p:nvPr/>
+        </p:nvSpPr>
+        <p:spPr>
+          <a:xfrm>
+            <a:off x="1097280" y="4590288"/>
+            <a:ext cx="10545775" cy="493776"/>
+          </a:xfrm>
+          <a:prstGeom prst="rect">
+            <a:avLst/>
+          </a:prstGeom>
+          <a:noFill/>
+        </p:spPr>
+        <p:txBody>
+          <a:bodyPr wrap="square" anchor="t" lIns="45720" rIns="45720" tIns="27432" bIns="27432">
+            <a:spAutoFit/>
+          </a:bodyPr>
+          <a:lstStyle/>
+          <a:p>
+            <a:pPr algn="l"/>
+            <a:r>
+              <a:rPr sz="1500" b="0" i="0">
+                <a:solidFill>
+                  <a:srgbClr val="111111"/>
+                </a:solidFill>
+                <a:latin typeface="Calibri"/>
+              </a:rPr>
+              <a:t>Paste the table with the prompt on the next slide. Note where it disagrees.</a:t>
+            </a:r>
+          </a:p>
+        </p:txBody>
+      </p:sp>
+      <p:sp>
+        <p:nvSpPr>
+          <p:cNvPr id="20" name="Rectangle 19"/>
+          <p:cNvSpPr/>
+          <p:nvPr/>
+        </p:nvSpPr>
+        <p:spPr>
+          <a:xfrm>
+            <a:off x="1097280" y="5084064"/>
+            <a:ext cx="10545775" cy="19050"/>
+          </a:xfrm>
+          <a:prstGeom prst="rect">
+            <a:avLst/>
+          </a:prstGeom>
+          <a:solidFill>
+            <a:srgbClr val="DDDDDD"/>
+          </a:solidFill>
+          <a:ln>
+            <a:noFill/>
+          </a:ln>
+          <a:effectLst/>
+        </p:spPr>
+        <p:style>
+          <a:lnRef idx="1">
+            <a:schemeClr val="accent1"/>
+          </a:lnRef>
+          <a:fillRef idx="3">
+            <a:schemeClr val="accent1"/>
+          </a:fillRef>
+          <a:effectRef idx="2">
+            <a:schemeClr val="accent1"/>
+          </a:effectRef>
+          <a:fontRef idx="minor">
+            <a:schemeClr val="lt1"/>
+          </a:fontRef>
+        </p:style>
+        <p:txBody>
+          <a:bodyPr rtlCol="0" anchor="ctr"/>
+          <a:lstStyle/>
+          <a:p>
+            <a:pPr algn="ctr"/>
+          </a:p>
+        </p:txBody>
+      </p:sp>
+      <p:sp>
+        <p:nvSpPr>
+          <p:cNvPr id="21" name="Oval 20"/>
+          <p:cNvSpPr/>
+          <p:nvPr/>
+        </p:nvSpPr>
+        <p:spPr>
+          <a:xfrm>
+            <a:off x="548640" y="5202936"/>
+            <a:ext cx="384048" cy="384048"/>
+          </a:xfrm>
+          <a:prstGeom prst="ellipse">
+            <a:avLst/>
+          </a:prstGeom>
+          <a:solidFill>
+            <a:srgbClr val="F7A11A"/>
+          </a:solidFill>
+          <a:ln>
+            <a:noFill/>
+          </a:ln>
+          <a:effectLst/>
+        </p:spPr>
+        <p:style>
+          <a:lnRef idx="1">
+            <a:schemeClr val="accent1"/>
+          </a:lnRef>
+          <a:fillRef idx="3">
+            <a:schemeClr val="accent1"/>
+          </a:fillRef>
+          <a:effectRef idx="2">
+            <a:schemeClr val="accent1"/>
+          </a:effectRef>
+          <a:fontRef idx="minor">
+            <a:schemeClr val="lt1"/>
+          </a:fontRef>
+        </p:style>
+        <p:txBody>
+          <a:bodyPr rtlCol="0" anchor="ctr" lIns="0" rIns="0"/>
+          <a:lstStyle/>
+          <a:p>
+            <a:pPr algn="ctr"/>
+            <a:r>
+              <a:rPr sz="1300" b="1">
+                <a:solidFill>
+                  <a:srgbClr val="FFFFFF"/>
+                </a:solidFill>
+                <a:latin typeface="Calibri"/>
+              </a:rPr>
+              <a:t>5</a:t>
+            </a:r>
+          </a:p>
+        </p:txBody>
+      </p:sp>
+      <p:sp>
+        <p:nvSpPr>
+          <p:cNvPr id="22" name="TextBox 21"/>
+          <p:cNvSpPr txBox="1"/>
+          <p:nvPr/>
+        </p:nvSpPr>
+        <p:spPr>
+          <a:xfrm>
+            <a:off x="1097280" y="5129784"/>
+            <a:ext cx="10545775" cy="457200"/>
+          </a:xfrm>
+          <a:prstGeom prst="rect">
+            <a:avLst/>
+          </a:prstGeom>
+          <a:noFill/>
+        </p:spPr>
+        <p:txBody>
+          <a:bodyPr wrap="square" anchor="t" lIns="45720" rIns="45720" tIns="27432" bIns="27432">
+            <a:spAutoFit/>
+          </a:bodyPr>
+          <a:lstStyle/>
+          <a:p>
+            <a:pPr algn="l"/>
+            <a:r>
+              <a:rPr sz="1800" b="1" i="0">
+                <a:solidFill>
+                  <a:srgbClr val="111111"/>
+                </a:solidFill>
+                <a:latin typeface="Calibri"/>
+              </a:rPr>
+              <a:t>5. Pick your course task</a:t>
+            </a:r>
+          </a:p>
+        </p:txBody>
+      </p:sp>
+      <p:sp>
+        <p:nvSpPr>
+          <p:cNvPr id="23" name="TextBox 22"/>
+          <p:cNvSpPr txBox="1"/>
+          <p:nvPr/>
+        </p:nvSpPr>
+        <p:spPr>
+          <a:xfrm>
+            <a:off x="1097280" y="5541264"/>
+            <a:ext cx="10545775" cy="493776"/>
+          </a:xfrm>
+          <a:prstGeom prst="rect">
+            <a:avLst/>
+          </a:prstGeom>
+          <a:noFill/>
+        </p:spPr>
+        <p:txBody>
+          <a:bodyPr wrap="square" anchor="t" lIns="45720" rIns="45720" tIns="27432" bIns="27432">
+            <a:spAutoFit/>
+          </a:bodyPr>
+          <a:lstStyle/>
+          <a:p>
+            <a:pPr algn="l"/>
+            <a:r>
+              <a:rPr sz="1500" b="0" i="0">
+                <a:solidFill>
+                  <a:srgbClr val="111111"/>
+                </a:solidFill>
+                <a:latin typeface="Calibri"/>
+              </a:rPr>
+              <a:t>One 'Workflow with AI step' task taking 30+ minutes a week. You will map, build and control it over the course.</a:t>
+            </a:r>
+          </a:p>
+        </p:txBody>
+      </p:sp>
+      <p:sp>
+        <p:nvSpPr>
+          <p:cNvPr id="24" name="Rectangle 23"/>
+          <p:cNvSpPr/>
+          <p:nvPr/>
+        </p:nvSpPr>
+        <p:spPr>
+          <a:xfrm>
+            <a:off x="548640" y="6309360"/>
+            <a:ext cx="11094415" cy="19050"/>
+          </a:xfrm>
+          <a:prstGeom prst="rect">
+            <a:avLst/>
+          </a:prstGeom>
+          <a:solidFill>
+            <a:srgbClr val="DDDDDD"/>
+          </a:solidFill>
+          <a:ln>
+            <a:noFill/>
+          </a:ln>
+          <a:effectLst/>
+        </p:spPr>
+        <p:style>
+          <a:lnRef idx="1">
+            <a:schemeClr val="accent1"/>
+          </a:lnRef>
+          <a:fillRef idx="3">
+            <a:schemeClr val="accent1"/>
+          </a:fillRef>
+          <a:effectRef idx="2">
+            <a:schemeClr val="accent1"/>
+          </a:effectRef>
+          <a:fontRef idx="minor">
+            <a:schemeClr val="lt1"/>
+          </a:fontRef>
+        </p:style>
+        <p:txBody>
+          <a:bodyPr rtlCol="0" anchor="ctr"/>
+          <a:lstStyle/>
+          <a:p>
+            <a:pPr algn="ctr"/>
+          </a:p>
+        </p:txBody>
+      </p:sp>
+      <p:sp>
+        <p:nvSpPr>
+          <p:cNvPr id="25" name="TextBox 24"/>
           <p:cNvSpPr txBox="1"/>
           <p:nvPr/>
         </p:nvSpPr>
@@ -29939,7 +30180,7 @@
       </p:sp>
       <p:sp>
         <p:nvSpPr>
-          <p:cNvPr id="9" name="TextBox 8"/>
+          <p:cNvPr id="26" name="TextBox 25"/>
           <p:cNvSpPr txBox="1"/>
           <p:nvPr/>
         </p:nvSpPr>
@@ -29998,8 +30239,8 @@
         </p:nvSpPr>
         <p:spPr>
           <a:xfrm>
-            <a:off x="548640" y="2011680"/>
-            <a:ext cx="11094415" cy="457200"/>
+            <a:off x="548640" y="365760"/>
+            <a:ext cx="11094415" cy="777240"/>
           </a:xfrm>
           <a:prstGeom prst="rect">
             <a:avLst/>
@@ -30007,20 +30248,20 @@
           <a:noFill/>
         </p:spPr>
         <p:txBody>
-          <a:bodyPr wrap="square" anchor="t" lIns="45720" rIns="45720" tIns="27432" bIns="27432">
+          <a:bodyPr wrap="square" anchor="b" lIns="45720" rIns="45720" tIns="27432" bIns="27432">
             <a:spAutoFit/>
           </a:bodyPr>
           <a:lstStyle/>
           <a:p>
             <a:pPr algn="l"/>
             <a:r>
-              <a:rPr sz="1400" b="0" i="0">
-                <a:solidFill>
-                  <a:srgbClr val="666666"/>
-                </a:solidFill>
-                <a:latin typeface="Calibri"/>
-              </a:rPr>
-              <a:t>Section · minute 110</a:t>
+              <a:rPr sz="3000" b="1" i="0">
+                <a:solidFill>
+                  <a:srgbClr val="111111"/>
+                </a:solidFill>
+                <a:latin typeface="Calibri"/>
+              </a:rPr>
+              <a:t>Step 4: the challenge prompt</a:t>
             </a:r>
           </a:p>
         </p:txBody>
@@ -30033,8 +30274,8 @@
         </p:nvSpPr>
         <p:spPr>
           <a:xfrm>
-            <a:off x="548640" y="2514600"/>
-            <a:ext cx="1463040" cy="50800"/>
+            <a:off x="548640" y="1115568"/>
+            <a:ext cx="1097280" cy="38100"/>
           </a:xfrm>
           <a:prstGeom prst="rect">
             <a:avLst/>
@@ -30071,14 +30312,104 @@
       </p:sp>
       <p:sp>
         <p:nvSpPr>
-          <p:cNvPr id="4" name="TextBox 3"/>
+          <p:cNvPr id="4" name="Rectangle 3"/>
+          <p:cNvSpPr/>
+          <p:nvPr/>
+        </p:nvSpPr>
+        <p:spPr>
+          <a:xfrm>
+            <a:off x="1645920" y="1115568"/>
+            <a:ext cx="9997135" cy="19050"/>
+          </a:xfrm>
+          <a:prstGeom prst="rect">
+            <a:avLst/>
+          </a:prstGeom>
+          <a:solidFill>
+            <a:srgbClr val="DDDDDD"/>
+          </a:solidFill>
+          <a:ln>
+            <a:noFill/>
+          </a:ln>
+          <a:effectLst/>
+        </p:spPr>
+        <p:style>
+          <a:lnRef idx="1">
+            <a:schemeClr val="accent1"/>
+          </a:lnRef>
+          <a:fillRef idx="3">
+            <a:schemeClr val="accent1"/>
+          </a:fillRef>
+          <a:effectRef idx="2">
+            <a:schemeClr val="accent1"/>
+          </a:effectRef>
+          <a:fontRef idx="minor">
+            <a:schemeClr val="lt1"/>
+          </a:fontRef>
+        </p:style>
+        <p:txBody>
+          <a:bodyPr rtlCol="0" anchor="ctr"/>
+          <a:lstStyle/>
+          <a:p>
+            <a:pPr algn="ctr"/>
+          </a:p>
+        </p:txBody>
+      </p:sp>
+      <p:sp>
+        <p:nvSpPr>
+          <p:cNvPr id="5" name="Rectangle 4"/>
+          <p:cNvSpPr/>
+          <p:nvPr/>
+        </p:nvSpPr>
+        <p:spPr>
+          <a:xfrm>
+            <a:off x="548640" y="1371600"/>
+            <a:ext cx="11094415" cy="4663440"/>
+          </a:xfrm>
+          <a:prstGeom prst="rect">
+            <a:avLst/>
+          </a:prstGeom>
+          <a:solidFill>
+            <a:srgbClr val="F2F2F2"/>
+          </a:solidFill>
+          <a:ln>
+            <a:solidFill>
+              <a:srgbClr val="DDDDDD"/>
+            </a:solidFill>
+          </a:ln>
+          <a:effectLst/>
+        </p:spPr>
+        <p:style>
+          <a:lnRef idx="1">
+            <a:schemeClr val="accent1"/>
+          </a:lnRef>
+          <a:fillRef idx="3">
+            <a:schemeClr val="accent1"/>
+          </a:fillRef>
+          <a:effectRef idx="2">
+            <a:schemeClr val="accent1"/>
+          </a:effectRef>
+          <a:fontRef idx="minor">
+            <a:schemeClr val="lt1"/>
+          </a:fontRef>
+        </p:style>
+        <p:txBody>
+          <a:bodyPr rtlCol="0" anchor="ctr"/>
+          <a:lstStyle/>
+          <a:p>
+            <a:pPr algn="ctr"/>
+          </a:p>
+        </p:txBody>
+      </p:sp>
+      <p:sp>
+        <p:nvSpPr>
+          <p:cNvPr id="6" name="TextBox 5"/>
           <p:cNvSpPr txBox="1"/>
           <p:nvPr/>
         </p:nvSpPr>
         <p:spPr>
           <a:xfrm>
-            <a:off x="548640" y="2651760"/>
-            <a:ext cx="11094415" cy="1371600"/>
+            <a:off x="822960" y="1554480"/>
+            <a:ext cx="10545775" cy="4297680"/>
           </a:xfrm>
           <a:prstGeom prst="rect">
             <a:avLst/>
@@ -30093,83 +30424,61 @@
           <a:p>
             <a:pPr algn="l"/>
             <a:r>
-              <a:rPr sz="3800" b="1" i="0">
+              <a:rPr sz="1600" b="0" i="0">
                 <a:solidFill>
                   <a:srgbClr val="111111"/>
                 </a:solidFill>
-                <a:latin typeface="Calibri"/>
-              </a:rPr>
-              <a:t>Kahoot: knowledge check</a:t>
-            </a:r>
-          </a:p>
-        </p:txBody>
-      </p:sp>
-      <p:sp>
-        <p:nvSpPr>
-          <p:cNvPr id="5" name="TextBox 4"/>
-          <p:cNvSpPr txBox="1"/>
-          <p:nvPr/>
-        </p:nvSpPr>
-        <p:spPr>
-          <a:xfrm>
-            <a:off x="548640" y="4023360"/>
-            <a:ext cx="11094415" cy="822960"/>
-          </a:xfrm>
-          <a:prstGeom prst="rect">
-            <a:avLst/>
-          </a:prstGeom>
-          <a:noFill/>
-        </p:spPr>
-        <p:txBody>
-          <a:bodyPr wrap="square" anchor="t" lIns="45720" rIns="45720" tIns="27432" bIns="27432">
-            <a:spAutoFit/>
-          </a:bodyPr>
-          <a:lstStyle/>
+                <a:latin typeface="Courier New"/>
+              </a:rPr>
+              <a:t>You are an operations consultant. Here is a table of my recurring tasks with my proposed design for each</a:t>
+            </a:r>
+          </a:p>
           <a:p>
             <a:pPr algn="l"/>
             <a:r>
-              <a:rPr sz="2000" b="0" i="0">
-                <a:solidFill>
-                  <a:srgbClr val="666666"/>
-                </a:solidFill>
-                <a:latin typeface="Calibri"/>
-              </a:rPr>
-              <a:t>30 questions, 20 seconds each. Phones out.</a:t>
-            </a:r>
-          </a:p>
-        </p:txBody>
-      </p:sp>
-      <p:sp>
-        <p:nvSpPr>
-          <p:cNvPr id="6" name="TextBox 5"/>
-          <p:cNvSpPr txBox="1"/>
-          <p:nvPr/>
-        </p:nvSpPr>
-        <p:spPr>
-          <a:xfrm>
-            <a:off x="548640" y="4846320"/>
-            <a:ext cx="11094415" cy="457200"/>
-          </a:xfrm>
-          <a:prstGeom prst="rect">
-            <a:avLst/>
-          </a:prstGeom>
-          <a:noFill/>
-        </p:spPr>
-        <p:txBody>
-          <a:bodyPr wrap="square" anchor="t" lIns="45720" rIns="45720" tIns="27432" bIns="27432">
-            <a:spAutoFit/>
-          </a:bodyPr>
-          <a:lstStyle/>
+              <a:rPr sz="1600" b="0" i="0">
+                <a:solidFill>
+                  <a:srgbClr val="111111"/>
+                </a:solidFill>
+                <a:latin typeface="Courier New"/>
+              </a:rPr>
+              <a:t>(Automation, Workflow with AI step, Agent, Keep human). For each row, say whether you agree, and if not, why.</a:t>
+            </a:r>
+          </a:p>
           <a:p>
             <a:pPr algn="l"/>
             <a:r>
-              <a:rPr sz="1400" b="0" i="0">
-                <a:solidFill>
-                  <a:srgbClr val="666666"/>
-                </a:solidFill>
-                <a:latin typeface="Calibri"/>
-              </a:rPr>
-              <a:t>About 10 minutes</a:t>
+              <a:rPr sz="1600" b="0" i="0">
+                <a:solidFill>
+                  <a:srgbClr val="111111"/>
+                </a:solidFill>
+                <a:latin typeface="Courier New"/>
+              </a:rPr>
+              <a:t>Then rank the top three tasks by time saved per week. Be brief.</a:t>
+            </a:r>
+          </a:p>
+          <a:p>
+            <a:pPr algn="l"/>
+            <a:r>
+              <a:rPr sz="1600" b="0" i="0">
+                <a:solidFill>
+                  <a:srgbClr val="111111"/>
+                </a:solidFill>
+                <a:latin typeface="Courier New"/>
+              </a:rPr>
+              <a:t/>
+            </a:r>
+          </a:p>
+          <a:p>
+            <a:pPr algn="l"/>
+            <a:r>
+              <a:rPr sz="1600" b="0" i="0">
+                <a:solidFill>
+                  <a:srgbClr val="111111"/>
+                </a:solidFill>
+                <a:latin typeface="Courier New"/>
+              </a:rPr>
+              <a:t>[paste your table here]</a:t>
             </a:r>
           </a:p>
         </p:txBody>
@@ -30336,7 +30645,7 @@
                 </a:solidFill>
                 <a:latin typeface="Calibri"/>
               </a:rPr>
-              <a:t>Join the Kahoot</a:t>
+              <a:t>Deliverable</a:t>
             </a:r>
           </a:p>
         </p:txBody>
@@ -30431,49 +30740,14 @@
       </p:sp>
       <p:sp>
         <p:nvSpPr>
-          <p:cNvPr id="5" name="TextBox 4"/>
-          <p:cNvSpPr txBox="1"/>
-          <p:nvPr/>
-        </p:nvSpPr>
-        <p:spPr>
-          <a:xfrm>
-            <a:off x="548640" y="1325880"/>
-            <a:ext cx="5318607" cy="457200"/>
-          </a:xfrm>
-          <a:prstGeom prst="rect">
-            <a:avLst/>
-          </a:prstGeom>
-          <a:noFill/>
-        </p:spPr>
-        <p:txBody>
-          <a:bodyPr wrap="square" anchor="t" lIns="45720" rIns="45720" tIns="27432" bIns="27432">
-            <a:spAutoFit/>
-          </a:bodyPr>
-          <a:lstStyle/>
-          <a:p>
-            <a:pPr algn="l"/>
-            <a:r>
-              <a:rPr sz="2000" b="1" i="0">
-                <a:solidFill>
-                  <a:srgbClr val="111111"/>
-                </a:solidFill>
-                <a:latin typeface="Calibri"/>
-              </a:rPr>
-              <a:t>How to join</a:t>
-            </a:r>
-          </a:p>
-        </p:txBody>
-      </p:sp>
-      <p:sp>
-        <p:nvSpPr>
-          <p:cNvPr id="6" name="Rectangle 5"/>
+          <p:cNvPr id="5" name="Rectangle 4"/>
           <p:cNvSpPr/>
           <p:nvPr/>
         </p:nvSpPr>
         <p:spPr>
           <a:xfrm>
-            <a:off x="548640" y="1801368"/>
-            <a:ext cx="5318607" cy="25400"/>
+            <a:off x="548640" y="1783080"/>
+            <a:ext cx="76200" cy="2926080"/>
           </a:xfrm>
           <a:prstGeom prst="rect">
             <a:avLst/>
@@ -30510,14 +30784,14 @@
       </p:sp>
       <p:sp>
         <p:nvSpPr>
-          <p:cNvPr id="7" name="TextBox 6"/>
+          <p:cNvPr id="6" name="TextBox 5"/>
           <p:cNvSpPr txBox="1"/>
           <p:nvPr/>
         </p:nvSpPr>
         <p:spPr>
           <a:xfrm>
-            <a:off x="548640" y="1920240"/>
-            <a:ext cx="5318607" cy="4297680"/>
+            <a:off x="914400" y="1783080"/>
+            <a:ext cx="10728655" cy="2926080"/>
           </a:xfrm>
           <a:prstGeom prst="rect">
             <a:avLst/>
@@ -30525,245 +30799,27 @@
           <a:noFill/>
         </p:spPr>
         <p:txBody>
-          <a:bodyPr wrap="square" lIns="45720" rIns="45720">
+          <a:bodyPr wrap="square" anchor="ctr" lIns="45720" rIns="45720" tIns="27432" bIns="27432">
             <a:spAutoFit/>
           </a:bodyPr>
           <a:lstStyle/>
           <a:p>
-            <a:pPr>
-              <a:spcAft>
-                <a:spcPts val="1000"/>
-              </a:spcAft>
-            </a:pPr>
-            <a:r>
-              <a:rPr sz="1800">
+            <a:pPr algn="l"/>
+            <a:r>
+              <a:rPr sz="2800" b="0" i="0">
                 <a:solidFill>
                   <a:srgbClr val="111111"/>
                 </a:solidFill>
                 <a:latin typeface="Calibri"/>
               </a:rPr>
-              <a:t>•  Open kahoot.it on your phone, or the Kahoot app</a:t>
-            </a:r>
-          </a:p>
-          <a:p>
-            <a:pPr>
-              <a:spcAft>
-                <a:spcPts val="1000"/>
-              </a:spcAft>
-            </a:pPr>
-            <a:r>
-              <a:rPr sz="1800">
-                <a:solidFill>
-                  <a:srgbClr val="111111"/>
-                </a:solidFill>
-                <a:latin typeface="Calibri"/>
-              </a:rPr>
-              <a:t>•  Enter the game PIN shown on the screen</a:t>
-            </a:r>
-          </a:p>
-          <a:p>
-            <a:pPr>
-              <a:spcAft>
-                <a:spcPts val="1000"/>
-              </a:spcAft>
-            </a:pPr>
-            <a:r>
-              <a:rPr sz="1800">
-                <a:solidFill>
-                  <a:srgbClr val="111111"/>
-                </a:solidFill>
-                <a:latin typeface="Calibri"/>
-              </a:rPr>
-              <a:t>•  Nickname: your first name</a:t>
-            </a:r>
-          </a:p>
-          <a:p>
-            <a:pPr>
-              <a:spcAft>
-                <a:spcPts val="1000"/>
-              </a:spcAft>
-            </a:pPr>
-            <a:r>
-              <a:rPr sz="1800">
-                <a:solidFill>
-                  <a:srgbClr val="111111"/>
-                </a:solidFill>
-                <a:latin typeface="Calibri"/>
-              </a:rPr>
-              <a:t>•  20 seconds per question; answer on your phone</a:t>
-            </a:r>
-          </a:p>
-        </p:txBody>
-      </p:sp>
-      <p:sp>
-        <p:nvSpPr>
-          <p:cNvPr id="8" name="TextBox 7"/>
-          <p:cNvSpPr txBox="1"/>
-          <p:nvPr/>
-        </p:nvSpPr>
-        <p:spPr>
-          <a:xfrm>
-            <a:off x="6324447" y="1325880"/>
-            <a:ext cx="5318607" cy="457200"/>
-          </a:xfrm>
-          <a:prstGeom prst="rect">
-            <a:avLst/>
-          </a:prstGeom>
-          <a:noFill/>
-        </p:spPr>
-        <p:txBody>
-          <a:bodyPr wrap="square" anchor="t" lIns="45720" rIns="45720" tIns="27432" bIns="27432">
-            <a:spAutoFit/>
-          </a:bodyPr>
-          <a:lstStyle/>
-          <a:p>
-            <a:pPr algn="l"/>
-            <a:r>
-              <a:rPr sz="2000" b="1" i="0">
-                <a:solidFill>
-                  <a:srgbClr val="111111"/>
-                </a:solidFill>
-                <a:latin typeface="Calibri"/>
-              </a:rPr>
-              <a:t>Fair play notes</a:t>
-            </a:r>
-          </a:p>
-        </p:txBody>
-      </p:sp>
-      <p:sp>
-        <p:nvSpPr>
-          <p:cNvPr id="9" name="Rectangle 8"/>
-          <p:cNvSpPr/>
-          <p:nvPr/>
-        </p:nvSpPr>
-        <p:spPr>
-          <a:xfrm>
-            <a:off x="6324447" y="1801368"/>
-            <a:ext cx="5318607" cy="25400"/>
-          </a:xfrm>
-          <a:prstGeom prst="rect">
-            <a:avLst/>
-          </a:prstGeom>
-          <a:solidFill>
-            <a:srgbClr val="666666"/>
-          </a:solidFill>
-          <a:ln>
-            <a:noFill/>
-          </a:ln>
-          <a:effectLst/>
-        </p:spPr>
-        <p:style>
-          <a:lnRef idx="1">
-            <a:schemeClr val="accent1"/>
-          </a:lnRef>
-          <a:fillRef idx="3">
-            <a:schemeClr val="accent1"/>
-          </a:fillRef>
-          <a:effectRef idx="2">
-            <a:schemeClr val="accent1"/>
-          </a:effectRef>
-          <a:fontRef idx="minor">
-            <a:schemeClr val="lt1"/>
-          </a:fontRef>
-        </p:style>
-        <p:txBody>
-          <a:bodyPr rtlCol="0" anchor="ctr"/>
-          <a:lstStyle/>
-          <a:p>
-            <a:pPr algn="ctr"/>
-          </a:p>
-        </p:txBody>
-      </p:sp>
-      <p:sp>
-        <p:nvSpPr>
-          <p:cNvPr id="10" name="TextBox 9"/>
-          <p:cNvSpPr txBox="1"/>
-          <p:nvPr/>
-        </p:nvSpPr>
-        <p:spPr>
-          <a:xfrm>
-            <a:off x="6324447" y="1920240"/>
-            <a:ext cx="5318607" cy="4297680"/>
-          </a:xfrm>
-          <a:prstGeom prst="rect">
-            <a:avLst/>
-          </a:prstGeom>
-          <a:noFill/>
-        </p:spPr>
-        <p:txBody>
-          <a:bodyPr wrap="square" lIns="45720" rIns="45720">
-            <a:spAutoFit/>
-          </a:bodyPr>
-          <a:lstStyle/>
-          <a:p>
-            <a:pPr>
-              <a:spcAft>
-                <a:spcPts val="1000"/>
-              </a:spcAft>
-            </a:pPr>
-            <a:r>
-              <a:rPr sz="1800">
-                <a:solidFill>
-                  <a:srgbClr val="111111"/>
-                </a:solidFill>
-                <a:latin typeface="Calibri"/>
-              </a:rPr>
-              <a:t>•  All four answers are about the same length. The long one is not a hint.</a:t>
-            </a:r>
-          </a:p>
-          <a:p>
-            <a:pPr>
-              <a:spcAft>
-                <a:spcPts val="1000"/>
-              </a:spcAft>
-            </a:pPr>
-            <a:r>
-              <a:rPr sz="1800">
-                <a:solidFill>
-                  <a:srgbClr val="111111"/>
-                </a:solidFill>
-                <a:latin typeface="Calibri"/>
-              </a:rPr>
-              <a:t>•  Correct answers are spread evenly over the four colours.</a:t>
-            </a:r>
-          </a:p>
-          <a:p>
-            <a:pPr>
-              <a:spcAft>
-                <a:spcPts val="1000"/>
-              </a:spcAft>
-            </a:pPr>
-            <a:r>
-              <a:rPr sz="1800">
-                <a:solidFill>
-                  <a:srgbClr val="111111"/>
-                </a:solidFill>
-                <a:latin typeface="Calibri"/>
-              </a:rPr>
-              <a:t>•  We run as many as time allows in the room</a:t>
-            </a:r>
-          </a:p>
-          <a:p>
-            <a:pPr>
-              <a:spcAft>
-                <a:spcPts val="1000"/>
-              </a:spcAft>
-            </a:pPr>
-            <a:r>
-              <a:rPr sz="1800">
-                <a:solidFill>
-                  <a:srgbClr val="111111"/>
-                </a:solidFill>
-                <a:latin typeface="Calibri"/>
-              </a:rPr>
-              <a:t>•  The rest arrive as a Kahoot challenge link for homework</a:t>
-            </a:r>
-          </a:p>
-        </p:txBody>
-      </p:sp>
-      <p:sp>
-        <p:nvSpPr>
-          <p:cNvPr id="11" name="Rectangle 10"/>
+              <a:t>A one-page task inventory (ten rows, four columns) with your chosen course task highlighted, saved as M1-task-inventory in your course folder. Bring it to the next session.</a:t>
+            </a:r>
+          </a:p>
+        </p:txBody>
+      </p:sp>
+      <p:sp>
+        <p:nvSpPr>
+          <p:cNvPr id="7" name="Rectangle 6"/>
           <p:cNvSpPr/>
           <p:nvPr/>
         </p:nvSpPr>
@@ -30807,7 +30863,7 @@
       </p:sp>
       <p:sp>
         <p:nvSpPr>
-          <p:cNvPr id="12" name="TextBox 11"/>
+          <p:cNvPr id="8" name="TextBox 7"/>
           <p:cNvSpPr txBox="1"/>
           <p:nvPr/>
         </p:nvSpPr>
@@ -30842,7 +30898,7 @@
       </p:sp>
       <p:sp>
         <p:nvSpPr>
-          <p:cNvPr id="13" name="TextBox 12"/>
+          <p:cNvPr id="9" name="TextBox 8"/>
           <p:cNvSpPr txBox="1"/>
           <p:nvPr/>
         </p:nvSpPr>

--- a/instructor/ai-administrator/out/day1/Day1_S1_Foundations.pptx
+++ b/instructor/ai-administrator/out/day1/Day1_S1_Foundations.pptx
@@ -12019,9 +12019,33 @@
           </a:p>
         </p:txBody>
       </p:sp>
-      <p:sp>
-        <p:nvSpPr>
-          <p:cNvPr id="5" name="TextBox 4"/>
+      <p:pic>
+        <p:nvPicPr>
+          <p:cNvPr id="5" name="Picture 4" descr="kahoot_logo.png"/>
+          <p:cNvPicPr>
+            <a:picLocks noChangeAspect="1"/>
+          </p:cNvPicPr>
+          <p:nvPr/>
+        </p:nvPicPr>
+        <p:blipFill>
+          <a:blip r:embed="rId2"/>
+          <a:stretch>
+            <a:fillRect/>
+          </a:stretch>
+        </p:blipFill>
+        <p:spPr>
+          <a:xfrm>
+            <a:off x="9315522" y="274320"/>
+            <a:ext cx="2277626" cy="777240"/>
+          </a:xfrm>
+          <a:prstGeom prst="rect">
+            <a:avLst/>
+          </a:prstGeom>
+        </p:spPr>
+      </p:pic>
+      <p:sp>
+        <p:nvSpPr>
+          <p:cNvPr id="6" name="TextBox 5"/>
           <p:cNvSpPr txBox="1"/>
           <p:nvPr/>
         </p:nvSpPr>
@@ -12156,7 +12180,7 @@
       </p:sp>
       <p:sp>
         <p:nvSpPr>
-          <p:cNvPr id="6" name="Rectangle 5"/>
+          <p:cNvPr id="7" name="Rectangle 6"/>
           <p:cNvSpPr/>
           <p:nvPr/>
         </p:nvSpPr>
@@ -12200,7 +12224,7 @@
       </p:sp>
       <p:sp>
         <p:nvSpPr>
-          <p:cNvPr id="7" name="TextBox 6"/>
+          <p:cNvPr id="8" name="TextBox 7"/>
           <p:cNvSpPr txBox="1"/>
           <p:nvPr/>
         </p:nvSpPr>
@@ -12235,7 +12259,7 @@
       </p:sp>
       <p:sp>
         <p:nvSpPr>
-          <p:cNvPr id="8" name="TextBox 7"/>
+          <p:cNvPr id="9" name="TextBox 8"/>
           <p:cNvSpPr txBox="1"/>
           <p:nvPr/>
         </p:nvSpPr>
@@ -16072,9 +16096,33 @@
           </a:p>
         </p:txBody>
       </p:sp>
-      <p:sp>
-        <p:nvSpPr>
-          <p:cNvPr id="5" name="TextBox 4"/>
+      <p:pic>
+        <p:nvPicPr>
+          <p:cNvPr id="5" name="Picture 4" descr="kahoot_logo.png"/>
+          <p:cNvPicPr>
+            <a:picLocks noChangeAspect="1"/>
+          </p:cNvPicPr>
+          <p:nvPr/>
+        </p:nvPicPr>
+        <p:blipFill>
+          <a:blip r:embed="rId2"/>
+          <a:stretch>
+            <a:fillRect/>
+          </a:stretch>
+        </p:blipFill>
+        <p:spPr>
+          <a:xfrm>
+            <a:off x="9315522" y="274320"/>
+            <a:ext cx="2277626" cy="777240"/>
+          </a:xfrm>
+          <a:prstGeom prst="rect">
+            <a:avLst/>
+          </a:prstGeom>
+        </p:spPr>
+      </p:pic>
+      <p:sp>
+        <p:nvSpPr>
+          <p:cNvPr id="6" name="TextBox 5"/>
           <p:cNvSpPr txBox="1"/>
           <p:nvPr/>
         </p:nvSpPr>
@@ -16193,7 +16241,7 @@
       </p:sp>
       <p:sp>
         <p:nvSpPr>
-          <p:cNvPr id="6" name="Rectangle 5"/>
+          <p:cNvPr id="7" name="Rectangle 6"/>
           <p:cNvSpPr/>
           <p:nvPr/>
         </p:nvSpPr>
@@ -16237,7 +16285,7 @@
       </p:sp>
       <p:sp>
         <p:nvSpPr>
-          <p:cNvPr id="7" name="TextBox 6"/>
+          <p:cNvPr id="8" name="TextBox 7"/>
           <p:cNvSpPr txBox="1"/>
           <p:nvPr/>
         </p:nvSpPr>
@@ -16272,7 +16320,7 @@
       </p:sp>
       <p:sp>
         <p:nvSpPr>
-          <p:cNvPr id="8" name="TextBox 7"/>
+          <p:cNvPr id="9" name="TextBox 8"/>
           <p:cNvSpPr txBox="1"/>
           <p:nvPr/>
         </p:nvSpPr>
@@ -28126,9 +28174,33 @@
           </a:p>
         </p:txBody>
       </p:sp>
-      <p:sp>
-        <p:nvSpPr>
-          <p:cNvPr id="7" name="Rectangle 6"/>
+      <p:pic>
+        <p:nvPicPr>
+          <p:cNvPr id="7" name="Picture 6" descr="kahoot_logo.png"/>
+          <p:cNvPicPr>
+            <a:picLocks noChangeAspect="1"/>
+          </p:cNvPicPr>
+          <p:nvPr/>
+        </p:nvPicPr>
+        <p:blipFill>
+          <a:blip r:embed="rId2"/>
+          <a:stretch>
+            <a:fillRect/>
+          </a:stretch>
+        </p:blipFill>
+        <p:spPr>
+          <a:xfrm>
+            <a:off x="6888175" y="2206219"/>
+            <a:ext cx="4754880" cy="1622602"/>
+          </a:xfrm>
+          <a:prstGeom prst="rect">
+            <a:avLst/>
+          </a:prstGeom>
+        </p:spPr>
+      </p:pic>
+      <p:sp>
+        <p:nvSpPr>
+          <p:cNvPr id="8" name="Rectangle 7"/>
           <p:cNvSpPr/>
           <p:nvPr/>
         </p:nvSpPr>
@@ -28172,7 +28244,7 @@
       </p:sp>
       <p:sp>
         <p:nvSpPr>
-          <p:cNvPr id="8" name="TextBox 7"/>
+          <p:cNvPr id="9" name="TextBox 8"/>
           <p:cNvSpPr txBox="1"/>
           <p:nvPr/>
         </p:nvSpPr>
@@ -28207,7 +28279,7 @@
       </p:sp>
       <p:sp>
         <p:nvSpPr>
-          <p:cNvPr id="9" name="TextBox 8"/>
+          <p:cNvPr id="10" name="TextBox 9"/>
           <p:cNvSpPr txBox="1"/>
           <p:nvPr/>
         </p:nvSpPr>
